--- a/2026/2026Thumbnail.pptx
+++ b/2026/2026Thumbnail.pptx
@@ -7,6 +7,9 @@
   <p:sldIdLst>
     <p:sldId id="267" r:id="rId2"/>
     <p:sldId id="275" r:id="rId3"/>
+    <p:sldId id="941" r:id="rId4"/>
+    <p:sldId id="943" r:id="rId5"/>
+    <p:sldId id="944" r:id="rId6"/>
   </p:sldIdLst>
   <p:sldSz cx="12192000" cy="6858000"/>
   <p:notesSz cx="6858000" cy="9144000"/>
@@ -260,7 +263,7 @@
           <a:p>
             <a:fld id="{3816CC03-B68F-4642-A2B8-7A8633A67F21}" type="datetimeFigureOut">
               <a:rPr lang="en-US" smtClean="0"/>
-              <a:t>1/26/2026</a:t>
+              <a:t>2/28/2026</a:t>
             </a:fld>
             <a:endParaRPr lang="en-US"/>
           </a:p>
@@ -458,7 +461,7 @@
           <a:p>
             <a:fld id="{3816CC03-B68F-4642-A2B8-7A8633A67F21}" type="datetimeFigureOut">
               <a:rPr lang="en-US" smtClean="0"/>
-              <a:t>1/26/2026</a:t>
+              <a:t>2/28/2026</a:t>
             </a:fld>
             <a:endParaRPr lang="en-US"/>
           </a:p>
@@ -666,7 +669,7 @@
           <a:p>
             <a:fld id="{3816CC03-B68F-4642-A2B8-7A8633A67F21}" type="datetimeFigureOut">
               <a:rPr lang="en-US" smtClean="0"/>
-              <a:t>1/26/2026</a:t>
+              <a:t>2/28/2026</a:t>
             </a:fld>
             <a:endParaRPr lang="en-US"/>
           </a:p>
@@ -864,7 +867,7 @@
           <a:p>
             <a:fld id="{3816CC03-B68F-4642-A2B8-7A8633A67F21}" type="datetimeFigureOut">
               <a:rPr lang="en-US" smtClean="0"/>
-              <a:t>1/26/2026</a:t>
+              <a:t>2/28/2026</a:t>
             </a:fld>
             <a:endParaRPr lang="en-US"/>
           </a:p>
@@ -1139,7 +1142,7 @@
           <a:p>
             <a:fld id="{3816CC03-B68F-4642-A2B8-7A8633A67F21}" type="datetimeFigureOut">
               <a:rPr lang="en-US" smtClean="0"/>
-              <a:t>1/26/2026</a:t>
+              <a:t>2/28/2026</a:t>
             </a:fld>
             <a:endParaRPr lang="en-US"/>
           </a:p>
@@ -1404,7 +1407,7 @@
           <a:p>
             <a:fld id="{3816CC03-B68F-4642-A2B8-7A8633A67F21}" type="datetimeFigureOut">
               <a:rPr lang="en-US" smtClean="0"/>
-              <a:t>1/26/2026</a:t>
+              <a:t>2/28/2026</a:t>
             </a:fld>
             <a:endParaRPr lang="en-US"/>
           </a:p>
@@ -1816,7 +1819,7 @@
           <a:p>
             <a:fld id="{3816CC03-B68F-4642-A2B8-7A8633A67F21}" type="datetimeFigureOut">
               <a:rPr lang="en-US" smtClean="0"/>
-              <a:t>1/26/2026</a:t>
+              <a:t>2/28/2026</a:t>
             </a:fld>
             <a:endParaRPr lang="en-US"/>
           </a:p>
@@ -1957,7 +1960,7 @@
           <a:p>
             <a:fld id="{3816CC03-B68F-4642-A2B8-7A8633A67F21}" type="datetimeFigureOut">
               <a:rPr lang="en-US" smtClean="0"/>
-              <a:t>1/26/2026</a:t>
+              <a:t>2/28/2026</a:t>
             </a:fld>
             <a:endParaRPr lang="en-US"/>
           </a:p>
@@ -2070,7 +2073,7 @@
           <a:p>
             <a:fld id="{3816CC03-B68F-4642-A2B8-7A8633A67F21}" type="datetimeFigureOut">
               <a:rPr lang="en-US" smtClean="0"/>
-              <a:t>1/26/2026</a:t>
+              <a:t>2/28/2026</a:t>
             </a:fld>
             <a:endParaRPr lang="en-US"/>
           </a:p>
@@ -2417,7 +2420,7 @@
           <a:p>
             <a:fld id="{3816CC03-B68F-4642-A2B8-7A8633A67F21}" type="datetimeFigureOut">
               <a:rPr lang="en-US" smtClean="0"/>
-              <a:t>1/26/2026</a:t>
+              <a:t>2/28/2026</a:t>
             </a:fld>
             <a:endParaRPr lang="en-US"/>
           </a:p>
@@ -2705,7 +2708,7 @@
           <a:p>
             <a:fld id="{3816CC03-B68F-4642-A2B8-7A8633A67F21}" type="datetimeFigureOut">
               <a:rPr lang="en-US" smtClean="0"/>
-              <a:t>1/26/2026</a:t>
+              <a:t>2/28/2026</a:t>
             </a:fld>
             <a:endParaRPr lang="en-US"/>
           </a:p>
@@ -2946,7 +2949,7 @@
           <a:p>
             <a:fld id="{3816CC03-B68F-4642-A2B8-7A8633A67F21}" type="datetimeFigureOut">
               <a:rPr lang="en-US" smtClean="0"/>
-              <a:t>1/26/2026</a:t>
+              <a:t>2/28/2026</a:t>
             </a:fld>
             <a:endParaRPr lang="en-US"/>
           </a:p>
@@ -3547,6 +3550,7169 @@
 </p:sld>
 </file>
 
+<file path=ppt/slides/slide3.xml><?xml version="1.0" encoding="utf-8"?>
+<p:sld xmlns:a="http://schemas.openxmlformats.org/drawingml/2006/main" xmlns:r="http://schemas.openxmlformats.org/officeDocument/2006/relationships" xmlns:p="http://schemas.openxmlformats.org/presentationml/2006/main">
+  <p:cSld>
+    <p:spTree>
+      <p:nvGrpSpPr>
+        <p:cNvPr id="1" name="">
+          <a:extLst>
+            <a:ext uri="{FF2B5EF4-FFF2-40B4-BE49-F238E27FC236}">
+              <a16:creationId xmlns:a16="http://schemas.microsoft.com/office/drawing/2014/main" id="{FE7AD6B4-44AA-D860-8D57-166F71D24830}"/>
+            </a:ext>
+          </a:extLst>
+        </p:cNvPr>
+        <p:cNvGrpSpPr/>
+        <p:nvPr/>
+      </p:nvGrpSpPr>
+      <p:grpSpPr>
+        <a:xfrm>
+          <a:off x="0" y="0"/>
+          <a:ext cx="0" cy="0"/>
+          <a:chOff x="0" y="0"/>
+          <a:chExt cx="0" cy="0"/>
+        </a:xfrm>
+      </p:grpSpPr>
+      <p:grpSp>
+        <p:nvGrpSpPr>
+          <p:cNvPr id="16" name="Group 15">
+            <a:extLst>
+              <a:ext uri="{FF2B5EF4-FFF2-40B4-BE49-F238E27FC236}">
+                <a16:creationId xmlns:a16="http://schemas.microsoft.com/office/drawing/2014/main" id="{D0214044-75D0-B067-EFAA-F71960EA065F}"/>
+              </a:ext>
+            </a:extLst>
+          </p:cNvPr>
+          <p:cNvGrpSpPr/>
+          <p:nvPr/>
+        </p:nvGrpSpPr>
+        <p:grpSpPr>
+          <a:xfrm>
+            <a:off x="5806746" y="3854114"/>
+            <a:ext cx="4931158" cy="2229842"/>
+            <a:chOff x="5777047" y="3947245"/>
+            <a:chExt cx="4931158" cy="2229842"/>
+          </a:xfrm>
+        </p:grpSpPr>
+        <mc:AlternateContent xmlns:mc="http://schemas.openxmlformats.org/markup-compatibility/2006">
+          <mc:Choice xmlns:a14="http://schemas.microsoft.com/office/drawing/2010/main" Requires="a14">
+            <p:sp>
+              <p:nvSpPr>
+                <p:cNvPr id="28" name="TextBox 27">
+                  <a:extLst>
+                    <a:ext uri="{FF2B5EF4-FFF2-40B4-BE49-F238E27FC236}">
+                      <a16:creationId xmlns:a16="http://schemas.microsoft.com/office/drawing/2014/main" id="{147BBAA8-85FA-A3A1-ED9A-F34B1608BBE2}"/>
+                    </a:ext>
+                  </a:extLst>
+                </p:cNvPr>
+                <p:cNvSpPr txBox="1"/>
+                <p:nvPr/>
+              </p:nvSpPr>
+              <p:spPr>
+                <a:xfrm>
+                  <a:off x="5898940" y="4540698"/>
+                  <a:ext cx="4687372" cy="1030282"/>
+                </a:xfrm>
+                <a:prstGeom prst="rect">
+                  <a:avLst/>
+                </a:prstGeom>
+                <a:noFill/>
+              </p:spPr>
+              <p:txBody>
+                <a:bodyPr wrap="none" rtlCol="0">
+                  <a:spAutoFit/>
+                </a:bodyPr>
+                <a:lstStyle/>
+                <a:p>
+                  <a:pPr/>
+                  <a14:m>
+                    <m:oMathPara xmlns:m="http://schemas.openxmlformats.org/officeDocument/2006/math">
+                      <m:oMathParaPr>
+                        <m:jc m:val="centerGroup"/>
+                      </m:oMathParaPr>
+                      <m:oMath xmlns:m="http://schemas.openxmlformats.org/officeDocument/2006/math">
+                        <m:d>
+                          <m:dPr>
+                            <m:ctrlPr>
+                              <a:rPr lang="en-US" sz="5400" b="0" i="1" smtClean="0">
+                                <a:solidFill>
+                                  <a:schemeClr val="tx1"/>
+                                </a:solidFill>
+                                <a:latin typeface="Cambria Math" panose="02040503050406030204" pitchFamily="18" charset="0"/>
+                              </a:rPr>
+                            </m:ctrlPr>
+                          </m:dPr>
+                          <m:e>
+                            <m:r>
+                              <a:rPr lang="en-US" sz="5400" b="0" i="1" smtClean="0">
+                                <a:solidFill>
+                                  <a:srgbClr val="FF0000"/>
+                                </a:solidFill>
+                                <a:latin typeface="Cambria Math" panose="02040503050406030204" pitchFamily="18" charset="0"/>
+                              </a:rPr>
+                              <m:t>𝑝</m:t>
+                            </m:r>
+                            <m:d>
+                              <m:dPr>
+                                <m:ctrlPr>
+                                  <a:rPr lang="en-US" sz="5400" b="0" i="1" smtClean="0">
+                                    <a:solidFill>
+                                      <a:srgbClr val="FF0000"/>
+                                    </a:solidFill>
+                                    <a:latin typeface="Cambria Math" panose="02040503050406030204" pitchFamily="18" charset="0"/>
+                                  </a:rPr>
+                                </m:ctrlPr>
+                              </m:dPr>
+                              <m:e>
+                                <m:sSup>
+                                  <m:sSupPr>
+                                    <m:ctrlPr>
+                                      <a:rPr lang="en-US" sz="5400" b="0" i="1" smtClean="0">
+                                        <a:solidFill>
+                                          <a:srgbClr val="FF0000"/>
+                                        </a:solidFill>
+                                        <a:latin typeface="Cambria Math" panose="02040503050406030204" pitchFamily="18" charset="0"/>
+                                      </a:rPr>
+                                    </m:ctrlPr>
+                                  </m:sSupPr>
+                                  <m:e>
+                                    <m:r>
+                                      <a:rPr lang="en-US" sz="5400" b="0" i="1" smtClean="0">
+                                        <a:solidFill>
+                                          <a:srgbClr val="FF0000"/>
+                                        </a:solidFill>
+                                        <a:latin typeface="Cambria Math" panose="02040503050406030204" pitchFamily="18" charset="0"/>
+                                      </a:rPr>
+                                      <m:t>𝑧</m:t>
+                                    </m:r>
+                                  </m:e>
+                                  <m:sup>
+                                    <m:r>
+                                      <a:rPr lang="en-US" sz="5400" b="0" i="1" smtClean="0">
+                                        <a:solidFill>
+                                          <a:srgbClr val="FF0000"/>
+                                        </a:solidFill>
+                                        <a:latin typeface="Cambria Math" panose="02040503050406030204" pitchFamily="18" charset="0"/>
+                                      </a:rPr>
+                                      <m:t>+</m:t>
+                                    </m:r>
+                                  </m:sup>
+                                </m:sSup>
+                              </m:e>
+                            </m:d>
+                            <m:r>
+                              <a:rPr lang="en-US" sz="5400" b="0" i="1" smtClean="0">
+                                <a:solidFill>
+                                  <a:schemeClr val="tx1"/>
+                                </a:solidFill>
+                                <a:latin typeface="Cambria Math" panose="02040503050406030204" pitchFamily="18" charset="0"/>
+                              </a:rPr>
+                              <m:t>,</m:t>
+                            </m:r>
+                            <m:r>
+                              <a:rPr lang="en-US" sz="5400" i="1" smtClean="0">
+                                <a:solidFill>
+                                  <a:srgbClr val="FFFF00"/>
+                                </a:solidFill>
+                                <a:latin typeface="Cambria Math" panose="02040503050406030204" pitchFamily="18" charset="0"/>
+                              </a:rPr>
+                              <m:t>𝑝</m:t>
+                            </m:r>
+                            <m:d>
+                              <m:dPr>
+                                <m:ctrlPr>
+                                  <a:rPr lang="en-US" sz="5400" i="1">
+                                    <a:solidFill>
+                                      <a:srgbClr val="FFFF00"/>
+                                    </a:solidFill>
+                                    <a:latin typeface="Cambria Math" panose="02040503050406030204" pitchFamily="18" charset="0"/>
+                                  </a:rPr>
+                                </m:ctrlPr>
+                              </m:dPr>
+                              <m:e>
+                                <m:sSup>
+                                  <m:sSupPr>
+                                    <m:ctrlPr>
+                                      <a:rPr lang="en-US" sz="5400" i="1">
+                                        <a:solidFill>
+                                          <a:srgbClr val="FFFF00"/>
+                                        </a:solidFill>
+                                        <a:latin typeface="Cambria Math" panose="02040503050406030204" pitchFamily="18" charset="0"/>
+                                      </a:rPr>
+                                    </m:ctrlPr>
+                                  </m:sSupPr>
+                                  <m:e>
+                                    <m:r>
+                                      <a:rPr lang="en-US" sz="5400" i="1">
+                                        <a:solidFill>
+                                          <a:srgbClr val="FFFF00"/>
+                                        </a:solidFill>
+                                        <a:latin typeface="Cambria Math" panose="02040503050406030204" pitchFamily="18" charset="0"/>
+                                      </a:rPr>
+                                      <m:t>𝑧</m:t>
+                                    </m:r>
+                                  </m:e>
+                                  <m:sup>
+                                    <m:r>
+                                      <a:rPr lang="en-US" sz="5400" b="0" i="1" smtClean="0">
+                                        <a:solidFill>
+                                          <a:srgbClr val="FFFF00"/>
+                                        </a:solidFill>
+                                        <a:latin typeface="Cambria Math" panose="02040503050406030204" pitchFamily="18" charset="0"/>
+                                      </a:rPr>
+                                      <m:t>−</m:t>
+                                    </m:r>
+                                  </m:sup>
+                                </m:sSup>
+                              </m:e>
+                            </m:d>
+                          </m:e>
+                        </m:d>
+                      </m:oMath>
+                    </m:oMathPara>
+                  </a14:m>
+                  <a:endParaRPr lang="en-US" sz="5400" dirty="0">
+                    <a:solidFill>
+                      <a:schemeClr val="tx1"/>
+                    </a:solidFill>
+                  </a:endParaRPr>
+                </a:p>
+              </p:txBody>
+            </p:sp>
+          </mc:Choice>
+          <mc:Fallback>
+            <p:sp>
+              <p:nvSpPr>
+                <p:cNvPr id="28" name="TextBox 27">
+                  <a:extLst>
+                    <a:ext uri="{FF2B5EF4-FFF2-40B4-BE49-F238E27FC236}">
+                      <a16:creationId xmlns:a16="http://schemas.microsoft.com/office/drawing/2014/main" id="{147BBAA8-85FA-A3A1-ED9A-F34B1608BBE2}"/>
+                    </a:ext>
+                  </a:extLst>
+                </p:cNvPr>
+                <p:cNvSpPr txBox="1">
+                  <a:spLocks noRot="1" noChangeAspect="1" noMove="1" noResize="1" noEditPoints="1" noAdjustHandles="1" noChangeArrowheads="1" noChangeShapeType="1" noTextEdit="1"/>
+                </p:cNvSpPr>
+                <p:nvPr/>
+              </p:nvSpPr>
+              <p:spPr>
+                <a:xfrm>
+                  <a:off x="5898940" y="4540698"/>
+                  <a:ext cx="4687372" cy="1030282"/>
+                </a:xfrm>
+                <a:prstGeom prst="rect">
+                  <a:avLst/>
+                </a:prstGeom>
+                <a:blipFill>
+                  <a:blip r:embed="rId2"/>
+                  <a:stretch>
+                    <a:fillRect/>
+                  </a:stretch>
+                </a:blipFill>
+              </p:spPr>
+              <p:txBody>
+                <a:bodyPr/>
+                <a:lstStyle/>
+                <a:p>
+                  <a:r>
+                    <a:rPr lang="en-US">
+                      <a:noFill/>
+                    </a:rPr>
+                    <a:t> </a:t>
+                  </a:r>
+                </a:p>
+              </p:txBody>
+            </p:sp>
+          </mc:Fallback>
+        </mc:AlternateContent>
+        <mc:AlternateContent xmlns:mc="http://schemas.openxmlformats.org/markup-compatibility/2006">
+          <mc:Choice xmlns:a14="http://schemas.microsoft.com/office/drawing/2010/main" Requires="a14">
+            <p:sp>
+              <p:nvSpPr>
+                <p:cNvPr id="30" name="TextBox 29">
+                  <a:extLst>
+                    <a:ext uri="{FF2B5EF4-FFF2-40B4-BE49-F238E27FC236}">
+                      <a16:creationId xmlns:a16="http://schemas.microsoft.com/office/drawing/2014/main" id="{6FEE0A4A-7957-4357-8415-471E17F4D57D}"/>
+                    </a:ext>
+                  </a:extLst>
+                </p:cNvPr>
+                <p:cNvSpPr txBox="1"/>
+                <p:nvPr/>
+              </p:nvSpPr>
+              <p:spPr>
+                <a:xfrm>
+                  <a:off x="6450757" y="5592312"/>
+                  <a:ext cx="3583738" cy="584775"/>
+                </a:xfrm>
+                <a:prstGeom prst="rect">
+                  <a:avLst/>
+                </a:prstGeom>
+                <a:noFill/>
+              </p:spPr>
+              <p:txBody>
+                <a:bodyPr wrap="none" rtlCol="0">
+                  <a:spAutoFit/>
+                </a:bodyPr>
+                <a:lstStyle/>
+                <a:p>
+                  <a:pPr/>
+                  <a14:m>
+                    <m:oMathPara xmlns:m="http://schemas.openxmlformats.org/officeDocument/2006/math">
+                      <m:oMathParaPr>
+                        <m:jc m:val="centerGroup"/>
+                      </m:oMathParaPr>
+                      <m:oMath xmlns:m="http://schemas.openxmlformats.org/officeDocument/2006/math">
+                        <m:r>
+                          <a:rPr lang="en-US" sz="3200" i="1" smtClean="0">
+                            <a:latin typeface="Cambria Math" panose="02040503050406030204" pitchFamily="18" charset="0"/>
+                          </a:rPr>
+                          <m:t>𝑝</m:t>
+                        </m:r>
+                        <m:d>
+                          <m:dPr>
+                            <m:ctrlPr>
+                              <a:rPr lang="en-US" sz="3200" i="1">
+                                <a:latin typeface="Cambria Math" panose="02040503050406030204" pitchFamily="18" charset="0"/>
+                              </a:rPr>
+                            </m:ctrlPr>
+                          </m:dPr>
+                          <m:e>
+                            <m:sSup>
+                              <m:sSupPr>
+                                <m:ctrlPr>
+                                  <a:rPr lang="en-US" sz="3200" i="1">
+                                    <a:latin typeface="Cambria Math" panose="02040503050406030204" pitchFamily="18" charset="0"/>
+                                  </a:rPr>
+                                </m:ctrlPr>
+                              </m:sSupPr>
+                              <m:e>
+                                <m:r>
+                                  <a:rPr lang="en-US" sz="3200" i="1">
+                                    <a:latin typeface="Cambria Math" panose="02040503050406030204" pitchFamily="18" charset="0"/>
+                                  </a:rPr>
+                                  <m:t>𝑧</m:t>
+                                </m:r>
+                              </m:e>
+                              <m:sup>
+                                <m:r>
+                                  <a:rPr lang="en-US" sz="3200" i="1">
+                                    <a:latin typeface="Cambria Math" panose="02040503050406030204" pitchFamily="18" charset="0"/>
+                                  </a:rPr>
+                                  <m:t>+</m:t>
+                                </m:r>
+                              </m:sup>
+                            </m:sSup>
+                          </m:e>
+                        </m:d>
+                        <m:r>
+                          <a:rPr lang="en-US" sz="3200" b="0" i="1" smtClean="0">
+                            <a:latin typeface="Cambria Math" panose="02040503050406030204" pitchFamily="18" charset="0"/>
+                          </a:rPr>
+                          <m:t>+</m:t>
+                        </m:r>
+                        <m:r>
+                          <a:rPr lang="en-US" sz="3200" i="1">
+                            <a:latin typeface="Cambria Math" panose="02040503050406030204" pitchFamily="18" charset="0"/>
+                          </a:rPr>
+                          <m:t>𝑝</m:t>
+                        </m:r>
+                        <m:d>
+                          <m:dPr>
+                            <m:ctrlPr>
+                              <a:rPr lang="en-US" sz="3200" i="1">
+                                <a:latin typeface="Cambria Math" panose="02040503050406030204" pitchFamily="18" charset="0"/>
+                              </a:rPr>
+                            </m:ctrlPr>
+                          </m:dPr>
+                          <m:e>
+                            <m:sSup>
+                              <m:sSupPr>
+                                <m:ctrlPr>
+                                  <a:rPr lang="en-US" sz="3200" i="1">
+                                    <a:latin typeface="Cambria Math" panose="02040503050406030204" pitchFamily="18" charset="0"/>
+                                  </a:rPr>
+                                </m:ctrlPr>
+                              </m:sSupPr>
+                              <m:e>
+                                <m:r>
+                                  <a:rPr lang="en-US" sz="3200" i="1">
+                                    <a:latin typeface="Cambria Math" panose="02040503050406030204" pitchFamily="18" charset="0"/>
+                                  </a:rPr>
+                                  <m:t>𝑧</m:t>
+                                </m:r>
+                              </m:e>
+                              <m:sup>
+                                <m:r>
+                                  <a:rPr lang="en-US" sz="3200" i="1">
+                                    <a:latin typeface="Cambria Math" panose="02040503050406030204" pitchFamily="18" charset="0"/>
+                                  </a:rPr>
+                                  <m:t>−</m:t>
+                                </m:r>
+                              </m:sup>
+                            </m:sSup>
+                          </m:e>
+                        </m:d>
+                        <m:r>
+                          <a:rPr lang="en-US" sz="3200" b="0" i="1" smtClean="0">
+                            <a:latin typeface="Cambria Math" panose="02040503050406030204" pitchFamily="18" charset="0"/>
+                          </a:rPr>
+                          <m:t>=1</m:t>
+                        </m:r>
+                      </m:oMath>
+                    </m:oMathPara>
+                  </a14:m>
+                  <a:endParaRPr lang="en-US" sz="3200" dirty="0">
+                    <a:solidFill>
+                      <a:schemeClr val="tx1"/>
+                    </a:solidFill>
+                  </a:endParaRPr>
+                </a:p>
+              </p:txBody>
+            </p:sp>
+          </mc:Choice>
+          <mc:Fallback>
+            <p:sp>
+              <p:nvSpPr>
+                <p:cNvPr id="30" name="TextBox 29">
+                  <a:extLst>
+                    <a:ext uri="{FF2B5EF4-FFF2-40B4-BE49-F238E27FC236}">
+                      <a16:creationId xmlns:a16="http://schemas.microsoft.com/office/drawing/2014/main" id="{6FEE0A4A-7957-4357-8415-471E17F4D57D}"/>
+                    </a:ext>
+                  </a:extLst>
+                </p:cNvPr>
+                <p:cNvSpPr txBox="1">
+                  <a:spLocks noRot="1" noChangeAspect="1" noMove="1" noResize="1" noEditPoints="1" noAdjustHandles="1" noChangeArrowheads="1" noChangeShapeType="1" noTextEdit="1"/>
+                </p:cNvSpPr>
+                <p:nvPr/>
+              </p:nvSpPr>
+              <p:spPr>
+                <a:xfrm>
+                  <a:off x="6450757" y="5592312"/>
+                  <a:ext cx="3583738" cy="584775"/>
+                </a:xfrm>
+                <a:prstGeom prst="rect">
+                  <a:avLst/>
+                </a:prstGeom>
+                <a:blipFill>
+                  <a:blip r:embed="rId3"/>
+                  <a:stretch>
+                    <a:fillRect/>
+                  </a:stretch>
+                </a:blipFill>
+              </p:spPr>
+              <p:txBody>
+                <a:bodyPr/>
+                <a:lstStyle/>
+                <a:p>
+                  <a:r>
+                    <a:rPr lang="en-US">
+                      <a:noFill/>
+                    </a:rPr>
+                    <a:t> </a:t>
+                  </a:r>
+                </a:p>
+              </p:txBody>
+            </p:sp>
+          </mc:Fallback>
+        </mc:AlternateContent>
+        <p:sp>
+          <p:nvSpPr>
+            <p:cNvPr id="32" name="TextBox 31">
+              <a:extLst>
+                <a:ext uri="{FF2B5EF4-FFF2-40B4-BE49-F238E27FC236}">
+                  <a16:creationId xmlns:a16="http://schemas.microsoft.com/office/drawing/2014/main" id="{44C89B5D-9EE1-498B-0D27-A8A3F997EF7D}"/>
+                </a:ext>
+              </a:extLst>
+            </p:cNvPr>
+            <p:cNvSpPr txBox="1"/>
+            <p:nvPr/>
+          </p:nvSpPr>
+          <p:spPr>
+            <a:xfrm>
+              <a:off x="5777047" y="3947245"/>
+              <a:ext cx="4931158" cy="646331"/>
+            </a:xfrm>
+            <a:prstGeom prst="rect">
+              <a:avLst/>
+            </a:prstGeom>
+            <a:noFill/>
+          </p:spPr>
+          <p:txBody>
+            <a:bodyPr wrap="none" rtlCol="0">
+              <a:spAutoFit/>
+            </a:bodyPr>
+            <a:lstStyle/>
+            <a:p>
+              <a:r>
+                <a:rPr lang="en-US" sz="3600" dirty="0"/>
+                <a:t>Quantum state vectors</a:t>
+              </a:r>
+            </a:p>
+          </p:txBody>
+        </p:sp>
+      </p:grpSp>
+      <p:grpSp>
+        <p:nvGrpSpPr>
+          <p:cNvPr id="17" name="Group 16">
+            <a:extLst>
+              <a:ext uri="{FF2B5EF4-FFF2-40B4-BE49-F238E27FC236}">
+                <a16:creationId xmlns:a16="http://schemas.microsoft.com/office/drawing/2014/main" id="{5576D53A-715F-0373-55BA-0E3330EF5DEE}"/>
+              </a:ext>
+            </a:extLst>
+          </p:cNvPr>
+          <p:cNvGrpSpPr/>
+          <p:nvPr/>
+        </p:nvGrpSpPr>
+        <p:grpSpPr>
+          <a:xfrm>
+            <a:off x="6329788" y="1140665"/>
+            <a:ext cx="4812536" cy="2238859"/>
+            <a:chOff x="5754398" y="1182742"/>
+            <a:chExt cx="4812536" cy="2238859"/>
+          </a:xfrm>
+        </p:grpSpPr>
+        <p:sp>
+          <p:nvSpPr>
+            <p:cNvPr id="19" name="TextBox 18">
+              <a:extLst>
+                <a:ext uri="{FF2B5EF4-FFF2-40B4-BE49-F238E27FC236}">
+                  <a16:creationId xmlns:a16="http://schemas.microsoft.com/office/drawing/2014/main" id="{48D13ABD-65CC-8B82-CC30-77975A9E48B1}"/>
+                </a:ext>
+              </a:extLst>
+            </p:cNvPr>
+            <p:cNvSpPr txBox="1"/>
+            <p:nvPr/>
+          </p:nvSpPr>
+          <p:spPr>
+            <a:xfrm>
+              <a:off x="5754398" y="1182742"/>
+              <a:ext cx="4812536" cy="646331"/>
+            </a:xfrm>
+            <a:prstGeom prst="rect">
+              <a:avLst/>
+            </a:prstGeom>
+            <a:noFill/>
+          </p:spPr>
+          <p:txBody>
+            <a:bodyPr wrap="none" rtlCol="0">
+              <a:spAutoFit/>
+            </a:bodyPr>
+            <a:lstStyle/>
+            <a:p>
+              <a:r>
+                <a:rPr lang="en-US" sz="3600" dirty="0"/>
+                <a:t>Physical space vectors</a:t>
+              </a:r>
+            </a:p>
+          </p:txBody>
+        </p:sp>
+        <mc:AlternateContent xmlns:mc="http://schemas.openxmlformats.org/markup-compatibility/2006">
+          <mc:Choice xmlns:a14="http://schemas.microsoft.com/office/drawing/2010/main" Requires="a14">
+            <p:sp>
+              <p:nvSpPr>
+                <p:cNvPr id="25" name="TextBox 24">
+                  <a:extLst>
+                    <a:ext uri="{FF2B5EF4-FFF2-40B4-BE49-F238E27FC236}">
+                      <a16:creationId xmlns:a16="http://schemas.microsoft.com/office/drawing/2014/main" id="{DF9BD25A-3706-D2BC-DC2A-C9FB047987A2}"/>
+                    </a:ext>
+                  </a:extLst>
+                </p:cNvPr>
+                <p:cNvSpPr txBox="1"/>
+                <p:nvPr/>
+              </p:nvSpPr>
+              <p:spPr>
+                <a:xfrm>
+                  <a:off x="6815843" y="1813712"/>
+                  <a:ext cx="2689646" cy="923330"/>
+                </a:xfrm>
+                <a:prstGeom prst="rect">
+                  <a:avLst/>
+                </a:prstGeom>
+                <a:noFill/>
+              </p:spPr>
+              <p:txBody>
+                <a:bodyPr wrap="none" rtlCol="0">
+                  <a:spAutoFit/>
+                </a:bodyPr>
+                <a:lstStyle/>
+                <a:p>
+                  <a:pPr/>
+                  <a14:m>
+                    <m:oMathPara xmlns:m="http://schemas.openxmlformats.org/officeDocument/2006/math">
+                      <m:oMathParaPr>
+                        <m:jc m:val="centerGroup"/>
+                      </m:oMathParaPr>
+                      <m:oMath xmlns:m="http://schemas.openxmlformats.org/officeDocument/2006/math">
+                        <m:d>
+                          <m:dPr>
+                            <m:ctrlPr>
+                              <a:rPr lang="en-US" sz="5400" b="0" i="1" smtClean="0">
+                                <a:solidFill>
+                                  <a:schemeClr val="tx1"/>
+                                </a:solidFill>
+                                <a:latin typeface="Cambria Math" panose="02040503050406030204" pitchFamily="18" charset="0"/>
+                              </a:rPr>
+                            </m:ctrlPr>
+                          </m:dPr>
+                          <m:e>
+                            <m:sSup>
+                              <m:sSupPr>
+                                <m:ctrlPr>
+                                  <a:rPr lang="en-US" sz="5400" b="0" i="1" smtClean="0">
+                                    <a:solidFill>
+                                      <a:srgbClr val="7030A0"/>
+                                    </a:solidFill>
+                                    <a:latin typeface="Cambria Math" panose="02040503050406030204" pitchFamily="18" charset="0"/>
+                                  </a:rPr>
+                                </m:ctrlPr>
+                              </m:sSupPr>
+                              <m:e>
+                                <m:r>
+                                  <a:rPr lang="en-US" sz="5400" b="0" i="1" smtClean="0">
+                                    <a:solidFill>
+                                      <a:srgbClr val="7030A0"/>
+                                    </a:solidFill>
+                                    <a:latin typeface="Cambria Math" panose="02040503050406030204" pitchFamily="18" charset="0"/>
+                                  </a:rPr>
+                                  <m:t>𝑣</m:t>
+                                </m:r>
+                              </m:e>
+                              <m:sup>
+                                <m:r>
+                                  <a:rPr lang="en-US" sz="5400" b="0" i="1" smtClean="0">
+                                    <a:solidFill>
+                                      <a:srgbClr val="7030A0"/>
+                                    </a:solidFill>
+                                    <a:latin typeface="Cambria Math" panose="02040503050406030204" pitchFamily="18" charset="0"/>
+                                  </a:rPr>
+                                  <m:t>𝑥</m:t>
+                                </m:r>
+                              </m:sup>
+                            </m:sSup>
+                            <m:r>
+                              <a:rPr lang="en-US" sz="5400" b="0" i="1" smtClean="0">
+                                <a:solidFill>
+                                  <a:schemeClr val="tx1"/>
+                                </a:solidFill>
+                                <a:latin typeface="Cambria Math" panose="02040503050406030204" pitchFamily="18" charset="0"/>
+                              </a:rPr>
+                              <m:t>,</m:t>
+                            </m:r>
+                            <m:r>
+                              <a:rPr lang="en-US" sz="5400" b="0" i="1" smtClean="0">
+                                <a:solidFill>
+                                  <a:schemeClr val="tx1"/>
+                                </a:solidFill>
+                                <a:latin typeface="Cambria Math" panose="02040503050406030204" pitchFamily="18" charset="0"/>
+                              </a:rPr>
+                              <m:t> </m:t>
+                            </m:r>
+                            <m:sSup>
+                              <m:sSupPr>
+                                <m:ctrlPr>
+                                  <a:rPr lang="en-US" sz="5400" b="0" i="1" smtClean="0">
+                                    <a:solidFill>
+                                      <a:srgbClr val="00B0F0"/>
+                                    </a:solidFill>
+                                    <a:latin typeface="Cambria Math" panose="02040503050406030204" pitchFamily="18" charset="0"/>
+                                  </a:rPr>
+                                </m:ctrlPr>
+                              </m:sSupPr>
+                              <m:e>
+                                <m:r>
+                                  <a:rPr lang="en-US" sz="5400" b="0" i="1" smtClean="0">
+                                    <a:solidFill>
+                                      <a:srgbClr val="00B0F0"/>
+                                    </a:solidFill>
+                                    <a:latin typeface="Cambria Math" panose="02040503050406030204" pitchFamily="18" charset="0"/>
+                                  </a:rPr>
+                                  <m:t>𝑣</m:t>
+                                </m:r>
+                              </m:e>
+                              <m:sup>
+                                <m:r>
+                                  <a:rPr lang="en-US" sz="5400" b="0" i="1" smtClean="0">
+                                    <a:solidFill>
+                                      <a:srgbClr val="00B0F0"/>
+                                    </a:solidFill>
+                                    <a:latin typeface="Cambria Math" panose="02040503050406030204" pitchFamily="18" charset="0"/>
+                                  </a:rPr>
+                                  <m:t>𝑧</m:t>
+                                </m:r>
+                              </m:sup>
+                            </m:sSup>
+                          </m:e>
+                        </m:d>
+                      </m:oMath>
+                    </m:oMathPara>
+                  </a14:m>
+                  <a:endParaRPr lang="en-US" sz="5400" dirty="0">
+                    <a:solidFill>
+                      <a:schemeClr val="tx1"/>
+                    </a:solidFill>
+                  </a:endParaRPr>
+                </a:p>
+              </p:txBody>
+            </p:sp>
+          </mc:Choice>
+          <mc:Fallback>
+            <p:sp>
+              <p:nvSpPr>
+                <p:cNvPr id="25" name="TextBox 24">
+                  <a:extLst>
+                    <a:ext uri="{FF2B5EF4-FFF2-40B4-BE49-F238E27FC236}">
+                      <a16:creationId xmlns:a16="http://schemas.microsoft.com/office/drawing/2014/main" id="{DF9BD25A-3706-D2BC-DC2A-C9FB047987A2}"/>
+                    </a:ext>
+                  </a:extLst>
+                </p:cNvPr>
+                <p:cNvSpPr txBox="1">
+                  <a:spLocks noRot="1" noChangeAspect="1" noMove="1" noResize="1" noEditPoints="1" noAdjustHandles="1" noChangeArrowheads="1" noChangeShapeType="1" noTextEdit="1"/>
+                </p:cNvSpPr>
+                <p:nvPr/>
+              </p:nvSpPr>
+              <p:spPr>
+                <a:xfrm>
+                  <a:off x="6815843" y="1813712"/>
+                  <a:ext cx="2689646" cy="923330"/>
+                </a:xfrm>
+                <a:prstGeom prst="rect">
+                  <a:avLst/>
+                </a:prstGeom>
+                <a:blipFill>
+                  <a:blip r:embed="rId4"/>
+                  <a:stretch>
+                    <a:fillRect/>
+                  </a:stretch>
+                </a:blipFill>
+              </p:spPr>
+              <p:txBody>
+                <a:bodyPr/>
+                <a:lstStyle/>
+                <a:p>
+                  <a:r>
+                    <a:rPr lang="en-US">
+                      <a:noFill/>
+                    </a:rPr>
+                    <a:t> </a:t>
+                  </a:r>
+                </a:p>
+              </p:txBody>
+            </p:sp>
+          </mc:Fallback>
+        </mc:AlternateContent>
+        <mc:AlternateContent xmlns:mc="http://schemas.openxmlformats.org/markup-compatibility/2006">
+          <mc:Choice xmlns:a14="http://schemas.microsoft.com/office/drawing/2010/main" Requires="a14">
+            <p:sp>
+              <p:nvSpPr>
+                <p:cNvPr id="26" name="TextBox 25">
+                  <a:extLst>
+                    <a:ext uri="{FF2B5EF4-FFF2-40B4-BE49-F238E27FC236}">
+                      <a16:creationId xmlns:a16="http://schemas.microsoft.com/office/drawing/2014/main" id="{72D6013A-FED7-0423-29F7-96839BE8B8D1}"/>
+                    </a:ext>
+                  </a:extLst>
+                </p:cNvPr>
+                <p:cNvSpPr txBox="1"/>
+                <p:nvPr/>
+              </p:nvSpPr>
+              <p:spPr>
+                <a:xfrm>
+                  <a:off x="6417304" y="2836826"/>
+                  <a:ext cx="3486724" cy="584775"/>
+                </a:xfrm>
+                <a:prstGeom prst="rect">
+                  <a:avLst/>
+                </a:prstGeom>
+                <a:noFill/>
+              </p:spPr>
+              <p:txBody>
+                <a:bodyPr wrap="none" rtlCol="0">
+                  <a:spAutoFit/>
+                </a:bodyPr>
+                <a:lstStyle/>
+                <a:p>
+                  <a:pPr/>
+                  <a14:m>
+                    <m:oMathPara xmlns:m="http://schemas.openxmlformats.org/officeDocument/2006/math">
+                      <m:oMathParaPr>
+                        <m:jc m:val="centerGroup"/>
+                      </m:oMathParaPr>
+                      <m:oMath xmlns:m="http://schemas.openxmlformats.org/officeDocument/2006/math">
+                        <m:sSup>
+                          <m:sSupPr>
+                            <m:ctrlPr>
+                              <a:rPr lang="en-US" sz="3200" i="1" smtClean="0">
+                                <a:latin typeface="Cambria Math" panose="02040503050406030204" pitchFamily="18" charset="0"/>
+                              </a:rPr>
+                            </m:ctrlPr>
+                          </m:sSupPr>
+                          <m:e>
+                            <m:d>
+                              <m:dPr>
+                                <m:ctrlPr>
+                                  <a:rPr lang="en-US" sz="3200" i="1">
+                                    <a:latin typeface="Cambria Math" panose="02040503050406030204" pitchFamily="18" charset="0"/>
+                                  </a:rPr>
+                                </m:ctrlPr>
+                              </m:dPr>
+                              <m:e>
+                                <m:sSup>
+                                  <m:sSupPr>
+                                    <m:ctrlPr>
+                                      <a:rPr lang="en-US" sz="3200" i="1">
+                                        <a:latin typeface="Cambria Math" panose="02040503050406030204" pitchFamily="18" charset="0"/>
+                                      </a:rPr>
+                                    </m:ctrlPr>
+                                  </m:sSupPr>
+                                  <m:e>
+                                    <m:r>
+                                      <a:rPr lang="en-US" sz="3200" i="1">
+                                        <a:latin typeface="Cambria Math" panose="02040503050406030204" pitchFamily="18" charset="0"/>
+                                      </a:rPr>
+                                      <m:t>𝑣</m:t>
+                                    </m:r>
+                                  </m:e>
+                                  <m:sup>
+                                    <m:r>
+                                      <a:rPr lang="en-US" sz="3200" i="1">
+                                        <a:latin typeface="Cambria Math" panose="02040503050406030204" pitchFamily="18" charset="0"/>
+                                      </a:rPr>
+                                      <m:t>𝑥</m:t>
+                                    </m:r>
+                                  </m:sup>
+                                </m:sSup>
+                              </m:e>
+                            </m:d>
+                          </m:e>
+                          <m:sup>
+                            <m:r>
+                              <a:rPr lang="en-US" sz="3200" i="1">
+                                <a:latin typeface="Cambria Math" panose="02040503050406030204" pitchFamily="18" charset="0"/>
+                              </a:rPr>
+                              <m:t>2</m:t>
+                            </m:r>
+                          </m:sup>
+                        </m:sSup>
+                        <m:r>
+                          <a:rPr lang="en-US" sz="3200" i="1">
+                            <a:latin typeface="Cambria Math" panose="02040503050406030204" pitchFamily="18" charset="0"/>
+                          </a:rPr>
+                          <m:t>+</m:t>
+                        </m:r>
+                        <m:sSup>
+                          <m:sSupPr>
+                            <m:ctrlPr>
+                              <a:rPr lang="en-US" sz="3200" i="1">
+                                <a:latin typeface="Cambria Math" panose="02040503050406030204" pitchFamily="18" charset="0"/>
+                              </a:rPr>
+                            </m:ctrlPr>
+                          </m:sSupPr>
+                          <m:e>
+                            <m:d>
+                              <m:dPr>
+                                <m:ctrlPr>
+                                  <a:rPr lang="en-US" sz="3200" i="1">
+                                    <a:latin typeface="Cambria Math" panose="02040503050406030204" pitchFamily="18" charset="0"/>
+                                  </a:rPr>
+                                </m:ctrlPr>
+                              </m:dPr>
+                              <m:e>
+                                <m:sSup>
+                                  <m:sSupPr>
+                                    <m:ctrlPr>
+                                      <a:rPr lang="en-US" sz="3200" i="1">
+                                        <a:latin typeface="Cambria Math" panose="02040503050406030204" pitchFamily="18" charset="0"/>
+                                      </a:rPr>
+                                    </m:ctrlPr>
+                                  </m:sSupPr>
+                                  <m:e>
+                                    <m:r>
+                                      <a:rPr lang="en-US" sz="3200" i="1">
+                                        <a:latin typeface="Cambria Math" panose="02040503050406030204" pitchFamily="18" charset="0"/>
+                                      </a:rPr>
+                                      <m:t>𝑣</m:t>
+                                    </m:r>
+                                  </m:e>
+                                  <m:sup>
+                                    <m:r>
+                                      <a:rPr lang="en-US" sz="3200" b="0" i="1" smtClean="0">
+                                        <a:latin typeface="Cambria Math" panose="02040503050406030204" pitchFamily="18" charset="0"/>
+                                      </a:rPr>
+                                      <m:t>𝑧</m:t>
+                                    </m:r>
+                                  </m:sup>
+                                </m:sSup>
+                              </m:e>
+                            </m:d>
+                          </m:e>
+                          <m:sup>
+                            <m:r>
+                              <a:rPr lang="en-US" sz="3200" i="1">
+                                <a:latin typeface="Cambria Math" panose="02040503050406030204" pitchFamily="18" charset="0"/>
+                              </a:rPr>
+                              <m:t>2</m:t>
+                            </m:r>
+                          </m:sup>
+                        </m:sSup>
+                        <m:r>
+                          <a:rPr lang="en-US" sz="3200" b="0" i="1" smtClean="0">
+                            <a:latin typeface="Cambria Math" panose="02040503050406030204" pitchFamily="18" charset="0"/>
+                          </a:rPr>
+                          <m:t>=1</m:t>
+                        </m:r>
+                      </m:oMath>
+                    </m:oMathPara>
+                  </a14:m>
+                  <a:endParaRPr lang="en-US" sz="3200" dirty="0">
+                    <a:solidFill>
+                      <a:schemeClr val="tx1"/>
+                    </a:solidFill>
+                  </a:endParaRPr>
+                </a:p>
+              </p:txBody>
+            </p:sp>
+          </mc:Choice>
+          <mc:Fallback>
+            <p:sp>
+              <p:nvSpPr>
+                <p:cNvPr id="26" name="TextBox 25">
+                  <a:extLst>
+                    <a:ext uri="{FF2B5EF4-FFF2-40B4-BE49-F238E27FC236}">
+                      <a16:creationId xmlns:a16="http://schemas.microsoft.com/office/drawing/2014/main" id="{72D6013A-FED7-0423-29F7-96839BE8B8D1}"/>
+                    </a:ext>
+                  </a:extLst>
+                </p:cNvPr>
+                <p:cNvSpPr txBox="1">
+                  <a:spLocks noRot="1" noChangeAspect="1" noMove="1" noResize="1" noEditPoints="1" noAdjustHandles="1" noChangeArrowheads="1" noChangeShapeType="1" noTextEdit="1"/>
+                </p:cNvSpPr>
+                <p:nvPr/>
+              </p:nvSpPr>
+              <p:spPr>
+                <a:xfrm>
+                  <a:off x="6417304" y="2836826"/>
+                  <a:ext cx="3486724" cy="584775"/>
+                </a:xfrm>
+                <a:prstGeom prst="rect">
+                  <a:avLst/>
+                </a:prstGeom>
+                <a:blipFill>
+                  <a:blip r:embed="rId5"/>
+                  <a:stretch>
+                    <a:fillRect/>
+                  </a:stretch>
+                </a:blipFill>
+              </p:spPr>
+              <p:txBody>
+                <a:bodyPr/>
+                <a:lstStyle/>
+                <a:p>
+                  <a:r>
+                    <a:rPr lang="en-US">
+                      <a:noFill/>
+                    </a:rPr>
+                    <a:t> </a:t>
+                  </a:r>
+                </a:p>
+              </p:txBody>
+            </p:sp>
+          </mc:Fallback>
+        </mc:AlternateContent>
+      </p:grpSp>
+      <p:grpSp>
+        <p:nvGrpSpPr>
+          <p:cNvPr id="2" name="Group 1">
+            <a:extLst>
+              <a:ext uri="{FF2B5EF4-FFF2-40B4-BE49-F238E27FC236}">
+                <a16:creationId xmlns:a16="http://schemas.microsoft.com/office/drawing/2014/main" id="{F0547967-5E79-8382-BD65-45036A2BF091}"/>
+              </a:ext>
+            </a:extLst>
+          </p:cNvPr>
+          <p:cNvGrpSpPr/>
+          <p:nvPr/>
+        </p:nvGrpSpPr>
+        <p:grpSpPr>
+          <a:xfrm>
+            <a:off x="1095410" y="1175786"/>
+            <a:ext cx="3577708" cy="4608064"/>
+            <a:chOff x="1153584" y="233822"/>
+            <a:chExt cx="3577708" cy="4608064"/>
+          </a:xfrm>
+        </p:grpSpPr>
+        <p:sp>
+          <p:nvSpPr>
+            <p:cNvPr id="35" name="Arc 34">
+              <a:extLst>
+                <a:ext uri="{FF2B5EF4-FFF2-40B4-BE49-F238E27FC236}">
+                  <a16:creationId xmlns:a16="http://schemas.microsoft.com/office/drawing/2014/main" id="{349052E5-368E-641F-CE3A-0D80894950A2}"/>
+                </a:ext>
+              </a:extLst>
+            </p:cNvPr>
+            <p:cNvSpPr/>
+            <p:nvPr/>
+          </p:nvSpPr>
+          <p:spPr>
+            <a:xfrm>
+              <a:off x="2598212" y="2085993"/>
+              <a:ext cx="697242" cy="553554"/>
+            </a:xfrm>
+            <a:prstGeom prst="arc">
+              <a:avLst>
+                <a:gd name="adj1" fmla="val 16200000"/>
+                <a:gd name="adj2" fmla="val 20129490"/>
+              </a:avLst>
+            </a:prstGeom>
+          </p:spPr>
+          <p:style>
+            <a:lnRef idx="1">
+              <a:schemeClr val="accent1"/>
+            </a:lnRef>
+            <a:fillRef idx="0">
+              <a:schemeClr val="accent1"/>
+            </a:fillRef>
+            <a:effectRef idx="0">
+              <a:schemeClr val="accent1"/>
+            </a:effectRef>
+            <a:fontRef idx="minor">
+              <a:schemeClr val="tx1"/>
+            </a:fontRef>
+          </p:style>
+          <p:txBody>
+            <a:bodyPr rtlCol="0" anchor="ctr"/>
+            <a:lstStyle/>
+            <a:p>
+              <a:pPr algn="ctr"/>
+              <a:endParaRPr lang="en-US"/>
+            </a:p>
+          </p:txBody>
+        </p:sp>
+        <p:grpSp>
+          <p:nvGrpSpPr>
+            <p:cNvPr id="36" name="Group 35">
+              <a:extLst>
+                <a:ext uri="{FF2B5EF4-FFF2-40B4-BE49-F238E27FC236}">
+                  <a16:creationId xmlns:a16="http://schemas.microsoft.com/office/drawing/2014/main" id="{79371863-4A5A-DBDD-CA22-FC7D9E37FD51}"/>
+                </a:ext>
+              </a:extLst>
+            </p:cNvPr>
+            <p:cNvGrpSpPr/>
+            <p:nvPr/>
+          </p:nvGrpSpPr>
+          <p:grpSpPr>
+            <a:xfrm>
+              <a:off x="1153584" y="740244"/>
+              <a:ext cx="3577708" cy="3577703"/>
+              <a:chOff x="2012104" y="948792"/>
+              <a:chExt cx="3577708" cy="3577703"/>
+            </a:xfrm>
+          </p:grpSpPr>
+          <p:cxnSp>
+            <p:nvCxnSpPr>
+              <p:cNvPr id="39" name="Straight Connector 38">
+                <a:extLst>
+                  <a:ext uri="{FF2B5EF4-FFF2-40B4-BE49-F238E27FC236}">
+                    <a16:creationId xmlns:a16="http://schemas.microsoft.com/office/drawing/2014/main" id="{F2EA62BC-3CF0-13A3-0DE1-853FECF4927F}"/>
+                  </a:ext>
+                </a:extLst>
+              </p:cNvPr>
+              <p:cNvCxnSpPr>
+                <a:cxnSpLocks/>
+                <a:stCxn id="47" idx="2"/>
+              </p:cNvCxnSpPr>
+              <p:nvPr/>
+            </p:nvCxnSpPr>
+            <p:spPr>
+              <a:xfrm>
+                <a:off x="2012104" y="2737644"/>
+                <a:ext cx="3577706" cy="7622"/>
+              </a:xfrm>
+              <a:prstGeom prst="line">
+                <a:avLst/>
+              </a:prstGeom>
+              <a:ln/>
+            </p:spPr>
+            <p:style>
+              <a:lnRef idx="1">
+                <a:schemeClr val="accent1"/>
+              </a:lnRef>
+              <a:fillRef idx="0">
+                <a:schemeClr val="accent1"/>
+              </a:fillRef>
+              <a:effectRef idx="0">
+                <a:schemeClr val="accent1"/>
+              </a:effectRef>
+              <a:fontRef idx="minor">
+                <a:schemeClr val="tx1"/>
+              </a:fontRef>
+            </p:style>
+          </p:cxnSp>
+          <p:cxnSp>
+            <p:nvCxnSpPr>
+              <p:cNvPr id="40" name="Straight Connector 39">
+                <a:extLst>
+                  <a:ext uri="{FF2B5EF4-FFF2-40B4-BE49-F238E27FC236}">
+                    <a16:creationId xmlns:a16="http://schemas.microsoft.com/office/drawing/2014/main" id="{7B5F2E82-07AC-7F88-6C67-76DC99EAC189}"/>
+                  </a:ext>
+                </a:extLst>
+              </p:cNvPr>
+              <p:cNvCxnSpPr>
+                <a:cxnSpLocks/>
+                <a:stCxn id="47" idx="0"/>
+                <a:endCxn id="47" idx="4"/>
+              </p:cNvCxnSpPr>
+              <p:nvPr/>
+            </p:nvCxnSpPr>
+            <p:spPr>
+              <a:xfrm>
+                <a:off x="3800958" y="948792"/>
+                <a:ext cx="0" cy="3577703"/>
+              </a:xfrm>
+              <a:prstGeom prst="line">
+                <a:avLst/>
+              </a:prstGeom>
+              <a:ln/>
+            </p:spPr>
+            <p:style>
+              <a:lnRef idx="1">
+                <a:schemeClr val="accent1"/>
+              </a:lnRef>
+              <a:fillRef idx="0">
+                <a:schemeClr val="accent1"/>
+              </a:fillRef>
+              <a:effectRef idx="0">
+                <a:schemeClr val="accent1"/>
+              </a:effectRef>
+              <a:fontRef idx="minor">
+                <a:schemeClr val="tx1"/>
+              </a:fontRef>
+            </p:style>
+          </p:cxnSp>
+          <p:grpSp>
+            <p:nvGrpSpPr>
+              <p:cNvPr id="41" name="Group 40">
+                <a:extLst>
+                  <a:ext uri="{FF2B5EF4-FFF2-40B4-BE49-F238E27FC236}">
+                    <a16:creationId xmlns:a16="http://schemas.microsoft.com/office/drawing/2014/main" id="{E7A46A4D-07FF-3914-BA14-FE928CC1A409}"/>
+                  </a:ext>
+                </a:extLst>
+              </p:cNvPr>
+              <p:cNvGrpSpPr/>
+              <p:nvPr/>
+            </p:nvGrpSpPr>
+            <p:grpSpPr>
+              <a:xfrm>
+                <a:off x="2012104" y="948792"/>
+                <a:ext cx="3577708" cy="3577703"/>
+                <a:chOff x="934944" y="1636949"/>
+                <a:chExt cx="2674273" cy="2674270"/>
+              </a:xfrm>
+            </p:grpSpPr>
+            <p:grpSp>
+              <p:nvGrpSpPr>
+                <p:cNvPr id="42" name="Group 41">
+                  <a:extLst>
+                    <a:ext uri="{FF2B5EF4-FFF2-40B4-BE49-F238E27FC236}">
+                      <a16:creationId xmlns:a16="http://schemas.microsoft.com/office/drawing/2014/main" id="{F7A60819-6B04-87D1-6FEC-67649CD20E62}"/>
+                    </a:ext>
+                  </a:extLst>
+                </p:cNvPr>
+                <p:cNvGrpSpPr/>
+                <p:nvPr/>
+              </p:nvGrpSpPr>
+              <p:grpSpPr>
+                <a:xfrm>
+                  <a:off x="934944" y="1636949"/>
+                  <a:ext cx="2674273" cy="2674270"/>
+                  <a:chOff x="2521889" y="2808131"/>
+                  <a:chExt cx="1916265" cy="1916264"/>
+                </a:xfrm>
+              </p:grpSpPr>
+              <p:sp>
+                <p:nvSpPr>
+                  <p:cNvPr id="45" name="Oval 44">
+                    <a:extLst>
+                      <a:ext uri="{FF2B5EF4-FFF2-40B4-BE49-F238E27FC236}">
+                        <a16:creationId xmlns:a16="http://schemas.microsoft.com/office/drawing/2014/main" id="{D5CCBA0F-4357-677D-C5A7-481691904867}"/>
+                      </a:ext>
+                    </a:extLst>
+                  </p:cNvPr>
+                  <p:cNvSpPr/>
+                  <p:nvPr/>
+                </p:nvSpPr>
+                <p:spPr>
+                  <a:xfrm>
+                    <a:off x="2521889" y="2808131"/>
+                    <a:ext cx="1916264" cy="1916264"/>
+                  </a:xfrm>
+                  <a:prstGeom prst="ellipse">
+                    <a:avLst/>
+                  </a:prstGeom>
+                  <a:ln w="12700">
+                    <a:solidFill>
+                      <a:schemeClr val="tx1"/>
+                    </a:solidFill>
+                  </a:ln>
+                </p:spPr>
+                <p:style>
+                  <a:lnRef idx="1">
+                    <a:schemeClr val="accent1"/>
+                  </a:lnRef>
+                  <a:fillRef idx="0">
+                    <a:schemeClr val="accent1"/>
+                  </a:fillRef>
+                  <a:effectRef idx="0">
+                    <a:schemeClr val="accent1"/>
+                  </a:effectRef>
+                  <a:fontRef idx="minor">
+                    <a:schemeClr val="tx1"/>
+                  </a:fontRef>
+                </p:style>
+                <p:txBody>
+                  <a:bodyPr rtlCol="0" anchor="ctr"/>
+                  <a:lstStyle/>
+                  <a:p>
+                    <a:pPr algn="ctr"/>
+                    <a:endParaRPr lang="en-US"/>
+                  </a:p>
+                </p:txBody>
+              </p:sp>
+              <p:sp>
+                <p:nvSpPr>
+                  <p:cNvPr id="46" name="Oval 31">
+                    <a:extLst>
+                      <a:ext uri="{FF2B5EF4-FFF2-40B4-BE49-F238E27FC236}">
+                        <a16:creationId xmlns:a16="http://schemas.microsoft.com/office/drawing/2014/main" id="{7F7EB69C-9E17-9762-1CDC-D47B21D794E6}"/>
+                      </a:ext>
+                    </a:extLst>
+                  </p:cNvPr>
+                  <p:cNvSpPr/>
+                  <p:nvPr/>
+                </p:nvSpPr>
+                <p:spPr>
+                  <a:xfrm>
+                    <a:off x="2521889" y="2808132"/>
+                    <a:ext cx="1916264" cy="958132"/>
+                  </a:xfrm>
+                  <a:custGeom>
+                    <a:avLst/>
+                    <a:gdLst>
+                      <a:gd name="connsiteX0" fmla="*/ 0 w 1916264"/>
+                      <a:gd name="connsiteY0" fmla="*/ 958132 h 1916264"/>
+                      <a:gd name="connsiteX1" fmla="*/ 958132 w 1916264"/>
+                      <a:gd name="connsiteY1" fmla="*/ 0 h 1916264"/>
+                      <a:gd name="connsiteX2" fmla="*/ 1916264 w 1916264"/>
+                      <a:gd name="connsiteY2" fmla="*/ 958132 h 1916264"/>
+                      <a:gd name="connsiteX3" fmla="*/ 958132 w 1916264"/>
+                      <a:gd name="connsiteY3" fmla="*/ 1916264 h 1916264"/>
+                      <a:gd name="connsiteX4" fmla="*/ 0 w 1916264"/>
+                      <a:gd name="connsiteY4" fmla="*/ 958132 h 1916264"/>
+                      <a:gd name="connsiteX0" fmla="*/ 958132 w 1916264"/>
+                      <a:gd name="connsiteY0" fmla="*/ 1916264 h 2007704"/>
+                      <a:gd name="connsiteX1" fmla="*/ 0 w 1916264"/>
+                      <a:gd name="connsiteY1" fmla="*/ 958132 h 2007704"/>
+                      <a:gd name="connsiteX2" fmla="*/ 958132 w 1916264"/>
+                      <a:gd name="connsiteY2" fmla="*/ 0 h 2007704"/>
+                      <a:gd name="connsiteX3" fmla="*/ 1916264 w 1916264"/>
+                      <a:gd name="connsiteY3" fmla="*/ 958132 h 2007704"/>
+                      <a:gd name="connsiteX4" fmla="*/ 1049572 w 1916264"/>
+                      <a:gd name="connsiteY4" fmla="*/ 2007704 h 2007704"/>
+                      <a:gd name="connsiteX0" fmla="*/ 958132 w 1916264"/>
+                      <a:gd name="connsiteY0" fmla="*/ 1916264 h 1916264"/>
+                      <a:gd name="connsiteX1" fmla="*/ 0 w 1916264"/>
+                      <a:gd name="connsiteY1" fmla="*/ 958132 h 1916264"/>
+                      <a:gd name="connsiteX2" fmla="*/ 958132 w 1916264"/>
+                      <a:gd name="connsiteY2" fmla="*/ 0 h 1916264"/>
+                      <a:gd name="connsiteX3" fmla="*/ 1916264 w 1916264"/>
+                      <a:gd name="connsiteY3" fmla="*/ 958132 h 1916264"/>
+                      <a:gd name="connsiteX0" fmla="*/ 0 w 1916264"/>
+                      <a:gd name="connsiteY0" fmla="*/ 958132 h 958132"/>
+                      <a:gd name="connsiteX1" fmla="*/ 958132 w 1916264"/>
+                      <a:gd name="connsiteY1" fmla="*/ 0 h 958132"/>
+                      <a:gd name="connsiteX2" fmla="*/ 1916264 w 1916264"/>
+                      <a:gd name="connsiteY2" fmla="*/ 958132 h 958132"/>
+                    </a:gdLst>
+                    <a:ahLst/>
+                    <a:cxnLst>
+                      <a:cxn ang="0">
+                        <a:pos x="connsiteX0" y="connsiteY0"/>
+                      </a:cxn>
+                      <a:cxn ang="0">
+                        <a:pos x="connsiteX1" y="connsiteY1"/>
+                      </a:cxn>
+                      <a:cxn ang="0">
+                        <a:pos x="connsiteX2" y="connsiteY2"/>
+                      </a:cxn>
+                    </a:cxnLst>
+                    <a:rect l="l" t="t" r="r" b="b"/>
+                    <a:pathLst>
+                      <a:path w="1916264" h="958132">
+                        <a:moveTo>
+                          <a:pt x="0" y="958132"/>
+                        </a:moveTo>
+                        <a:cubicBezTo>
+                          <a:pt x="0" y="428970"/>
+                          <a:pt x="428970" y="0"/>
+                          <a:pt x="958132" y="0"/>
+                        </a:cubicBezTo>
+                        <a:cubicBezTo>
+                          <a:pt x="1487294" y="0"/>
+                          <a:pt x="1916264" y="428970"/>
+                          <a:pt x="1916264" y="958132"/>
+                        </a:cubicBezTo>
+                      </a:path>
+                    </a:pathLst>
+                  </a:custGeom>
+                  <a:noFill/>
+                  <a:ln w="28575">
+                    <a:solidFill>
+                      <a:schemeClr val="accent1"/>
+                    </a:solidFill>
+                  </a:ln>
+                </p:spPr>
+                <p:style>
+                  <a:lnRef idx="2">
+                    <a:schemeClr val="accent1">
+                      <a:shade val="15000"/>
+                    </a:schemeClr>
+                  </a:lnRef>
+                  <a:fillRef idx="1">
+                    <a:schemeClr val="accent1"/>
+                  </a:fillRef>
+                  <a:effectRef idx="0">
+                    <a:schemeClr val="accent1"/>
+                  </a:effectRef>
+                  <a:fontRef idx="minor">
+                    <a:schemeClr val="lt1"/>
+                  </a:fontRef>
+                </p:style>
+                <p:txBody>
+                  <a:bodyPr rtlCol="0" anchor="ctr"/>
+                  <a:lstStyle/>
+                  <a:p>
+                    <a:pPr algn="ctr"/>
+                    <a:endParaRPr lang="en-US"/>
+                  </a:p>
+                </p:txBody>
+              </p:sp>
+              <p:sp>
+                <p:nvSpPr>
+                  <p:cNvPr id="47" name="Oval 46">
+                    <a:extLst>
+                      <a:ext uri="{FF2B5EF4-FFF2-40B4-BE49-F238E27FC236}">
+                        <a16:creationId xmlns:a16="http://schemas.microsoft.com/office/drawing/2014/main" id="{5594BCFB-4010-5BB5-E6C3-7C7D8EE741FF}"/>
+                      </a:ext>
+                    </a:extLst>
+                  </p:cNvPr>
+                  <p:cNvSpPr/>
+                  <p:nvPr/>
+                </p:nvSpPr>
+                <p:spPr>
+                  <a:xfrm>
+                    <a:off x="2521889" y="2808131"/>
+                    <a:ext cx="1916265" cy="1916264"/>
+                  </a:xfrm>
+                  <a:prstGeom prst="ellipse">
+                    <a:avLst/>
+                  </a:prstGeom>
+                  <a:noFill/>
+                  <a:ln w="28575">
+                    <a:solidFill>
+                      <a:schemeClr val="accent1"/>
+                    </a:solidFill>
+                  </a:ln>
+                </p:spPr>
+                <p:style>
+                  <a:lnRef idx="2">
+                    <a:schemeClr val="accent1">
+                      <a:shade val="15000"/>
+                    </a:schemeClr>
+                  </a:lnRef>
+                  <a:fillRef idx="1">
+                    <a:schemeClr val="accent1"/>
+                  </a:fillRef>
+                  <a:effectRef idx="0">
+                    <a:schemeClr val="accent1"/>
+                  </a:effectRef>
+                  <a:fontRef idx="minor">
+                    <a:schemeClr val="lt1"/>
+                  </a:fontRef>
+                </p:style>
+                <p:txBody>
+                  <a:bodyPr rtlCol="0" anchor="ctr"/>
+                  <a:lstStyle/>
+                  <a:p>
+                    <a:pPr algn="ctr"/>
+                    <a:endParaRPr lang="en-US">
+                      <a:solidFill>
+                        <a:schemeClr val="lt1"/>
+                      </a:solidFill>
+                    </a:endParaRPr>
+                  </a:p>
+                </p:txBody>
+              </p:sp>
+            </p:grpSp>
+            <p:cxnSp>
+              <p:nvCxnSpPr>
+                <p:cNvPr id="43" name="Straight Arrow Connector 42">
+                  <a:extLst>
+                    <a:ext uri="{FF2B5EF4-FFF2-40B4-BE49-F238E27FC236}">
+                      <a16:creationId xmlns:a16="http://schemas.microsoft.com/office/drawing/2014/main" id="{FCD64F03-B68C-3AE2-9561-FA3D9C985D09}"/>
+                    </a:ext>
+                  </a:extLst>
+                </p:cNvPr>
+                <p:cNvCxnSpPr>
+                  <a:cxnSpLocks/>
+                  <a:endCxn id="47" idx="7"/>
+                </p:cNvCxnSpPr>
+                <p:nvPr/>
+              </p:nvCxnSpPr>
+              <p:spPr>
+                <a:xfrm flipV="1">
+                  <a:off x="2272076" y="2028586"/>
+                  <a:ext cx="945503" cy="945496"/>
+                </a:xfrm>
+                <a:prstGeom prst="straightConnector1">
+                  <a:avLst/>
+                </a:prstGeom>
+                <a:ln w="28575">
+                  <a:solidFill>
+                    <a:schemeClr val="tx1"/>
+                  </a:solidFill>
+                  <a:tailEnd type="triangle" w="lg" len="lg"/>
+                </a:ln>
+              </p:spPr>
+              <p:style>
+                <a:lnRef idx="1">
+                  <a:schemeClr val="accent1"/>
+                </a:lnRef>
+                <a:fillRef idx="0">
+                  <a:schemeClr val="accent1"/>
+                </a:fillRef>
+                <a:effectRef idx="0">
+                  <a:schemeClr val="accent1"/>
+                </a:effectRef>
+                <a:fontRef idx="minor">
+                  <a:schemeClr val="tx1"/>
+                </a:fontRef>
+              </p:style>
+            </p:cxnSp>
+          </p:grpSp>
+        </p:grpSp>
+        <mc:AlternateContent xmlns:mc="http://schemas.openxmlformats.org/markup-compatibility/2006">
+          <mc:Choice xmlns:a14="http://schemas.microsoft.com/office/drawing/2010/main" Requires="a14">
+            <p:sp>
+              <p:nvSpPr>
+                <p:cNvPr id="51" name="TextBox 50">
+                  <a:extLst>
+                    <a:ext uri="{FF2B5EF4-FFF2-40B4-BE49-F238E27FC236}">
+                      <a16:creationId xmlns:a16="http://schemas.microsoft.com/office/drawing/2014/main" id="{CA8F6DD0-06FC-6E5D-C604-9CB12C3D0B91}"/>
+                    </a:ext>
+                  </a:extLst>
+                </p:cNvPr>
+                <p:cNvSpPr txBox="1"/>
+                <p:nvPr/>
+              </p:nvSpPr>
+              <p:spPr>
+                <a:xfrm>
+                  <a:off x="2920848" y="1799377"/>
+                  <a:ext cx="500535" cy="494101"/>
+                </a:xfrm>
+                <a:prstGeom prst="rect">
+                  <a:avLst/>
+                </a:prstGeom>
+                <a:noFill/>
+              </p:spPr>
+              <p:txBody>
+                <a:bodyPr wrap="none" rtlCol="0">
+                  <a:spAutoFit/>
+                </a:bodyPr>
+                <a:lstStyle/>
+                <a:p>
+                  <a:pPr/>
+                  <a14:m>
+                    <m:oMathPara xmlns:m="http://schemas.openxmlformats.org/officeDocument/2006/math">
+                      <m:oMathParaPr>
+                        <m:jc m:val="centerGroup"/>
+                      </m:oMathParaPr>
+                      <m:oMath xmlns:m="http://schemas.openxmlformats.org/officeDocument/2006/math">
+                        <m:r>
+                          <a:rPr lang="en-US" b="0" i="1" smtClean="0">
+                            <a:latin typeface="Cambria Math" panose="02040503050406030204" pitchFamily="18" charset="0"/>
+                          </a:rPr>
+                          <m:t>𝜃</m:t>
+                        </m:r>
+                      </m:oMath>
+                    </m:oMathPara>
+                  </a14:m>
+                  <a:endParaRPr lang="en-US" dirty="0"/>
+                </a:p>
+              </p:txBody>
+            </p:sp>
+          </mc:Choice>
+          <mc:Fallback>
+            <p:sp>
+              <p:nvSpPr>
+                <p:cNvPr id="51" name="TextBox 50">
+                  <a:extLst>
+                    <a:ext uri="{FF2B5EF4-FFF2-40B4-BE49-F238E27FC236}">
+                      <a16:creationId xmlns:a16="http://schemas.microsoft.com/office/drawing/2014/main" id="{CA8F6DD0-06FC-6E5D-C604-9CB12C3D0B91}"/>
+                    </a:ext>
+                  </a:extLst>
+                </p:cNvPr>
+                <p:cNvSpPr txBox="1">
+                  <a:spLocks noRot="1" noChangeAspect="1" noMove="1" noResize="1" noEditPoints="1" noAdjustHandles="1" noChangeArrowheads="1" noChangeShapeType="1" noTextEdit="1"/>
+                </p:cNvSpPr>
+                <p:nvPr/>
+              </p:nvSpPr>
+              <p:spPr>
+                <a:xfrm>
+                  <a:off x="2920848" y="1799377"/>
+                  <a:ext cx="500535" cy="494101"/>
+                </a:xfrm>
+                <a:prstGeom prst="rect">
+                  <a:avLst/>
+                </a:prstGeom>
+                <a:blipFill>
+                  <a:blip r:embed="rId6"/>
+                  <a:stretch>
+                    <a:fillRect/>
+                  </a:stretch>
+                </a:blipFill>
+              </p:spPr>
+              <p:txBody>
+                <a:bodyPr/>
+                <a:lstStyle/>
+                <a:p>
+                  <a:r>
+                    <a:rPr lang="en-US">
+                      <a:noFill/>
+                    </a:rPr>
+                    <a:t> </a:t>
+                  </a:r>
+                </a:p>
+              </p:txBody>
+            </p:sp>
+          </mc:Fallback>
+        </mc:AlternateContent>
+        <mc:AlternateContent xmlns:mc="http://schemas.openxmlformats.org/markup-compatibility/2006">
+          <mc:Choice xmlns:a14="http://schemas.microsoft.com/office/drawing/2010/main" Requires="a14">
+            <p:sp>
+              <p:nvSpPr>
+                <p:cNvPr id="52" name="TextBox 51">
+                  <a:extLst>
+                    <a:ext uri="{FF2B5EF4-FFF2-40B4-BE49-F238E27FC236}">
+                      <a16:creationId xmlns:a16="http://schemas.microsoft.com/office/drawing/2014/main" id="{5B3A1FE5-8BE1-054D-0D83-E84748B4C47B}"/>
+                    </a:ext>
+                  </a:extLst>
+                </p:cNvPr>
+                <p:cNvSpPr txBox="1"/>
+                <p:nvPr/>
+              </p:nvSpPr>
+              <p:spPr>
+                <a:xfrm>
+                  <a:off x="2541264" y="233822"/>
+                  <a:ext cx="802336" cy="461665"/>
+                </a:xfrm>
+                <a:prstGeom prst="rect">
+                  <a:avLst/>
+                </a:prstGeom>
+                <a:noFill/>
+              </p:spPr>
+              <p:txBody>
+                <a:bodyPr wrap="none" rtlCol="0">
+                  <a:spAutoFit/>
+                </a:bodyPr>
+                <a:lstStyle/>
+                <a:p>
+                  <a:pPr/>
+                  <a14:m>
+                    <m:oMathPara xmlns:m="http://schemas.openxmlformats.org/officeDocument/2006/math">
+                      <m:oMathParaPr>
+                        <m:jc m:val="centerGroup"/>
+                      </m:oMathParaPr>
+                      <m:oMath xmlns:m="http://schemas.openxmlformats.org/officeDocument/2006/math">
+                        <m:r>
+                          <a:rPr lang="en-US" sz="2400" i="1" dirty="0">
+                            <a:latin typeface="Cambria Math" panose="02040503050406030204" pitchFamily="18" charset="0"/>
+                          </a:rPr>
+                          <m:t>|</m:t>
+                        </m:r>
+                        <m:sSup>
+                          <m:sSupPr>
+                            <m:ctrlPr>
+                              <a:rPr lang="en-US" sz="2400" i="1" dirty="0">
+                                <a:latin typeface="Cambria Math" panose="02040503050406030204" pitchFamily="18" charset="0"/>
+                              </a:rPr>
+                            </m:ctrlPr>
+                          </m:sSupPr>
+                          <m:e>
+                            <m:r>
+                              <a:rPr lang="en-US" sz="2400" i="1" dirty="0">
+                                <a:latin typeface="Cambria Math" panose="02040503050406030204" pitchFamily="18" charset="0"/>
+                              </a:rPr>
+                              <m:t>𝑧</m:t>
+                            </m:r>
+                          </m:e>
+                          <m:sup>
+                            <m:r>
+                              <a:rPr lang="en-US" sz="2400" i="1" dirty="0">
+                                <a:latin typeface="Cambria Math" panose="02040503050406030204" pitchFamily="18" charset="0"/>
+                              </a:rPr>
+                              <m:t>+</m:t>
+                            </m:r>
+                          </m:sup>
+                        </m:sSup>
+                        <m:r>
+                          <a:rPr lang="en-US" sz="2400" i="1" dirty="0">
+                            <a:latin typeface="Cambria Math" panose="02040503050406030204" pitchFamily="18" charset="0"/>
+                          </a:rPr>
+                          <m:t>⟩</m:t>
+                        </m:r>
+                      </m:oMath>
+                    </m:oMathPara>
+                  </a14:m>
+                  <a:endParaRPr lang="en-US" sz="2400" dirty="0"/>
+                </a:p>
+              </p:txBody>
+            </p:sp>
+          </mc:Choice>
+          <mc:Fallback>
+            <p:sp>
+              <p:nvSpPr>
+                <p:cNvPr id="52" name="TextBox 51">
+                  <a:extLst>
+                    <a:ext uri="{FF2B5EF4-FFF2-40B4-BE49-F238E27FC236}">
+                      <a16:creationId xmlns:a16="http://schemas.microsoft.com/office/drawing/2014/main" id="{5B3A1FE5-8BE1-054D-0D83-E84748B4C47B}"/>
+                    </a:ext>
+                  </a:extLst>
+                </p:cNvPr>
+                <p:cNvSpPr txBox="1">
+                  <a:spLocks noRot="1" noChangeAspect="1" noMove="1" noResize="1" noEditPoints="1" noAdjustHandles="1" noChangeArrowheads="1" noChangeShapeType="1" noTextEdit="1"/>
+                </p:cNvSpPr>
+                <p:nvPr/>
+              </p:nvSpPr>
+              <p:spPr>
+                <a:xfrm>
+                  <a:off x="2541264" y="233822"/>
+                  <a:ext cx="802336" cy="461665"/>
+                </a:xfrm>
+                <a:prstGeom prst="rect">
+                  <a:avLst/>
+                </a:prstGeom>
+                <a:blipFill>
+                  <a:blip r:embed="rId7"/>
+                  <a:stretch>
+                    <a:fillRect l="-1515" r="-2273" b="-18421"/>
+                  </a:stretch>
+                </a:blipFill>
+              </p:spPr>
+              <p:txBody>
+                <a:bodyPr/>
+                <a:lstStyle/>
+                <a:p>
+                  <a:r>
+                    <a:rPr lang="en-US">
+                      <a:noFill/>
+                    </a:rPr>
+                    <a:t> </a:t>
+                  </a:r>
+                </a:p>
+              </p:txBody>
+            </p:sp>
+          </mc:Fallback>
+        </mc:AlternateContent>
+        <mc:AlternateContent xmlns:mc="http://schemas.openxmlformats.org/markup-compatibility/2006">
+          <mc:Choice xmlns:a14="http://schemas.microsoft.com/office/drawing/2010/main" Requires="a14">
+            <p:sp>
+              <p:nvSpPr>
+                <p:cNvPr id="53" name="TextBox 52">
+                  <a:extLst>
+                    <a:ext uri="{FF2B5EF4-FFF2-40B4-BE49-F238E27FC236}">
+                      <a16:creationId xmlns:a16="http://schemas.microsoft.com/office/drawing/2014/main" id="{8F2F84F8-76DD-B1A6-90C3-5F8509088D40}"/>
+                    </a:ext>
+                  </a:extLst>
+                </p:cNvPr>
+                <p:cNvSpPr txBox="1"/>
+                <p:nvPr/>
+              </p:nvSpPr>
+              <p:spPr>
+                <a:xfrm>
+                  <a:off x="2541264" y="4380221"/>
+                  <a:ext cx="802336" cy="461665"/>
+                </a:xfrm>
+                <a:prstGeom prst="rect">
+                  <a:avLst/>
+                </a:prstGeom>
+                <a:noFill/>
+              </p:spPr>
+              <p:txBody>
+                <a:bodyPr wrap="none" rtlCol="0">
+                  <a:spAutoFit/>
+                </a:bodyPr>
+                <a:lstStyle/>
+                <a:p>
+                  <a:pPr/>
+                  <a14:m>
+                    <m:oMathPara xmlns:m="http://schemas.openxmlformats.org/officeDocument/2006/math">
+                      <m:oMathParaPr>
+                        <m:jc m:val="centerGroup"/>
+                      </m:oMathParaPr>
+                      <m:oMath xmlns:m="http://schemas.openxmlformats.org/officeDocument/2006/math">
+                        <m:r>
+                          <a:rPr lang="en-US" sz="2400" i="1" dirty="0">
+                            <a:latin typeface="Cambria Math" panose="02040503050406030204" pitchFamily="18" charset="0"/>
+                          </a:rPr>
+                          <m:t>|</m:t>
+                        </m:r>
+                        <m:sSup>
+                          <m:sSupPr>
+                            <m:ctrlPr>
+                              <a:rPr lang="en-US" sz="2400" i="1" dirty="0">
+                                <a:latin typeface="Cambria Math" panose="02040503050406030204" pitchFamily="18" charset="0"/>
+                              </a:rPr>
+                            </m:ctrlPr>
+                          </m:sSupPr>
+                          <m:e>
+                            <m:r>
+                              <a:rPr lang="en-US" sz="2400" i="1" dirty="0">
+                                <a:latin typeface="Cambria Math" panose="02040503050406030204" pitchFamily="18" charset="0"/>
+                              </a:rPr>
+                              <m:t>𝑧</m:t>
+                            </m:r>
+                          </m:e>
+                          <m:sup>
+                            <m:r>
+                              <a:rPr lang="en-US" sz="2400" i="1" dirty="0">
+                                <a:latin typeface="Cambria Math" panose="02040503050406030204" pitchFamily="18" charset="0"/>
+                              </a:rPr>
+                              <m:t>−</m:t>
+                            </m:r>
+                          </m:sup>
+                        </m:sSup>
+                        <m:r>
+                          <a:rPr lang="en-US" sz="2400" i="1" dirty="0">
+                            <a:latin typeface="Cambria Math" panose="02040503050406030204" pitchFamily="18" charset="0"/>
+                          </a:rPr>
+                          <m:t>⟩</m:t>
+                        </m:r>
+                      </m:oMath>
+                    </m:oMathPara>
+                  </a14:m>
+                  <a:endParaRPr lang="en-US" sz="2400" dirty="0"/>
+                </a:p>
+              </p:txBody>
+            </p:sp>
+          </mc:Choice>
+          <mc:Fallback>
+            <p:sp>
+              <p:nvSpPr>
+                <p:cNvPr id="53" name="TextBox 52">
+                  <a:extLst>
+                    <a:ext uri="{FF2B5EF4-FFF2-40B4-BE49-F238E27FC236}">
+                      <a16:creationId xmlns:a16="http://schemas.microsoft.com/office/drawing/2014/main" id="{8F2F84F8-76DD-B1A6-90C3-5F8509088D40}"/>
+                    </a:ext>
+                  </a:extLst>
+                </p:cNvPr>
+                <p:cNvSpPr txBox="1">
+                  <a:spLocks noRot="1" noChangeAspect="1" noMove="1" noResize="1" noEditPoints="1" noAdjustHandles="1" noChangeArrowheads="1" noChangeShapeType="1" noTextEdit="1"/>
+                </p:cNvSpPr>
+                <p:nvPr/>
+              </p:nvSpPr>
+              <p:spPr>
+                <a:xfrm>
+                  <a:off x="2541264" y="4380221"/>
+                  <a:ext cx="802336" cy="461665"/>
+                </a:xfrm>
+                <a:prstGeom prst="rect">
+                  <a:avLst/>
+                </a:prstGeom>
+                <a:blipFill>
+                  <a:blip r:embed="rId8"/>
+                  <a:stretch>
+                    <a:fillRect l="-1515" r="-2273" b="-18421"/>
+                  </a:stretch>
+                </a:blipFill>
+              </p:spPr>
+              <p:txBody>
+                <a:bodyPr/>
+                <a:lstStyle/>
+                <a:p>
+                  <a:r>
+                    <a:rPr lang="en-US">
+                      <a:noFill/>
+                    </a:rPr>
+                    <a:t> </a:t>
+                  </a:r>
+                </a:p>
+              </p:txBody>
+            </p:sp>
+          </mc:Fallback>
+        </mc:AlternateContent>
+        <p:cxnSp>
+          <p:nvCxnSpPr>
+            <p:cNvPr id="54" name="Straight Connector 53">
+              <a:extLst>
+                <a:ext uri="{FF2B5EF4-FFF2-40B4-BE49-F238E27FC236}">
+                  <a16:creationId xmlns:a16="http://schemas.microsoft.com/office/drawing/2014/main" id="{81AAA80D-597A-9D4A-E9F0-8EB3B5418499}"/>
+                </a:ext>
+              </a:extLst>
+            </p:cNvPr>
+            <p:cNvCxnSpPr>
+              <a:cxnSpLocks/>
+              <a:endCxn id="47" idx="7"/>
+            </p:cNvCxnSpPr>
+            <p:nvPr/>
+          </p:nvCxnSpPr>
+          <p:spPr>
+            <a:xfrm flipV="1">
+              <a:off x="4207349" y="1264186"/>
+              <a:ext cx="0" cy="1272532"/>
+            </a:xfrm>
+            <a:prstGeom prst="line">
+              <a:avLst/>
+            </a:prstGeom>
+            <a:ln w="28575">
+              <a:solidFill>
+                <a:srgbClr val="00B0F0"/>
+              </a:solidFill>
+            </a:ln>
+          </p:spPr>
+          <p:style>
+            <a:lnRef idx="1">
+              <a:schemeClr val="accent1"/>
+            </a:lnRef>
+            <a:fillRef idx="0">
+              <a:schemeClr val="accent1"/>
+            </a:fillRef>
+            <a:effectRef idx="0">
+              <a:schemeClr val="accent1"/>
+            </a:effectRef>
+            <a:fontRef idx="minor">
+              <a:schemeClr val="tx1"/>
+            </a:fontRef>
+          </p:style>
+        </p:cxnSp>
+        <p:cxnSp>
+          <p:nvCxnSpPr>
+            <p:cNvPr id="55" name="Straight Connector 54">
+              <a:extLst>
+                <a:ext uri="{FF2B5EF4-FFF2-40B4-BE49-F238E27FC236}">
+                  <a16:creationId xmlns:a16="http://schemas.microsoft.com/office/drawing/2014/main" id="{3EC32B97-DCB0-8C25-AD21-B0ED5FF02662}"/>
+                </a:ext>
+              </a:extLst>
+            </p:cNvPr>
+            <p:cNvCxnSpPr/>
+            <p:nvPr/>
+          </p:nvCxnSpPr>
+          <p:spPr>
+            <a:xfrm>
+              <a:off x="2942432" y="2532261"/>
+              <a:ext cx="1264917" cy="1"/>
+            </a:xfrm>
+            <a:prstGeom prst="line">
+              <a:avLst/>
+            </a:prstGeom>
+            <a:ln w="28575">
+              <a:solidFill>
+                <a:srgbClr val="7030A0"/>
+              </a:solidFill>
+            </a:ln>
+          </p:spPr>
+          <p:style>
+            <a:lnRef idx="1">
+              <a:schemeClr val="accent1"/>
+            </a:lnRef>
+            <a:fillRef idx="0">
+              <a:schemeClr val="accent1"/>
+            </a:fillRef>
+            <a:effectRef idx="0">
+              <a:schemeClr val="accent1"/>
+            </a:effectRef>
+            <a:fontRef idx="minor">
+              <a:schemeClr val="tx1"/>
+            </a:fontRef>
+          </p:style>
+        </p:cxnSp>
+        <mc:AlternateContent xmlns:mc="http://schemas.openxmlformats.org/markup-compatibility/2006">
+          <mc:Choice xmlns:a14="http://schemas.microsoft.com/office/drawing/2010/main" Requires="a14">
+            <p:sp>
+              <p:nvSpPr>
+                <p:cNvPr id="56" name="TextBox 55">
+                  <a:extLst>
+                    <a:ext uri="{FF2B5EF4-FFF2-40B4-BE49-F238E27FC236}">
+                      <a16:creationId xmlns:a16="http://schemas.microsoft.com/office/drawing/2014/main" id="{3474534C-27E1-B3FB-6584-87E28CFE13FF}"/>
+                    </a:ext>
+                  </a:extLst>
+                </p:cNvPr>
+                <p:cNvSpPr txBox="1"/>
+                <p:nvPr/>
+              </p:nvSpPr>
+              <p:spPr>
+                <a:xfrm>
+                  <a:off x="3515484" y="1748127"/>
+                  <a:ext cx="429348" cy="461665"/>
+                </a:xfrm>
+                <a:prstGeom prst="rect">
+                  <a:avLst/>
+                </a:prstGeom>
+                <a:noFill/>
+              </p:spPr>
+              <p:txBody>
+                <a:bodyPr wrap="none" rtlCol="0">
+                  <a:spAutoFit/>
+                </a:bodyPr>
+                <a:lstStyle/>
+                <a:p>
+                  <a:pPr/>
+                  <a14:m>
+                    <m:oMathPara xmlns:m="http://schemas.openxmlformats.org/officeDocument/2006/math">
+                      <m:oMathParaPr>
+                        <m:jc m:val="centerGroup"/>
+                      </m:oMathParaPr>
+                      <m:oMath xmlns:m="http://schemas.openxmlformats.org/officeDocument/2006/math">
+                        <m:r>
+                          <a:rPr lang="en-US" sz="2400" b="0" i="1" smtClean="0">
+                            <a:latin typeface="Cambria Math" panose="02040503050406030204" pitchFamily="18" charset="0"/>
+                          </a:rPr>
+                          <m:t>𝑣</m:t>
+                        </m:r>
+                      </m:oMath>
+                    </m:oMathPara>
+                  </a14:m>
+                  <a:endParaRPr lang="en-US" sz="2400" dirty="0"/>
+                </a:p>
+              </p:txBody>
+            </p:sp>
+          </mc:Choice>
+          <mc:Fallback>
+            <p:sp>
+              <p:nvSpPr>
+                <p:cNvPr id="56" name="TextBox 55">
+                  <a:extLst>
+                    <a:ext uri="{FF2B5EF4-FFF2-40B4-BE49-F238E27FC236}">
+                      <a16:creationId xmlns:a16="http://schemas.microsoft.com/office/drawing/2014/main" id="{3474534C-27E1-B3FB-6584-87E28CFE13FF}"/>
+                    </a:ext>
+                  </a:extLst>
+                </p:cNvPr>
+                <p:cNvSpPr txBox="1">
+                  <a:spLocks noRot="1" noChangeAspect="1" noMove="1" noResize="1" noEditPoints="1" noAdjustHandles="1" noChangeArrowheads="1" noChangeShapeType="1" noTextEdit="1"/>
+                </p:cNvSpPr>
+                <p:nvPr/>
+              </p:nvSpPr>
+              <p:spPr>
+                <a:xfrm>
+                  <a:off x="3515484" y="1748127"/>
+                  <a:ext cx="429348" cy="461665"/>
+                </a:xfrm>
+                <a:prstGeom prst="rect">
+                  <a:avLst/>
+                </a:prstGeom>
+                <a:blipFill>
+                  <a:blip r:embed="rId9"/>
+                  <a:stretch>
+                    <a:fillRect/>
+                  </a:stretch>
+                </a:blipFill>
+              </p:spPr>
+              <p:txBody>
+                <a:bodyPr/>
+                <a:lstStyle/>
+                <a:p>
+                  <a:r>
+                    <a:rPr lang="en-US">
+                      <a:noFill/>
+                    </a:rPr>
+                    <a:t> </a:t>
+                  </a:r>
+                </a:p>
+              </p:txBody>
+            </p:sp>
+          </mc:Fallback>
+        </mc:AlternateContent>
+        <mc:AlternateContent xmlns:mc="http://schemas.openxmlformats.org/markup-compatibility/2006">
+          <mc:Choice xmlns:a14="http://schemas.microsoft.com/office/drawing/2010/main" Requires="a14">
+            <p:sp>
+              <p:nvSpPr>
+                <p:cNvPr id="58" name="TextBox 57">
+                  <a:extLst>
+                    <a:ext uri="{FF2B5EF4-FFF2-40B4-BE49-F238E27FC236}">
+                      <a16:creationId xmlns:a16="http://schemas.microsoft.com/office/drawing/2014/main" id="{DD7A84CD-8CE4-65E9-D188-9E4D8EF51BEE}"/>
+                    </a:ext>
+                  </a:extLst>
+                </p:cNvPr>
+                <p:cNvSpPr txBox="1"/>
+                <p:nvPr/>
+              </p:nvSpPr>
+              <p:spPr>
+                <a:xfrm>
+                  <a:off x="2001030" y="2577939"/>
+                  <a:ext cx="815095" cy="369332"/>
+                </a:xfrm>
+                <a:prstGeom prst="rect">
+                  <a:avLst/>
+                </a:prstGeom>
+                <a:noFill/>
+              </p:spPr>
+              <p:txBody>
+                <a:bodyPr wrap="none" rtlCol="0">
+                  <a:spAutoFit/>
+                </a:bodyPr>
+                <a:lstStyle/>
+                <a:p>
+                  <a:pPr/>
+                  <a14:m>
+                    <m:oMathPara xmlns:m="http://schemas.openxmlformats.org/officeDocument/2006/math">
+                      <m:oMathParaPr>
+                        <m:jc m:val="centerGroup"/>
+                      </m:oMathParaPr>
+                      <m:oMath xmlns:m="http://schemas.openxmlformats.org/officeDocument/2006/math">
+                        <m:r>
+                          <a:rPr lang="en-US" b="0" i="1" smtClean="0">
+                            <a:latin typeface="Cambria Math" panose="02040503050406030204" pitchFamily="18" charset="0"/>
+                          </a:rPr>
+                          <m:t>𝑝</m:t>
+                        </m:r>
+                        <m:d>
+                          <m:dPr>
+                            <m:ctrlPr>
+                              <a:rPr lang="en-US" b="0" i="1" smtClean="0">
+                                <a:latin typeface="Cambria Math" panose="02040503050406030204" pitchFamily="18" charset="0"/>
+                              </a:rPr>
+                            </m:ctrlPr>
+                          </m:dPr>
+                          <m:e>
+                            <m:sSup>
+                              <m:sSupPr>
+                                <m:ctrlPr>
+                                  <a:rPr lang="en-US" b="0" i="1" smtClean="0">
+                                    <a:latin typeface="Cambria Math" panose="02040503050406030204" pitchFamily="18" charset="0"/>
+                                  </a:rPr>
+                                </m:ctrlPr>
+                              </m:sSupPr>
+                              <m:e>
+                                <m:r>
+                                  <a:rPr lang="en-US" b="0" i="1" smtClean="0">
+                                    <a:latin typeface="Cambria Math" panose="02040503050406030204" pitchFamily="18" charset="0"/>
+                                  </a:rPr>
+                                  <m:t>𝑧</m:t>
+                                </m:r>
+                              </m:e>
+                              <m:sup>
+                                <m:r>
+                                  <a:rPr lang="en-US" b="0" i="1" smtClean="0">
+                                    <a:latin typeface="Cambria Math" panose="02040503050406030204" pitchFamily="18" charset="0"/>
+                                  </a:rPr>
+                                  <m:t>+</m:t>
+                                </m:r>
+                              </m:sup>
+                            </m:sSup>
+                          </m:e>
+                        </m:d>
+                      </m:oMath>
+                    </m:oMathPara>
+                  </a14:m>
+                  <a:endParaRPr lang="en-US" dirty="0"/>
+                </a:p>
+              </p:txBody>
+            </p:sp>
+          </mc:Choice>
+          <mc:Fallback>
+            <p:sp>
+              <p:nvSpPr>
+                <p:cNvPr id="58" name="TextBox 57">
+                  <a:extLst>
+                    <a:ext uri="{FF2B5EF4-FFF2-40B4-BE49-F238E27FC236}">
+                      <a16:creationId xmlns:a16="http://schemas.microsoft.com/office/drawing/2014/main" id="{DD7A84CD-8CE4-65E9-D188-9E4D8EF51BEE}"/>
+                    </a:ext>
+                  </a:extLst>
+                </p:cNvPr>
+                <p:cNvSpPr txBox="1">
+                  <a:spLocks noRot="1" noChangeAspect="1" noMove="1" noResize="1" noEditPoints="1" noAdjustHandles="1" noChangeArrowheads="1" noChangeShapeType="1" noTextEdit="1"/>
+                </p:cNvSpPr>
+                <p:nvPr/>
+              </p:nvSpPr>
+              <p:spPr>
+                <a:xfrm>
+                  <a:off x="2001030" y="2577939"/>
+                  <a:ext cx="815095" cy="369332"/>
+                </a:xfrm>
+                <a:prstGeom prst="rect">
+                  <a:avLst/>
+                </a:prstGeom>
+                <a:blipFill>
+                  <a:blip r:embed="rId10"/>
+                  <a:stretch>
+                    <a:fillRect b="-8197"/>
+                  </a:stretch>
+                </a:blipFill>
+              </p:spPr>
+              <p:txBody>
+                <a:bodyPr/>
+                <a:lstStyle/>
+                <a:p>
+                  <a:r>
+                    <a:rPr lang="en-US">
+                      <a:noFill/>
+                    </a:rPr>
+                    <a:t> </a:t>
+                  </a:r>
+                </a:p>
+              </p:txBody>
+            </p:sp>
+          </mc:Fallback>
+        </mc:AlternateContent>
+        <mc:AlternateContent xmlns:mc="http://schemas.openxmlformats.org/markup-compatibility/2006">
+          <mc:Choice xmlns:a14="http://schemas.microsoft.com/office/drawing/2010/main" Requires="a14">
+            <p:sp>
+              <p:nvSpPr>
+                <p:cNvPr id="59" name="TextBox 58">
+                  <a:extLst>
+                    <a:ext uri="{FF2B5EF4-FFF2-40B4-BE49-F238E27FC236}">
+                      <a16:creationId xmlns:a16="http://schemas.microsoft.com/office/drawing/2014/main" id="{ED3D2389-8E5E-0EAB-1677-B3BC0DD8F5B7}"/>
+                    </a:ext>
+                  </a:extLst>
+                </p:cNvPr>
+                <p:cNvSpPr txBox="1"/>
+                <p:nvPr/>
+              </p:nvSpPr>
+              <p:spPr>
+                <a:xfrm>
+                  <a:off x="2001031" y="814752"/>
+                  <a:ext cx="815095" cy="369332"/>
+                </a:xfrm>
+                <a:prstGeom prst="rect">
+                  <a:avLst/>
+                </a:prstGeom>
+                <a:noFill/>
+              </p:spPr>
+              <p:txBody>
+                <a:bodyPr wrap="none" rtlCol="0">
+                  <a:spAutoFit/>
+                </a:bodyPr>
+                <a:lstStyle/>
+                <a:p>
+                  <a:pPr/>
+                  <a14:m>
+                    <m:oMathPara xmlns:m="http://schemas.openxmlformats.org/officeDocument/2006/math">
+                      <m:oMathParaPr>
+                        <m:jc m:val="centerGroup"/>
+                      </m:oMathParaPr>
+                      <m:oMath xmlns:m="http://schemas.openxmlformats.org/officeDocument/2006/math">
+                        <m:r>
+                          <a:rPr lang="en-US" b="0" i="1" smtClean="0">
+                            <a:latin typeface="Cambria Math" panose="02040503050406030204" pitchFamily="18" charset="0"/>
+                          </a:rPr>
+                          <m:t>𝑝</m:t>
+                        </m:r>
+                        <m:d>
+                          <m:dPr>
+                            <m:ctrlPr>
+                              <a:rPr lang="en-US" b="0" i="1" smtClean="0">
+                                <a:latin typeface="Cambria Math" panose="02040503050406030204" pitchFamily="18" charset="0"/>
+                              </a:rPr>
+                            </m:ctrlPr>
+                          </m:dPr>
+                          <m:e>
+                            <m:sSup>
+                              <m:sSupPr>
+                                <m:ctrlPr>
+                                  <a:rPr lang="en-US" b="0" i="1" smtClean="0">
+                                    <a:latin typeface="Cambria Math" panose="02040503050406030204" pitchFamily="18" charset="0"/>
+                                  </a:rPr>
+                                </m:ctrlPr>
+                              </m:sSupPr>
+                              <m:e>
+                                <m:r>
+                                  <a:rPr lang="en-US" b="0" i="1" smtClean="0">
+                                    <a:latin typeface="Cambria Math" panose="02040503050406030204" pitchFamily="18" charset="0"/>
+                                  </a:rPr>
+                                  <m:t>𝑧</m:t>
+                                </m:r>
+                              </m:e>
+                              <m:sup>
+                                <m:r>
+                                  <a:rPr lang="en-US" b="0" i="1" smtClean="0">
+                                    <a:latin typeface="Cambria Math" panose="02040503050406030204" pitchFamily="18" charset="0"/>
+                                  </a:rPr>
+                                  <m:t>−</m:t>
+                                </m:r>
+                              </m:sup>
+                            </m:sSup>
+                          </m:e>
+                        </m:d>
+                      </m:oMath>
+                    </m:oMathPara>
+                  </a14:m>
+                  <a:endParaRPr lang="en-US" dirty="0"/>
+                </a:p>
+              </p:txBody>
+            </p:sp>
+          </mc:Choice>
+          <mc:Fallback>
+            <p:sp>
+              <p:nvSpPr>
+                <p:cNvPr id="59" name="TextBox 58">
+                  <a:extLst>
+                    <a:ext uri="{FF2B5EF4-FFF2-40B4-BE49-F238E27FC236}">
+                      <a16:creationId xmlns:a16="http://schemas.microsoft.com/office/drawing/2014/main" id="{ED3D2389-8E5E-0EAB-1677-B3BC0DD8F5B7}"/>
+                    </a:ext>
+                  </a:extLst>
+                </p:cNvPr>
+                <p:cNvSpPr txBox="1">
+                  <a:spLocks noRot="1" noChangeAspect="1" noMove="1" noResize="1" noEditPoints="1" noAdjustHandles="1" noChangeArrowheads="1" noChangeShapeType="1" noTextEdit="1"/>
+                </p:cNvSpPr>
+                <p:nvPr/>
+              </p:nvSpPr>
+              <p:spPr>
+                <a:xfrm>
+                  <a:off x="2001031" y="814752"/>
+                  <a:ext cx="815095" cy="369332"/>
+                </a:xfrm>
+                <a:prstGeom prst="rect">
+                  <a:avLst/>
+                </a:prstGeom>
+                <a:blipFill>
+                  <a:blip r:embed="rId11"/>
+                  <a:stretch>
+                    <a:fillRect b="-8197"/>
+                  </a:stretch>
+                </a:blipFill>
+              </p:spPr>
+              <p:txBody>
+                <a:bodyPr/>
+                <a:lstStyle/>
+                <a:p>
+                  <a:r>
+                    <a:rPr lang="en-US">
+                      <a:noFill/>
+                    </a:rPr>
+                    <a:t> </a:t>
+                  </a:r>
+                </a:p>
+              </p:txBody>
+            </p:sp>
+          </mc:Fallback>
+        </mc:AlternateContent>
+        <p:sp>
+          <p:nvSpPr>
+            <p:cNvPr id="60" name="Right Brace 59">
+              <a:extLst>
+                <a:ext uri="{FF2B5EF4-FFF2-40B4-BE49-F238E27FC236}">
+                  <a16:creationId xmlns:a16="http://schemas.microsoft.com/office/drawing/2014/main" id="{C90F723D-7403-ABBE-E39D-C2B3A7D6382F}"/>
+                </a:ext>
+              </a:extLst>
+            </p:cNvPr>
+            <p:cNvSpPr/>
+            <p:nvPr/>
+          </p:nvSpPr>
+          <p:spPr>
+            <a:xfrm flipH="1">
+              <a:off x="2751185" y="759208"/>
+              <a:ext cx="169816" cy="494101"/>
+            </a:xfrm>
+            <a:prstGeom prst="rightBrace">
+              <a:avLst/>
+            </a:prstGeom>
+            <a:ln w="28575">
+              <a:solidFill>
+                <a:srgbClr val="FFFF00"/>
+              </a:solidFill>
+            </a:ln>
+          </p:spPr>
+          <p:style>
+            <a:lnRef idx="1">
+              <a:schemeClr val="accent1"/>
+            </a:lnRef>
+            <a:fillRef idx="0">
+              <a:schemeClr val="accent1"/>
+            </a:fillRef>
+            <a:effectRef idx="0">
+              <a:schemeClr val="accent1"/>
+            </a:effectRef>
+            <a:fontRef idx="minor">
+              <a:schemeClr val="tx1"/>
+            </a:fontRef>
+          </p:style>
+          <p:txBody>
+            <a:bodyPr rtlCol="0" anchor="ctr"/>
+            <a:lstStyle/>
+            <a:p>
+              <a:pPr algn="ctr"/>
+              <a:endParaRPr lang="en-US"/>
+            </a:p>
+          </p:txBody>
+        </p:sp>
+        <p:sp>
+          <p:nvSpPr>
+            <p:cNvPr id="61" name="Right Brace 60">
+              <a:extLst>
+                <a:ext uri="{FF2B5EF4-FFF2-40B4-BE49-F238E27FC236}">
+                  <a16:creationId xmlns:a16="http://schemas.microsoft.com/office/drawing/2014/main" id="{436BDB9C-EC0F-2D02-1D8C-FEB89251C46B}"/>
+                </a:ext>
+              </a:extLst>
+            </p:cNvPr>
+            <p:cNvSpPr/>
+            <p:nvPr/>
+          </p:nvSpPr>
+          <p:spPr>
+            <a:xfrm flipH="1">
+              <a:off x="2751185" y="1273558"/>
+              <a:ext cx="169816" cy="3017470"/>
+            </a:xfrm>
+            <a:prstGeom prst="rightBrace">
+              <a:avLst/>
+            </a:prstGeom>
+            <a:ln w="28575">
+              <a:solidFill>
+                <a:srgbClr val="C00000"/>
+              </a:solidFill>
+            </a:ln>
+          </p:spPr>
+          <p:style>
+            <a:lnRef idx="1">
+              <a:schemeClr val="accent1"/>
+            </a:lnRef>
+            <a:fillRef idx="0">
+              <a:schemeClr val="accent1"/>
+            </a:fillRef>
+            <a:effectRef idx="0">
+              <a:schemeClr val="accent1"/>
+            </a:effectRef>
+            <a:fontRef idx="minor">
+              <a:schemeClr val="tx1"/>
+            </a:fontRef>
+          </p:style>
+          <p:txBody>
+            <a:bodyPr rtlCol="0" anchor="ctr"/>
+            <a:lstStyle/>
+            <a:p>
+              <a:pPr algn="ctr"/>
+              <a:endParaRPr lang="en-US"/>
+            </a:p>
+          </p:txBody>
+        </p:sp>
+      </p:grpSp>
+      <p:sp>
+        <p:nvSpPr>
+          <p:cNvPr id="15" name="TextBox 14">
+            <a:extLst>
+              <a:ext uri="{FF2B5EF4-FFF2-40B4-BE49-F238E27FC236}">
+                <a16:creationId xmlns:a16="http://schemas.microsoft.com/office/drawing/2014/main" id="{007890C9-7DA2-9785-2891-61123704C5B7}"/>
+              </a:ext>
+            </a:extLst>
+          </p:cNvPr>
+          <p:cNvSpPr txBox="1"/>
+          <p:nvPr/>
+        </p:nvSpPr>
+        <p:spPr>
+          <a:xfrm>
+            <a:off x="435316" y="146736"/>
+            <a:ext cx="11142794" cy="923330"/>
+          </a:xfrm>
+          <a:prstGeom prst="rect">
+            <a:avLst/>
+          </a:prstGeom>
+          <a:noFill/>
+        </p:spPr>
+        <p:txBody>
+          <a:bodyPr wrap="none" rtlCol="0">
+            <a:spAutoFit/>
+          </a:bodyPr>
+          <a:lstStyle/>
+          <a:p>
+            <a:r>
+              <a:rPr lang="en-US" sz="5400" dirty="0"/>
+              <a:t>Quantum superpositions explained</a:t>
+            </a:r>
+          </a:p>
+        </p:txBody>
+      </p:sp>
+    </p:spTree>
+    <p:extLst>
+      <p:ext uri="{BB962C8B-B14F-4D97-AF65-F5344CB8AC3E}">
+        <p14:creationId xmlns:p14="http://schemas.microsoft.com/office/powerpoint/2010/main" val="1252360544"/>
+      </p:ext>
+    </p:extLst>
+  </p:cSld>
+  <p:clrMapOvr>
+    <a:masterClrMapping/>
+  </p:clrMapOvr>
+</p:sld>
+</file>
+
+<file path=ppt/slides/slide4.xml><?xml version="1.0" encoding="utf-8"?>
+<p:sld xmlns:a="http://schemas.openxmlformats.org/drawingml/2006/main" xmlns:r="http://schemas.openxmlformats.org/officeDocument/2006/relationships" xmlns:p="http://schemas.openxmlformats.org/presentationml/2006/main">
+  <p:cSld>
+    <p:spTree>
+      <p:nvGrpSpPr>
+        <p:cNvPr id="1" name="">
+          <a:extLst>
+            <a:ext uri="{FF2B5EF4-FFF2-40B4-BE49-F238E27FC236}">
+              <a16:creationId xmlns:a16="http://schemas.microsoft.com/office/drawing/2014/main" id="{5D3E25D9-9CDD-7929-9A33-D12412A3D8EA}"/>
+            </a:ext>
+          </a:extLst>
+        </p:cNvPr>
+        <p:cNvGrpSpPr/>
+        <p:nvPr/>
+      </p:nvGrpSpPr>
+      <p:grpSpPr>
+        <a:xfrm>
+          <a:off x="0" y="0"/>
+          <a:ext cx="0" cy="0"/>
+          <a:chOff x="0" y="0"/>
+          <a:chExt cx="0" cy="0"/>
+        </a:xfrm>
+      </p:grpSpPr>
+      <p:grpSp>
+        <p:nvGrpSpPr>
+          <p:cNvPr id="16" name="Group 15">
+            <a:extLst>
+              <a:ext uri="{FF2B5EF4-FFF2-40B4-BE49-F238E27FC236}">
+                <a16:creationId xmlns:a16="http://schemas.microsoft.com/office/drawing/2014/main" id="{33B23DBC-0898-B62C-73B1-A8A73C80F005}"/>
+              </a:ext>
+            </a:extLst>
+          </p:cNvPr>
+          <p:cNvGrpSpPr/>
+          <p:nvPr/>
+        </p:nvGrpSpPr>
+        <p:grpSpPr>
+          <a:xfrm>
+            <a:off x="5806746" y="3854114"/>
+            <a:ext cx="4931158" cy="2229842"/>
+            <a:chOff x="5777047" y="3947245"/>
+            <a:chExt cx="4931158" cy="2229842"/>
+          </a:xfrm>
+        </p:grpSpPr>
+        <mc:AlternateContent xmlns:mc="http://schemas.openxmlformats.org/markup-compatibility/2006">
+          <mc:Choice xmlns:a14="http://schemas.microsoft.com/office/drawing/2010/main" Requires="a14">
+            <p:sp>
+              <p:nvSpPr>
+                <p:cNvPr id="28" name="TextBox 27">
+                  <a:extLst>
+                    <a:ext uri="{FF2B5EF4-FFF2-40B4-BE49-F238E27FC236}">
+                      <a16:creationId xmlns:a16="http://schemas.microsoft.com/office/drawing/2014/main" id="{20FB1572-F825-54D4-267D-A8C8B81605B1}"/>
+                    </a:ext>
+                  </a:extLst>
+                </p:cNvPr>
+                <p:cNvSpPr txBox="1"/>
+                <p:nvPr/>
+              </p:nvSpPr>
+              <p:spPr>
+                <a:xfrm>
+                  <a:off x="5898940" y="4540698"/>
+                  <a:ext cx="4687372" cy="1030282"/>
+                </a:xfrm>
+                <a:prstGeom prst="rect">
+                  <a:avLst/>
+                </a:prstGeom>
+                <a:noFill/>
+              </p:spPr>
+              <p:txBody>
+                <a:bodyPr wrap="none" rtlCol="0">
+                  <a:spAutoFit/>
+                </a:bodyPr>
+                <a:lstStyle/>
+                <a:p>
+                  <a:pPr/>
+                  <a14:m>
+                    <m:oMathPara xmlns:m="http://schemas.openxmlformats.org/officeDocument/2006/math">
+                      <m:oMathParaPr>
+                        <m:jc m:val="centerGroup"/>
+                      </m:oMathParaPr>
+                      <m:oMath xmlns:m="http://schemas.openxmlformats.org/officeDocument/2006/math">
+                        <m:d>
+                          <m:dPr>
+                            <m:ctrlPr>
+                              <a:rPr lang="en-US" sz="5400" b="0" i="1" smtClean="0">
+                                <a:solidFill>
+                                  <a:schemeClr val="tx1"/>
+                                </a:solidFill>
+                                <a:latin typeface="Cambria Math" panose="02040503050406030204" pitchFamily="18" charset="0"/>
+                              </a:rPr>
+                            </m:ctrlPr>
+                          </m:dPr>
+                          <m:e>
+                            <m:r>
+                              <a:rPr lang="en-US" sz="5400" b="0" i="1" smtClean="0">
+                                <a:solidFill>
+                                  <a:srgbClr val="FF0000"/>
+                                </a:solidFill>
+                                <a:latin typeface="Cambria Math" panose="02040503050406030204" pitchFamily="18" charset="0"/>
+                              </a:rPr>
+                              <m:t>𝑝</m:t>
+                            </m:r>
+                            <m:d>
+                              <m:dPr>
+                                <m:ctrlPr>
+                                  <a:rPr lang="en-US" sz="5400" b="0" i="1" smtClean="0">
+                                    <a:solidFill>
+                                      <a:srgbClr val="FF0000"/>
+                                    </a:solidFill>
+                                    <a:latin typeface="Cambria Math" panose="02040503050406030204" pitchFamily="18" charset="0"/>
+                                  </a:rPr>
+                                </m:ctrlPr>
+                              </m:dPr>
+                              <m:e>
+                                <m:sSup>
+                                  <m:sSupPr>
+                                    <m:ctrlPr>
+                                      <a:rPr lang="en-US" sz="5400" b="0" i="1" smtClean="0">
+                                        <a:solidFill>
+                                          <a:srgbClr val="FF0000"/>
+                                        </a:solidFill>
+                                        <a:latin typeface="Cambria Math" panose="02040503050406030204" pitchFamily="18" charset="0"/>
+                                      </a:rPr>
+                                    </m:ctrlPr>
+                                  </m:sSupPr>
+                                  <m:e>
+                                    <m:r>
+                                      <a:rPr lang="en-US" sz="5400" b="0" i="1" smtClean="0">
+                                        <a:solidFill>
+                                          <a:srgbClr val="FF0000"/>
+                                        </a:solidFill>
+                                        <a:latin typeface="Cambria Math" panose="02040503050406030204" pitchFamily="18" charset="0"/>
+                                      </a:rPr>
+                                      <m:t>𝑧</m:t>
+                                    </m:r>
+                                  </m:e>
+                                  <m:sup>
+                                    <m:r>
+                                      <a:rPr lang="en-US" sz="5400" b="0" i="1" smtClean="0">
+                                        <a:solidFill>
+                                          <a:srgbClr val="FF0000"/>
+                                        </a:solidFill>
+                                        <a:latin typeface="Cambria Math" panose="02040503050406030204" pitchFamily="18" charset="0"/>
+                                      </a:rPr>
+                                      <m:t>+</m:t>
+                                    </m:r>
+                                  </m:sup>
+                                </m:sSup>
+                              </m:e>
+                            </m:d>
+                            <m:r>
+                              <a:rPr lang="en-US" sz="5400" b="0" i="1" smtClean="0">
+                                <a:solidFill>
+                                  <a:schemeClr val="tx1"/>
+                                </a:solidFill>
+                                <a:latin typeface="Cambria Math" panose="02040503050406030204" pitchFamily="18" charset="0"/>
+                              </a:rPr>
+                              <m:t>,</m:t>
+                            </m:r>
+                            <m:r>
+                              <a:rPr lang="en-US" sz="5400" i="1" smtClean="0">
+                                <a:solidFill>
+                                  <a:srgbClr val="FFFF00"/>
+                                </a:solidFill>
+                                <a:latin typeface="Cambria Math" panose="02040503050406030204" pitchFamily="18" charset="0"/>
+                              </a:rPr>
+                              <m:t>𝑝</m:t>
+                            </m:r>
+                            <m:d>
+                              <m:dPr>
+                                <m:ctrlPr>
+                                  <a:rPr lang="en-US" sz="5400" i="1">
+                                    <a:solidFill>
+                                      <a:srgbClr val="FFFF00"/>
+                                    </a:solidFill>
+                                    <a:latin typeface="Cambria Math" panose="02040503050406030204" pitchFamily="18" charset="0"/>
+                                  </a:rPr>
+                                </m:ctrlPr>
+                              </m:dPr>
+                              <m:e>
+                                <m:sSup>
+                                  <m:sSupPr>
+                                    <m:ctrlPr>
+                                      <a:rPr lang="en-US" sz="5400" i="1">
+                                        <a:solidFill>
+                                          <a:srgbClr val="FFFF00"/>
+                                        </a:solidFill>
+                                        <a:latin typeface="Cambria Math" panose="02040503050406030204" pitchFamily="18" charset="0"/>
+                                      </a:rPr>
+                                    </m:ctrlPr>
+                                  </m:sSupPr>
+                                  <m:e>
+                                    <m:r>
+                                      <a:rPr lang="en-US" sz="5400" i="1">
+                                        <a:solidFill>
+                                          <a:srgbClr val="FFFF00"/>
+                                        </a:solidFill>
+                                        <a:latin typeface="Cambria Math" panose="02040503050406030204" pitchFamily="18" charset="0"/>
+                                      </a:rPr>
+                                      <m:t>𝑧</m:t>
+                                    </m:r>
+                                  </m:e>
+                                  <m:sup>
+                                    <m:r>
+                                      <a:rPr lang="en-US" sz="5400" b="0" i="1" smtClean="0">
+                                        <a:solidFill>
+                                          <a:srgbClr val="FFFF00"/>
+                                        </a:solidFill>
+                                        <a:latin typeface="Cambria Math" panose="02040503050406030204" pitchFamily="18" charset="0"/>
+                                      </a:rPr>
+                                      <m:t>−</m:t>
+                                    </m:r>
+                                  </m:sup>
+                                </m:sSup>
+                              </m:e>
+                            </m:d>
+                          </m:e>
+                        </m:d>
+                      </m:oMath>
+                    </m:oMathPara>
+                  </a14:m>
+                  <a:endParaRPr lang="en-US" sz="5400" dirty="0">
+                    <a:solidFill>
+                      <a:schemeClr val="tx1"/>
+                    </a:solidFill>
+                  </a:endParaRPr>
+                </a:p>
+              </p:txBody>
+            </p:sp>
+          </mc:Choice>
+          <mc:Fallback>
+            <p:sp>
+              <p:nvSpPr>
+                <p:cNvPr id="28" name="TextBox 27">
+                  <a:extLst>
+                    <a:ext uri="{FF2B5EF4-FFF2-40B4-BE49-F238E27FC236}">
+                      <a16:creationId xmlns:a16="http://schemas.microsoft.com/office/drawing/2014/main" id="{20FB1572-F825-54D4-267D-A8C8B81605B1}"/>
+                    </a:ext>
+                  </a:extLst>
+                </p:cNvPr>
+                <p:cNvSpPr txBox="1">
+                  <a:spLocks noRot="1" noChangeAspect="1" noMove="1" noResize="1" noEditPoints="1" noAdjustHandles="1" noChangeArrowheads="1" noChangeShapeType="1" noTextEdit="1"/>
+                </p:cNvSpPr>
+                <p:nvPr/>
+              </p:nvSpPr>
+              <p:spPr>
+                <a:xfrm>
+                  <a:off x="5898940" y="4540698"/>
+                  <a:ext cx="4687372" cy="1030282"/>
+                </a:xfrm>
+                <a:prstGeom prst="rect">
+                  <a:avLst/>
+                </a:prstGeom>
+                <a:blipFill>
+                  <a:blip r:embed="rId2"/>
+                  <a:stretch>
+                    <a:fillRect/>
+                  </a:stretch>
+                </a:blipFill>
+              </p:spPr>
+              <p:txBody>
+                <a:bodyPr/>
+                <a:lstStyle/>
+                <a:p>
+                  <a:r>
+                    <a:rPr lang="en-US">
+                      <a:noFill/>
+                    </a:rPr>
+                    <a:t> </a:t>
+                  </a:r>
+                </a:p>
+              </p:txBody>
+            </p:sp>
+          </mc:Fallback>
+        </mc:AlternateContent>
+        <mc:AlternateContent xmlns:mc="http://schemas.openxmlformats.org/markup-compatibility/2006">
+          <mc:Choice xmlns:a14="http://schemas.microsoft.com/office/drawing/2010/main" Requires="a14">
+            <p:sp>
+              <p:nvSpPr>
+                <p:cNvPr id="30" name="TextBox 29">
+                  <a:extLst>
+                    <a:ext uri="{FF2B5EF4-FFF2-40B4-BE49-F238E27FC236}">
+                      <a16:creationId xmlns:a16="http://schemas.microsoft.com/office/drawing/2014/main" id="{CD8F5B79-A91F-83EF-EF70-1827C3446A81}"/>
+                    </a:ext>
+                  </a:extLst>
+                </p:cNvPr>
+                <p:cNvSpPr txBox="1"/>
+                <p:nvPr/>
+              </p:nvSpPr>
+              <p:spPr>
+                <a:xfrm>
+                  <a:off x="6450757" y="5592312"/>
+                  <a:ext cx="3583738" cy="584775"/>
+                </a:xfrm>
+                <a:prstGeom prst="rect">
+                  <a:avLst/>
+                </a:prstGeom>
+                <a:noFill/>
+              </p:spPr>
+              <p:txBody>
+                <a:bodyPr wrap="none" rtlCol="0">
+                  <a:spAutoFit/>
+                </a:bodyPr>
+                <a:lstStyle/>
+                <a:p>
+                  <a:pPr/>
+                  <a14:m>
+                    <m:oMathPara xmlns:m="http://schemas.openxmlformats.org/officeDocument/2006/math">
+                      <m:oMathParaPr>
+                        <m:jc m:val="centerGroup"/>
+                      </m:oMathParaPr>
+                      <m:oMath xmlns:m="http://schemas.openxmlformats.org/officeDocument/2006/math">
+                        <m:r>
+                          <a:rPr lang="en-US" sz="3200" i="1" smtClean="0">
+                            <a:latin typeface="Cambria Math" panose="02040503050406030204" pitchFamily="18" charset="0"/>
+                          </a:rPr>
+                          <m:t>𝑝</m:t>
+                        </m:r>
+                        <m:d>
+                          <m:dPr>
+                            <m:ctrlPr>
+                              <a:rPr lang="en-US" sz="3200" i="1">
+                                <a:latin typeface="Cambria Math" panose="02040503050406030204" pitchFamily="18" charset="0"/>
+                              </a:rPr>
+                            </m:ctrlPr>
+                          </m:dPr>
+                          <m:e>
+                            <m:sSup>
+                              <m:sSupPr>
+                                <m:ctrlPr>
+                                  <a:rPr lang="en-US" sz="3200" i="1">
+                                    <a:latin typeface="Cambria Math" panose="02040503050406030204" pitchFamily="18" charset="0"/>
+                                  </a:rPr>
+                                </m:ctrlPr>
+                              </m:sSupPr>
+                              <m:e>
+                                <m:r>
+                                  <a:rPr lang="en-US" sz="3200" i="1">
+                                    <a:latin typeface="Cambria Math" panose="02040503050406030204" pitchFamily="18" charset="0"/>
+                                  </a:rPr>
+                                  <m:t>𝑧</m:t>
+                                </m:r>
+                              </m:e>
+                              <m:sup>
+                                <m:r>
+                                  <a:rPr lang="en-US" sz="3200" i="1">
+                                    <a:latin typeface="Cambria Math" panose="02040503050406030204" pitchFamily="18" charset="0"/>
+                                  </a:rPr>
+                                  <m:t>+</m:t>
+                                </m:r>
+                              </m:sup>
+                            </m:sSup>
+                          </m:e>
+                        </m:d>
+                        <m:r>
+                          <a:rPr lang="en-US" sz="3200" b="0" i="1" smtClean="0">
+                            <a:latin typeface="Cambria Math" panose="02040503050406030204" pitchFamily="18" charset="0"/>
+                          </a:rPr>
+                          <m:t>+</m:t>
+                        </m:r>
+                        <m:r>
+                          <a:rPr lang="en-US" sz="3200" i="1">
+                            <a:latin typeface="Cambria Math" panose="02040503050406030204" pitchFamily="18" charset="0"/>
+                          </a:rPr>
+                          <m:t>𝑝</m:t>
+                        </m:r>
+                        <m:d>
+                          <m:dPr>
+                            <m:ctrlPr>
+                              <a:rPr lang="en-US" sz="3200" i="1">
+                                <a:latin typeface="Cambria Math" panose="02040503050406030204" pitchFamily="18" charset="0"/>
+                              </a:rPr>
+                            </m:ctrlPr>
+                          </m:dPr>
+                          <m:e>
+                            <m:sSup>
+                              <m:sSupPr>
+                                <m:ctrlPr>
+                                  <a:rPr lang="en-US" sz="3200" i="1">
+                                    <a:latin typeface="Cambria Math" panose="02040503050406030204" pitchFamily="18" charset="0"/>
+                                  </a:rPr>
+                                </m:ctrlPr>
+                              </m:sSupPr>
+                              <m:e>
+                                <m:r>
+                                  <a:rPr lang="en-US" sz="3200" i="1">
+                                    <a:latin typeface="Cambria Math" panose="02040503050406030204" pitchFamily="18" charset="0"/>
+                                  </a:rPr>
+                                  <m:t>𝑧</m:t>
+                                </m:r>
+                              </m:e>
+                              <m:sup>
+                                <m:r>
+                                  <a:rPr lang="en-US" sz="3200" i="1">
+                                    <a:latin typeface="Cambria Math" panose="02040503050406030204" pitchFamily="18" charset="0"/>
+                                  </a:rPr>
+                                  <m:t>−</m:t>
+                                </m:r>
+                              </m:sup>
+                            </m:sSup>
+                          </m:e>
+                        </m:d>
+                        <m:r>
+                          <a:rPr lang="en-US" sz="3200" b="0" i="1" smtClean="0">
+                            <a:latin typeface="Cambria Math" panose="02040503050406030204" pitchFamily="18" charset="0"/>
+                          </a:rPr>
+                          <m:t>=1</m:t>
+                        </m:r>
+                      </m:oMath>
+                    </m:oMathPara>
+                  </a14:m>
+                  <a:endParaRPr lang="en-US" sz="3200" dirty="0">
+                    <a:solidFill>
+                      <a:schemeClr val="tx1"/>
+                    </a:solidFill>
+                  </a:endParaRPr>
+                </a:p>
+              </p:txBody>
+            </p:sp>
+          </mc:Choice>
+          <mc:Fallback>
+            <p:sp>
+              <p:nvSpPr>
+                <p:cNvPr id="30" name="TextBox 29">
+                  <a:extLst>
+                    <a:ext uri="{FF2B5EF4-FFF2-40B4-BE49-F238E27FC236}">
+                      <a16:creationId xmlns:a16="http://schemas.microsoft.com/office/drawing/2014/main" id="{CD8F5B79-A91F-83EF-EF70-1827C3446A81}"/>
+                    </a:ext>
+                  </a:extLst>
+                </p:cNvPr>
+                <p:cNvSpPr txBox="1">
+                  <a:spLocks noRot="1" noChangeAspect="1" noMove="1" noResize="1" noEditPoints="1" noAdjustHandles="1" noChangeArrowheads="1" noChangeShapeType="1" noTextEdit="1"/>
+                </p:cNvSpPr>
+                <p:nvPr/>
+              </p:nvSpPr>
+              <p:spPr>
+                <a:xfrm>
+                  <a:off x="6450757" y="5592312"/>
+                  <a:ext cx="3583738" cy="584775"/>
+                </a:xfrm>
+                <a:prstGeom prst="rect">
+                  <a:avLst/>
+                </a:prstGeom>
+                <a:blipFill>
+                  <a:blip r:embed="rId3"/>
+                  <a:stretch>
+                    <a:fillRect/>
+                  </a:stretch>
+                </a:blipFill>
+              </p:spPr>
+              <p:txBody>
+                <a:bodyPr/>
+                <a:lstStyle/>
+                <a:p>
+                  <a:r>
+                    <a:rPr lang="en-US">
+                      <a:noFill/>
+                    </a:rPr>
+                    <a:t> </a:t>
+                  </a:r>
+                </a:p>
+              </p:txBody>
+            </p:sp>
+          </mc:Fallback>
+        </mc:AlternateContent>
+        <p:sp>
+          <p:nvSpPr>
+            <p:cNvPr id="32" name="TextBox 31">
+              <a:extLst>
+                <a:ext uri="{FF2B5EF4-FFF2-40B4-BE49-F238E27FC236}">
+                  <a16:creationId xmlns:a16="http://schemas.microsoft.com/office/drawing/2014/main" id="{ABF31161-4E2D-A7B3-AD62-25A15D460D5A}"/>
+                </a:ext>
+              </a:extLst>
+            </p:cNvPr>
+            <p:cNvSpPr txBox="1"/>
+            <p:nvPr/>
+          </p:nvSpPr>
+          <p:spPr>
+            <a:xfrm>
+              <a:off x="5777047" y="3947245"/>
+              <a:ext cx="4931158" cy="646331"/>
+            </a:xfrm>
+            <a:prstGeom prst="rect">
+              <a:avLst/>
+            </a:prstGeom>
+            <a:noFill/>
+          </p:spPr>
+          <p:txBody>
+            <a:bodyPr wrap="none" rtlCol="0">
+              <a:spAutoFit/>
+            </a:bodyPr>
+            <a:lstStyle/>
+            <a:p>
+              <a:r>
+                <a:rPr lang="en-US" sz="3600" dirty="0"/>
+                <a:t>Quantum state vectors</a:t>
+              </a:r>
+            </a:p>
+          </p:txBody>
+        </p:sp>
+      </p:grpSp>
+      <p:grpSp>
+        <p:nvGrpSpPr>
+          <p:cNvPr id="17" name="Group 16">
+            <a:extLst>
+              <a:ext uri="{FF2B5EF4-FFF2-40B4-BE49-F238E27FC236}">
+                <a16:creationId xmlns:a16="http://schemas.microsoft.com/office/drawing/2014/main" id="{95F14E5C-EC43-64FB-907C-584C78CDCF49}"/>
+              </a:ext>
+            </a:extLst>
+          </p:cNvPr>
+          <p:cNvGrpSpPr/>
+          <p:nvPr/>
+        </p:nvGrpSpPr>
+        <p:grpSpPr>
+          <a:xfrm>
+            <a:off x="6329788" y="1140665"/>
+            <a:ext cx="4812536" cy="2238859"/>
+            <a:chOff x="5754398" y="1182742"/>
+            <a:chExt cx="4812536" cy="2238859"/>
+          </a:xfrm>
+        </p:grpSpPr>
+        <p:sp>
+          <p:nvSpPr>
+            <p:cNvPr id="19" name="TextBox 18">
+              <a:extLst>
+                <a:ext uri="{FF2B5EF4-FFF2-40B4-BE49-F238E27FC236}">
+                  <a16:creationId xmlns:a16="http://schemas.microsoft.com/office/drawing/2014/main" id="{E202CBC6-880B-F0B8-9499-996EE4CFD17B}"/>
+                </a:ext>
+              </a:extLst>
+            </p:cNvPr>
+            <p:cNvSpPr txBox="1"/>
+            <p:nvPr/>
+          </p:nvSpPr>
+          <p:spPr>
+            <a:xfrm>
+              <a:off x="5754398" y="1182742"/>
+              <a:ext cx="4812536" cy="646331"/>
+            </a:xfrm>
+            <a:prstGeom prst="rect">
+              <a:avLst/>
+            </a:prstGeom>
+            <a:noFill/>
+          </p:spPr>
+          <p:txBody>
+            <a:bodyPr wrap="none" rtlCol="0">
+              <a:spAutoFit/>
+            </a:bodyPr>
+            <a:lstStyle/>
+            <a:p>
+              <a:r>
+                <a:rPr lang="en-US" sz="3600" dirty="0"/>
+                <a:t>Physical space vectors</a:t>
+              </a:r>
+            </a:p>
+          </p:txBody>
+        </p:sp>
+        <mc:AlternateContent xmlns:mc="http://schemas.openxmlformats.org/markup-compatibility/2006">
+          <mc:Choice xmlns:a14="http://schemas.microsoft.com/office/drawing/2010/main" Requires="a14">
+            <p:sp>
+              <p:nvSpPr>
+                <p:cNvPr id="25" name="TextBox 24">
+                  <a:extLst>
+                    <a:ext uri="{FF2B5EF4-FFF2-40B4-BE49-F238E27FC236}">
+                      <a16:creationId xmlns:a16="http://schemas.microsoft.com/office/drawing/2014/main" id="{B618F12E-25D3-2323-58C7-C6C3DB5E5973}"/>
+                    </a:ext>
+                  </a:extLst>
+                </p:cNvPr>
+                <p:cNvSpPr txBox="1"/>
+                <p:nvPr/>
+              </p:nvSpPr>
+              <p:spPr>
+                <a:xfrm>
+                  <a:off x="6815843" y="1813712"/>
+                  <a:ext cx="2689646" cy="923330"/>
+                </a:xfrm>
+                <a:prstGeom prst="rect">
+                  <a:avLst/>
+                </a:prstGeom>
+                <a:noFill/>
+              </p:spPr>
+              <p:txBody>
+                <a:bodyPr wrap="none" rtlCol="0">
+                  <a:spAutoFit/>
+                </a:bodyPr>
+                <a:lstStyle/>
+                <a:p>
+                  <a:pPr/>
+                  <a14:m>
+                    <m:oMathPara xmlns:m="http://schemas.openxmlformats.org/officeDocument/2006/math">
+                      <m:oMathParaPr>
+                        <m:jc m:val="centerGroup"/>
+                      </m:oMathParaPr>
+                      <m:oMath xmlns:m="http://schemas.openxmlformats.org/officeDocument/2006/math">
+                        <m:d>
+                          <m:dPr>
+                            <m:ctrlPr>
+                              <a:rPr lang="en-US" sz="5400" b="0" i="1" smtClean="0">
+                                <a:solidFill>
+                                  <a:schemeClr val="tx1"/>
+                                </a:solidFill>
+                                <a:latin typeface="Cambria Math" panose="02040503050406030204" pitchFamily="18" charset="0"/>
+                              </a:rPr>
+                            </m:ctrlPr>
+                          </m:dPr>
+                          <m:e>
+                            <m:sSup>
+                              <m:sSupPr>
+                                <m:ctrlPr>
+                                  <a:rPr lang="en-US" sz="5400" b="0" i="1" smtClean="0">
+                                    <a:solidFill>
+                                      <a:srgbClr val="7030A0"/>
+                                    </a:solidFill>
+                                    <a:latin typeface="Cambria Math" panose="02040503050406030204" pitchFamily="18" charset="0"/>
+                                  </a:rPr>
+                                </m:ctrlPr>
+                              </m:sSupPr>
+                              <m:e>
+                                <m:r>
+                                  <a:rPr lang="en-US" sz="5400" b="0" i="1" smtClean="0">
+                                    <a:solidFill>
+                                      <a:srgbClr val="7030A0"/>
+                                    </a:solidFill>
+                                    <a:latin typeface="Cambria Math" panose="02040503050406030204" pitchFamily="18" charset="0"/>
+                                  </a:rPr>
+                                  <m:t>𝑣</m:t>
+                                </m:r>
+                              </m:e>
+                              <m:sup>
+                                <m:r>
+                                  <a:rPr lang="en-US" sz="5400" b="0" i="1" smtClean="0">
+                                    <a:solidFill>
+                                      <a:srgbClr val="7030A0"/>
+                                    </a:solidFill>
+                                    <a:latin typeface="Cambria Math" panose="02040503050406030204" pitchFamily="18" charset="0"/>
+                                  </a:rPr>
+                                  <m:t>𝑥</m:t>
+                                </m:r>
+                              </m:sup>
+                            </m:sSup>
+                            <m:r>
+                              <a:rPr lang="en-US" sz="5400" b="0" i="1" smtClean="0">
+                                <a:solidFill>
+                                  <a:schemeClr val="tx1"/>
+                                </a:solidFill>
+                                <a:latin typeface="Cambria Math" panose="02040503050406030204" pitchFamily="18" charset="0"/>
+                              </a:rPr>
+                              <m:t>,</m:t>
+                            </m:r>
+                            <m:r>
+                              <a:rPr lang="en-US" sz="5400" b="0" i="1" smtClean="0">
+                                <a:solidFill>
+                                  <a:schemeClr val="tx1"/>
+                                </a:solidFill>
+                                <a:latin typeface="Cambria Math" panose="02040503050406030204" pitchFamily="18" charset="0"/>
+                              </a:rPr>
+                              <m:t> </m:t>
+                            </m:r>
+                            <m:sSup>
+                              <m:sSupPr>
+                                <m:ctrlPr>
+                                  <a:rPr lang="en-US" sz="5400" b="0" i="1" smtClean="0">
+                                    <a:solidFill>
+                                      <a:srgbClr val="00B0F0"/>
+                                    </a:solidFill>
+                                    <a:latin typeface="Cambria Math" panose="02040503050406030204" pitchFamily="18" charset="0"/>
+                                  </a:rPr>
+                                </m:ctrlPr>
+                              </m:sSupPr>
+                              <m:e>
+                                <m:r>
+                                  <a:rPr lang="en-US" sz="5400" b="0" i="1" smtClean="0">
+                                    <a:solidFill>
+                                      <a:srgbClr val="00B0F0"/>
+                                    </a:solidFill>
+                                    <a:latin typeface="Cambria Math" panose="02040503050406030204" pitchFamily="18" charset="0"/>
+                                  </a:rPr>
+                                  <m:t>𝑣</m:t>
+                                </m:r>
+                              </m:e>
+                              <m:sup>
+                                <m:r>
+                                  <a:rPr lang="en-US" sz="5400" b="0" i="1" smtClean="0">
+                                    <a:solidFill>
+                                      <a:srgbClr val="00B0F0"/>
+                                    </a:solidFill>
+                                    <a:latin typeface="Cambria Math" panose="02040503050406030204" pitchFamily="18" charset="0"/>
+                                  </a:rPr>
+                                  <m:t>𝑧</m:t>
+                                </m:r>
+                              </m:sup>
+                            </m:sSup>
+                          </m:e>
+                        </m:d>
+                      </m:oMath>
+                    </m:oMathPara>
+                  </a14:m>
+                  <a:endParaRPr lang="en-US" sz="5400" dirty="0">
+                    <a:solidFill>
+                      <a:schemeClr val="tx1"/>
+                    </a:solidFill>
+                  </a:endParaRPr>
+                </a:p>
+              </p:txBody>
+            </p:sp>
+          </mc:Choice>
+          <mc:Fallback>
+            <p:sp>
+              <p:nvSpPr>
+                <p:cNvPr id="25" name="TextBox 24">
+                  <a:extLst>
+                    <a:ext uri="{FF2B5EF4-FFF2-40B4-BE49-F238E27FC236}">
+                      <a16:creationId xmlns:a16="http://schemas.microsoft.com/office/drawing/2014/main" id="{B618F12E-25D3-2323-58C7-C6C3DB5E5973}"/>
+                    </a:ext>
+                  </a:extLst>
+                </p:cNvPr>
+                <p:cNvSpPr txBox="1">
+                  <a:spLocks noRot="1" noChangeAspect="1" noMove="1" noResize="1" noEditPoints="1" noAdjustHandles="1" noChangeArrowheads="1" noChangeShapeType="1" noTextEdit="1"/>
+                </p:cNvSpPr>
+                <p:nvPr/>
+              </p:nvSpPr>
+              <p:spPr>
+                <a:xfrm>
+                  <a:off x="6815843" y="1813712"/>
+                  <a:ext cx="2689646" cy="923330"/>
+                </a:xfrm>
+                <a:prstGeom prst="rect">
+                  <a:avLst/>
+                </a:prstGeom>
+                <a:blipFill>
+                  <a:blip r:embed="rId4"/>
+                  <a:stretch>
+                    <a:fillRect/>
+                  </a:stretch>
+                </a:blipFill>
+              </p:spPr>
+              <p:txBody>
+                <a:bodyPr/>
+                <a:lstStyle/>
+                <a:p>
+                  <a:r>
+                    <a:rPr lang="en-US">
+                      <a:noFill/>
+                    </a:rPr>
+                    <a:t> </a:t>
+                  </a:r>
+                </a:p>
+              </p:txBody>
+            </p:sp>
+          </mc:Fallback>
+        </mc:AlternateContent>
+        <mc:AlternateContent xmlns:mc="http://schemas.openxmlformats.org/markup-compatibility/2006">
+          <mc:Choice xmlns:a14="http://schemas.microsoft.com/office/drawing/2010/main" Requires="a14">
+            <p:sp>
+              <p:nvSpPr>
+                <p:cNvPr id="26" name="TextBox 25">
+                  <a:extLst>
+                    <a:ext uri="{FF2B5EF4-FFF2-40B4-BE49-F238E27FC236}">
+                      <a16:creationId xmlns:a16="http://schemas.microsoft.com/office/drawing/2014/main" id="{7A71D16F-96DC-1CC1-6444-9C803C2F3224}"/>
+                    </a:ext>
+                  </a:extLst>
+                </p:cNvPr>
+                <p:cNvSpPr txBox="1"/>
+                <p:nvPr/>
+              </p:nvSpPr>
+              <p:spPr>
+                <a:xfrm>
+                  <a:off x="6417304" y="2836826"/>
+                  <a:ext cx="3486724" cy="584775"/>
+                </a:xfrm>
+                <a:prstGeom prst="rect">
+                  <a:avLst/>
+                </a:prstGeom>
+                <a:noFill/>
+              </p:spPr>
+              <p:txBody>
+                <a:bodyPr wrap="none" rtlCol="0">
+                  <a:spAutoFit/>
+                </a:bodyPr>
+                <a:lstStyle/>
+                <a:p>
+                  <a:pPr/>
+                  <a14:m>
+                    <m:oMathPara xmlns:m="http://schemas.openxmlformats.org/officeDocument/2006/math">
+                      <m:oMathParaPr>
+                        <m:jc m:val="centerGroup"/>
+                      </m:oMathParaPr>
+                      <m:oMath xmlns:m="http://schemas.openxmlformats.org/officeDocument/2006/math">
+                        <m:sSup>
+                          <m:sSupPr>
+                            <m:ctrlPr>
+                              <a:rPr lang="en-US" sz="3200" i="1" smtClean="0">
+                                <a:latin typeface="Cambria Math" panose="02040503050406030204" pitchFamily="18" charset="0"/>
+                              </a:rPr>
+                            </m:ctrlPr>
+                          </m:sSupPr>
+                          <m:e>
+                            <m:d>
+                              <m:dPr>
+                                <m:ctrlPr>
+                                  <a:rPr lang="en-US" sz="3200" i="1">
+                                    <a:latin typeface="Cambria Math" panose="02040503050406030204" pitchFamily="18" charset="0"/>
+                                  </a:rPr>
+                                </m:ctrlPr>
+                              </m:dPr>
+                              <m:e>
+                                <m:sSup>
+                                  <m:sSupPr>
+                                    <m:ctrlPr>
+                                      <a:rPr lang="en-US" sz="3200" i="1">
+                                        <a:latin typeface="Cambria Math" panose="02040503050406030204" pitchFamily="18" charset="0"/>
+                                      </a:rPr>
+                                    </m:ctrlPr>
+                                  </m:sSupPr>
+                                  <m:e>
+                                    <m:r>
+                                      <a:rPr lang="en-US" sz="3200" i="1">
+                                        <a:latin typeface="Cambria Math" panose="02040503050406030204" pitchFamily="18" charset="0"/>
+                                      </a:rPr>
+                                      <m:t>𝑣</m:t>
+                                    </m:r>
+                                  </m:e>
+                                  <m:sup>
+                                    <m:r>
+                                      <a:rPr lang="en-US" sz="3200" i="1">
+                                        <a:latin typeface="Cambria Math" panose="02040503050406030204" pitchFamily="18" charset="0"/>
+                                      </a:rPr>
+                                      <m:t>𝑥</m:t>
+                                    </m:r>
+                                  </m:sup>
+                                </m:sSup>
+                              </m:e>
+                            </m:d>
+                          </m:e>
+                          <m:sup>
+                            <m:r>
+                              <a:rPr lang="en-US" sz="3200" i="1">
+                                <a:latin typeface="Cambria Math" panose="02040503050406030204" pitchFamily="18" charset="0"/>
+                              </a:rPr>
+                              <m:t>2</m:t>
+                            </m:r>
+                          </m:sup>
+                        </m:sSup>
+                        <m:r>
+                          <a:rPr lang="en-US" sz="3200" i="1">
+                            <a:latin typeface="Cambria Math" panose="02040503050406030204" pitchFamily="18" charset="0"/>
+                          </a:rPr>
+                          <m:t>+</m:t>
+                        </m:r>
+                        <m:sSup>
+                          <m:sSupPr>
+                            <m:ctrlPr>
+                              <a:rPr lang="en-US" sz="3200" i="1">
+                                <a:latin typeface="Cambria Math" panose="02040503050406030204" pitchFamily="18" charset="0"/>
+                              </a:rPr>
+                            </m:ctrlPr>
+                          </m:sSupPr>
+                          <m:e>
+                            <m:d>
+                              <m:dPr>
+                                <m:ctrlPr>
+                                  <a:rPr lang="en-US" sz="3200" i="1">
+                                    <a:latin typeface="Cambria Math" panose="02040503050406030204" pitchFamily="18" charset="0"/>
+                                  </a:rPr>
+                                </m:ctrlPr>
+                              </m:dPr>
+                              <m:e>
+                                <m:sSup>
+                                  <m:sSupPr>
+                                    <m:ctrlPr>
+                                      <a:rPr lang="en-US" sz="3200" i="1">
+                                        <a:latin typeface="Cambria Math" panose="02040503050406030204" pitchFamily="18" charset="0"/>
+                                      </a:rPr>
+                                    </m:ctrlPr>
+                                  </m:sSupPr>
+                                  <m:e>
+                                    <m:r>
+                                      <a:rPr lang="en-US" sz="3200" i="1">
+                                        <a:latin typeface="Cambria Math" panose="02040503050406030204" pitchFamily="18" charset="0"/>
+                                      </a:rPr>
+                                      <m:t>𝑣</m:t>
+                                    </m:r>
+                                  </m:e>
+                                  <m:sup>
+                                    <m:r>
+                                      <a:rPr lang="en-US" sz="3200" b="0" i="1" smtClean="0">
+                                        <a:latin typeface="Cambria Math" panose="02040503050406030204" pitchFamily="18" charset="0"/>
+                                      </a:rPr>
+                                      <m:t>𝑧</m:t>
+                                    </m:r>
+                                  </m:sup>
+                                </m:sSup>
+                              </m:e>
+                            </m:d>
+                          </m:e>
+                          <m:sup>
+                            <m:r>
+                              <a:rPr lang="en-US" sz="3200" i="1">
+                                <a:latin typeface="Cambria Math" panose="02040503050406030204" pitchFamily="18" charset="0"/>
+                              </a:rPr>
+                              <m:t>2</m:t>
+                            </m:r>
+                          </m:sup>
+                        </m:sSup>
+                        <m:r>
+                          <a:rPr lang="en-US" sz="3200" b="0" i="1" smtClean="0">
+                            <a:latin typeface="Cambria Math" panose="02040503050406030204" pitchFamily="18" charset="0"/>
+                          </a:rPr>
+                          <m:t>=1</m:t>
+                        </m:r>
+                      </m:oMath>
+                    </m:oMathPara>
+                  </a14:m>
+                  <a:endParaRPr lang="en-US" sz="3200" dirty="0">
+                    <a:solidFill>
+                      <a:schemeClr val="tx1"/>
+                    </a:solidFill>
+                  </a:endParaRPr>
+                </a:p>
+              </p:txBody>
+            </p:sp>
+          </mc:Choice>
+          <mc:Fallback>
+            <p:sp>
+              <p:nvSpPr>
+                <p:cNvPr id="26" name="TextBox 25">
+                  <a:extLst>
+                    <a:ext uri="{FF2B5EF4-FFF2-40B4-BE49-F238E27FC236}">
+                      <a16:creationId xmlns:a16="http://schemas.microsoft.com/office/drawing/2014/main" id="{7A71D16F-96DC-1CC1-6444-9C803C2F3224}"/>
+                    </a:ext>
+                  </a:extLst>
+                </p:cNvPr>
+                <p:cNvSpPr txBox="1">
+                  <a:spLocks noRot="1" noChangeAspect="1" noMove="1" noResize="1" noEditPoints="1" noAdjustHandles="1" noChangeArrowheads="1" noChangeShapeType="1" noTextEdit="1"/>
+                </p:cNvSpPr>
+                <p:nvPr/>
+              </p:nvSpPr>
+              <p:spPr>
+                <a:xfrm>
+                  <a:off x="6417304" y="2836826"/>
+                  <a:ext cx="3486724" cy="584775"/>
+                </a:xfrm>
+                <a:prstGeom prst="rect">
+                  <a:avLst/>
+                </a:prstGeom>
+                <a:blipFill>
+                  <a:blip r:embed="rId5"/>
+                  <a:stretch>
+                    <a:fillRect/>
+                  </a:stretch>
+                </a:blipFill>
+              </p:spPr>
+              <p:txBody>
+                <a:bodyPr/>
+                <a:lstStyle/>
+                <a:p>
+                  <a:r>
+                    <a:rPr lang="en-US">
+                      <a:noFill/>
+                    </a:rPr>
+                    <a:t> </a:t>
+                  </a:r>
+                </a:p>
+              </p:txBody>
+            </p:sp>
+          </mc:Fallback>
+        </mc:AlternateContent>
+      </p:grpSp>
+      <p:grpSp>
+        <p:nvGrpSpPr>
+          <p:cNvPr id="2" name="Group 1">
+            <a:extLst>
+              <a:ext uri="{FF2B5EF4-FFF2-40B4-BE49-F238E27FC236}">
+                <a16:creationId xmlns:a16="http://schemas.microsoft.com/office/drawing/2014/main" id="{306DEF9A-2D62-734F-67DD-8C52E1768B59}"/>
+              </a:ext>
+            </a:extLst>
+          </p:cNvPr>
+          <p:cNvGrpSpPr/>
+          <p:nvPr/>
+        </p:nvGrpSpPr>
+        <p:grpSpPr>
+          <a:xfrm>
+            <a:off x="1095410" y="1175786"/>
+            <a:ext cx="3577708" cy="4608064"/>
+            <a:chOff x="1153584" y="233822"/>
+            <a:chExt cx="3577708" cy="4608064"/>
+          </a:xfrm>
+        </p:grpSpPr>
+        <p:sp>
+          <p:nvSpPr>
+            <p:cNvPr id="35" name="Arc 34">
+              <a:extLst>
+                <a:ext uri="{FF2B5EF4-FFF2-40B4-BE49-F238E27FC236}">
+                  <a16:creationId xmlns:a16="http://schemas.microsoft.com/office/drawing/2014/main" id="{72F3C812-50BA-ACAF-7B2F-38E044D86AA0}"/>
+                </a:ext>
+              </a:extLst>
+            </p:cNvPr>
+            <p:cNvSpPr/>
+            <p:nvPr/>
+          </p:nvSpPr>
+          <p:spPr>
+            <a:xfrm>
+              <a:off x="2598212" y="2085993"/>
+              <a:ext cx="697242" cy="553554"/>
+            </a:xfrm>
+            <a:prstGeom prst="arc">
+              <a:avLst>
+                <a:gd name="adj1" fmla="val 16200000"/>
+                <a:gd name="adj2" fmla="val 20129490"/>
+              </a:avLst>
+            </a:prstGeom>
+          </p:spPr>
+          <p:style>
+            <a:lnRef idx="1">
+              <a:schemeClr val="accent1"/>
+            </a:lnRef>
+            <a:fillRef idx="0">
+              <a:schemeClr val="accent1"/>
+            </a:fillRef>
+            <a:effectRef idx="0">
+              <a:schemeClr val="accent1"/>
+            </a:effectRef>
+            <a:fontRef idx="minor">
+              <a:schemeClr val="tx1"/>
+            </a:fontRef>
+          </p:style>
+          <p:txBody>
+            <a:bodyPr rtlCol="0" anchor="ctr"/>
+            <a:lstStyle/>
+            <a:p>
+              <a:pPr algn="ctr"/>
+              <a:endParaRPr lang="en-US"/>
+            </a:p>
+          </p:txBody>
+        </p:sp>
+        <p:grpSp>
+          <p:nvGrpSpPr>
+            <p:cNvPr id="36" name="Group 35">
+              <a:extLst>
+                <a:ext uri="{FF2B5EF4-FFF2-40B4-BE49-F238E27FC236}">
+                  <a16:creationId xmlns:a16="http://schemas.microsoft.com/office/drawing/2014/main" id="{30E87756-A213-279A-7762-C5C7690D8B9A}"/>
+                </a:ext>
+              </a:extLst>
+            </p:cNvPr>
+            <p:cNvGrpSpPr/>
+            <p:nvPr/>
+          </p:nvGrpSpPr>
+          <p:grpSpPr>
+            <a:xfrm>
+              <a:off x="1153584" y="740244"/>
+              <a:ext cx="3577708" cy="3577703"/>
+              <a:chOff x="2012104" y="948792"/>
+              <a:chExt cx="3577708" cy="3577703"/>
+            </a:xfrm>
+          </p:grpSpPr>
+          <p:cxnSp>
+            <p:nvCxnSpPr>
+              <p:cNvPr id="39" name="Straight Connector 38">
+                <a:extLst>
+                  <a:ext uri="{FF2B5EF4-FFF2-40B4-BE49-F238E27FC236}">
+                    <a16:creationId xmlns:a16="http://schemas.microsoft.com/office/drawing/2014/main" id="{A224C640-64EC-9E34-4926-5A6A36FFFDA8}"/>
+                  </a:ext>
+                </a:extLst>
+              </p:cNvPr>
+              <p:cNvCxnSpPr>
+                <a:cxnSpLocks/>
+                <a:stCxn id="47" idx="2"/>
+              </p:cNvCxnSpPr>
+              <p:nvPr/>
+            </p:nvCxnSpPr>
+            <p:spPr>
+              <a:xfrm>
+                <a:off x="2012104" y="2737644"/>
+                <a:ext cx="3577706" cy="7622"/>
+              </a:xfrm>
+              <a:prstGeom prst="line">
+                <a:avLst/>
+              </a:prstGeom>
+              <a:ln/>
+            </p:spPr>
+            <p:style>
+              <a:lnRef idx="1">
+                <a:schemeClr val="accent1"/>
+              </a:lnRef>
+              <a:fillRef idx="0">
+                <a:schemeClr val="accent1"/>
+              </a:fillRef>
+              <a:effectRef idx="0">
+                <a:schemeClr val="accent1"/>
+              </a:effectRef>
+              <a:fontRef idx="minor">
+                <a:schemeClr val="tx1"/>
+              </a:fontRef>
+            </p:style>
+          </p:cxnSp>
+          <p:cxnSp>
+            <p:nvCxnSpPr>
+              <p:cNvPr id="40" name="Straight Connector 39">
+                <a:extLst>
+                  <a:ext uri="{FF2B5EF4-FFF2-40B4-BE49-F238E27FC236}">
+                    <a16:creationId xmlns:a16="http://schemas.microsoft.com/office/drawing/2014/main" id="{11BED6B2-6F8D-9B3D-190C-B7AE323E56B3}"/>
+                  </a:ext>
+                </a:extLst>
+              </p:cNvPr>
+              <p:cNvCxnSpPr>
+                <a:cxnSpLocks/>
+                <a:stCxn id="47" idx="0"/>
+                <a:endCxn id="47" idx="4"/>
+              </p:cNvCxnSpPr>
+              <p:nvPr/>
+            </p:nvCxnSpPr>
+            <p:spPr>
+              <a:xfrm>
+                <a:off x="3800958" y="948792"/>
+                <a:ext cx="0" cy="3577703"/>
+              </a:xfrm>
+              <a:prstGeom prst="line">
+                <a:avLst/>
+              </a:prstGeom>
+              <a:ln/>
+            </p:spPr>
+            <p:style>
+              <a:lnRef idx="1">
+                <a:schemeClr val="accent1"/>
+              </a:lnRef>
+              <a:fillRef idx="0">
+                <a:schemeClr val="accent1"/>
+              </a:fillRef>
+              <a:effectRef idx="0">
+                <a:schemeClr val="accent1"/>
+              </a:effectRef>
+              <a:fontRef idx="minor">
+                <a:schemeClr val="tx1"/>
+              </a:fontRef>
+            </p:style>
+          </p:cxnSp>
+          <p:grpSp>
+            <p:nvGrpSpPr>
+              <p:cNvPr id="41" name="Group 40">
+                <a:extLst>
+                  <a:ext uri="{FF2B5EF4-FFF2-40B4-BE49-F238E27FC236}">
+                    <a16:creationId xmlns:a16="http://schemas.microsoft.com/office/drawing/2014/main" id="{7545E1EE-E0DE-A905-32DD-DC39D7B73053}"/>
+                  </a:ext>
+                </a:extLst>
+              </p:cNvPr>
+              <p:cNvGrpSpPr/>
+              <p:nvPr/>
+            </p:nvGrpSpPr>
+            <p:grpSpPr>
+              <a:xfrm>
+                <a:off x="2012104" y="948792"/>
+                <a:ext cx="3577708" cy="3577703"/>
+                <a:chOff x="934944" y="1636949"/>
+                <a:chExt cx="2674273" cy="2674270"/>
+              </a:xfrm>
+            </p:grpSpPr>
+            <p:grpSp>
+              <p:nvGrpSpPr>
+                <p:cNvPr id="42" name="Group 41">
+                  <a:extLst>
+                    <a:ext uri="{FF2B5EF4-FFF2-40B4-BE49-F238E27FC236}">
+                      <a16:creationId xmlns:a16="http://schemas.microsoft.com/office/drawing/2014/main" id="{F71BB623-DCCC-9D8F-CEC5-9C5B0EEBD2D2}"/>
+                    </a:ext>
+                  </a:extLst>
+                </p:cNvPr>
+                <p:cNvGrpSpPr/>
+                <p:nvPr/>
+              </p:nvGrpSpPr>
+              <p:grpSpPr>
+                <a:xfrm>
+                  <a:off x="934944" y="1636949"/>
+                  <a:ext cx="2674273" cy="2674270"/>
+                  <a:chOff x="2521889" y="2808131"/>
+                  <a:chExt cx="1916265" cy="1916264"/>
+                </a:xfrm>
+              </p:grpSpPr>
+              <p:sp>
+                <p:nvSpPr>
+                  <p:cNvPr id="45" name="Oval 44">
+                    <a:extLst>
+                      <a:ext uri="{FF2B5EF4-FFF2-40B4-BE49-F238E27FC236}">
+                        <a16:creationId xmlns:a16="http://schemas.microsoft.com/office/drawing/2014/main" id="{DD1E980A-366D-7CE0-AE8F-3D91404D4D9E}"/>
+                      </a:ext>
+                    </a:extLst>
+                  </p:cNvPr>
+                  <p:cNvSpPr/>
+                  <p:nvPr/>
+                </p:nvSpPr>
+                <p:spPr>
+                  <a:xfrm>
+                    <a:off x="2521889" y="2808131"/>
+                    <a:ext cx="1916264" cy="1916264"/>
+                  </a:xfrm>
+                  <a:prstGeom prst="ellipse">
+                    <a:avLst/>
+                  </a:prstGeom>
+                  <a:ln w="12700">
+                    <a:solidFill>
+                      <a:schemeClr val="tx1"/>
+                    </a:solidFill>
+                  </a:ln>
+                </p:spPr>
+                <p:style>
+                  <a:lnRef idx="1">
+                    <a:schemeClr val="accent1"/>
+                  </a:lnRef>
+                  <a:fillRef idx="0">
+                    <a:schemeClr val="accent1"/>
+                  </a:fillRef>
+                  <a:effectRef idx="0">
+                    <a:schemeClr val="accent1"/>
+                  </a:effectRef>
+                  <a:fontRef idx="minor">
+                    <a:schemeClr val="tx1"/>
+                  </a:fontRef>
+                </p:style>
+                <p:txBody>
+                  <a:bodyPr rtlCol="0" anchor="ctr"/>
+                  <a:lstStyle/>
+                  <a:p>
+                    <a:pPr algn="ctr"/>
+                    <a:endParaRPr lang="en-US"/>
+                  </a:p>
+                </p:txBody>
+              </p:sp>
+              <p:sp>
+                <p:nvSpPr>
+                  <p:cNvPr id="46" name="Oval 31">
+                    <a:extLst>
+                      <a:ext uri="{FF2B5EF4-FFF2-40B4-BE49-F238E27FC236}">
+                        <a16:creationId xmlns:a16="http://schemas.microsoft.com/office/drawing/2014/main" id="{224EFAD5-179A-82C2-4D06-F39BC81C0B0C}"/>
+                      </a:ext>
+                    </a:extLst>
+                  </p:cNvPr>
+                  <p:cNvSpPr/>
+                  <p:nvPr/>
+                </p:nvSpPr>
+                <p:spPr>
+                  <a:xfrm>
+                    <a:off x="2521889" y="2808132"/>
+                    <a:ext cx="1916264" cy="958132"/>
+                  </a:xfrm>
+                  <a:custGeom>
+                    <a:avLst/>
+                    <a:gdLst>
+                      <a:gd name="connsiteX0" fmla="*/ 0 w 1916264"/>
+                      <a:gd name="connsiteY0" fmla="*/ 958132 h 1916264"/>
+                      <a:gd name="connsiteX1" fmla="*/ 958132 w 1916264"/>
+                      <a:gd name="connsiteY1" fmla="*/ 0 h 1916264"/>
+                      <a:gd name="connsiteX2" fmla="*/ 1916264 w 1916264"/>
+                      <a:gd name="connsiteY2" fmla="*/ 958132 h 1916264"/>
+                      <a:gd name="connsiteX3" fmla="*/ 958132 w 1916264"/>
+                      <a:gd name="connsiteY3" fmla="*/ 1916264 h 1916264"/>
+                      <a:gd name="connsiteX4" fmla="*/ 0 w 1916264"/>
+                      <a:gd name="connsiteY4" fmla="*/ 958132 h 1916264"/>
+                      <a:gd name="connsiteX0" fmla="*/ 958132 w 1916264"/>
+                      <a:gd name="connsiteY0" fmla="*/ 1916264 h 2007704"/>
+                      <a:gd name="connsiteX1" fmla="*/ 0 w 1916264"/>
+                      <a:gd name="connsiteY1" fmla="*/ 958132 h 2007704"/>
+                      <a:gd name="connsiteX2" fmla="*/ 958132 w 1916264"/>
+                      <a:gd name="connsiteY2" fmla="*/ 0 h 2007704"/>
+                      <a:gd name="connsiteX3" fmla="*/ 1916264 w 1916264"/>
+                      <a:gd name="connsiteY3" fmla="*/ 958132 h 2007704"/>
+                      <a:gd name="connsiteX4" fmla="*/ 1049572 w 1916264"/>
+                      <a:gd name="connsiteY4" fmla="*/ 2007704 h 2007704"/>
+                      <a:gd name="connsiteX0" fmla="*/ 958132 w 1916264"/>
+                      <a:gd name="connsiteY0" fmla="*/ 1916264 h 1916264"/>
+                      <a:gd name="connsiteX1" fmla="*/ 0 w 1916264"/>
+                      <a:gd name="connsiteY1" fmla="*/ 958132 h 1916264"/>
+                      <a:gd name="connsiteX2" fmla="*/ 958132 w 1916264"/>
+                      <a:gd name="connsiteY2" fmla="*/ 0 h 1916264"/>
+                      <a:gd name="connsiteX3" fmla="*/ 1916264 w 1916264"/>
+                      <a:gd name="connsiteY3" fmla="*/ 958132 h 1916264"/>
+                      <a:gd name="connsiteX0" fmla="*/ 0 w 1916264"/>
+                      <a:gd name="connsiteY0" fmla="*/ 958132 h 958132"/>
+                      <a:gd name="connsiteX1" fmla="*/ 958132 w 1916264"/>
+                      <a:gd name="connsiteY1" fmla="*/ 0 h 958132"/>
+                      <a:gd name="connsiteX2" fmla="*/ 1916264 w 1916264"/>
+                      <a:gd name="connsiteY2" fmla="*/ 958132 h 958132"/>
+                    </a:gdLst>
+                    <a:ahLst/>
+                    <a:cxnLst>
+                      <a:cxn ang="0">
+                        <a:pos x="connsiteX0" y="connsiteY0"/>
+                      </a:cxn>
+                      <a:cxn ang="0">
+                        <a:pos x="connsiteX1" y="connsiteY1"/>
+                      </a:cxn>
+                      <a:cxn ang="0">
+                        <a:pos x="connsiteX2" y="connsiteY2"/>
+                      </a:cxn>
+                    </a:cxnLst>
+                    <a:rect l="l" t="t" r="r" b="b"/>
+                    <a:pathLst>
+                      <a:path w="1916264" h="958132">
+                        <a:moveTo>
+                          <a:pt x="0" y="958132"/>
+                        </a:moveTo>
+                        <a:cubicBezTo>
+                          <a:pt x="0" y="428970"/>
+                          <a:pt x="428970" y="0"/>
+                          <a:pt x="958132" y="0"/>
+                        </a:cubicBezTo>
+                        <a:cubicBezTo>
+                          <a:pt x="1487294" y="0"/>
+                          <a:pt x="1916264" y="428970"/>
+                          <a:pt x="1916264" y="958132"/>
+                        </a:cubicBezTo>
+                      </a:path>
+                    </a:pathLst>
+                  </a:custGeom>
+                  <a:noFill/>
+                  <a:ln w="28575">
+                    <a:solidFill>
+                      <a:schemeClr val="accent1"/>
+                    </a:solidFill>
+                  </a:ln>
+                </p:spPr>
+                <p:style>
+                  <a:lnRef idx="2">
+                    <a:schemeClr val="accent1">
+                      <a:shade val="15000"/>
+                    </a:schemeClr>
+                  </a:lnRef>
+                  <a:fillRef idx="1">
+                    <a:schemeClr val="accent1"/>
+                  </a:fillRef>
+                  <a:effectRef idx="0">
+                    <a:schemeClr val="accent1"/>
+                  </a:effectRef>
+                  <a:fontRef idx="minor">
+                    <a:schemeClr val="lt1"/>
+                  </a:fontRef>
+                </p:style>
+                <p:txBody>
+                  <a:bodyPr rtlCol="0" anchor="ctr"/>
+                  <a:lstStyle/>
+                  <a:p>
+                    <a:pPr algn="ctr"/>
+                    <a:endParaRPr lang="en-US"/>
+                  </a:p>
+                </p:txBody>
+              </p:sp>
+              <p:sp>
+                <p:nvSpPr>
+                  <p:cNvPr id="47" name="Oval 46">
+                    <a:extLst>
+                      <a:ext uri="{FF2B5EF4-FFF2-40B4-BE49-F238E27FC236}">
+                        <a16:creationId xmlns:a16="http://schemas.microsoft.com/office/drawing/2014/main" id="{78AA8024-7036-0AA6-7507-E18DC1F8545A}"/>
+                      </a:ext>
+                    </a:extLst>
+                  </p:cNvPr>
+                  <p:cNvSpPr/>
+                  <p:nvPr/>
+                </p:nvSpPr>
+                <p:spPr>
+                  <a:xfrm>
+                    <a:off x="2521889" y="2808131"/>
+                    <a:ext cx="1916265" cy="1916264"/>
+                  </a:xfrm>
+                  <a:prstGeom prst="ellipse">
+                    <a:avLst/>
+                  </a:prstGeom>
+                  <a:noFill/>
+                  <a:ln w="28575">
+                    <a:solidFill>
+                      <a:schemeClr val="accent1"/>
+                    </a:solidFill>
+                  </a:ln>
+                </p:spPr>
+                <p:style>
+                  <a:lnRef idx="2">
+                    <a:schemeClr val="accent1">
+                      <a:shade val="15000"/>
+                    </a:schemeClr>
+                  </a:lnRef>
+                  <a:fillRef idx="1">
+                    <a:schemeClr val="accent1"/>
+                  </a:fillRef>
+                  <a:effectRef idx="0">
+                    <a:schemeClr val="accent1"/>
+                  </a:effectRef>
+                  <a:fontRef idx="minor">
+                    <a:schemeClr val="lt1"/>
+                  </a:fontRef>
+                </p:style>
+                <p:txBody>
+                  <a:bodyPr rtlCol="0" anchor="ctr"/>
+                  <a:lstStyle/>
+                  <a:p>
+                    <a:pPr algn="ctr"/>
+                    <a:endParaRPr lang="en-US">
+                      <a:solidFill>
+                        <a:schemeClr val="lt1"/>
+                      </a:solidFill>
+                    </a:endParaRPr>
+                  </a:p>
+                </p:txBody>
+              </p:sp>
+            </p:grpSp>
+            <p:cxnSp>
+              <p:nvCxnSpPr>
+                <p:cNvPr id="43" name="Straight Arrow Connector 42">
+                  <a:extLst>
+                    <a:ext uri="{FF2B5EF4-FFF2-40B4-BE49-F238E27FC236}">
+                      <a16:creationId xmlns:a16="http://schemas.microsoft.com/office/drawing/2014/main" id="{8B139303-17A3-A2B8-8345-6D018F62C370}"/>
+                    </a:ext>
+                  </a:extLst>
+                </p:cNvPr>
+                <p:cNvCxnSpPr>
+                  <a:cxnSpLocks/>
+                  <a:endCxn id="47" idx="7"/>
+                </p:cNvCxnSpPr>
+                <p:nvPr/>
+              </p:nvCxnSpPr>
+              <p:spPr>
+                <a:xfrm flipV="1">
+                  <a:off x="2272076" y="2028586"/>
+                  <a:ext cx="945503" cy="945496"/>
+                </a:xfrm>
+                <a:prstGeom prst="straightConnector1">
+                  <a:avLst/>
+                </a:prstGeom>
+                <a:ln w="28575">
+                  <a:solidFill>
+                    <a:schemeClr val="tx1"/>
+                  </a:solidFill>
+                  <a:tailEnd type="triangle" w="lg" len="lg"/>
+                </a:ln>
+              </p:spPr>
+              <p:style>
+                <a:lnRef idx="1">
+                  <a:schemeClr val="accent1"/>
+                </a:lnRef>
+                <a:fillRef idx="0">
+                  <a:schemeClr val="accent1"/>
+                </a:fillRef>
+                <a:effectRef idx="0">
+                  <a:schemeClr val="accent1"/>
+                </a:effectRef>
+                <a:fontRef idx="minor">
+                  <a:schemeClr val="tx1"/>
+                </a:fontRef>
+              </p:style>
+            </p:cxnSp>
+          </p:grpSp>
+        </p:grpSp>
+        <mc:AlternateContent xmlns:mc="http://schemas.openxmlformats.org/markup-compatibility/2006">
+          <mc:Choice xmlns:a14="http://schemas.microsoft.com/office/drawing/2010/main" Requires="a14">
+            <p:sp>
+              <p:nvSpPr>
+                <p:cNvPr id="51" name="TextBox 50">
+                  <a:extLst>
+                    <a:ext uri="{FF2B5EF4-FFF2-40B4-BE49-F238E27FC236}">
+                      <a16:creationId xmlns:a16="http://schemas.microsoft.com/office/drawing/2014/main" id="{D43BE4D5-0DB2-D8BD-4AB0-75A4A60B97CE}"/>
+                    </a:ext>
+                  </a:extLst>
+                </p:cNvPr>
+                <p:cNvSpPr txBox="1"/>
+                <p:nvPr/>
+              </p:nvSpPr>
+              <p:spPr>
+                <a:xfrm>
+                  <a:off x="2920848" y="1799377"/>
+                  <a:ext cx="500535" cy="494101"/>
+                </a:xfrm>
+                <a:prstGeom prst="rect">
+                  <a:avLst/>
+                </a:prstGeom>
+                <a:noFill/>
+              </p:spPr>
+              <p:txBody>
+                <a:bodyPr wrap="none" rtlCol="0">
+                  <a:spAutoFit/>
+                </a:bodyPr>
+                <a:lstStyle/>
+                <a:p>
+                  <a:pPr/>
+                  <a14:m>
+                    <m:oMathPara xmlns:m="http://schemas.openxmlformats.org/officeDocument/2006/math">
+                      <m:oMathParaPr>
+                        <m:jc m:val="centerGroup"/>
+                      </m:oMathParaPr>
+                      <m:oMath xmlns:m="http://schemas.openxmlformats.org/officeDocument/2006/math">
+                        <m:r>
+                          <a:rPr lang="en-US" b="0" i="1" smtClean="0">
+                            <a:latin typeface="Cambria Math" panose="02040503050406030204" pitchFamily="18" charset="0"/>
+                          </a:rPr>
+                          <m:t>𝜃</m:t>
+                        </m:r>
+                      </m:oMath>
+                    </m:oMathPara>
+                  </a14:m>
+                  <a:endParaRPr lang="en-US" dirty="0"/>
+                </a:p>
+              </p:txBody>
+            </p:sp>
+          </mc:Choice>
+          <mc:Fallback>
+            <p:sp>
+              <p:nvSpPr>
+                <p:cNvPr id="51" name="TextBox 50">
+                  <a:extLst>
+                    <a:ext uri="{FF2B5EF4-FFF2-40B4-BE49-F238E27FC236}">
+                      <a16:creationId xmlns:a16="http://schemas.microsoft.com/office/drawing/2014/main" id="{D43BE4D5-0DB2-D8BD-4AB0-75A4A60B97CE}"/>
+                    </a:ext>
+                  </a:extLst>
+                </p:cNvPr>
+                <p:cNvSpPr txBox="1">
+                  <a:spLocks noRot="1" noChangeAspect="1" noMove="1" noResize="1" noEditPoints="1" noAdjustHandles="1" noChangeArrowheads="1" noChangeShapeType="1" noTextEdit="1"/>
+                </p:cNvSpPr>
+                <p:nvPr/>
+              </p:nvSpPr>
+              <p:spPr>
+                <a:xfrm>
+                  <a:off x="2920848" y="1799377"/>
+                  <a:ext cx="500535" cy="494101"/>
+                </a:xfrm>
+                <a:prstGeom prst="rect">
+                  <a:avLst/>
+                </a:prstGeom>
+                <a:blipFill>
+                  <a:blip r:embed="rId6"/>
+                  <a:stretch>
+                    <a:fillRect/>
+                  </a:stretch>
+                </a:blipFill>
+              </p:spPr>
+              <p:txBody>
+                <a:bodyPr/>
+                <a:lstStyle/>
+                <a:p>
+                  <a:r>
+                    <a:rPr lang="en-US">
+                      <a:noFill/>
+                    </a:rPr>
+                    <a:t> </a:t>
+                  </a:r>
+                </a:p>
+              </p:txBody>
+            </p:sp>
+          </mc:Fallback>
+        </mc:AlternateContent>
+        <mc:AlternateContent xmlns:mc="http://schemas.openxmlformats.org/markup-compatibility/2006">
+          <mc:Choice xmlns:a14="http://schemas.microsoft.com/office/drawing/2010/main" Requires="a14">
+            <p:sp>
+              <p:nvSpPr>
+                <p:cNvPr id="52" name="TextBox 51">
+                  <a:extLst>
+                    <a:ext uri="{FF2B5EF4-FFF2-40B4-BE49-F238E27FC236}">
+                      <a16:creationId xmlns:a16="http://schemas.microsoft.com/office/drawing/2014/main" id="{C1539CB9-6B3B-811D-DBAE-1BE1D098F5A5}"/>
+                    </a:ext>
+                  </a:extLst>
+                </p:cNvPr>
+                <p:cNvSpPr txBox="1"/>
+                <p:nvPr/>
+              </p:nvSpPr>
+              <p:spPr>
+                <a:xfrm>
+                  <a:off x="2541264" y="233822"/>
+                  <a:ext cx="802336" cy="461665"/>
+                </a:xfrm>
+                <a:prstGeom prst="rect">
+                  <a:avLst/>
+                </a:prstGeom>
+                <a:noFill/>
+              </p:spPr>
+              <p:txBody>
+                <a:bodyPr wrap="none" rtlCol="0">
+                  <a:spAutoFit/>
+                </a:bodyPr>
+                <a:lstStyle/>
+                <a:p>
+                  <a:pPr/>
+                  <a14:m>
+                    <m:oMathPara xmlns:m="http://schemas.openxmlformats.org/officeDocument/2006/math">
+                      <m:oMathParaPr>
+                        <m:jc m:val="centerGroup"/>
+                      </m:oMathParaPr>
+                      <m:oMath xmlns:m="http://schemas.openxmlformats.org/officeDocument/2006/math">
+                        <m:r>
+                          <a:rPr lang="en-US" sz="2400" i="1" dirty="0">
+                            <a:latin typeface="Cambria Math" panose="02040503050406030204" pitchFamily="18" charset="0"/>
+                          </a:rPr>
+                          <m:t>|</m:t>
+                        </m:r>
+                        <m:sSup>
+                          <m:sSupPr>
+                            <m:ctrlPr>
+                              <a:rPr lang="en-US" sz="2400" i="1" dirty="0">
+                                <a:latin typeface="Cambria Math" panose="02040503050406030204" pitchFamily="18" charset="0"/>
+                              </a:rPr>
+                            </m:ctrlPr>
+                          </m:sSupPr>
+                          <m:e>
+                            <m:r>
+                              <a:rPr lang="en-US" sz="2400" i="1" dirty="0">
+                                <a:latin typeface="Cambria Math" panose="02040503050406030204" pitchFamily="18" charset="0"/>
+                              </a:rPr>
+                              <m:t>𝑧</m:t>
+                            </m:r>
+                          </m:e>
+                          <m:sup>
+                            <m:r>
+                              <a:rPr lang="en-US" sz="2400" i="1" dirty="0">
+                                <a:latin typeface="Cambria Math" panose="02040503050406030204" pitchFamily="18" charset="0"/>
+                              </a:rPr>
+                              <m:t>+</m:t>
+                            </m:r>
+                          </m:sup>
+                        </m:sSup>
+                        <m:r>
+                          <a:rPr lang="en-US" sz="2400" i="1" dirty="0">
+                            <a:latin typeface="Cambria Math" panose="02040503050406030204" pitchFamily="18" charset="0"/>
+                          </a:rPr>
+                          <m:t>⟩</m:t>
+                        </m:r>
+                      </m:oMath>
+                    </m:oMathPara>
+                  </a14:m>
+                  <a:endParaRPr lang="en-US" sz="2400" dirty="0"/>
+                </a:p>
+              </p:txBody>
+            </p:sp>
+          </mc:Choice>
+          <mc:Fallback>
+            <p:sp>
+              <p:nvSpPr>
+                <p:cNvPr id="52" name="TextBox 51">
+                  <a:extLst>
+                    <a:ext uri="{FF2B5EF4-FFF2-40B4-BE49-F238E27FC236}">
+                      <a16:creationId xmlns:a16="http://schemas.microsoft.com/office/drawing/2014/main" id="{C1539CB9-6B3B-811D-DBAE-1BE1D098F5A5}"/>
+                    </a:ext>
+                  </a:extLst>
+                </p:cNvPr>
+                <p:cNvSpPr txBox="1">
+                  <a:spLocks noRot="1" noChangeAspect="1" noMove="1" noResize="1" noEditPoints="1" noAdjustHandles="1" noChangeArrowheads="1" noChangeShapeType="1" noTextEdit="1"/>
+                </p:cNvSpPr>
+                <p:nvPr/>
+              </p:nvSpPr>
+              <p:spPr>
+                <a:xfrm>
+                  <a:off x="2541264" y="233822"/>
+                  <a:ext cx="802336" cy="461665"/>
+                </a:xfrm>
+                <a:prstGeom prst="rect">
+                  <a:avLst/>
+                </a:prstGeom>
+                <a:blipFill>
+                  <a:blip r:embed="rId7"/>
+                  <a:stretch>
+                    <a:fillRect l="-1515" r="-2273" b="-18421"/>
+                  </a:stretch>
+                </a:blipFill>
+              </p:spPr>
+              <p:txBody>
+                <a:bodyPr/>
+                <a:lstStyle/>
+                <a:p>
+                  <a:r>
+                    <a:rPr lang="en-US">
+                      <a:noFill/>
+                    </a:rPr>
+                    <a:t> </a:t>
+                  </a:r>
+                </a:p>
+              </p:txBody>
+            </p:sp>
+          </mc:Fallback>
+        </mc:AlternateContent>
+        <mc:AlternateContent xmlns:mc="http://schemas.openxmlformats.org/markup-compatibility/2006">
+          <mc:Choice xmlns:a14="http://schemas.microsoft.com/office/drawing/2010/main" Requires="a14">
+            <p:sp>
+              <p:nvSpPr>
+                <p:cNvPr id="53" name="TextBox 52">
+                  <a:extLst>
+                    <a:ext uri="{FF2B5EF4-FFF2-40B4-BE49-F238E27FC236}">
+                      <a16:creationId xmlns:a16="http://schemas.microsoft.com/office/drawing/2014/main" id="{BE9ADAC2-7AC3-AF72-4EAD-CCCCD6824854}"/>
+                    </a:ext>
+                  </a:extLst>
+                </p:cNvPr>
+                <p:cNvSpPr txBox="1"/>
+                <p:nvPr/>
+              </p:nvSpPr>
+              <p:spPr>
+                <a:xfrm>
+                  <a:off x="2541264" y="4380221"/>
+                  <a:ext cx="802336" cy="461665"/>
+                </a:xfrm>
+                <a:prstGeom prst="rect">
+                  <a:avLst/>
+                </a:prstGeom>
+                <a:noFill/>
+              </p:spPr>
+              <p:txBody>
+                <a:bodyPr wrap="none" rtlCol="0">
+                  <a:spAutoFit/>
+                </a:bodyPr>
+                <a:lstStyle/>
+                <a:p>
+                  <a:pPr/>
+                  <a14:m>
+                    <m:oMathPara xmlns:m="http://schemas.openxmlformats.org/officeDocument/2006/math">
+                      <m:oMathParaPr>
+                        <m:jc m:val="centerGroup"/>
+                      </m:oMathParaPr>
+                      <m:oMath xmlns:m="http://schemas.openxmlformats.org/officeDocument/2006/math">
+                        <m:r>
+                          <a:rPr lang="en-US" sz="2400" i="1" dirty="0">
+                            <a:latin typeface="Cambria Math" panose="02040503050406030204" pitchFamily="18" charset="0"/>
+                          </a:rPr>
+                          <m:t>|</m:t>
+                        </m:r>
+                        <m:sSup>
+                          <m:sSupPr>
+                            <m:ctrlPr>
+                              <a:rPr lang="en-US" sz="2400" i="1" dirty="0">
+                                <a:latin typeface="Cambria Math" panose="02040503050406030204" pitchFamily="18" charset="0"/>
+                              </a:rPr>
+                            </m:ctrlPr>
+                          </m:sSupPr>
+                          <m:e>
+                            <m:r>
+                              <a:rPr lang="en-US" sz="2400" i="1" dirty="0">
+                                <a:latin typeface="Cambria Math" panose="02040503050406030204" pitchFamily="18" charset="0"/>
+                              </a:rPr>
+                              <m:t>𝑧</m:t>
+                            </m:r>
+                          </m:e>
+                          <m:sup>
+                            <m:r>
+                              <a:rPr lang="en-US" sz="2400" i="1" dirty="0">
+                                <a:latin typeface="Cambria Math" panose="02040503050406030204" pitchFamily="18" charset="0"/>
+                              </a:rPr>
+                              <m:t>−</m:t>
+                            </m:r>
+                          </m:sup>
+                        </m:sSup>
+                        <m:r>
+                          <a:rPr lang="en-US" sz="2400" i="1" dirty="0">
+                            <a:latin typeface="Cambria Math" panose="02040503050406030204" pitchFamily="18" charset="0"/>
+                          </a:rPr>
+                          <m:t>⟩</m:t>
+                        </m:r>
+                      </m:oMath>
+                    </m:oMathPara>
+                  </a14:m>
+                  <a:endParaRPr lang="en-US" sz="2400" dirty="0"/>
+                </a:p>
+              </p:txBody>
+            </p:sp>
+          </mc:Choice>
+          <mc:Fallback>
+            <p:sp>
+              <p:nvSpPr>
+                <p:cNvPr id="53" name="TextBox 52">
+                  <a:extLst>
+                    <a:ext uri="{FF2B5EF4-FFF2-40B4-BE49-F238E27FC236}">
+                      <a16:creationId xmlns:a16="http://schemas.microsoft.com/office/drawing/2014/main" id="{BE9ADAC2-7AC3-AF72-4EAD-CCCCD6824854}"/>
+                    </a:ext>
+                  </a:extLst>
+                </p:cNvPr>
+                <p:cNvSpPr txBox="1">
+                  <a:spLocks noRot="1" noChangeAspect="1" noMove="1" noResize="1" noEditPoints="1" noAdjustHandles="1" noChangeArrowheads="1" noChangeShapeType="1" noTextEdit="1"/>
+                </p:cNvSpPr>
+                <p:nvPr/>
+              </p:nvSpPr>
+              <p:spPr>
+                <a:xfrm>
+                  <a:off x="2541264" y="4380221"/>
+                  <a:ext cx="802336" cy="461665"/>
+                </a:xfrm>
+                <a:prstGeom prst="rect">
+                  <a:avLst/>
+                </a:prstGeom>
+                <a:blipFill>
+                  <a:blip r:embed="rId8"/>
+                  <a:stretch>
+                    <a:fillRect l="-1515" r="-2273" b="-18421"/>
+                  </a:stretch>
+                </a:blipFill>
+              </p:spPr>
+              <p:txBody>
+                <a:bodyPr/>
+                <a:lstStyle/>
+                <a:p>
+                  <a:r>
+                    <a:rPr lang="en-US">
+                      <a:noFill/>
+                    </a:rPr>
+                    <a:t> </a:t>
+                  </a:r>
+                </a:p>
+              </p:txBody>
+            </p:sp>
+          </mc:Fallback>
+        </mc:AlternateContent>
+        <p:cxnSp>
+          <p:nvCxnSpPr>
+            <p:cNvPr id="54" name="Straight Connector 53">
+              <a:extLst>
+                <a:ext uri="{FF2B5EF4-FFF2-40B4-BE49-F238E27FC236}">
+                  <a16:creationId xmlns:a16="http://schemas.microsoft.com/office/drawing/2014/main" id="{67DF6704-4C12-6AC3-BC17-2BB81EA8BDEE}"/>
+                </a:ext>
+              </a:extLst>
+            </p:cNvPr>
+            <p:cNvCxnSpPr>
+              <a:cxnSpLocks/>
+              <a:endCxn id="47" idx="7"/>
+            </p:cNvCxnSpPr>
+            <p:nvPr/>
+          </p:nvCxnSpPr>
+          <p:spPr>
+            <a:xfrm flipV="1">
+              <a:off x="4207349" y="1264186"/>
+              <a:ext cx="0" cy="1272532"/>
+            </a:xfrm>
+            <a:prstGeom prst="line">
+              <a:avLst/>
+            </a:prstGeom>
+            <a:ln w="28575">
+              <a:solidFill>
+                <a:srgbClr val="00B0F0"/>
+              </a:solidFill>
+            </a:ln>
+          </p:spPr>
+          <p:style>
+            <a:lnRef idx="1">
+              <a:schemeClr val="accent1"/>
+            </a:lnRef>
+            <a:fillRef idx="0">
+              <a:schemeClr val="accent1"/>
+            </a:fillRef>
+            <a:effectRef idx="0">
+              <a:schemeClr val="accent1"/>
+            </a:effectRef>
+            <a:fontRef idx="minor">
+              <a:schemeClr val="tx1"/>
+            </a:fontRef>
+          </p:style>
+        </p:cxnSp>
+        <p:cxnSp>
+          <p:nvCxnSpPr>
+            <p:cNvPr id="55" name="Straight Connector 54">
+              <a:extLst>
+                <a:ext uri="{FF2B5EF4-FFF2-40B4-BE49-F238E27FC236}">
+                  <a16:creationId xmlns:a16="http://schemas.microsoft.com/office/drawing/2014/main" id="{62675C6A-4264-C7FD-6E33-6E88F7437228}"/>
+                </a:ext>
+              </a:extLst>
+            </p:cNvPr>
+            <p:cNvCxnSpPr/>
+            <p:nvPr/>
+          </p:nvCxnSpPr>
+          <p:spPr>
+            <a:xfrm>
+              <a:off x="2942432" y="2532261"/>
+              <a:ext cx="1264917" cy="1"/>
+            </a:xfrm>
+            <a:prstGeom prst="line">
+              <a:avLst/>
+            </a:prstGeom>
+            <a:ln w="28575">
+              <a:solidFill>
+                <a:srgbClr val="7030A0"/>
+              </a:solidFill>
+            </a:ln>
+          </p:spPr>
+          <p:style>
+            <a:lnRef idx="1">
+              <a:schemeClr val="accent1"/>
+            </a:lnRef>
+            <a:fillRef idx="0">
+              <a:schemeClr val="accent1"/>
+            </a:fillRef>
+            <a:effectRef idx="0">
+              <a:schemeClr val="accent1"/>
+            </a:effectRef>
+            <a:fontRef idx="minor">
+              <a:schemeClr val="tx1"/>
+            </a:fontRef>
+          </p:style>
+        </p:cxnSp>
+        <mc:AlternateContent xmlns:mc="http://schemas.openxmlformats.org/markup-compatibility/2006">
+          <mc:Choice xmlns:a14="http://schemas.microsoft.com/office/drawing/2010/main" Requires="a14">
+            <p:sp>
+              <p:nvSpPr>
+                <p:cNvPr id="56" name="TextBox 55">
+                  <a:extLst>
+                    <a:ext uri="{FF2B5EF4-FFF2-40B4-BE49-F238E27FC236}">
+                      <a16:creationId xmlns:a16="http://schemas.microsoft.com/office/drawing/2014/main" id="{95FFA814-91DE-058A-D763-98C0CEE14D56}"/>
+                    </a:ext>
+                  </a:extLst>
+                </p:cNvPr>
+                <p:cNvSpPr txBox="1"/>
+                <p:nvPr/>
+              </p:nvSpPr>
+              <p:spPr>
+                <a:xfrm>
+                  <a:off x="3515484" y="1748127"/>
+                  <a:ext cx="429348" cy="461665"/>
+                </a:xfrm>
+                <a:prstGeom prst="rect">
+                  <a:avLst/>
+                </a:prstGeom>
+                <a:noFill/>
+              </p:spPr>
+              <p:txBody>
+                <a:bodyPr wrap="none" rtlCol="0">
+                  <a:spAutoFit/>
+                </a:bodyPr>
+                <a:lstStyle/>
+                <a:p>
+                  <a:pPr/>
+                  <a14:m>
+                    <m:oMathPara xmlns:m="http://schemas.openxmlformats.org/officeDocument/2006/math">
+                      <m:oMathParaPr>
+                        <m:jc m:val="centerGroup"/>
+                      </m:oMathParaPr>
+                      <m:oMath xmlns:m="http://schemas.openxmlformats.org/officeDocument/2006/math">
+                        <m:r>
+                          <a:rPr lang="en-US" sz="2400" b="0" i="1" smtClean="0">
+                            <a:latin typeface="Cambria Math" panose="02040503050406030204" pitchFamily="18" charset="0"/>
+                          </a:rPr>
+                          <m:t>𝑣</m:t>
+                        </m:r>
+                      </m:oMath>
+                    </m:oMathPara>
+                  </a14:m>
+                  <a:endParaRPr lang="en-US" sz="2400" dirty="0"/>
+                </a:p>
+              </p:txBody>
+            </p:sp>
+          </mc:Choice>
+          <mc:Fallback>
+            <p:sp>
+              <p:nvSpPr>
+                <p:cNvPr id="56" name="TextBox 55">
+                  <a:extLst>
+                    <a:ext uri="{FF2B5EF4-FFF2-40B4-BE49-F238E27FC236}">
+                      <a16:creationId xmlns:a16="http://schemas.microsoft.com/office/drawing/2014/main" id="{95FFA814-91DE-058A-D763-98C0CEE14D56}"/>
+                    </a:ext>
+                  </a:extLst>
+                </p:cNvPr>
+                <p:cNvSpPr txBox="1">
+                  <a:spLocks noRot="1" noChangeAspect="1" noMove="1" noResize="1" noEditPoints="1" noAdjustHandles="1" noChangeArrowheads="1" noChangeShapeType="1" noTextEdit="1"/>
+                </p:cNvSpPr>
+                <p:nvPr/>
+              </p:nvSpPr>
+              <p:spPr>
+                <a:xfrm>
+                  <a:off x="3515484" y="1748127"/>
+                  <a:ext cx="429348" cy="461665"/>
+                </a:xfrm>
+                <a:prstGeom prst="rect">
+                  <a:avLst/>
+                </a:prstGeom>
+                <a:blipFill>
+                  <a:blip r:embed="rId9"/>
+                  <a:stretch>
+                    <a:fillRect/>
+                  </a:stretch>
+                </a:blipFill>
+              </p:spPr>
+              <p:txBody>
+                <a:bodyPr/>
+                <a:lstStyle/>
+                <a:p>
+                  <a:r>
+                    <a:rPr lang="en-US">
+                      <a:noFill/>
+                    </a:rPr>
+                    <a:t> </a:t>
+                  </a:r>
+                </a:p>
+              </p:txBody>
+            </p:sp>
+          </mc:Fallback>
+        </mc:AlternateContent>
+        <mc:AlternateContent xmlns:mc="http://schemas.openxmlformats.org/markup-compatibility/2006">
+          <mc:Choice xmlns:a14="http://schemas.microsoft.com/office/drawing/2010/main" Requires="a14">
+            <p:sp>
+              <p:nvSpPr>
+                <p:cNvPr id="58" name="TextBox 57">
+                  <a:extLst>
+                    <a:ext uri="{FF2B5EF4-FFF2-40B4-BE49-F238E27FC236}">
+                      <a16:creationId xmlns:a16="http://schemas.microsoft.com/office/drawing/2014/main" id="{F8661AEE-46D0-A21A-4526-03DF86D26064}"/>
+                    </a:ext>
+                  </a:extLst>
+                </p:cNvPr>
+                <p:cNvSpPr txBox="1"/>
+                <p:nvPr/>
+              </p:nvSpPr>
+              <p:spPr>
+                <a:xfrm>
+                  <a:off x="2001030" y="2577939"/>
+                  <a:ext cx="815095" cy="369332"/>
+                </a:xfrm>
+                <a:prstGeom prst="rect">
+                  <a:avLst/>
+                </a:prstGeom>
+                <a:noFill/>
+              </p:spPr>
+              <p:txBody>
+                <a:bodyPr wrap="none" rtlCol="0">
+                  <a:spAutoFit/>
+                </a:bodyPr>
+                <a:lstStyle/>
+                <a:p>
+                  <a:pPr/>
+                  <a14:m>
+                    <m:oMathPara xmlns:m="http://schemas.openxmlformats.org/officeDocument/2006/math">
+                      <m:oMathParaPr>
+                        <m:jc m:val="centerGroup"/>
+                      </m:oMathParaPr>
+                      <m:oMath xmlns:m="http://schemas.openxmlformats.org/officeDocument/2006/math">
+                        <m:r>
+                          <a:rPr lang="en-US" b="0" i="1" smtClean="0">
+                            <a:latin typeface="Cambria Math" panose="02040503050406030204" pitchFamily="18" charset="0"/>
+                          </a:rPr>
+                          <m:t>𝑝</m:t>
+                        </m:r>
+                        <m:d>
+                          <m:dPr>
+                            <m:ctrlPr>
+                              <a:rPr lang="en-US" b="0" i="1" smtClean="0">
+                                <a:latin typeface="Cambria Math" panose="02040503050406030204" pitchFamily="18" charset="0"/>
+                              </a:rPr>
+                            </m:ctrlPr>
+                          </m:dPr>
+                          <m:e>
+                            <m:sSup>
+                              <m:sSupPr>
+                                <m:ctrlPr>
+                                  <a:rPr lang="en-US" b="0" i="1" smtClean="0">
+                                    <a:latin typeface="Cambria Math" panose="02040503050406030204" pitchFamily="18" charset="0"/>
+                                  </a:rPr>
+                                </m:ctrlPr>
+                              </m:sSupPr>
+                              <m:e>
+                                <m:r>
+                                  <a:rPr lang="en-US" b="0" i="1" smtClean="0">
+                                    <a:latin typeface="Cambria Math" panose="02040503050406030204" pitchFamily="18" charset="0"/>
+                                  </a:rPr>
+                                  <m:t>𝑧</m:t>
+                                </m:r>
+                              </m:e>
+                              <m:sup>
+                                <m:r>
+                                  <a:rPr lang="en-US" b="0" i="1" smtClean="0">
+                                    <a:latin typeface="Cambria Math" panose="02040503050406030204" pitchFamily="18" charset="0"/>
+                                  </a:rPr>
+                                  <m:t>+</m:t>
+                                </m:r>
+                              </m:sup>
+                            </m:sSup>
+                          </m:e>
+                        </m:d>
+                      </m:oMath>
+                    </m:oMathPara>
+                  </a14:m>
+                  <a:endParaRPr lang="en-US" dirty="0"/>
+                </a:p>
+              </p:txBody>
+            </p:sp>
+          </mc:Choice>
+          <mc:Fallback>
+            <p:sp>
+              <p:nvSpPr>
+                <p:cNvPr id="58" name="TextBox 57">
+                  <a:extLst>
+                    <a:ext uri="{FF2B5EF4-FFF2-40B4-BE49-F238E27FC236}">
+                      <a16:creationId xmlns:a16="http://schemas.microsoft.com/office/drawing/2014/main" id="{F8661AEE-46D0-A21A-4526-03DF86D26064}"/>
+                    </a:ext>
+                  </a:extLst>
+                </p:cNvPr>
+                <p:cNvSpPr txBox="1">
+                  <a:spLocks noRot="1" noChangeAspect="1" noMove="1" noResize="1" noEditPoints="1" noAdjustHandles="1" noChangeArrowheads="1" noChangeShapeType="1" noTextEdit="1"/>
+                </p:cNvSpPr>
+                <p:nvPr/>
+              </p:nvSpPr>
+              <p:spPr>
+                <a:xfrm>
+                  <a:off x="2001030" y="2577939"/>
+                  <a:ext cx="815095" cy="369332"/>
+                </a:xfrm>
+                <a:prstGeom prst="rect">
+                  <a:avLst/>
+                </a:prstGeom>
+                <a:blipFill>
+                  <a:blip r:embed="rId10"/>
+                  <a:stretch>
+                    <a:fillRect b="-8197"/>
+                  </a:stretch>
+                </a:blipFill>
+              </p:spPr>
+              <p:txBody>
+                <a:bodyPr/>
+                <a:lstStyle/>
+                <a:p>
+                  <a:r>
+                    <a:rPr lang="en-US">
+                      <a:noFill/>
+                    </a:rPr>
+                    <a:t> </a:t>
+                  </a:r>
+                </a:p>
+              </p:txBody>
+            </p:sp>
+          </mc:Fallback>
+        </mc:AlternateContent>
+        <mc:AlternateContent xmlns:mc="http://schemas.openxmlformats.org/markup-compatibility/2006">
+          <mc:Choice xmlns:a14="http://schemas.microsoft.com/office/drawing/2010/main" Requires="a14">
+            <p:sp>
+              <p:nvSpPr>
+                <p:cNvPr id="59" name="TextBox 58">
+                  <a:extLst>
+                    <a:ext uri="{FF2B5EF4-FFF2-40B4-BE49-F238E27FC236}">
+                      <a16:creationId xmlns:a16="http://schemas.microsoft.com/office/drawing/2014/main" id="{E51B53FC-D501-9C88-CD97-1B77CF4BD18A}"/>
+                    </a:ext>
+                  </a:extLst>
+                </p:cNvPr>
+                <p:cNvSpPr txBox="1"/>
+                <p:nvPr/>
+              </p:nvSpPr>
+              <p:spPr>
+                <a:xfrm>
+                  <a:off x="2001031" y="814752"/>
+                  <a:ext cx="815095" cy="369332"/>
+                </a:xfrm>
+                <a:prstGeom prst="rect">
+                  <a:avLst/>
+                </a:prstGeom>
+                <a:noFill/>
+              </p:spPr>
+              <p:txBody>
+                <a:bodyPr wrap="none" rtlCol="0">
+                  <a:spAutoFit/>
+                </a:bodyPr>
+                <a:lstStyle/>
+                <a:p>
+                  <a:pPr/>
+                  <a14:m>
+                    <m:oMathPara xmlns:m="http://schemas.openxmlformats.org/officeDocument/2006/math">
+                      <m:oMathParaPr>
+                        <m:jc m:val="centerGroup"/>
+                      </m:oMathParaPr>
+                      <m:oMath xmlns:m="http://schemas.openxmlformats.org/officeDocument/2006/math">
+                        <m:r>
+                          <a:rPr lang="en-US" b="0" i="1" smtClean="0">
+                            <a:latin typeface="Cambria Math" panose="02040503050406030204" pitchFamily="18" charset="0"/>
+                          </a:rPr>
+                          <m:t>𝑝</m:t>
+                        </m:r>
+                        <m:d>
+                          <m:dPr>
+                            <m:ctrlPr>
+                              <a:rPr lang="en-US" b="0" i="1" smtClean="0">
+                                <a:latin typeface="Cambria Math" panose="02040503050406030204" pitchFamily="18" charset="0"/>
+                              </a:rPr>
+                            </m:ctrlPr>
+                          </m:dPr>
+                          <m:e>
+                            <m:sSup>
+                              <m:sSupPr>
+                                <m:ctrlPr>
+                                  <a:rPr lang="en-US" b="0" i="1" smtClean="0">
+                                    <a:latin typeface="Cambria Math" panose="02040503050406030204" pitchFamily="18" charset="0"/>
+                                  </a:rPr>
+                                </m:ctrlPr>
+                              </m:sSupPr>
+                              <m:e>
+                                <m:r>
+                                  <a:rPr lang="en-US" b="0" i="1" smtClean="0">
+                                    <a:latin typeface="Cambria Math" panose="02040503050406030204" pitchFamily="18" charset="0"/>
+                                  </a:rPr>
+                                  <m:t>𝑧</m:t>
+                                </m:r>
+                              </m:e>
+                              <m:sup>
+                                <m:r>
+                                  <a:rPr lang="en-US" b="0" i="1" smtClean="0">
+                                    <a:latin typeface="Cambria Math" panose="02040503050406030204" pitchFamily="18" charset="0"/>
+                                  </a:rPr>
+                                  <m:t>−</m:t>
+                                </m:r>
+                              </m:sup>
+                            </m:sSup>
+                          </m:e>
+                        </m:d>
+                      </m:oMath>
+                    </m:oMathPara>
+                  </a14:m>
+                  <a:endParaRPr lang="en-US" dirty="0"/>
+                </a:p>
+              </p:txBody>
+            </p:sp>
+          </mc:Choice>
+          <mc:Fallback>
+            <p:sp>
+              <p:nvSpPr>
+                <p:cNvPr id="59" name="TextBox 58">
+                  <a:extLst>
+                    <a:ext uri="{FF2B5EF4-FFF2-40B4-BE49-F238E27FC236}">
+                      <a16:creationId xmlns:a16="http://schemas.microsoft.com/office/drawing/2014/main" id="{E51B53FC-D501-9C88-CD97-1B77CF4BD18A}"/>
+                    </a:ext>
+                  </a:extLst>
+                </p:cNvPr>
+                <p:cNvSpPr txBox="1">
+                  <a:spLocks noRot="1" noChangeAspect="1" noMove="1" noResize="1" noEditPoints="1" noAdjustHandles="1" noChangeArrowheads="1" noChangeShapeType="1" noTextEdit="1"/>
+                </p:cNvSpPr>
+                <p:nvPr/>
+              </p:nvSpPr>
+              <p:spPr>
+                <a:xfrm>
+                  <a:off x="2001031" y="814752"/>
+                  <a:ext cx="815095" cy="369332"/>
+                </a:xfrm>
+                <a:prstGeom prst="rect">
+                  <a:avLst/>
+                </a:prstGeom>
+                <a:blipFill>
+                  <a:blip r:embed="rId11"/>
+                  <a:stretch>
+                    <a:fillRect b="-8197"/>
+                  </a:stretch>
+                </a:blipFill>
+              </p:spPr>
+              <p:txBody>
+                <a:bodyPr/>
+                <a:lstStyle/>
+                <a:p>
+                  <a:r>
+                    <a:rPr lang="en-US">
+                      <a:noFill/>
+                    </a:rPr>
+                    <a:t> </a:t>
+                  </a:r>
+                </a:p>
+              </p:txBody>
+            </p:sp>
+          </mc:Fallback>
+        </mc:AlternateContent>
+        <p:sp>
+          <p:nvSpPr>
+            <p:cNvPr id="60" name="Right Brace 59">
+              <a:extLst>
+                <a:ext uri="{FF2B5EF4-FFF2-40B4-BE49-F238E27FC236}">
+                  <a16:creationId xmlns:a16="http://schemas.microsoft.com/office/drawing/2014/main" id="{E0A93F1C-DF27-70C4-5D18-1EDCA6957B0D}"/>
+                </a:ext>
+              </a:extLst>
+            </p:cNvPr>
+            <p:cNvSpPr/>
+            <p:nvPr/>
+          </p:nvSpPr>
+          <p:spPr>
+            <a:xfrm flipH="1">
+              <a:off x="2751185" y="759208"/>
+              <a:ext cx="169816" cy="494101"/>
+            </a:xfrm>
+            <a:prstGeom prst="rightBrace">
+              <a:avLst/>
+            </a:prstGeom>
+            <a:ln w="28575">
+              <a:solidFill>
+                <a:srgbClr val="FFFF00"/>
+              </a:solidFill>
+            </a:ln>
+          </p:spPr>
+          <p:style>
+            <a:lnRef idx="1">
+              <a:schemeClr val="accent1"/>
+            </a:lnRef>
+            <a:fillRef idx="0">
+              <a:schemeClr val="accent1"/>
+            </a:fillRef>
+            <a:effectRef idx="0">
+              <a:schemeClr val="accent1"/>
+            </a:effectRef>
+            <a:fontRef idx="minor">
+              <a:schemeClr val="tx1"/>
+            </a:fontRef>
+          </p:style>
+          <p:txBody>
+            <a:bodyPr rtlCol="0" anchor="ctr"/>
+            <a:lstStyle/>
+            <a:p>
+              <a:pPr algn="ctr"/>
+              <a:endParaRPr lang="en-US"/>
+            </a:p>
+          </p:txBody>
+        </p:sp>
+        <p:sp>
+          <p:nvSpPr>
+            <p:cNvPr id="61" name="Right Brace 60">
+              <a:extLst>
+                <a:ext uri="{FF2B5EF4-FFF2-40B4-BE49-F238E27FC236}">
+                  <a16:creationId xmlns:a16="http://schemas.microsoft.com/office/drawing/2014/main" id="{AD27930D-73B1-6B38-7A21-1066CCDA0BD9}"/>
+                </a:ext>
+              </a:extLst>
+            </p:cNvPr>
+            <p:cNvSpPr/>
+            <p:nvPr/>
+          </p:nvSpPr>
+          <p:spPr>
+            <a:xfrm flipH="1">
+              <a:off x="2751185" y="1273558"/>
+              <a:ext cx="169816" cy="3017470"/>
+            </a:xfrm>
+            <a:prstGeom prst="rightBrace">
+              <a:avLst/>
+            </a:prstGeom>
+            <a:ln w="28575">
+              <a:solidFill>
+                <a:srgbClr val="C00000"/>
+              </a:solidFill>
+            </a:ln>
+          </p:spPr>
+          <p:style>
+            <a:lnRef idx="1">
+              <a:schemeClr val="accent1"/>
+            </a:lnRef>
+            <a:fillRef idx="0">
+              <a:schemeClr val="accent1"/>
+            </a:fillRef>
+            <a:effectRef idx="0">
+              <a:schemeClr val="accent1"/>
+            </a:effectRef>
+            <a:fontRef idx="minor">
+              <a:schemeClr val="tx1"/>
+            </a:fontRef>
+          </p:style>
+          <p:txBody>
+            <a:bodyPr rtlCol="0" anchor="ctr"/>
+            <a:lstStyle/>
+            <a:p>
+              <a:pPr algn="ctr"/>
+              <a:endParaRPr lang="en-US"/>
+            </a:p>
+          </p:txBody>
+        </p:sp>
+      </p:grpSp>
+      <p:sp>
+        <p:nvSpPr>
+          <p:cNvPr id="3" name="TextBox 2">
+            <a:extLst>
+              <a:ext uri="{FF2B5EF4-FFF2-40B4-BE49-F238E27FC236}">
+                <a16:creationId xmlns:a16="http://schemas.microsoft.com/office/drawing/2014/main" id="{783AC605-3E46-CB2B-6890-29CA2E9F4231}"/>
+              </a:ext>
+            </a:extLst>
+          </p:cNvPr>
+          <p:cNvSpPr txBox="1"/>
+          <p:nvPr/>
+        </p:nvSpPr>
+        <p:spPr>
+          <a:xfrm>
+            <a:off x="555071" y="146736"/>
+            <a:ext cx="11081880" cy="923330"/>
+          </a:xfrm>
+          <a:prstGeom prst="rect">
+            <a:avLst/>
+          </a:prstGeom>
+          <a:noFill/>
+        </p:spPr>
+        <p:txBody>
+          <a:bodyPr wrap="none" rtlCol="0">
+            <a:spAutoFit/>
+          </a:bodyPr>
+          <a:lstStyle/>
+          <a:p>
+            <a:pPr algn="ctr"/>
+            <a:r>
+              <a:rPr lang="en-US" sz="5400" dirty="0"/>
+              <a:t>There are no “superposition states”</a:t>
+            </a:r>
+          </a:p>
+        </p:txBody>
+      </p:sp>
+    </p:spTree>
+    <p:extLst>
+      <p:ext uri="{BB962C8B-B14F-4D97-AF65-F5344CB8AC3E}">
+        <p14:creationId xmlns:p14="http://schemas.microsoft.com/office/powerpoint/2010/main" val="3999043138"/>
+      </p:ext>
+    </p:extLst>
+  </p:cSld>
+  <p:clrMapOvr>
+    <a:masterClrMapping/>
+  </p:clrMapOvr>
+</p:sld>
+</file>
+
+<file path=ppt/slides/slide5.xml><?xml version="1.0" encoding="utf-8"?>
+<p:sld xmlns:a="http://schemas.openxmlformats.org/drawingml/2006/main" xmlns:r="http://schemas.openxmlformats.org/officeDocument/2006/relationships" xmlns:p="http://schemas.openxmlformats.org/presentationml/2006/main">
+  <p:cSld>
+    <p:spTree>
+      <p:nvGrpSpPr>
+        <p:cNvPr id="1" name="">
+          <a:extLst>
+            <a:ext uri="{FF2B5EF4-FFF2-40B4-BE49-F238E27FC236}">
+              <a16:creationId xmlns:a16="http://schemas.microsoft.com/office/drawing/2014/main" id="{527AB609-176A-E2B5-0ECE-5AB9F8EB2578}"/>
+            </a:ext>
+          </a:extLst>
+        </p:cNvPr>
+        <p:cNvGrpSpPr/>
+        <p:nvPr/>
+      </p:nvGrpSpPr>
+      <p:grpSpPr>
+        <a:xfrm>
+          <a:off x="0" y="0"/>
+          <a:ext cx="0" cy="0"/>
+          <a:chOff x="0" y="0"/>
+          <a:chExt cx="0" cy="0"/>
+        </a:xfrm>
+      </p:grpSpPr>
+      <p:grpSp>
+        <p:nvGrpSpPr>
+          <p:cNvPr id="16" name="Group 15">
+            <a:extLst>
+              <a:ext uri="{FF2B5EF4-FFF2-40B4-BE49-F238E27FC236}">
+                <a16:creationId xmlns:a16="http://schemas.microsoft.com/office/drawing/2014/main" id="{9B1025B8-D0CB-16CA-3623-527875AB85FA}"/>
+              </a:ext>
+            </a:extLst>
+          </p:cNvPr>
+          <p:cNvGrpSpPr/>
+          <p:nvPr/>
+        </p:nvGrpSpPr>
+        <p:grpSpPr>
+          <a:xfrm>
+            <a:off x="5806746" y="3854114"/>
+            <a:ext cx="4931158" cy="2229842"/>
+            <a:chOff x="5777047" y="3947245"/>
+            <a:chExt cx="4931158" cy="2229842"/>
+          </a:xfrm>
+        </p:grpSpPr>
+        <mc:AlternateContent xmlns:mc="http://schemas.openxmlformats.org/markup-compatibility/2006">
+          <mc:Choice xmlns:a14="http://schemas.microsoft.com/office/drawing/2010/main" Requires="a14">
+            <p:sp>
+              <p:nvSpPr>
+                <p:cNvPr id="28" name="TextBox 27">
+                  <a:extLst>
+                    <a:ext uri="{FF2B5EF4-FFF2-40B4-BE49-F238E27FC236}">
+                      <a16:creationId xmlns:a16="http://schemas.microsoft.com/office/drawing/2014/main" id="{FD298D98-BAF0-8FAB-13DC-6113B7D5E9AD}"/>
+                    </a:ext>
+                  </a:extLst>
+                </p:cNvPr>
+                <p:cNvSpPr txBox="1"/>
+                <p:nvPr/>
+              </p:nvSpPr>
+              <p:spPr>
+                <a:xfrm>
+                  <a:off x="5898940" y="4540698"/>
+                  <a:ext cx="4687372" cy="1030282"/>
+                </a:xfrm>
+                <a:prstGeom prst="rect">
+                  <a:avLst/>
+                </a:prstGeom>
+                <a:noFill/>
+              </p:spPr>
+              <p:txBody>
+                <a:bodyPr wrap="none" rtlCol="0">
+                  <a:spAutoFit/>
+                </a:bodyPr>
+                <a:lstStyle/>
+                <a:p>
+                  <a:pPr/>
+                  <a14:m>
+                    <m:oMathPara xmlns:m="http://schemas.openxmlformats.org/officeDocument/2006/math">
+                      <m:oMathParaPr>
+                        <m:jc m:val="centerGroup"/>
+                      </m:oMathParaPr>
+                      <m:oMath xmlns:m="http://schemas.openxmlformats.org/officeDocument/2006/math">
+                        <m:d>
+                          <m:dPr>
+                            <m:ctrlPr>
+                              <a:rPr lang="en-US" sz="5400" b="0" i="1" smtClean="0">
+                                <a:solidFill>
+                                  <a:schemeClr val="tx1"/>
+                                </a:solidFill>
+                                <a:latin typeface="Cambria Math" panose="02040503050406030204" pitchFamily="18" charset="0"/>
+                              </a:rPr>
+                            </m:ctrlPr>
+                          </m:dPr>
+                          <m:e>
+                            <m:r>
+                              <a:rPr lang="en-US" sz="5400" b="0" i="1" smtClean="0">
+                                <a:solidFill>
+                                  <a:srgbClr val="FF0000"/>
+                                </a:solidFill>
+                                <a:latin typeface="Cambria Math" panose="02040503050406030204" pitchFamily="18" charset="0"/>
+                              </a:rPr>
+                              <m:t>𝑝</m:t>
+                            </m:r>
+                            <m:d>
+                              <m:dPr>
+                                <m:ctrlPr>
+                                  <a:rPr lang="en-US" sz="5400" b="0" i="1" smtClean="0">
+                                    <a:solidFill>
+                                      <a:srgbClr val="FF0000"/>
+                                    </a:solidFill>
+                                    <a:latin typeface="Cambria Math" panose="02040503050406030204" pitchFamily="18" charset="0"/>
+                                  </a:rPr>
+                                </m:ctrlPr>
+                              </m:dPr>
+                              <m:e>
+                                <m:sSup>
+                                  <m:sSupPr>
+                                    <m:ctrlPr>
+                                      <a:rPr lang="en-US" sz="5400" b="0" i="1" smtClean="0">
+                                        <a:solidFill>
+                                          <a:srgbClr val="FF0000"/>
+                                        </a:solidFill>
+                                        <a:latin typeface="Cambria Math" panose="02040503050406030204" pitchFamily="18" charset="0"/>
+                                      </a:rPr>
+                                    </m:ctrlPr>
+                                  </m:sSupPr>
+                                  <m:e>
+                                    <m:r>
+                                      <a:rPr lang="en-US" sz="5400" b="0" i="1" smtClean="0">
+                                        <a:solidFill>
+                                          <a:srgbClr val="FF0000"/>
+                                        </a:solidFill>
+                                        <a:latin typeface="Cambria Math" panose="02040503050406030204" pitchFamily="18" charset="0"/>
+                                      </a:rPr>
+                                      <m:t>𝑧</m:t>
+                                    </m:r>
+                                  </m:e>
+                                  <m:sup>
+                                    <m:r>
+                                      <a:rPr lang="en-US" sz="5400" b="0" i="1" smtClean="0">
+                                        <a:solidFill>
+                                          <a:srgbClr val="FF0000"/>
+                                        </a:solidFill>
+                                        <a:latin typeface="Cambria Math" panose="02040503050406030204" pitchFamily="18" charset="0"/>
+                                      </a:rPr>
+                                      <m:t>+</m:t>
+                                    </m:r>
+                                  </m:sup>
+                                </m:sSup>
+                              </m:e>
+                            </m:d>
+                            <m:r>
+                              <a:rPr lang="en-US" sz="5400" b="0" i="1" smtClean="0">
+                                <a:solidFill>
+                                  <a:schemeClr val="tx1"/>
+                                </a:solidFill>
+                                <a:latin typeface="Cambria Math" panose="02040503050406030204" pitchFamily="18" charset="0"/>
+                              </a:rPr>
+                              <m:t>,</m:t>
+                            </m:r>
+                            <m:r>
+                              <a:rPr lang="en-US" sz="5400" i="1" smtClean="0">
+                                <a:solidFill>
+                                  <a:srgbClr val="FFFF00"/>
+                                </a:solidFill>
+                                <a:latin typeface="Cambria Math" panose="02040503050406030204" pitchFamily="18" charset="0"/>
+                              </a:rPr>
+                              <m:t>𝑝</m:t>
+                            </m:r>
+                            <m:d>
+                              <m:dPr>
+                                <m:ctrlPr>
+                                  <a:rPr lang="en-US" sz="5400" i="1">
+                                    <a:solidFill>
+                                      <a:srgbClr val="FFFF00"/>
+                                    </a:solidFill>
+                                    <a:latin typeface="Cambria Math" panose="02040503050406030204" pitchFamily="18" charset="0"/>
+                                  </a:rPr>
+                                </m:ctrlPr>
+                              </m:dPr>
+                              <m:e>
+                                <m:sSup>
+                                  <m:sSupPr>
+                                    <m:ctrlPr>
+                                      <a:rPr lang="en-US" sz="5400" i="1">
+                                        <a:solidFill>
+                                          <a:srgbClr val="FFFF00"/>
+                                        </a:solidFill>
+                                        <a:latin typeface="Cambria Math" panose="02040503050406030204" pitchFamily="18" charset="0"/>
+                                      </a:rPr>
+                                    </m:ctrlPr>
+                                  </m:sSupPr>
+                                  <m:e>
+                                    <m:r>
+                                      <a:rPr lang="en-US" sz="5400" i="1">
+                                        <a:solidFill>
+                                          <a:srgbClr val="FFFF00"/>
+                                        </a:solidFill>
+                                        <a:latin typeface="Cambria Math" panose="02040503050406030204" pitchFamily="18" charset="0"/>
+                                      </a:rPr>
+                                      <m:t>𝑧</m:t>
+                                    </m:r>
+                                  </m:e>
+                                  <m:sup>
+                                    <m:r>
+                                      <a:rPr lang="en-US" sz="5400" b="0" i="1" smtClean="0">
+                                        <a:solidFill>
+                                          <a:srgbClr val="FFFF00"/>
+                                        </a:solidFill>
+                                        <a:latin typeface="Cambria Math" panose="02040503050406030204" pitchFamily="18" charset="0"/>
+                                      </a:rPr>
+                                      <m:t>−</m:t>
+                                    </m:r>
+                                  </m:sup>
+                                </m:sSup>
+                              </m:e>
+                            </m:d>
+                          </m:e>
+                        </m:d>
+                      </m:oMath>
+                    </m:oMathPara>
+                  </a14:m>
+                  <a:endParaRPr lang="en-US" sz="5400" dirty="0">
+                    <a:solidFill>
+                      <a:schemeClr val="tx1"/>
+                    </a:solidFill>
+                  </a:endParaRPr>
+                </a:p>
+              </p:txBody>
+            </p:sp>
+          </mc:Choice>
+          <mc:Fallback>
+            <p:sp>
+              <p:nvSpPr>
+                <p:cNvPr id="28" name="TextBox 27">
+                  <a:extLst>
+                    <a:ext uri="{FF2B5EF4-FFF2-40B4-BE49-F238E27FC236}">
+                      <a16:creationId xmlns:a16="http://schemas.microsoft.com/office/drawing/2014/main" id="{FD298D98-BAF0-8FAB-13DC-6113B7D5E9AD}"/>
+                    </a:ext>
+                  </a:extLst>
+                </p:cNvPr>
+                <p:cNvSpPr txBox="1">
+                  <a:spLocks noRot="1" noChangeAspect="1" noMove="1" noResize="1" noEditPoints="1" noAdjustHandles="1" noChangeArrowheads="1" noChangeShapeType="1" noTextEdit="1"/>
+                </p:cNvSpPr>
+                <p:nvPr/>
+              </p:nvSpPr>
+              <p:spPr>
+                <a:xfrm>
+                  <a:off x="5898940" y="4540698"/>
+                  <a:ext cx="4687372" cy="1030282"/>
+                </a:xfrm>
+                <a:prstGeom prst="rect">
+                  <a:avLst/>
+                </a:prstGeom>
+                <a:blipFill>
+                  <a:blip r:embed="rId2"/>
+                  <a:stretch>
+                    <a:fillRect/>
+                  </a:stretch>
+                </a:blipFill>
+              </p:spPr>
+              <p:txBody>
+                <a:bodyPr/>
+                <a:lstStyle/>
+                <a:p>
+                  <a:r>
+                    <a:rPr lang="en-US">
+                      <a:noFill/>
+                    </a:rPr>
+                    <a:t> </a:t>
+                  </a:r>
+                </a:p>
+              </p:txBody>
+            </p:sp>
+          </mc:Fallback>
+        </mc:AlternateContent>
+        <mc:AlternateContent xmlns:mc="http://schemas.openxmlformats.org/markup-compatibility/2006">
+          <mc:Choice xmlns:a14="http://schemas.microsoft.com/office/drawing/2010/main" Requires="a14">
+            <p:sp>
+              <p:nvSpPr>
+                <p:cNvPr id="30" name="TextBox 29">
+                  <a:extLst>
+                    <a:ext uri="{FF2B5EF4-FFF2-40B4-BE49-F238E27FC236}">
+                      <a16:creationId xmlns:a16="http://schemas.microsoft.com/office/drawing/2014/main" id="{FA94EA48-40D7-AE15-FBC0-6EC30E06F4D7}"/>
+                    </a:ext>
+                  </a:extLst>
+                </p:cNvPr>
+                <p:cNvSpPr txBox="1"/>
+                <p:nvPr/>
+              </p:nvSpPr>
+              <p:spPr>
+                <a:xfrm>
+                  <a:off x="6450757" y="5592312"/>
+                  <a:ext cx="3583738" cy="584775"/>
+                </a:xfrm>
+                <a:prstGeom prst="rect">
+                  <a:avLst/>
+                </a:prstGeom>
+                <a:noFill/>
+              </p:spPr>
+              <p:txBody>
+                <a:bodyPr wrap="none" rtlCol="0">
+                  <a:spAutoFit/>
+                </a:bodyPr>
+                <a:lstStyle/>
+                <a:p>
+                  <a:pPr/>
+                  <a14:m>
+                    <m:oMathPara xmlns:m="http://schemas.openxmlformats.org/officeDocument/2006/math">
+                      <m:oMathParaPr>
+                        <m:jc m:val="centerGroup"/>
+                      </m:oMathParaPr>
+                      <m:oMath xmlns:m="http://schemas.openxmlformats.org/officeDocument/2006/math">
+                        <m:r>
+                          <a:rPr lang="en-US" sz="3200" i="1" smtClean="0">
+                            <a:latin typeface="Cambria Math" panose="02040503050406030204" pitchFamily="18" charset="0"/>
+                          </a:rPr>
+                          <m:t>𝑝</m:t>
+                        </m:r>
+                        <m:d>
+                          <m:dPr>
+                            <m:ctrlPr>
+                              <a:rPr lang="en-US" sz="3200" i="1">
+                                <a:latin typeface="Cambria Math" panose="02040503050406030204" pitchFamily="18" charset="0"/>
+                              </a:rPr>
+                            </m:ctrlPr>
+                          </m:dPr>
+                          <m:e>
+                            <m:sSup>
+                              <m:sSupPr>
+                                <m:ctrlPr>
+                                  <a:rPr lang="en-US" sz="3200" i="1">
+                                    <a:latin typeface="Cambria Math" panose="02040503050406030204" pitchFamily="18" charset="0"/>
+                                  </a:rPr>
+                                </m:ctrlPr>
+                              </m:sSupPr>
+                              <m:e>
+                                <m:r>
+                                  <a:rPr lang="en-US" sz="3200" i="1">
+                                    <a:latin typeface="Cambria Math" panose="02040503050406030204" pitchFamily="18" charset="0"/>
+                                  </a:rPr>
+                                  <m:t>𝑧</m:t>
+                                </m:r>
+                              </m:e>
+                              <m:sup>
+                                <m:r>
+                                  <a:rPr lang="en-US" sz="3200" i="1">
+                                    <a:latin typeface="Cambria Math" panose="02040503050406030204" pitchFamily="18" charset="0"/>
+                                  </a:rPr>
+                                  <m:t>+</m:t>
+                                </m:r>
+                              </m:sup>
+                            </m:sSup>
+                          </m:e>
+                        </m:d>
+                        <m:r>
+                          <a:rPr lang="en-US" sz="3200" b="0" i="1" smtClean="0">
+                            <a:latin typeface="Cambria Math" panose="02040503050406030204" pitchFamily="18" charset="0"/>
+                          </a:rPr>
+                          <m:t>+</m:t>
+                        </m:r>
+                        <m:r>
+                          <a:rPr lang="en-US" sz="3200" i="1">
+                            <a:latin typeface="Cambria Math" panose="02040503050406030204" pitchFamily="18" charset="0"/>
+                          </a:rPr>
+                          <m:t>𝑝</m:t>
+                        </m:r>
+                        <m:d>
+                          <m:dPr>
+                            <m:ctrlPr>
+                              <a:rPr lang="en-US" sz="3200" i="1">
+                                <a:latin typeface="Cambria Math" panose="02040503050406030204" pitchFamily="18" charset="0"/>
+                              </a:rPr>
+                            </m:ctrlPr>
+                          </m:dPr>
+                          <m:e>
+                            <m:sSup>
+                              <m:sSupPr>
+                                <m:ctrlPr>
+                                  <a:rPr lang="en-US" sz="3200" i="1">
+                                    <a:latin typeface="Cambria Math" panose="02040503050406030204" pitchFamily="18" charset="0"/>
+                                  </a:rPr>
+                                </m:ctrlPr>
+                              </m:sSupPr>
+                              <m:e>
+                                <m:r>
+                                  <a:rPr lang="en-US" sz="3200" i="1">
+                                    <a:latin typeface="Cambria Math" panose="02040503050406030204" pitchFamily="18" charset="0"/>
+                                  </a:rPr>
+                                  <m:t>𝑧</m:t>
+                                </m:r>
+                              </m:e>
+                              <m:sup>
+                                <m:r>
+                                  <a:rPr lang="en-US" sz="3200" i="1">
+                                    <a:latin typeface="Cambria Math" panose="02040503050406030204" pitchFamily="18" charset="0"/>
+                                  </a:rPr>
+                                  <m:t>−</m:t>
+                                </m:r>
+                              </m:sup>
+                            </m:sSup>
+                          </m:e>
+                        </m:d>
+                        <m:r>
+                          <a:rPr lang="en-US" sz="3200" b="0" i="1" smtClean="0">
+                            <a:latin typeface="Cambria Math" panose="02040503050406030204" pitchFamily="18" charset="0"/>
+                          </a:rPr>
+                          <m:t>=1</m:t>
+                        </m:r>
+                      </m:oMath>
+                    </m:oMathPara>
+                  </a14:m>
+                  <a:endParaRPr lang="en-US" sz="3200" dirty="0">
+                    <a:solidFill>
+                      <a:schemeClr val="tx1"/>
+                    </a:solidFill>
+                  </a:endParaRPr>
+                </a:p>
+              </p:txBody>
+            </p:sp>
+          </mc:Choice>
+          <mc:Fallback>
+            <p:sp>
+              <p:nvSpPr>
+                <p:cNvPr id="30" name="TextBox 29">
+                  <a:extLst>
+                    <a:ext uri="{FF2B5EF4-FFF2-40B4-BE49-F238E27FC236}">
+                      <a16:creationId xmlns:a16="http://schemas.microsoft.com/office/drawing/2014/main" id="{FA94EA48-40D7-AE15-FBC0-6EC30E06F4D7}"/>
+                    </a:ext>
+                  </a:extLst>
+                </p:cNvPr>
+                <p:cNvSpPr txBox="1">
+                  <a:spLocks noRot="1" noChangeAspect="1" noMove="1" noResize="1" noEditPoints="1" noAdjustHandles="1" noChangeArrowheads="1" noChangeShapeType="1" noTextEdit="1"/>
+                </p:cNvSpPr>
+                <p:nvPr/>
+              </p:nvSpPr>
+              <p:spPr>
+                <a:xfrm>
+                  <a:off x="6450757" y="5592312"/>
+                  <a:ext cx="3583738" cy="584775"/>
+                </a:xfrm>
+                <a:prstGeom prst="rect">
+                  <a:avLst/>
+                </a:prstGeom>
+                <a:blipFill>
+                  <a:blip r:embed="rId3"/>
+                  <a:stretch>
+                    <a:fillRect/>
+                  </a:stretch>
+                </a:blipFill>
+              </p:spPr>
+              <p:txBody>
+                <a:bodyPr/>
+                <a:lstStyle/>
+                <a:p>
+                  <a:r>
+                    <a:rPr lang="en-US">
+                      <a:noFill/>
+                    </a:rPr>
+                    <a:t> </a:t>
+                  </a:r>
+                </a:p>
+              </p:txBody>
+            </p:sp>
+          </mc:Fallback>
+        </mc:AlternateContent>
+        <p:sp>
+          <p:nvSpPr>
+            <p:cNvPr id="32" name="TextBox 31">
+              <a:extLst>
+                <a:ext uri="{FF2B5EF4-FFF2-40B4-BE49-F238E27FC236}">
+                  <a16:creationId xmlns:a16="http://schemas.microsoft.com/office/drawing/2014/main" id="{9597EF82-9434-E097-F06B-A7EFCB06B302}"/>
+                </a:ext>
+              </a:extLst>
+            </p:cNvPr>
+            <p:cNvSpPr txBox="1"/>
+            <p:nvPr/>
+          </p:nvSpPr>
+          <p:spPr>
+            <a:xfrm>
+              <a:off x="5777047" y="3947245"/>
+              <a:ext cx="4931158" cy="646331"/>
+            </a:xfrm>
+            <a:prstGeom prst="rect">
+              <a:avLst/>
+            </a:prstGeom>
+            <a:noFill/>
+          </p:spPr>
+          <p:txBody>
+            <a:bodyPr wrap="none" rtlCol="0">
+              <a:spAutoFit/>
+            </a:bodyPr>
+            <a:lstStyle/>
+            <a:p>
+              <a:r>
+                <a:rPr lang="en-US" sz="3600" dirty="0"/>
+                <a:t>Quantum state vectors</a:t>
+              </a:r>
+            </a:p>
+          </p:txBody>
+        </p:sp>
+      </p:grpSp>
+      <p:grpSp>
+        <p:nvGrpSpPr>
+          <p:cNvPr id="17" name="Group 16">
+            <a:extLst>
+              <a:ext uri="{FF2B5EF4-FFF2-40B4-BE49-F238E27FC236}">
+                <a16:creationId xmlns:a16="http://schemas.microsoft.com/office/drawing/2014/main" id="{68446EF5-13DB-1A3A-6BDB-7E399CAF6B4F}"/>
+              </a:ext>
+            </a:extLst>
+          </p:cNvPr>
+          <p:cNvGrpSpPr/>
+          <p:nvPr/>
+        </p:nvGrpSpPr>
+        <p:grpSpPr>
+          <a:xfrm>
+            <a:off x="6329788" y="1140665"/>
+            <a:ext cx="4812536" cy="2238859"/>
+            <a:chOff x="5754398" y="1182742"/>
+            <a:chExt cx="4812536" cy="2238859"/>
+          </a:xfrm>
+        </p:grpSpPr>
+        <p:sp>
+          <p:nvSpPr>
+            <p:cNvPr id="19" name="TextBox 18">
+              <a:extLst>
+                <a:ext uri="{FF2B5EF4-FFF2-40B4-BE49-F238E27FC236}">
+                  <a16:creationId xmlns:a16="http://schemas.microsoft.com/office/drawing/2014/main" id="{E6895ADA-BC6F-4598-231D-7717C8AB324A}"/>
+                </a:ext>
+              </a:extLst>
+            </p:cNvPr>
+            <p:cNvSpPr txBox="1"/>
+            <p:nvPr/>
+          </p:nvSpPr>
+          <p:spPr>
+            <a:xfrm>
+              <a:off x="5754398" y="1182742"/>
+              <a:ext cx="4812536" cy="646331"/>
+            </a:xfrm>
+            <a:prstGeom prst="rect">
+              <a:avLst/>
+            </a:prstGeom>
+            <a:noFill/>
+          </p:spPr>
+          <p:txBody>
+            <a:bodyPr wrap="none" rtlCol="0">
+              <a:spAutoFit/>
+            </a:bodyPr>
+            <a:lstStyle/>
+            <a:p>
+              <a:r>
+                <a:rPr lang="en-US" sz="3600" dirty="0"/>
+                <a:t>Physical space vectors</a:t>
+              </a:r>
+            </a:p>
+          </p:txBody>
+        </p:sp>
+        <mc:AlternateContent xmlns:mc="http://schemas.openxmlformats.org/markup-compatibility/2006">
+          <mc:Choice xmlns:a14="http://schemas.microsoft.com/office/drawing/2010/main" Requires="a14">
+            <p:sp>
+              <p:nvSpPr>
+                <p:cNvPr id="25" name="TextBox 24">
+                  <a:extLst>
+                    <a:ext uri="{FF2B5EF4-FFF2-40B4-BE49-F238E27FC236}">
+                      <a16:creationId xmlns:a16="http://schemas.microsoft.com/office/drawing/2014/main" id="{2C1948FE-329E-33B9-9DEF-84E0EFA84ECD}"/>
+                    </a:ext>
+                  </a:extLst>
+                </p:cNvPr>
+                <p:cNvSpPr txBox="1"/>
+                <p:nvPr/>
+              </p:nvSpPr>
+              <p:spPr>
+                <a:xfrm>
+                  <a:off x="6815843" y="1813712"/>
+                  <a:ext cx="2689646" cy="923330"/>
+                </a:xfrm>
+                <a:prstGeom prst="rect">
+                  <a:avLst/>
+                </a:prstGeom>
+                <a:noFill/>
+              </p:spPr>
+              <p:txBody>
+                <a:bodyPr wrap="none" rtlCol="0">
+                  <a:spAutoFit/>
+                </a:bodyPr>
+                <a:lstStyle/>
+                <a:p>
+                  <a:pPr/>
+                  <a14:m>
+                    <m:oMathPara xmlns:m="http://schemas.openxmlformats.org/officeDocument/2006/math">
+                      <m:oMathParaPr>
+                        <m:jc m:val="centerGroup"/>
+                      </m:oMathParaPr>
+                      <m:oMath xmlns:m="http://schemas.openxmlformats.org/officeDocument/2006/math">
+                        <m:d>
+                          <m:dPr>
+                            <m:ctrlPr>
+                              <a:rPr lang="en-US" sz="5400" b="0" i="1" smtClean="0">
+                                <a:solidFill>
+                                  <a:schemeClr val="tx1"/>
+                                </a:solidFill>
+                                <a:latin typeface="Cambria Math" panose="02040503050406030204" pitchFamily="18" charset="0"/>
+                              </a:rPr>
+                            </m:ctrlPr>
+                          </m:dPr>
+                          <m:e>
+                            <m:sSup>
+                              <m:sSupPr>
+                                <m:ctrlPr>
+                                  <a:rPr lang="en-US" sz="5400" b="0" i="1" smtClean="0">
+                                    <a:solidFill>
+                                      <a:srgbClr val="7030A0"/>
+                                    </a:solidFill>
+                                    <a:latin typeface="Cambria Math" panose="02040503050406030204" pitchFamily="18" charset="0"/>
+                                  </a:rPr>
+                                </m:ctrlPr>
+                              </m:sSupPr>
+                              <m:e>
+                                <m:r>
+                                  <a:rPr lang="en-US" sz="5400" b="0" i="1" smtClean="0">
+                                    <a:solidFill>
+                                      <a:srgbClr val="7030A0"/>
+                                    </a:solidFill>
+                                    <a:latin typeface="Cambria Math" panose="02040503050406030204" pitchFamily="18" charset="0"/>
+                                  </a:rPr>
+                                  <m:t>𝑣</m:t>
+                                </m:r>
+                              </m:e>
+                              <m:sup>
+                                <m:r>
+                                  <a:rPr lang="en-US" sz="5400" b="0" i="1" smtClean="0">
+                                    <a:solidFill>
+                                      <a:srgbClr val="7030A0"/>
+                                    </a:solidFill>
+                                    <a:latin typeface="Cambria Math" panose="02040503050406030204" pitchFamily="18" charset="0"/>
+                                  </a:rPr>
+                                  <m:t>𝑥</m:t>
+                                </m:r>
+                              </m:sup>
+                            </m:sSup>
+                            <m:r>
+                              <a:rPr lang="en-US" sz="5400" b="0" i="1" smtClean="0">
+                                <a:solidFill>
+                                  <a:schemeClr val="tx1"/>
+                                </a:solidFill>
+                                <a:latin typeface="Cambria Math" panose="02040503050406030204" pitchFamily="18" charset="0"/>
+                              </a:rPr>
+                              <m:t>,</m:t>
+                            </m:r>
+                            <m:r>
+                              <a:rPr lang="en-US" sz="5400" b="0" i="1" smtClean="0">
+                                <a:solidFill>
+                                  <a:schemeClr val="tx1"/>
+                                </a:solidFill>
+                                <a:latin typeface="Cambria Math" panose="02040503050406030204" pitchFamily="18" charset="0"/>
+                              </a:rPr>
+                              <m:t> </m:t>
+                            </m:r>
+                            <m:sSup>
+                              <m:sSupPr>
+                                <m:ctrlPr>
+                                  <a:rPr lang="en-US" sz="5400" b="0" i="1" smtClean="0">
+                                    <a:solidFill>
+                                      <a:srgbClr val="00B0F0"/>
+                                    </a:solidFill>
+                                    <a:latin typeface="Cambria Math" panose="02040503050406030204" pitchFamily="18" charset="0"/>
+                                  </a:rPr>
+                                </m:ctrlPr>
+                              </m:sSupPr>
+                              <m:e>
+                                <m:r>
+                                  <a:rPr lang="en-US" sz="5400" b="0" i="1" smtClean="0">
+                                    <a:solidFill>
+                                      <a:srgbClr val="00B0F0"/>
+                                    </a:solidFill>
+                                    <a:latin typeface="Cambria Math" panose="02040503050406030204" pitchFamily="18" charset="0"/>
+                                  </a:rPr>
+                                  <m:t>𝑣</m:t>
+                                </m:r>
+                              </m:e>
+                              <m:sup>
+                                <m:r>
+                                  <a:rPr lang="en-US" sz="5400" b="0" i="1" smtClean="0">
+                                    <a:solidFill>
+                                      <a:srgbClr val="00B0F0"/>
+                                    </a:solidFill>
+                                    <a:latin typeface="Cambria Math" panose="02040503050406030204" pitchFamily="18" charset="0"/>
+                                  </a:rPr>
+                                  <m:t>𝑧</m:t>
+                                </m:r>
+                              </m:sup>
+                            </m:sSup>
+                          </m:e>
+                        </m:d>
+                      </m:oMath>
+                    </m:oMathPara>
+                  </a14:m>
+                  <a:endParaRPr lang="en-US" sz="5400" dirty="0">
+                    <a:solidFill>
+                      <a:schemeClr val="tx1"/>
+                    </a:solidFill>
+                  </a:endParaRPr>
+                </a:p>
+              </p:txBody>
+            </p:sp>
+          </mc:Choice>
+          <mc:Fallback>
+            <p:sp>
+              <p:nvSpPr>
+                <p:cNvPr id="25" name="TextBox 24">
+                  <a:extLst>
+                    <a:ext uri="{FF2B5EF4-FFF2-40B4-BE49-F238E27FC236}">
+                      <a16:creationId xmlns:a16="http://schemas.microsoft.com/office/drawing/2014/main" id="{2C1948FE-329E-33B9-9DEF-84E0EFA84ECD}"/>
+                    </a:ext>
+                  </a:extLst>
+                </p:cNvPr>
+                <p:cNvSpPr txBox="1">
+                  <a:spLocks noRot="1" noChangeAspect="1" noMove="1" noResize="1" noEditPoints="1" noAdjustHandles="1" noChangeArrowheads="1" noChangeShapeType="1" noTextEdit="1"/>
+                </p:cNvSpPr>
+                <p:nvPr/>
+              </p:nvSpPr>
+              <p:spPr>
+                <a:xfrm>
+                  <a:off x="6815843" y="1813712"/>
+                  <a:ext cx="2689646" cy="923330"/>
+                </a:xfrm>
+                <a:prstGeom prst="rect">
+                  <a:avLst/>
+                </a:prstGeom>
+                <a:blipFill>
+                  <a:blip r:embed="rId4"/>
+                  <a:stretch>
+                    <a:fillRect/>
+                  </a:stretch>
+                </a:blipFill>
+              </p:spPr>
+              <p:txBody>
+                <a:bodyPr/>
+                <a:lstStyle/>
+                <a:p>
+                  <a:r>
+                    <a:rPr lang="en-US">
+                      <a:noFill/>
+                    </a:rPr>
+                    <a:t> </a:t>
+                  </a:r>
+                </a:p>
+              </p:txBody>
+            </p:sp>
+          </mc:Fallback>
+        </mc:AlternateContent>
+        <mc:AlternateContent xmlns:mc="http://schemas.openxmlformats.org/markup-compatibility/2006">
+          <mc:Choice xmlns:a14="http://schemas.microsoft.com/office/drawing/2010/main" Requires="a14">
+            <p:sp>
+              <p:nvSpPr>
+                <p:cNvPr id="26" name="TextBox 25">
+                  <a:extLst>
+                    <a:ext uri="{FF2B5EF4-FFF2-40B4-BE49-F238E27FC236}">
+                      <a16:creationId xmlns:a16="http://schemas.microsoft.com/office/drawing/2014/main" id="{F259711A-D914-6A04-47BE-F32667DB4B18}"/>
+                    </a:ext>
+                  </a:extLst>
+                </p:cNvPr>
+                <p:cNvSpPr txBox="1"/>
+                <p:nvPr/>
+              </p:nvSpPr>
+              <p:spPr>
+                <a:xfrm>
+                  <a:off x="6417304" y="2836826"/>
+                  <a:ext cx="3486724" cy="584775"/>
+                </a:xfrm>
+                <a:prstGeom prst="rect">
+                  <a:avLst/>
+                </a:prstGeom>
+                <a:noFill/>
+              </p:spPr>
+              <p:txBody>
+                <a:bodyPr wrap="none" rtlCol="0">
+                  <a:spAutoFit/>
+                </a:bodyPr>
+                <a:lstStyle/>
+                <a:p>
+                  <a:pPr/>
+                  <a14:m>
+                    <m:oMathPara xmlns:m="http://schemas.openxmlformats.org/officeDocument/2006/math">
+                      <m:oMathParaPr>
+                        <m:jc m:val="centerGroup"/>
+                      </m:oMathParaPr>
+                      <m:oMath xmlns:m="http://schemas.openxmlformats.org/officeDocument/2006/math">
+                        <m:sSup>
+                          <m:sSupPr>
+                            <m:ctrlPr>
+                              <a:rPr lang="en-US" sz="3200" i="1" smtClean="0">
+                                <a:latin typeface="Cambria Math" panose="02040503050406030204" pitchFamily="18" charset="0"/>
+                              </a:rPr>
+                            </m:ctrlPr>
+                          </m:sSupPr>
+                          <m:e>
+                            <m:d>
+                              <m:dPr>
+                                <m:ctrlPr>
+                                  <a:rPr lang="en-US" sz="3200" i="1">
+                                    <a:latin typeface="Cambria Math" panose="02040503050406030204" pitchFamily="18" charset="0"/>
+                                  </a:rPr>
+                                </m:ctrlPr>
+                              </m:dPr>
+                              <m:e>
+                                <m:sSup>
+                                  <m:sSupPr>
+                                    <m:ctrlPr>
+                                      <a:rPr lang="en-US" sz="3200" i="1">
+                                        <a:latin typeface="Cambria Math" panose="02040503050406030204" pitchFamily="18" charset="0"/>
+                                      </a:rPr>
+                                    </m:ctrlPr>
+                                  </m:sSupPr>
+                                  <m:e>
+                                    <m:r>
+                                      <a:rPr lang="en-US" sz="3200" i="1">
+                                        <a:latin typeface="Cambria Math" panose="02040503050406030204" pitchFamily="18" charset="0"/>
+                                      </a:rPr>
+                                      <m:t>𝑣</m:t>
+                                    </m:r>
+                                  </m:e>
+                                  <m:sup>
+                                    <m:r>
+                                      <a:rPr lang="en-US" sz="3200" i="1">
+                                        <a:latin typeface="Cambria Math" panose="02040503050406030204" pitchFamily="18" charset="0"/>
+                                      </a:rPr>
+                                      <m:t>𝑥</m:t>
+                                    </m:r>
+                                  </m:sup>
+                                </m:sSup>
+                              </m:e>
+                            </m:d>
+                          </m:e>
+                          <m:sup>
+                            <m:r>
+                              <a:rPr lang="en-US" sz="3200" i="1">
+                                <a:latin typeface="Cambria Math" panose="02040503050406030204" pitchFamily="18" charset="0"/>
+                              </a:rPr>
+                              <m:t>2</m:t>
+                            </m:r>
+                          </m:sup>
+                        </m:sSup>
+                        <m:r>
+                          <a:rPr lang="en-US" sz="3200" i="1">
+                            <a:latin typeface="Cambria Math" panose="02040503050406030204" pitchFamily="18" charset="0"/>
+                          </a:rPr>
+                          <m:t>+</m:t>
+                        </m:r>
+                        <m:sSup>
+                          <m:sSupPr>
+                            <m:ctrlPr>
+                              <a:rPr lang="en-US" sz="3200" i="1">
+                                <a:latin typeface="Cambria Math" panose="02040503050406030204" pitchFamily="18" charset="0"/>
+                              </a:rPr>
+                            </m:ctrlPr>
+                          </m:sSupPr>
+                          <m:e>
+                            <m:d>
+                              <m:dPr>
+                                <m:ctrlPr>
+                                  <a:rPr lang="en-US" sz="3200" i="1">
+                                    <a:latin typeface="Cambria Math" panose="02040503050406030204" pitchFamily="18" charset="0"/>
+                                  </a:rPr>
+                                </m:ctrlPr>
+                              </m:dPr>
+                              <m:e>
+                                <m:sSup>
+                                  <m:sSupPr>
+                                    <m:ctrlPr>
+                                      <a:rPr lang="en-US" sz="3200" i="1">
+                                        <a:latin typeface="Cambria Math" panose="02040503050406030204" pitchFamily="18" charset="0"/>
+                                      </a:rPr>
+                                    </m:ctrlPr>
+                                  </m:sSupPr>
+                                  <m:e>
+                                    <m:r>
+                                      <a:rPr lang="en-US" sz="3200" i="1">
+                                        <a:latin typeface="Cambria Math" panose="02040503050406030204" pitchFamily="18" charset="0"/>
+                                      </a:rPr>
+                                      <m:t>𝑣</m:t>
+                                    </m:r>
+                                  </m:e>
+                                  <m:sup>
+                                    <m:r>
+                                      <a:rPr lang="en-US" sz="3200" b="0" i="1" smtClean="0">
+                                        <a:latin typeface="Cambria Math" panose="02040503050406030204" pitchFamily="18" charset="0"/>
+                                      </a:rPr>
+                                      <m:t>𝑧</m:t>
+                                    </m:r>
+                                  </m:sup>
+                                </m:sSup>
+                              </m:e>
+                            </m:d>
+                          </m:e>
+                          <m:sup>
+                            <m:r>
+                              <a:rPr lang="en-US" sz="3200" i="1">
+                                <a:latin typeface="Cambria Math" panose="02040503050406030204" pitchFamily="18" charset="0"/>
+                              </a:rPr>
+                              <m:t>2</m:t>
+                            </m:r>
+                          </m:sup>
+                        </m:sSup>
+                        <m:r>
+                          <a:rPr lang="en-US" sz="3200" b="0" i="1" smtClean="0">
+                            <a:latin typeface="Cambria Math" panose="02040503050406030204" pitchFamily="18" charset="0"/>
+                          </a:rPr>
+                          <m:t>=1</m:t>
+                        </m:r>
+                      </m:oMath>
+                    </m:oMathPara>
+                  </a14:m>
+                  <a:endParaRPr lang="en-US" sz="3200" dirty="0">
+                    <a:solidFill>
+                      <a:schemeClr val="tx1"/>
+                    </a:solidFill>
+                  </a:endParaRPr>
+                </a:p>
+              </p:txBody>
+            </p:sp>
+          </mc:Choice>
+          <mc:Fallback>
+            <p:sp>
+              <p:nvSpPr>
+                <p:cNvPr id="26" name="TextBox 25">
+                  <a:extLst>
+                    <a:ext uri="{FF2B5EF4-FFF2-40B4-BE49-F238E27FC236}">
+                      <a16:creationId xmlns:a16="http://schemas.microsoft.com/office/drawing/2014/main" id="{F259711A-D914-6A04-47BE-F32667DB4B18}"/>
+                    </a:ext>
+                  </a:extLst>
+                </p:cNvPr>
+                <p:cNvSpPr txBox="1">
+                  <a:spLocks noRot="1" noChangeAspect="1" noMove="1" noResize="1" noEditPoints="1" noAdjustHandles="1" noChangeArrowheads="1" noChangeShapeType="1" noTextEdit="1"/>
+                </p:cNvSpPr>
+                <p:nvPr/>
+              </p:nvSpPr>
+              <p:spPr>
+                <a:xfrm>
+                  <a:off x="6417304" y="2836826"/>
+                  <a:ext cx="3486724" cy="584775"/>
+                </a:xfrm>
+                <a:prstGeom prst="rect">
+                  <a:avLst/>
+                </a:prstGeom>
+                <a:blipFill>
+                  <a:blip r:embed="rId5"/>
+                  <a:stretch>
+                    <a:fillRect/>
+                  </a:stretch>
+                </a:blipFill>
+              </p:spPr>
+              <p:txBody>
+                <a:bodyPr/>
+                <a:lstStyle/>
+                <a:p>
+                  <a:r>
+                    <a:rPr lang="en-US">
+                      <a:noFill/>
+                    </a:rPr>
+                    <a:t> </a:t>
+                  </a:r>
+                </a:p>
+              </p:txBody>
+            </p:sp>
+          </mc:Fallback>
+        </mc:AlternateContent>
+      </p:grpSp>
+      <p:grpSp>
+        <p:nvGrpSpPr>
+          <p:cNvPr id="2" name="Group 1">
+            <a:extLst>
+              <a:ext uri="{FF2B5EF4-FFF2-40B4-BE49-F238E27FC236}">
+                <a16:creationId xmlns:a16="http://schemas.microsoft.com/office/drawing/2014/main" id="{9ABC83A2-E7E6-761E-0E7D-DAF85974254E}"/>
+              </a:ext>
+            </a:extLst>
+          </p:cNvPr>
+          <p:cNvGrpSpPr/>
+          <p:nvPr/>
+        </p:nvGrpSpPr>
+        <p:grpSpPr>
+          <a:xfrm>
+            <a:off x="1095410" y="1175786"/>
+            <a:ext cx="3577708" cy="4608064"/>
+            <a:chOff x="1153584" y="233822"/>
+            <a:chExt cx="3577708" cy="4608064"/>
+          </a:xfrm>
+        </p:grpSpPr>
+        <p:sp>
+          <p:nvSpPr>
+            <p:cNvPr id="35" name="Arc 34">
+              <a:extLst>
+                <a:ext uri="{FF2B5EF4-FFF2-40B4-BE49-F238E27FC236}">
+                  <a16:creationId xmlns:a16="http://schemas.microsoft.com/office/drawing/2014/main" id="{E681EDC1-AD7F-4AF4-98BB-0D9BE0712D9D}"/>
+                </a:ext>
+              </a:extLst>
+            </p:cNvPr>
+            <p:cNvSpPr/>
+            <p:nvPr/>
+          </p:nvSpPr>
+          <p:spPr>
+            <a:xfrm>
+              <a:off x="2598212" y="2085993"/>
+              <a:ext cx="697242" cy="553554"/>
+            </a:xfrm>
+            <a:prstGeom prst="arc">
+              <a:avLst>
+                <a:gd name="adj1" fmla="val 16200000"/>
+                <a:gd name="adj2" fmla="val 20129490"/>
+              </a:avLst>
+            </a:prstGeom>
+          </p:spPr>
+          <p:style>
+            <a:lnRef idx="1">
+              <a:schemeClr val="accent1"/>
+            </a:lnRef>
+            <a:fillRef idx="0">
+              <a:schemeClr val="accent1"/>
+            </a:fillRef>
+            <a:effectRef idx="0">
+              <a:schemeClr val="accent1"/>
+            </a:effectRef>
+            <a:fontRef idx="minor">
+              <a:schemeClr val="tx1"/>
+            </a:fontRef>
+          </p:style>
+          <p:txBody>
+            <a:bodyPr rtlCol="0" anchor="ctr"/>
+            <a:lstStyle/>
+            <a:p>
+              <a:pPr algn="ctr"/>
+              <a:endParaRPr lang="en-US"/>
+            </a:p>
+          </p:txBody>
+        </p:sp>
+        <p:grpSp>
+          <p:nvGrpSpPr>
+            <p:cNvPr id="36" name="Group 35">
+              <a:extLst>
+                <a:ext uri="{FF2B5EF4-FFF2-40B4-BE49-F238E27FC236}">
+                  <a16:creationId xmlns:a16="http://schemas.microsoft.com/office/drawing/2014/main" id="{2B367656-9EC8-0B9B-4285-CC351D65EF0C}"/>
+                </a:ext>
+              </a:extLst>
+            </p:cNvPr>
+            <p:cNvGrpSpPr/>
+            <p:nvPr/>
+          </p:nvGrpSpPr>
+          <p:grpSpPr>
+            <a:xfrm>
+              <a:off x="1153584" y="740244"/>
+              <a:ext cx="3577708" cy="3577703"/>
+              <a:chOff x="2012104" y="948792"/>
+              <a:chExt cx="3577708" cy="3577703"/>
+            </a:xfrm>
+          </p:grpSpPr>
+          <p:cxnSp>
+            <p:nvCxnSpPr>
+              <p:cNvPr id="39" name="Straight Connector 38">
+                <a:extLst>
+                  <a:ext uri="{FF2B5EF4-FFF2-40B4-BE49-F238E27FC236}">
+                    <a16:creationId xmlns:a16="http://schemas.microsoft.com/office/drawing/2014/main" id="{BD99E079-0915-B20D-6776-52885AAEABAE}"/>
+                  </a:ext>
+                </a:extLst>
+              </p:cNvPr>
+              <p:cNvCxnSpPr>
+                <a:cxnSpLocks/>
+                <a:stCxn id="47" idx="2"/>
+              </p:cNvCxnSpPr>
+              <p:nvPr/>
+            </p:nvCxnSpPr>
+            <p:spPr>
+              <a:xfrm>
+                <a:off x="2012104" y="2737644"/>
+                <a:ext cx="3577706" cy="7622"/>
+              </a:xfrm>
+              <a:prstGeom prst="line">
+                <a:avLst/>
+              </a:prstGeom>
+              <a:ln/>
+            </p:spPr>
+            <p:style>
+              <a:lnRef idx="1">
+                <a:schemeClr val="accent1"/>
+              </a:lnRef>
+              <a:fillRef idx="0">
+                <a:schemeClr val="accent1"/>
+              </a:fillRef>
+              <a:effectRef idx="0">
+                <a:schemeClr val="accent1"/>
+              </a:effectRef>
+              <a:fontRef idx="minor">
+                <a:schemeClr val="tx1"/>
+              </a:fontRef>
+            </p:style>
+          </p:cxnSp>
+          <p:cxnSp>
+            <p:nvCxnSpPr>
+              <p:cNvPr id="40" name="Straight Connector 39">
+                <a:extLst>
+                  <a:ext uri="{FF2B5EF4-FFF2-40B4-BE49-F238E27FC236}">
+                    <a16:creationId xmlns:a16="http://schemas.microsoft.com/office/drawing/2014/main" id="{D7534988-F952-1CA1-1249-FB1ECDC1777D}"/>
+                  </a:ext>
+                </a:extLst>
+              </p:cNvPr>
+              <p:cNvCxnSpPr>
+                <a:cxnSpLocks/>
+                <a:stCxn id="47" idx="0"/>
+                <a:endCxn id="47" idx="4"/>
+              </p:cNvCxnSpPr>
+              <p:nvPr/>
+            </p:nvCxnSpPr>
+            <p:spPr>
+              <a:xfrm>
+                <a:off x="3800958" y="948792"/>
+                <a:ext cx="0" cy="3577703"/>
+              </a:xfrm>
+              <a:prstGeom prst="line">
+                <a:avLst/>
+              </a:prstGeom>
+              <a:ln/>
+            </p:spPr>
+            <p:style>
+              <a:lnRef idx="1">
+                <a:schemeClr val="accent1"/>
+              </a:lnRef>
+              <a:fillRef idx="0">
+                <a:schemeClr val="accent1"/>
+              </a:fillRef>
+              <a:effectRef idx="0">
+                <a:schemeClr val="accent1"/>
+              </a:effectRef>
+              <a:fontRef idx="minor">
+                <a:schemeClr val="tx1"/>
+              </a:fontRef>
+            </p:style>
+          </p:cxnSp>
+          <p:grpSp>
+            <p:nvGrpSpPr>
+              <p:cNvPr id="41" name="Group 40">
+                <a:extLst>
+                  <a:ext uri="{FF2B5EF4-FFF2-40B4-BE49-F238E27FC236}">
+                    <a16:creationId xmlns:a16="http://schemas.microsoft.com/office/drawing/2014/main" id="{6F1AA92F-77E8-9059-EE7B-674F3374B872}"/>
+                  </a:ext>
+                </a:extLst>
+              </p:cNvPr>
+              <p:cNvGrpSpPr/>
+              <p:nvPr/>
+            </p:nvGrpSpPr>
+            <p:grpSpPr>
+              <a:xfrm>
+                <a:off x="2012104" y="948792"/>
+                <a:ext cx="3577708" cy="3577703"/>
+                <a:chOff x="934944" y="1636949"/>
+                <a:chExt cx="2674273" cy="2674270"/>
+              </a:xfrm>
+            </p:grpSpPr>
+            <p:grpSp>
+              <p:nvGrpSpPr>
+                <p:cNvPr id="42" name="Group 41">
+                  <a:extLst>
+                    <a:ext uri="{FF2B5EF4-FFF2-40B4-BE49-F238E27FC236}">
+                      <a16:creationId xmlns:a16="http://schemas.microsoft.com/office/drawing/2014/main" id="{6EE54D14-CF6B-98C8-9411-ED8103262F40}"/>
+                    </a:ext>
+                  </a:extLst>
+                </p:cNvPr>
+                <p:cNvGrpSpPr/>
+                <p:nvPr/>
+              </p:nvGrpSpPr>
+              <p:grpSpPr>
+                <a:xfrm>
+                  <a:off x="934944" y="1636949"/>
+                  <a:ext cx="2674273" cy="2674270"/>
+                  <a:chOff x="2521889" y="2808131"/>
+                  <a:chExt cx="1916265" cy="1916264"/>
+                </a:xfrm>
+              </p:grpSpPr>
+              <p:sp>
+                <p:nvSpPr>
+                  <p:cNvPr id="45" name="Oval 44">
+                    <a:extLst>
+                      <a:ext uri="{FF2B5EF4-FFF2-40B4-BE49-F238E27FC236}">
+                        <a16:creationId xmlns:a16="http://schemas.microsoft.com/office/drawing/2014/main" id="{F4B23E58-5215-EAAE-18C3-6CCB768438BC}"/>
+                      </a:ext>
+                    </a:extLst>
+                  </p:cNvPr>
+                  <p:cNvSpPr/>
+                  <p:nvPr/>
+                </p:nvSpPr>
+                <p:spPr>
+                  <a:xfrm>
+                    <a:off x="2521889" y="2808131"/>
+                    <a:ext cx="1916264" cy="1916264"/>
+                  </a:xfrm>
+                  <a:prstGeom prst="ellipse">
+                    <a:avLst/>
+                  </a:prstGeom>
+                  <a:ln w="12700">
+                    <a:solidFill>
+                      <a:schemeClr val="tx1"/>
+                    </a:solidFill>
+                  </a:ln>
+                </p:spPr>
+                <p:style>
+                  <a:lnRef idx="1">
+                    <a:schemeClr val="accent1"/>
+                  </a:lnRef>
+                  <a:fillRef idx="0">
+                    <a:schemeClr val="accent1"/>
+                  </a:fillRef>
+                  <a:effectRef idx="0">
+                    <a:schemeClr val="accent1"/>
+                  </a:effectRef>
+                  <a:fontRef idx="minor">
+                    <a:schemeClr val="tx1"/>
+                  </a:fontRef>
+                </p:style>
+                <p:txBody>
+                  <a:bodyPr rtlCol="0" anchor="ctr"/>
+                  <a:lstStyle/>
+                  <a:p>
+                    <a:pPr algn="ctr"/>
+                    <a:endParaRPr lang="en-US"/>
+                  </a:p>
+                </p:txBody>
+              </p:sp>
+              <p:sp>
+                <p:nvSpPr>
+                  <p:cNvPr id="46" name="Oval 31">
+                    <a:extLst>
+                      <a:ext uri="{FF2B5EF4-FFF2-40B4-BE49-F238E27FC236}">
+                        <a16:creationId xmlns:a16="http://schemas.microsoft.com/office/drawing/2014/main" id="{41CFC122-6BD6-D932-66E9-E572EB97373D}"/>
+                      </a:ext>
+                    </a:extLst>
+                  </p:cNvPr>
+                  <p:cNvSpPr/>
+                  <p:nvPr/>
+                </p:nvSpPr>
+                <p:spPr>
+                  <a:xfrm>
+                    <a:off x="2521889" y="2808132"/>
+                    <a:ext cx="1916264" cy="958132"/>
+                  </a:xfrm>
+                  <a:custGeom>
+                    <a:avLst/>
+                    <a:gdLst>
+                      <a:gd name="connsiteX0" fmla="*/ 0 w 1916264"/>
+                      <a:gd name="connsiteY0" fmla="*/ 958132 h 1916264"/>
+                      <a:gd name="connsiteX1" fmla="*/ 958132 w 1916264"/>
+                      <a:gd name="connsiteY1" fmla="*/ 0 h 1916264"/>
+                      <a:gd name="connsiteX2" fmla="*/ 1916264 w 1916264"/>
+                      <a:gd name="connsiteY2" fmla="*/ 958132 h 1916264"/>
+                      <a:gd name="connsiteX3" fmla="*/ 958132 w 1916264"/>
+                      <a:gd name="connsiteY3" fmla="*/ 1916264 h 1916264"/>
+                      <a:gd name="connsiteX4" fmla="*/ 0 w 1916264"/>
+                      <a:gd name="connsiteY4" fmla="*/ 958132 h 1916264"/>
+                      <a:gd name="connsiteX0" fmla="*/ 958132 w 1916264"/>
+                      <a:gd name="connsiteY0" fmla="*/ 1916264 h 2007704"/>
+                      <a:gd name="connsiteX1" fmla="*/ 0 w 1916264"/>
+                      <a:gd name="connsiteY1" fmla="*/ 958132 h 2007704"/>
+                      <a:gd name="connsiteX2" fmla="*/ 958132 w 1916264"/>
+                      <a:gd name="connsiteY2" fmla="*/ 0 h 2007704"/>
+                      <a:gd name="connsiteX3" fmla="*/ 1916264 w 1916264"/>
+                      <a:gd name="connsiteY3" fmla="*/ 958132 h 2007704"/>
+                      <a:gd name="connsiteX4" fmla="*/ 1049572 w 1916264"/>
+                      <a:gd name="connsiteY4" fmla="*/ 2007704 h 2007704"/>
+                      <a:gd name="connsiteX0" fmla="*/ 958132 w 1916264"/>
+                      <a:gd name="connsiteY0" fmla="*/ 1916264 h 1916264"/>
+                      <a:gd name="connsiteX1" fmla="*/ 0 w 1916264"/>
+                      <a:gd name="connsiteY1" fmla="*/ 958132 h 1916264"/>
+                      <a:gd name="connsiteX2" fmla="*/ 958132 w 1916264"/>
+                      <a:gd name="connsiteY2" fmla="*/ 0 h 1916264"/>
+                      <a:gd name="connsiteX3" fmla="*/ 1916264 w 1916264"/>
+                      <a:gd name="connsiteY3" fmla="*/ 958132 h 1916264"/>
+                      <a:gd name="connsiteX0" fmla="*/ 0 w 1916264"/>
+                      <a:gd name="connsiteY0" fmla="*/ 958132 h 958132"/>
+                      <a:gd name="connsiteX1" fmla="*/ 958132 w 1916264"/>
+                      <a:gd name="connsiteY1" fmla="*/ 0 h 958132"/>
+                      <a:gd name="connsiteX2" fmla="*/ 1916264 w 1916264"/>
+                      <a:gd name="connsiteY2" fmla="*/ 958132 h 958132"/>
+                    </a:gdLst>
+                    <a:ahLst/>
+                    <a:cxnLst>
+                      <a:cxn ang="0">
+                        <a:pos x="connsiteX0" y="connsiteY0"/>
+                      </a:cxn>
+                      <a:cxn ang="0">
+                        <a:pos x="connsiteX1" y="connsiteY1"/>
+                      </a:cxn>
+                      <a:cxn ang="0">
+                        <a:pos x="connsiteX2" y="connsiteY2"/>
+                      </a:cxn>
+                    </a:cxnLst>
+                    <a:rect l="l" t="t" r="r" b="b"/>
+                    <a:pathLst>
+                      <a:path w="1916264" h="958132">
+                        <a:moveTo>
+                          <a:pt x="0" y="958132"/>
+                        </a:moveTo>
+                        <a:cubicBezTo>
+                          <a:pt x="0" y="428970"/>
+                          <a:pt x="428970" y="0"/>
+                          <a:pt x="958132" y="0"/>
+                        </a:cubicBezTo>
+                        <a:cubicBezTo>
+                          <a:pt x="1487294" y="0"/>
+                          <a:pt x="1916264" y="428970"/>
+                          <a:pt x="1916264" y="958132"/>
+                        </a:cubicBezTo>
+                      </a:path>
+                    </a:pathLst>
+                  </a:custGeom>
+                  <a:noFill/>
+                  <a:ln w="28575">
+                    <a:solidFill>
+                      <a:schemeClr val="accent1"/>
+                    </a:solidFill>
+                  </a:ln>
+                </p:spPr>
+                <p:style>
+                  <a:lnRef idx="2">
+                    <a:schemeClr val="accent1">
+                      <a:shade val="15000"/>
+                    </a:schemeClr>
+                  </a:lnRef>
+                  <a:fillRef idx="1">
+                    <a:schemeClr val="accent1"/>
+                  </a:fillRef>
+                  <a:effectRef idx="0">
+                    <a:schemeClr val="accent1"/>
+                  </a:effectRef>
+                  <a:fontRef idx="minor">
+                    <a:schemeClr val="lt1"/>
+                  </a:fontRef>
+                </p:style>
+                <p:txBody>
+                  <a:bodyPr rtlCol="0" anchor="ctr"/>
+                  <a:lstStyle/>
+                  <a:p>
+                    <a:pPr algn="ctr"/>
+                    <a:endParaRPr lang="en-US"/>
+                  </a:p>
+                </p:txBody>
+              </p:sp>
+              <p:sp>
+                <p:nvSpPr>
+                  <p:cNvPr id="47" name="Oval 46">
+                    <a:extLst>
+                      <a:ext uri="{FF2B5EF4-FFF2-40B4-BE49-F238E27FC236}">
+                        <a16:creationId xmlns:a16="http://schemas.microsoft.com/office/drawing/2014/main" id="{6AE097C2-187A-2B46-8124-DEEC6A810E60}"/>
+                      </a:ext>
+                    </a:extLst>
+                  </p:cNvPr>
+                  <p:cNvSpPr/>
+                  <p:nvPr/>
+                </p:nvSpPr>
+                <p:spPr>
+                  <a:xfrm>
+                    <a:off x="2521889" y="2808131"/>
+                    <a:ext cx="1916265" cy="1916264"/>
+                  </a:xfrm>
+                  <a:prstGeom prst="ellipse">
+                    <a:avLst/>
+                  </a:prstGeom>
+                  <a:noFill/>
+                  <a:ln w="28575">
+                    <a:solidFill>
+                      <a:schemeClr val="accent1"/>
+                    </a:solidFill>
+                  </a:ln>
+                </p:spPr>
+                <p:style>
+                  <a:lnRef idx="2">
+                    <a:schemeClr val="accent1">
+                      <a:shade val="15000"/>
+                    </a:schemeClr>
+                  </a:lnRef>
+                  <a:fillRef idx="1">
+                    <a:schemeClr val="accent1"/>
+                  </a:fillRef>
+                  <a:effectRef idx="0">
+                    <a:schemeClr val="accent1"/>
+                  </a:effectRef>
+                  <a:fontRef idx="minor">
+                    <a:schemeClr val="lt1"/>
+                  </a:fontRef>
+                </p:style>
+                <p:txBody>
+                  <a:bodyPr rtlCol="0" anchor="ctr"/>
+                  <a:lstStyle/>
+                  <a:p>
+                    <a:pPr algn="ctr"/>
+                    <a:endParaRPr lang="en-US">
+                      <a:solidFill>
+                        <a:schemeClr val="lt1"/>
+                      </a:solidFill>
+                    </a:endParaRPr>
+                  </a:p>
+                </p:txBody>
+              </p:sp>
+            </p:grpSp>
+            <p:cxnSp>
+              <p:nvCxnSpPr>
+                <p:cNvPr id="43" name="Straight Arrow Connector 42">
+                  <a:extLst>
+                    <a:ext uri="{FF2B5EF4-FFF2-40B4-BE49-F238E27FC236}">
+                      <a16:creationId xmlns:a16="http://schemas.microsoft.com/office/drawing/2014/main" id="{FCB8D567-6374-CB9D-D28B-6A2F62A9BE46}"/>
+                    </a:ext>
+                  </a:extLst>
+                </p:cNvPr>
+                <p:cNvCxnSpPr>
+                  <a:cxnSpLocks/>
+                  <a:endCxn id="47" idx="7"/>
+                </p:cNvCxnSpPr>
+                <p:nvPr/>
+              </p:nvCxnSpPr>
+              <p:spPr>
+                <a:xfrm flipV="1">
+                  <a:off x="2272076" y="2028586"/>
+                  <a:ext cx="945503" cy="945496"/>
+                </a:xfrm>
+                <a:prstGeom prst="straightConnector1">
+                  <a:avLst/>
+                </a:prstGeom>
+                <a:ln w="28575">
+                  <a:solidFill>
+                    <a:schemeClr val="tx1"/>
+                  </a:solidFill>
+                  <a:tailEnd type="triangle" w="lg" len="lg"/>
+                </a:ln>
+              </p:spPr>
+              <p:style>
+                <a:lnRef idx="1">
+                  <a:schemeClr val="accent1"/>
+                </a:lnRef>
+                <a:fillRef idx="0">
+                  <a:schemeClr val="accent1"/>
+                </a:fillRef>
+                <a:effectRef idx="0">
+                  <a:schemeClr val="accent1"/>
+                </a:effectRef>
+                <a:fontRef idx="minor">
+                  <a:schemeClr val="tx1"/>
+                </a:fontRef>
+              </p:style>
+            </p:cxnSp>
+          </p:grpSp>
+        </p:grpSp>
+        <mc:AlternateContent xmlns:mc="http://schemas.openxmlformats.org/markup-compatibility/2006">
+          <mc:Choice xmlns:a14="http://schemas.microsoft.com/office/drawing/2010/main" Requires="a14">
+            <p:sp>
+              <p:nvSpPr>
+                <p:cNvPr id="51" name="TextBox 50">
+                  <a:extLst>
+                    <a:ext uri="{FF2B5EF4-FFF2-40B4-BE49-F238E27FC236}">
+                      <a16:creationId xmlns:a16="http://schemas.microsoft.com/office/drawing/2014/main" id="{47AFC1E6-DE3A-B820-91DD-9E9B0020B0DB}"/>
+                    </a:ext>
+                  </a:extLst>
+                </p:cNvPr>
+                <p:cNvSpPr txBox="1"/>
+                <p:nvPr/>
+              </p:nvSpPr>
+              <p:spPr>
+                <a:xfrm>
+                  <a:off x="2920848" y="1799377"/>
+                  <a:ext cx="500535" cy="494101"/>
+                </a:xfrm>
+                <a:prstGeom prst="rect">
+                  <a:avLst/>
+                </a:prstGeom>
+                <a:noFill/>
+              </p:spPr>
+              <p:txBody>
+                <a:bodyPr wrap="none" rtlCol="0">
+                  <a:spAutoFit/>
+                </a:bodyPr>
+                <a:lstStyle/>
+                <a:p>
+                  <a:pPr/>
+                  <a14:m>
+                    <m:oMathPara xmlns:m="http://schemas.openxmlformats.org/officeDocument/2006/math">
+                      <m:oMathParaPr>
+                        <m:jc m:val="centerGroup"/>
+                      </m:oMathParaPr>
+                      <m:oMath xmlns:m="http://schemas.openxmlformats.org/officeDocument/2006/math">
+                        <m:r>
+                          <a:rPr lang="en-US" b="0" i="1" smtClean="0">
+                            <a:latin typeface="Cambria Math" panose="02040503050406030204" pitchFamily="18" charset="0"/>
+                          </a:rPr>
+                          <m:t>𝜃</m:t>
+                        </m:r>
+                      </m:oMath>
+                    </m:oMathPara>
+                  </a14:m>
+                  <a:endParaRPr lang="en-US" dirty="0"/>
+                </a:p>
+              </p:txBody>
+            </p:sp>
+          </mc:Choice>
+          <mc:Fallback>
+            <p:sp>
+              <p:nvSpPr>
+                <p:cNvPr id="51" name="TextBox 50">
+                  <a:extLst>
+                    <a:ext uri="{FF2B5EF4-FFF2-40B4-BE49-F238E27FC236}">
+                      <a16:creationId xmlns:a16="http://schemas.microsoft.com/office/drawing/2014/main" id="{47AFC1E6-DE3A-B820-91DD-9E9B0020B0DB}"/>
+                    </a:ext>
+                  </a:extLst>
+                </p:cNvPr>
+                <p:cNvSpPr txBox="1">
+                  <a:spLocks noRot="1" noChangeAspect="1" noMove="1" noResize="1" noEditPoints="1" noAdjustHandles="1" noChangeArrowheads="1" noChangeShapeType="1" noTextEdit="1"/>
+                </p:cNvSpPr>
+                <p:nvPr/>
+              </p:nvSpPr>
+              <p:spPr>
+                <a:xfrm>
+                  <a:off x="2920848" y="1799377"/>
+                  <a:ext cx="500535" cy="494101"/>
+                </a:xfrm>
+                <a:prstGeom prst="rect">
+                  <a:avLst/>
+                </a:prstGeom>
+                <a:blipFill>
+                  <a:blip r:embed="rId6"/>
+                  <a:stretch>
+                    <a:fillRect/>
+                  </a:stretch>
+                </a:blipFill>
+              </p:spPr>
+              <p:txBody>
+                <a:bodyPr/>
+                <a:lstStyle/>
+                <a:p>
+                  <a:r>
+                    <a:rPr lang="en-US">
+                      <a:noFill/>
+                    </a:rPr>
+                    <a:t> </a:t>
+                  </a:r>
+                </a:p>
+              </p:txBody>
+            </p:sp>
+          </mc:Fallback>
+        </mc:AlternateContent>
+        <mc:AlternateContent xmlns:mc="http://schemas.openxmlformats.org/markup-compatibility/2006">
+          <mc:Choice xmlns:a14="http://schemas.microsoft.com/office/drawing/2010/main" Requires="a14">
+            <p:sp>
+              <p:nvSpPr>
+                <p:cNvPr id="52" name="TextBox 51">
+                  <a:extLst>
+                    <a:ext uri="{FF2B5EF4-FFF2-40B4-BE49-F238E27FC236}">
+                      <a16:creationId xmlns:a16="http://schemas.microsoft.com/office/drawing/2014/main" id="{8058A8A6-4C25-6D3A-6D6B-CDC3B1C19892}"/>
+                    </a:ext>
+                  </a:extLst>
+                </p:cNvPr>
+                <p:cNvSpPr txBox="1"/>
+                <p:nvPr/>
+              </p:nvSpPr>
+              <p:spPr>
+                <a:xfrm>
+                  <a:off x="2541264" y="233822"/>
+                  <a:ext cx="802336" cy="461665"/>
+                </a:xfrm>
+                <a:prstGeom prst="rect">
+                  <a:avLst/>
+                </a:prstGeom>
+                <a:noFill/>
+              </p:spPr>
+              <p:txBody>
+                <a:bodyPr wrap="none" rtlCol="0">
+                  <a:spAutoFit/>
+                </a:bodyPr>
+                <a:lstStyle/>
+                <a:p>
+                  <a:pPr/>
+                  <a14:m>
+                    <m:oMathPara xmlns:m="http://schemas.openxmlformats.org/officeDocument/2006/math">
+                      <m:oMathParaPr>
+                        <m:jc m:val="centerGroup"/>
+                      </m:oMathParaPr>
+                      <m:oMath xmlns:m="http://schemas.openxmlformats.org/officeDocument/2006/math">
+                        <m:r>
+                          <a:rPr lang="en-US" sz="2400" i="1" dirty="0">
+                            <a:latin typeface="Cambria Math" panose="02040503050406030204" pitchFamily="18" charset="0"/>
+                          </a:rPr>
+                          <m:t>|</m:t>
+                        </m:r>
+                        <m:sSup>
+                          <m:sSupPr>
+                            <m:ctrlPr>
+                              <a:rPr lang="en-US" sz="2400" i="1" dirty="0">
+                                <a:latin typeface="Cambria Math" panose="02040503050406030204" pitchFamily="18" charset="0"/>
+                              </a:rPr>
+                            </m:ctrlPr>
+                          </m:sSupPr>
+                          <m:e>
+                            <m:r>
+                              <a:rPr lang="en-US" sz="2400" i="1" dirty="0">
+                                <a:latin typeface="Cambria Math" panose="02040503050406030204" pitchFamily="18" charset="0"/>
+                              </a:rPr>
+                              <m:t>𝑧</m:t>
+                            </m:r>
+                          </m:e>
+                          <m:sup>
+                            <m:r>
+                              <a:rPr lang="en-US" sz="2400" i="1" dirty="0">
+                                <a:latin typeface="Cambria Math" panose="02040503050406030204" pitchFamily="18" charset="0"/>
+                              </a:rPr>
+                              <m:t>+</m:t>
+                            </m:r>
+                          </m:sup>
+                        </m:sSup>
+                        <m:r>
+                          <a:rPr lang="en-US" sz="2400" i="1" dirty="0">
+                            <a:latin typeface="Cambria Math" panose="02040503050406030204" pitchFamily="18" charset="0"/>
+                          </a:rPr>
+                          <m:t>⟩</m:t>
+                        </m:r>
+                      </m:oMath>
+                    </m:oMathPara>
+                  </a14:m>
+                  <a:endParaRPr lang="en-US" sz="2400" dirty="0"/>
+                </a:p>
+              </p:txBody>
+            </p:sp>
+          </mc:Choice>
+          <mc:Fallback>
+            <p:sp>
+              <p:nvSpPr>
+                <p:cNvPr id="52" name="TextBox 51">
+                  <a:extLst>
+                    <a:ext uri="{FF2B5EF4-FFF2-40B4-BE49-F238E27FC236}">
+                      <a16:creationId xmlns:a16="http://schemas.microsoft.com/office/drawing/2014/main" id="{8058A8A6-4C25-6D3A-6D6B-CDC3B1C19892}"/>
+                    </a:ext>
+                  </a:extLst>
+                </p:cNvPr>
+                <p:cNvSpPr txBox="1">
+                  <a:spLocks noRot="1" noChangeAspect="1" noMove="1" noResize="1" noEditPoints="1" noAdjustHandles="1" noChangeArrowheads="1" noChangeShapeType="1" noTextEdit="1"/>
+                </p:cNvSpPr>
+                <p:nvPr/>
+              </p:nvSpPr>
+              <p:spPr>
+                <a:xfrm>
+                  <a:off x="2541264" y="233822"/>
+                  <a:ext cx="802336" cy="461665"/>
+                </a:xfrm>
+                <a:prstGeom prst="rect">
+                  <a:avLst/>
+                </a:prstGeom>
+                <a:blipFill>
+                  <a:blip r:embed="rId7"/>
+                  <a:stretch>
+                    <a:fillRect l="-1515" r="-2273" b="-18421"/>
+                  </a:stretch>
+                </a:blipFill>
+              </p:spPr>
+              <p:txBody>
+                <a:bodyPr/>
+                <a:lstStyle/>
+                <a:p>
+                  <a:r>
+                    <a:rPr lang="en-US">
+                      <a:noFill/>
+                    </a:rPr>
+                    <a:t> </a:t>
+                  </a:r>
+                </a:p>
+              </p:txBody>
+            </p:sp>
+          </mc:Fallback>
+        </mc:AlternateContent>
+        <mc:AlternateContent xmlns:mc="http://schemas.openxmlformats.org/markup-compatibility/2006">
+          <mc:Choice xmlns:a14="http://schemas.microsoft.com/office/drawing/2010/main" Requires="a14">
+            <p:sp>
+              <p:nvSpPr>
+                <p:cNvPr id="53" name="TextBox 52">
+                  <a:extLst>
+                    <a:ext uri="{FF2B5EF4-FFF2-40B4-BE49-F238E27FC236}">
+                      <a16:creationId xmlns:a16="http://schemas.microsoft.com/office/drawing/2014/main" id="{83BF00F7-823D-D799-18F1-FEBF4A918903}"/>
+                    </a:ext>
+                  </a:extLst>
+                </p:cNvPr>
+                <p:cNvSpPr txBox="1"/>
+                <p:nvPr/>
+              </p:nvSpPr>
+              <p:spPr>
+                <a:xfrm>
+                  <a:off x="2541264" y="4380221"/>
+                  <a:ext cx="802336" cy="461665"/>
+                </a:xfrm>
+                <a:prstGeom prst="rect">
+                  <a:avLst/>
+                </a:prstGeom>
+                <a:noFill/>
+              </p:spPr>
+              <p:txBody>
+                <a:bodyPr wrap="none" rtlCol="0">
+                  <a:spAutoFit/>
+                </a:bodyPr>
+                <a:lstStyle/>
+                <a:p>
+                  <a:pPr/>
+                  <a14:m>
+                    <m:oMathPara xmlns:m="http://schemas.openxmlformats.org/officeDocument/2006/math">
+                      <m:oMathParaPr>
+                        <m:jc m:val="centerGroup"/>
+                      </m:oMathParaPr>
+                      <m:oMath xmlns:m="http://schemas.openxmlformats.org/officeDocument/2006/math">
+                        <m:r>
+                          <a:rPr lang="en-US" sz="2400" i="1" dirty="0">
+                            <a:latin typeface="Cambria Math" panose="02040503050406030204" pitchFamily="18" charset="0"/>
+                          </a:rPr>
+                          <m:t>|</m:t>
+                        </m:r>
+                        <m:sSup>
+                          <m:sSupPr>
+                            <m:ctrlPr>
+                              <a:rPr lang="en-US" sz="2400" i="1" dirty="0">
+                                <a:latin typeface="Cambria Math" panose="02040503050406030204" pitchFamily="18" charset="0"/>
+                              </a:rPr>
+                            </m:ctrlPr>
+                          </m:sSupPr>
+                          <m:e>
+                            <m:r>
+                              <a:rPr lang="en-US" sz="2400" i="1" dirty="0">
+                                <a:latin typeface="Cambria Math" panose="02040503050406030204" pitchFamily="18" charset="0"/>
+                              </a:rPr>
+                              <m:t>𝑧</m:t>
+                            </m:r>
+                          </m:e>
+                          <m:sup>
+                            <m:r>
+                              <a:rPr lang="en-US" sz="2400" i="1" dirty="0">
+                                <a:latin typeface="Cambria Math" panose="02040503050406030204" pitchFamily="18" charset="0"/>
+                              </a:rPr>
+                              <m:t>−</m:t>
+                            </m:r>
+                          </m:sup>
+                        </m:sSup>
+                        <m:r>
+                          <a:rPr lang="en-US" sz="2400" i="1" dirty="0">
+                            <a:latin typeface="Cambria Math" panose="02040503050406030204" pitchFamily="18" charset="0"/>
+                          </a:rPr>
+                          <m:t>⟩</m:t>
+                        </m:r>
+                      </m:oMath>
+                    </m:oMathPara>
+                  </a14:m>
+                  <a:endParaRPr lang="en-US" sz="2400" dirty="0"/>
+                </a:p>
+              </p:txBody>
+            </p:sp>
+          </mc:Choice>
+          <mc:Fallback>
+            <p:sp>
+              <p:nvSpPr>
+                <p:cNvPr id="53" name="TextBox 52">
+                  <a:extLst>
+                    <a:ext uri="{FF2B5EF4-FFF2-40B4-BE49-F238E27FC236}">
+                      <a16:creationId xmlns:a16="http://schemas.microsoft.com/office/drawing/2014/main" id="{83BF00F7-823D-D799-18F1-FEBF4A918903}"/>
+                    </a:ext>
+                  </a:extLst>
+                </p:cNvPr>
+                <p:cNvSpPr txBox="1">
+                  <a:spLocks noRot="1" noChangeAspect="1" noMove="1" noResize="1" noEditPoints="1" noAdjustHandles="1" noChangeArrowheads="1" noChangeShapeType="1" noTextEdit="1"/>
+                </p:cNvSpPr>
+                <p:nvPr/>
+              </p:nvSpPr>
+              <p:spPr>
+                <a:xfrm>
+                  <a:off x="2541264" y="4380221"/>
+                  <a:ext cx="802336" cy="461665"/>
+                </a:xfrm>
+                <a:prstGeom prst="rect">
+                  <a:avLst/>
+                </a:prstGeom>
+                <a:blipFill>
+                  <a:blip r:embed="rId8"/>
+                  <a:stretch>
+                    <a:fillRect l="-1515" r="-2273" b="-18421"/>
+                  </a:stretch>
+                </a:blipFill>
+              </p:spPr>
+              <p:txBody>
+                <a:bodyPr/>
+                <a:lstStyle/>
+                <a:p>
+                  <a:r>
+                    <a:rPr lang="en-US">
+                      <a:noFill/>
+                    </a:rPr>
+                    <a:t> </a:t>
+                  </a:r>
+                </a:p>
+              </p:txBody>
+            </p:sp>
+          </mc:Fallback>
+        </mc:AlternateContent>
+        <p:cxnSp>
+          <p:nvCxnSpPr>
+            <p:cNvPr id="54" name="Straight Connector 53">
+              <a:extLst>
+                <a:ext uri="{FF2B5EF4-FFF2-40B4-BE49-F238E27FC236}">
+                  <a16:creationId xmlns:a16="http://schemas.microsoft.com/office/drawing/2014/main" id="{274690D3-F9E6-EE33-59DE-20F4AB17D64E}"/>
+                </a:ext>
+              </a:extLst>
+            </p:cNvPr>
+            <p:cNvCxnSpPr>
+              <a:cxnSpLocks/>
+              <a:endCxn id="47" idx="7"/>
+            </p:cNvCxnSpPr>
+            <p:nvPr/>
+          </p:nvCxnSpPr>
+          <p:spPr>
+            <a:xfrm flipV="1">
+              <a:off x="4207349" y="1264186"/>
+              <a:ext cx="0" cy="1272532"/>
+            </a:xfrm>
+            <a:prstGeom prst="line">
+              <a:avLst/>
+            </a:prstGeom>
+            <a:ln w="28575">
+              <a:solidFill>
+                <a:srgbClr val="00B0F0"/>
+              </a:solidFill>
+            </a:ln>
+          </p:spPr>
+          <p:style>
+            <a:lnRef idx="1">
+              <a:schemeClr val="accent1"/>
+            </a:lnRef>
+            <a:fillRef idx="0">
+              <a:schemeClr val="accent1"/>
+            </a:fillRef>
+            <a:effectRef idx="0">
+              <a:schemeClr val="accent1"/>
+            </a:effectRef>
+            <a:fontRef idx="minor">
+              <a:schemeClr val="tx1"/>
+            </a:fontRef>
+          </p:style>
+        </p:cxnSp>
+        <p:cxnSp>
+          <p:nvCxnSpPr>
+            <p:cNvPr id="55" name="Straight Connector 54">
+              <a:extLst>
+                <a:ext uri="{FF2B5EF4-FFF2-40B4-BE49-F238E27FC236}">
+                  <a16:creationId xmlns:a16="http://schemas.microsoft.com/office/drawing/2014/main" id="{4DC4F558-05FA-2415-F1D8-02B7FAEA5DA0}"/>
+                </a:ext>
+              </a:extLst>
+            </p:cNvPr>
+            <p:cNvCxnSpPr/>
+            <p:nvPr/>
+          </p:nvCxnSpPr>
+          <p:spPr>
+            <a:xfrm>
+              <a:off x="2942432" y="2532261"/>
+              <a:ext cx="1264917" cy="1"/>
+            </a:xfrm>
+            <a:prstGeom prst="line">
+              <a:avLst/>
+            </a:prstGeom>
+            <a:ln w="28575">
+              <a:solidFill>
+                <a:srgbClr val="7030A0"/>
+              </a:solidFill>
+            </a:ln>
+          </p:spPr>
+          <p:style>
+            <a:lnRef idx="1">
+              <a:schemeClr val="accent1"/>
+            </a:lnRef>
+            <a:fillRef idx="0">
+              <a:schemeClr val="accent1"/>
+            </a:fillRef>
+            <a:effectRef idx="0">
+              <a:schemeClr val="accent1"/>
+            </a:effectRef>
+            <a:fontRef idx="minor">
+              <a:schemeClr val="tx1"/>
+            </a:fontRef>
+          </p:style>
+        </p:cxnSp>
+        <mc:AlternateContent xmlns:mc="http://schemas.openxmlformats.org/markup-compatibility/2006">
+          <mc:Choice xmlns:a14="http://schemas.microsoft.com/office/drawing/2010/main" Requires="a14">
+            <p:sp>
+              <p:nvSpPr>
+                <p:cNvPr id="56" name="TextBox 55">
+                  <a:extLst>
+                    <a:ext uri="{FF2B5EF4-FFF2-40B4-BE49-F238E27FC236}">
+                      <a16:creationId xmlns:a16="http://schemas.microsoft.com/office/drawing/2014/main" id="{46B3B597-4178-970B-8047-31F84922645A}"/>
+                    </a:ext>
+                  </a:extLst>
+                </p:cNvPr>
+                <p:cNvSpPr txBox="1"/>
+                <p:nvPr/>
+              </p:nvSpPr>
+              <p:spPr>
+                <a:xfrm>
+                  <a:off x="3515484" y="1748127"/>
+                  <a:ext cx="429348" cy="461665"/>
+                </a:xfrm>
+                <a:prstGeom prst="rect">
+                  <a:avLst/>
+                </a:prstGeom>
+                <a:noFill/>
+              </p:spPr>
+              <p:txBody>
+                <a:bodyPr wrap="none" rtlCol="0">
+                  <a:spAutoFit/>
+                </a:bodyPr>
+                <a:lstStyle/>
+                <a:p>
+                  <a:pPr/>
+                  <a14:m>
+                    <m:oMathPara xmlns:m="http://schemas.openxmlformats.org/officeDocument/2006/math">
+                      <m:oMathParaPr>
+                        <m:jc m:val="centerGroup"/>
+                      </m:oMathParaPr>
+                      <m:oMath xmlns:m="http://schemas.openxmlformats.org/officeDocument/2006/math">
+                        <m:r>
+                          <a:rPr lang="en-US" sz="2400" b="0" i="1" smtClean="0">
+                            <a:latin typeface="Cambria Math" panose="02040503050406030204" pitchFamily="18" charset="0"/>
+                          </a:rPr>
+                          <m:t>𝑣</m:t>
+                        </m:r>
+                      </m:oMath>
+                    </m:oMathPara>
+                  </a14:m>
+                  <a:endParaRPr lang="en-US" sz="2400" dirty="0"/>
+                </a:p>
+              </p:txBody>
+            </p:sp>
+          </mc:Choice>
+          <mc:Fallback>
+            <p:sp>
+              <p:nvSpPr>
+                <p:cNvPr id="56" name="TextBox 55">
+                  <a:extLst>
+                    <a:ext uri="{FF2B5EF4-FFF2-40B4-BE49-F238E27FC236}">
+                      <a16:creationId xmlns:a16="http://schemas.microsoft.com/office/drawing/2014/main" id="{46B3B597-4178-970B-8047-31F84922645A}"/>
+                    </a:ext>
+                  </a:extLst>
+                </p:cNvPr>
+                <p:cNvSpPr txBox="1">
+                  <a:spLocks noRot="1" noChangeAspect="1" noMove="1" noResize="1" noEditPoints="1" noAdjustHandles="1" noChangeArrowheads="1" noChangeShapeType="1" noTextEdit="1"/>
+                </p:cNvSpPr>
+                <p:nvPr/>
+              </p:nvSpPr>
+              <p:spPr>
+                <a:xfrm>
+                  <a:off x="3515484" y="1748127"/>
+                  <a:ext cx="429348" cy="461665"/>
+                </a:xfrm>
+                <a:prstGeom prst="rect">
+                  <a:avLst/>
+                </a:prstGeom>
+                <a:blipFill>
+                  <a:blip r:embed="rId9"/>
+                  <a:stretch>
+                    <a:fillRect/>
+                  </a:stretch>
+                </a:blipFill>
+              </p:spPr>
+              <p:txBody>
+                <a:bodyPr/>
+                <a:lstStyle/>
+                <a:p>
+                  <a:r>
+                    <a:rPr lang="en-US">
+                      <a:noFill/>
+                    </a:rPr>
+                    <a:t> </a:t>
+                  </a:r>
+                </a:p>
+              </p:txBody>
+            </p:sp>
+          </mc:Fallback>
+        </mc:AlternateContent>
+        <mc:AlternateContent xmlns:mc="http://schemas.openxmlformats.org/markup-compatibility/2006">
+          <mc:Choice xmlns:a14="http://schemas.microsoft.com/office/drawing/2010/main" Requires="a14">
+            <p:sp>
+              <p:nvSpPr>
+                <p:cNvPr id="58" name="TextBox 57">
+                  <a:extLst>
+                    <a:ext uri="{FF2B5EF4-FFF2-40B4-BE49-F238E27FC236}">
+                      <a16:creationId xmlns:a16="http://schemas.microsoft.com/office/drawing/2014/main" id="{A102905C-904C-D5F0-98DE-56F1B14795BE}"/>
+                    </a:ext>
+                  </a:extLst>
+                </p:cNvPr>
+                <p:cNvSpPr txBox="1"/>
+                <p:nvPr/>
+              </p:nvSpPr>
+              <p:spPr>
+                <a:xfrm>
+                  <a:off x="2001030" y="2577939"/>
+                  <a:ext cx="815095" cy="369332"/>
+                </a:xfrm>
+                <a:prstGeom prst="rect">
+                  <a:avLst/>
+                </a:prstGeom>
+                <a:noFill/>
+              </p:spPr>
+              <p:txBody>
+                <a:bodyPr wrap="none" rtlCol="0">
+                  <a:spAutoFit/>
+                </a:bodyPr>
+                <a:lstStyle/>
+                <a:p>
+                  <a:pPr/>
+                  <a14:m>
+                    <m:oMathPara xmlns:m="http://schemas.openxmlformats.org/officeDocument/2006/math">
+                      <m:oMathParaPr>
+                        <m:jc m:val="centerGroup"/>
+                      </m:oMathParaPr>
+                      <m:oMath xmlns:m="http://schemas.openxmlformats.org/officeDocument/2006/math">
+                        <m:r>
+                          <a:rPr lang="en-US" b="0" i="1" smtClean="0">
+                            <a:latin typeface="Cambria Math" panose="02040503050406030204" pitchFamily="18" charset="0"/>
+                          </a:rPr>
+                          <m:t>𝑝</m:t>
+                        </m:r>
+                        <m:d>
+                          <m:dPr>
+                            <m:ctrlPr>
+                              <a:rPr lang="en-US" b="0" i="1" smtClean="0">
+                                <a:latin typeface="Cambria Math" panose="02040503050406030204" pitchFamily="18" charset="0"/>
+                              </a:rPr>
+                            </m:ctrlPr>
+                          </m:dPr>
+                          <m:e>
+                            <m:sSup>
+                              <m:sSupPr>
+                                <m:ctrlPr>
+                                  <a:rPr lang="en-US" b="0" i="1" smtClean="0">
+                                    <a:latin typeface="Cambria Math" panose="02040503050406030204" pitchFamily="18" charset="0"/>
+                                  </a:rPr>
+                                </m:ctrlPr>
+                              </m:sSupPr>
+                              <m:e>
+                                <m:r>
+                                  <a:rPr lang="en-US" b="0" i="1" smtClean="0">
+                                    <a:latin typeface="Cambria Math" panose="02040503050406030204" pitchFamily="18" charset="0"/>
+                                  </a:rPr>
+                                  <m:t>𝑧</m:t>
+                                </m:r>
+                              </m:e>
+                              <m:sup>
+                                <m:r>
+                                  <a:rPr lang="en-US" b="0" i="1" smtClean="0">
+                                    <a:latin typeface="Cambria Math" panose="02040503050406030204" pitchFamily="18" charset="0"/>
+                                  </a:rPr>
+                                  <m:t>+</m:t>
+                                </m:r>
+                              </m:sup>
+                            </m:sSup>
+                          </m:e>
+                        </m:d>
+                      </m:oMath>
+                    </m:oMathPara>
+                  </a14:m>
+                  <a:endParaRPr lang="en-US" dirty="0"/>
+                </a:p>
+              </p:txBody>
+            </p:sp>
+          </mc:Choice>
+          <mc:Fallback>
+            <p:sp>
+              <p:nvSpPr>
+                <p:cNvPr id="58" name="TextBox 57">
+                  <a:extLst>
+                    <a:ext uri="{FF2B5EF4-FFF2-40B4-BE49-F238E27FC236}">
+                      <a16:creationId xmlns:a16="http://schemas.microsoft.com/office/drawing/2014/main" id="{A102905C-904C-D5F0-98DE-56F1B14795BE}"/>
+                    </a:ext>
+                  </a:extLst>
+                </p:cNvPr>
+                <p:cNvSpPr txBox="1">
+                  <a:spLocks noRot="1" noChangeAspect="1" noMove="1" noResize="1" noEditPoints="1" noAdjustHandles="1" noChangeArrowheads="1" noChangeShapeType="1" noTextEdit="1"/>
+                </p:cNvSpPr>
+                <p:nvPr/>
+              </p:nvSpPr>
+              <p:spPr>
+                <a:xfrm>
+                  <a:off x="2001030" y="2577939"/>
+                  <a:ext cx="815095" cy="369332"/>
+                </a:xfrm>
+                <a:prstGeom prst="rect">
+                  <a:avLst/>
+                </a:prstGeom>
+                <a:blipFill>
+                  <a:blip r:embed="rId10"/>
+                  <a:stretch>
+                    <a:fillRect b="-8197"/>
+                  </a:stretch>
+                </a:blipFill>
+              </p:spPr>
+              <p:txBody>
+                <a:bodyPr/>
+                <a:lstStyle/>
+                <a:p>
+                  <a:r>
+                    <a:rPr lang="en-US">
+                      <a:noFill/>
+                    </a:rPr>
+                    <a:t> </a:t>
+                  </a:r>
+                </a:p>
+              </p:txBody>
+            </p:sp>
+          </mc:Fallback>
+        </mc:AlternateContent>
+        <mc:AlternateContent xmlns:mc="http://schemas.openxmlformats.org/markup-compatibility/2006">
+          <mc:Choice xmlns:a14="http://schemas.microsoft.com/office/drawing/2010/main" Requires="a14">
+            <p:sp>
+              <p:nvSpPr>
+                <p:cNvPr id="59" name="TextBox 58">
+                  <a:extLst>
+                    <a:ext uri="{FF2B5EF4-FFF2-40B4-BE49-F238E27FC236}">
+                      <a16:creationId xmlns:a16="http://schemas.microsoft.com/office/drawing/2014/main" id="{5FBF0BA7-A462-9470-0956-B7B7B287C3E4}"/>
+                    </a:ext>
+                  </a:extLst>
+                </p:cNvPr>
+                <p:cNvSpPr txBox="1"/>
+                <p:nvPr/>
+              </p:nvSpPr>
+              <p:spPr>
+                <a:xfrm>
+                  <a:off x="2001031" y="814752"/>
+                  <a:ext cx="815095" cy="369332"/>
+                </a:xfrm>
+                <a:prstGeom prst="rect">
+                  <a:avLst/>
+                </a:prstGeom>
+                <a:noFill/>
+              </p:spPr>
+              <p:txBody>
+                <a:bodyPr wrap="none" rtlCol="0">
+                  <a:spAutoFit/>
+                </a:bodyPr>
+                <a:lstStyle/>
+                <a:p>
+                  <a:pPr/>
+                  <a14:m>
+                    <m:oMathPara xmlns:m="http://schemas.openxmlformats.org/officeDocument/2006/math">
+                      <m:oMathParaPr>
+                        <m:jc m:val="centerGroup"/>
+                      </m:oMathParaPr>
+                      <m:oMath xmlns:m="http://schemas.openxmlformats.org/officeDocument/2006/math">
+                        <m:r>
+                          <a:rPr lang="en-US" b="0" i="1" smtClean="0">
+                            <a:latin typeface="Cambria Math" panose="02040503050406030204" pitchFamily="18" charset="0"/>
+                          </a:rPr>
+                          <m:t>𝑝</m:t>
+                        </m:r>
+                        <m:d>
+                          <m:dPr>
+                            <m:ctrlPr>
+                              <a:rPr lang="en-US" b="0" i="1" smtClean="0">
+                                <a:latin typeface="Cambria Math" panose="02040503050406030204" pitchFamily="18" charset="0"/>
+                              </a:rPr>
+                            </m:ctrlPr>
+                          </m:dPr>
+                          <m:e>
+                            <m:sSup>
+                              <m:sSupPr>
+                                <m:ctrlPr>
+                                  <a:rPr lang="en-US" b="0" i="1" smtClean="0">
+                                    <a:latin typeface="Cambria Math" panose="02040503050406030204" pitchFamily="18" charset="0"/>
+                                  </a:rPr>
+                                </m:ctrlPr>
+                              </m:sSupPr>
+                              <m:e>
+                                <m:r>
+                                  <a:rPr lang="en-US" b="0" i="1" smtClean="0">
+                                    <a:latin typeface="Cambria Math" panose="02040503050406030204" pitchFamily="18" charset="0"/>
+                                  </a:rPr>
+                                  <m:t>𝑧</m:t>
+                                </m:r>
+                              </m:e>
+                              <m:sup>
+                                <m:r>
+                                  <a:rPr lang="en-US" b="0" i="1" smtClean="0">
+                                    <a:latin typeface="Cambria Math" panose="02040503050406030204" pitchFamily="18" charset="0"/>
+                                  </a:rPr>
+                                  <m:t>−</m:t>
+                                </m:r>
+                              </m:sup>
+                            </m:sSup>
+                          </m:e>
+                        </m:d>
+                      </m:oMath>
+                    </m:oMathPara>
+                  </a14:m>
+                  <a:endParaRPr lang="en-US" dirty="0"/>
+                </a:p>
+              </p:txBody>
+            </p:sp>
+          </mc:Choice>
+          <mc:Fallback>
+            <p:sp>
+              <p:nvSpPr>
+                <p:cNvPr id="59" name="TextBox 58">
+                  <a:extLst>
+                    <a:ext uri="{FF2B5EF4-FFF2-40B4-BE49-F238E27FC236}">
+                      <a16:creationId xmlns:a16="http://schemas.microsoft.com/office/drawing/2014/main" id="{5FBF0BA7-A462-9470-0956-B7B7B287C3E4}"/>
+                    </a:ext>
+                  </a:extLst>
+                </p:cNvPr>
+                <p:cNvSpPr txBox="1">
+                  <a:spLocks noRot="1" noChangeAspect="1" noMove="1" noResize="1" noEditPoints="1" noAdjustHandles="1" noChangeArrowheads="1" noChangeShapeType="1" noTextEdit="1"/>
+                </p:cNvSpPr>
+                <p:nvPr/>
+              </p:nvSpPr>
+              <p:spPr>
+                <a:xfrm>
+                  <a:off x="2001031" y="814752"/>
+                  <a:ext cx="815095" cy="369332"/>
+                </a:xfrm>
+                <a:prstGeom prst="rect">
+                  <a:avLst/>
+                </a:prstGeom>
+                <a:blipFill>
+                  <a:blip r:embed="rId11"/>
+                  <a:stretch>
+                    <a:fillRect b="-8197"/>
+                  </a:stretch>
+                </a:blipFill>
+              </p:spPr>
+              <p:txBody>
+                <a:bodyPr/>
+                <a:lstStyle/>
+                <a:p>
+                  <a:r>
+                    <a:rPr lang="en-US">
+                      <a:noFill/>
+                    </a:rPr>
+                    <a:t> </a:t>
+                  </a:r>
+                </a:p>
+              </p:txBody>
+            </p:sp>
+          </mc:Fallback>
+        </mc:AlternateContent>
+        <p:sp>
+          <p:nvSpPr>
+            <p:cNvPr id="60" name="Right Brace 59">
+              <a:extLst>
+                <a:ext uri="{FF2B5EF4-FFF2-40B4-BE49-F238E27FC236}">
+                  <a16:creationId xmlns:a16="http://schemas.microsoft.com/office/drawing/2014/main" id="{7D34792C-6777-F72E-02A5-438382235943}"/>
+                </a:ext>
+              </a:extLst>
+            </p:cNvPr>
+            <p:cNvSpPr/>
+            <p:nvPr/>
+          </p:nvSpPr>
+          <p:spPr>
+            <a:xfrm flipH="1">
+              <a:off x="2751185" y="759208"/>
+              <a:ext cx="169816" cy="494101"/>
+            </a:xfrm>
+            <a:prstGeom prst="rightBrace">
+              <a:avLst/>
+            </a:prstGeom>
+            <a:ln w="28575">
+              <a:solidFill>
+                <a:srgbClr val="FFFF00"/>
+              </a:solidFill>
+            </a:ln>
+          </p:spPr>
+          <p:style>
+            <a:lnRef idx="1">
+              <a:schemeClr val="accent1"/>
+            </a:lnRef>
+            <a:fillRef idx="0">
+              <a:schemeClr val="accent1"/>
+            </a:fillRef>
+            <a:effectRef idx="0">
+              <a:schemeClr val="accent1"/>
+            </a:effectRef>
+            <a:fontRef idx="minor">
+              <a:schemeClr val="tx1"/>
+            </a:fontRef>
+          </p:style>
+          <p:txBody>
+            <a:bodyPr rtlCol="0" anchor="ctr"/>
+            <a:lstStyle/>
+            <a:p>
+              <a:pPr algn="ctr"/>
+              <a:endParaRPr lang="en-US"/>
+            </a:p>
+          </p:txBody>
+        </p:sp>
+        <p:sp>
+          <p:nvSpPr>
+            <p:cNvPr id="61" name="Right Brace 60">
+              <a:extLst>
+                <a:ext uri="{FF2B5EF4-FFF2-40B4-BE49-F238E27FC236}">
+                  <a16:creationId xmlns:a16="http://schemas.microsoft.com/office/drawing/2014/main" id="{8B7C3A90-73DE-C67F-36A6-2B0A6E6606EC}"/>
+                </a:ext>
+              </a:extLst>
+            </p:cNvPr>
+            <p:cNvSpPr/>
+            <p:nvPr/>
+          </p:nvSpPr>
+          <p:spPr>
+            <a:xfrm flipH="1">
+              <a:off x="2751185" y="1273558"/>
+              <a:ext cx="169816" cy="3017470"/>
+            </a:xfrm>
+            <a:prstGeom prst="rightBrace">
+              <a:avLst/>
+            </a:prstGeom>
+            <a:ln w="28575">
+              <a:solidFill>
+                <a:srgbClr val="C00000"/>
+              </a:solidFill>
+            </a:ln>
+          </p:spPr>
+          <p:style>
+            <a:lnRef idx="1">
+              <a:schemeClr val="accent1"/>
+            </a:lnRef>
+            <a:fillRef idx="0">
+              <a:schemeClr val="accent1"/>
+            </a:fillRef>
+            <a:effectRef idx="0">
+              <a:schemeClr val="accent1"/>
+            </a:effectRef>
+            <a:fontRef idx="minor">
+              <a:schemeClr val="tx1"/>
+            </a:fontRef>
+          </p:style>
+          <p:txBody>
+            <a:bodyPr rtlCol="0" anchor="ctr"/>
+            <a:lstStyle/>
+            <a:p>
+              <a:pPr algn="ctr"/>
+              <a:endParaRPr lang="en-US"/>
+            </a:p>
+          </p:txBody>
+        </p:sp>
+      </p:grpSp>
+      <p:sp>
+        <p:nvSpPr>
+          <p:cNvPr id="3" name="TextBox 2">
+            <a:extLst>
+              <a:ext uri="{FF2B5EF4-FFF2-40B4-BE49-F238E27FC236}">
+                <a16:creationId xmlns:a16="http://schemas.microsoft.com/office/drawing/2014/main" id="{727F091E-69FF-7912-C572-D99FFDD847F3}"/>
+              </a:ext>
+            </a:extLst>
+          </p:cNvPr>
+          <p:cNvSpPr txBox="1"/>
+          <p:nvPr/>
+        </p:nvSpPr>
+        <p:spPr>
+          <a:xfrm>
+            <a:off x="266520" y="146736"/>
+            <a:ext cx="11658961" cy="923330"/>
+          </a:xfrm>
+          <a:prstGeom prst="rect">
+            <a:avLst/>
+          </a:prstGeom>
+          <a:noFill/>
+        </p:spPr>
+        <p:txBody>
+          <a:bodyPr wrap="none" rtlCol="0">
+            <a:spAutoFit/>
+          </a:bodyPr>
+          <a:lstStyle/>
+          <a:p>
+            <a:pPr algn="ctr"/>
+            <a:r>
+              <a:rPr lang="en-US" sz="5400" dirty="0"/>
+              <a:t>Directional vs quantum state vectors</a:t>
+            </a:r>
+          </a:p>
+        </p:txBody>
+      </p:sp>
+    </p:spTree>
+    <p:extLst>
+      <p:ext uri="{BB962C8B-B14F-4D97-AF65-F5344CB8AC3E}">
+        <p14:creationId xmlns:p14="http://schemas.microsoft.com/office/powerpoint/2010/main" val="3059211557"/>
+      </p:ext>
+    </p:extLst>
+  </p:cSld>
+  <p:clrMapOvr>
+    <a:masterClrMapping/>
+  </p:clrMapOvr>
+</p:sld>
+</file>
+
 <file path=ppt/theme/theme1.xml><?xml version="1.0" encoding="utf-8"?>
 <a:theme xmlns:a="http://schemas.openxmlformats.org/drawingml/2006/main" name="Office Theme">
   <a:themeElements>

--- a/2026/2026Thumbnail.pptx
+++ b/2026/2026Thumbnail.pptx
@@ -10,6 +10,7 @@
     <p:sldId id="941" r:id="rId4"/>
     <p:sldId id="943" r:id="rId5"/>
     <p:sldId id="944" r:id="rId6"/>
+    <p:sldId id="945" r:id="rId7"/>
   </p:sldIdLst>
   <p:sldSz cx="12192000" cy="6858000"/>
   <p:notesSz cx="6858000" cy="9144000"/>
@@ -263,7 +264,7 @@
           <a:p>
             <a:fld id="{3816CC03-B68F-4642-A2B8-7A8633A67F21}" type="datetimeFigureOut">
               <a:rPr lang="en-US" smtClean="0"/>
-              <a:t>2/28/2026</a:t>
+              <a:t>5/28/2026</a:t>
             </a:fld>
             <a:endParaRPr lang="en-US"/>
           </a:p>
@@ -461,7 +462,7 @@
           <a:p>
             <a:fld id="{3816CC03-B68F-4642-A2B8-7A8633A67F21}" type="datetimeFigureOut">
               <a:rPr lang="en-US" smtClean="0"/>
-              <a:t>2/28/2026</a:t>
+              <a:t>5/28/2026</a:t>
             </a:fld>
             <a:endParaRPr lang="en-US"/>
           </a:p>
@@ -669,7 +670,7 @@
           <a:p>
             <a:fld id="{3816CC03-B68F-4642-A2B8-7A8633A67F21}" type="datetimeFigureOut">
               <a:rPr lang="en-US" smtClean="0"/>
-              <a:t>2/28/2026</a:t>
+              <a:t>5/28/2026</a:t>
             </a:fld>
             <a:endParaRPr lang="en-US"/>
           </a:p>
@@ -867,7 +868,7 @@
           <a:p>
             <a:fld id="{3816CC03-B68F-4642-A2B8-7A8633A67F21}" type="datetimeFigureOut">
               <a:rPr lang="en-US" smtClean="0"/>
-              <a:t>2/28/2026</a:t>
+              <a:t>5/28/2026</a:t>
             </a:fld>
             <a:endParaRPr lang="en-US"/>
           </a:p>
@@ -1142,7 +1143,7 @@
           <a:p>
             <a:fld id="{3816CC03-B68F-4642-A2B8-7A8633A67F21}" type="datetimeFigureOut">
               <a:rPr lang="en-US" smtClean="0"/>
-              <a:t>2/28/2026</a:t>
+              <a:t>5/28/2026</a:t>
             </a:fld>
             <a:endParaRPr lang="en-US"/>
           </a:p>
@@ -1407,7 +1408,7 @@
           <a:p>
             <a:fld id="{3816CC03-B68F-4642-A2B8-7A8633A67F21}" type="datetimeFigureOut">
               <a:rPr lang="en-US" smtClean="0"/>
-              <a:t>2/28/2026</a:t>
+              <a:t>5/28/2026</a:t>
             </a:fld>
             <a:endParaRPr lang="en-US"/>
           </a:p>
@@ -1819,7 +1820,7 @@
           <a:p>
             <a:fld id="{3816CC03-B68F-4642-A2B8-7A8633A67F21}" type="datetimeFigureOut">
               <a:rPr lang="en-US" smtClean="0"/>
-              <a:t>2/28/2026</a:t>
+              <a:t>5/28/2026</a:t>
             </a:fld>
             <a:endParaRPr lang="en-US"/>
           </a:p>
@@ -1960,7 +1961,7 @@
           <a:p>
             <a:fld id="{3816CC03-B68F-4642-A2B8-7A8633A67F21}" type="datetimeFigureOut">
               <a:rPr lang="en-US" smtClean="0"/>
-              <a:t>2/28/2026</a:t>
+              <a:t>5/28/2026</a:t>
             </a:fld>
             <a:endParaRPr lang="en-US"/>
           </a:p>
@@ -2073,7 +2074,7 @@
           <a:p>
             <a:fld id="{3816CC03-B68F-4642-A2B8-7A8633A67F21}" type="datetimeFigureOut">
               <a:rPr lang="en-US" smtClean="0"/>
-              <a:t>2/28/2026</a:t>
+              <a:t>5/28/2026</a:t>
             </a:fld>
             <a:endParaRPr lang="en-US"/>
           </a:p>
@@ -2420,7 +2421,7 @@
           <a:p>
             <a:fld id="{3816CC03-B68F-4642-A2B8-7A8633A67F21}" type="datetimeFigureOut">
               <a:rPr lang="en-US" smtClean="0"/>
-              <a:t>2/28/2026</a:t>
+              <a:t>5/28/2026</a:t>
             </a:fld>
             <a:endParaRPr lang="en-US"/>
           </a:p>
@@ -2708,7 +2709,7 @@
           <a:p>
             <a:fld id="{3816CC03-B68F-4642-A2B8-7A8633A67F21}" type="datetimeFigureOut">
               <a:rPr lang="en-US" smtClean="0"/>
-              <a:t>2/28/2026</a:t>
+              <a:t>5/28/2026</a:t>
             </a:fld>
             <a:endParaRPr lang="en-US"/>
           </a:p>
@@ -2949,7 +2950,7 @@
           <a:p>
             <a:fld id="{3816CC03-B68F-4642-A2B8-7A8633A67F21}" type="datetimeFigureOut">
               <a:rPr lang="en-US" smtClean="0"/>
-              <a:t>2/28/2026</a:t>
+              <a:t>5/28/2026</a:t>
             </a:fld>
             <a:endParaRPr lang="en-US"/>
           </a:p>
@@ -3593,8 +3594,8 @@
             <a:chExt cx="4931158" cy="2229842"/>
           </a:xfrm>
         </p:grpSpPr>
-        <mc:AlternateContent xmlns:mc="http://schemas.openxmlformats.org/markup-compatibility/2006">
-          <mc:Choice xmlns:a14="http://schemas.microsoft.com/office/drawing/2010/main" Requires="a14">
+        <mc:AlternateContent xmlns:mc="http://schemas.openxmlformats.org/markup-compatibility/2006" xmlns:a14="http://schemas.microsoft.com/office/drawing/2010/main">
+          <mc:Choice Requires="a14">
             <p:sp>
               <p:nvSpPr>
                 <p:cNvPr id="28" name="TextBox 27">
@@ -3779,7 +3780,7 @@
               </p:txBody>
             </p:sp>
           </mc:Choice>
-          <mc:Fallback>
+          <mc:Fallback xmlns="">
             <p:sp>
               <p:nvSpPr>
                 <p:cNvPr id="28" name="TextBox 27">
@@ -3824,8 +3825,8 @@
             </p:sp>
           </mc:Fallback>
         </mc:AlternateContent>
-        <mc:AlternateContent xmlns:mc="http://schemas.openxmlformats.org/markup-compatibility/2006">
-          <mc:Choice xmlns:a14="http://schemas.microsoft.com/office/drawing/2010/main" Requires="a14">
+        <mc:AlternateContent xmlns:mc="http://schemas.openxmlformats.org/markup-compatibility/2006" xmlns:a14="http://schemas.microsoft.com/office/drawing/2010/main">
+          <mc:Choice Requires="a14">
             <p:sp>
               <p:nvSpPr>
                 <p:cNvPr id="30" name="TextBox 29">
@@ -3969,7 +3970,7 @@
               </p:txBody>
             </p:sp>
           </mc:Choice>
-          <mc:Fallback>
+          <mc:Fallback xmlns="">
             <p:sp>
               <p:nvSpPr>
                 <p:cNvPr id="30" name="TextBox 29">
@@ -4105,8 +4106,8 @@
             </a:p>
           </p:txBody>
         </p:sp>
-        <mc:AlternateContent xmlns:mc="http://schemas.openxmlformats.org/markup-compatibility/2006">
-          <mc:Choice xmlns:a14="http://schemas.microsoft.com/office/drawing/2010/main" Requires="a14">
+        <mc:AlternateContent xmlns:mc="http://schemas.openxmlformats.org/markup-compatibility/2006" xmlns:a14="http://schemas.microsoft.com/office/drawing/2010/main">
+          <mc:Choice Requires="a14">
             <p:sp>
               <p:nvSpPr>
                 <p:cNvPr id="25" name="TextBox 24">
@@ -4195,16 +4196,7 @@
                                 </a:solidFill>
                                 <a:latin typeface="Cambria Math" panose="02040503050406030204" pitchFamily="18" charset="0"/>
                               </a:rPr>
-                              <m:t>,</m:t>
-                            </m:r>
-                            <m:r>
-                              <a:rPr lang="en-US" sz="5400" b="0" i="1" smtClean="0">
-                                <a:solidFill>
-                                  <a:schemeClr val="tx1"/>
-                                </a:solidFill>
-                                <a:latin typeface="Cambria Math" panose="02040503050406030204" pitchFamily="18" charset="0"/>
-                              </a:rPr>
-                              <m:t> </m:t>
+                              <m:t>, </m:t>
                             </m:r>
                             <m:sSup>
                               <m:sSupPr>
@@ -4254,7 +4246,7 @@
               </p:txBody>
             </p:sp>
           </mc:Choice>
-          <mc:Fallback>
+          <mc:Fallback xmlns="">
             <p:sp>
               <p:nvSpPr>
                 <p:cNvPr id="25" name="TextBox 24">
@@ -4299,8 +4291,8 @@
             </p:sp>
           </mc:Fallback>
         </mc:AlternateContent>
-        <mc:AlternateContent xmlns:mc="http://schemas.openxmlformats.org/markup-compatibility/2006">
-          <mc:Choice xmlns:a14="http://schemas.microsoft.com/office/drawing/2010/main" Requires="a14">
+        <mc:AlternateContent xmlns:mc="http://schemas.openxmlformats.org/markup-compatibility/2006" xmlns:a14="http://schemas.microsoft.com/office/drawing/2010/main">
+          <mc:Choice Requires="a14">
             <p:sp>
               <p:nvSpPr>
                 <p:cNvPr id="26" name="TextBox 25">
@@ -4470,7 +4462,7 @@
               </p:txBody>
             </p:sp>
           </mc:Choice>
-          <mc:Fallback>
+          <mc:Fallback xmlns="">
             <p:sp>
               <p:nvSpPr>
                 <p:cNvPr id="26" name="TextBox 25">
@@ -4995,8 +4987,8 @@
             </p:cxnSp>
           </p:grpSp>
         </p:grpSp>
-        <mc:AlternateContent xmlns:mc="http://schemas.openxmlformats.org/markup-compatibility/2006">
-          <mc:Choice xmlns:a14="http://schemas.microsoft.com/office/drawing/2010/main" Requires="a14">
+        <mc:AlternateContent xmlns:mc="http://schemas.openxmlformats.org/markup-compatibility/2006" xmlns:a14="http://schemas.microsoft.com/office/drawing/2010/main">
+          <mc:Choice Requires="a14">
             <p:sp>
               <p:nvSpPr>
                 <p:cNvPr id="51" name="TextBox 50">
@@ -5046,7 +5038,7 @@
               </p:txBody>
             </p:sp>
           </mc:Choice>
-          <mc:Fallback>
+          <mc:Fallback xmlns="">
             <p:sp>
               <p:nvSpPr>
                 <p:cNvPr id="51" name="TextBox 50">
@@ -5091,8 +5083,8 @@
             </p:sp>
           </mc:Fallback>
         </mc:AlternateContent>
-        <mc:AlternateContent xmlns:mc="http://schemas.openxmlformats.org/markup-compatibility/2006">
-          <mc:Choice xmlns:a14="http://schemas.microsoft.com/office/drawing/2010/main" Requires="a14">
+        <mc:AlternateContent xmlns:mc="http://schemas.openxmlformats.org/markup-compatibility/2006" xmlns:a14="http://schemas.microsoft.com/office/drawing/2010/main">
+          <mc:Choice Requires="a14">
             <p:sp>
               <p:nvSpPr>
                 <p:cNvPr id="52" name="TextBox 51">
@@ -5173,7 +5165,7 @@
               </p:txBody>
             </p:sp>
           </mc:Choice>
-          <mc:Fallback>
+          <mc:Fallback xmlns="">
             <p:sp>
               <p:nvSpPr>
                 <p:cNvPr id="52" name="TextBox 51">
@@ -5218,8 +5210,8 @@
             </p:sp>
           </mc:Fallback>
         </mc:AlternateContent>
-        <mc:AlternateContent xmlns:mc="http://schemas.openxmlformats.org/markup-compatibility/2006">
-          <mc:Choice xmlns:a14="http://schemas.microsoft.com/office/drawing/2010/main" Requires="a14">
+        <mc:AlternateContent xmlns:mc="http://schemas.openxmlformats.org/markup-compatibility/2006" xmlns:a14="http://schemas.microsoft.com/office/drawing/2010/main">
+          <mc:Choice Requires="a14">
             <p:sp>
               <p:nvSpPr>
                 <p:cNvPr id="53" name="TextBox 52">
@@ -5300,7 +5292,7 @@
               </p:txBody>
             </p:sp>
           </mc:Choice>
-          <mc:Fallback>
+          <mc:Fallback xmlns="">
             <p:sp>
               <p:nvSpPr>
                 <p:cNvPr id="53" name="TextBox 52">
@@ -5430,8 +5422,8 @@
             </a:fontRef>
           </p:style>
         </p:cxnSp>
-        <mc:AlternateContent xmlns:mc="http://schemas.openxmlformats.org/markup-compatibility/2006">
-          <mc:Choice xmlns:a14="http://schemas.microsoft.com/office/drawing/2010/main" Requires="a14">
+        <mc:AlternateContent xmlns:mc="http://schemas.openxmlformats.org/markup-compatibility/2006" xmlns:a14="http://schemas.microsoft.com/office/drawing/2010/main">
+          <mc:Choice Requires="a14">
             <p:sp>
               <p:nvSpPr>
                 <p:cNvPr id="56" name="TextBox 55">
@@ -5481,7 +5473,7 @@
               </p:txBody>
             </p:sp>
           </mc:Choice>
-          <mc:Fallback>
+          <mc:Fallback xmlns="">
             <p:sp>
               <p:nvSpPr>
                 <p:cNvPr id="56" name="TextBox 55">
@@ -5526,8 +5518,8 @@
             </p:sp>
           </mc:Fallback>
         </mc:AlternateContent>
-        <mc:AlternateContent xmlns:mc="http://schemas.openxmlformats.org/markup-compatibility/2006">
-          <mc:Choice xmlns:a14="http://schemas.microsoft.com/office/drawing/2010/main" Requires="a14">
+        <mc:AlternateContent xmlns:mc="http://schemas.openxmlformats.org/markup-compatibility/2006" xmlns:a14="http://schemas.microsoft.com/office/drawing/2010/main">
+          <mc:Choice Requires="a14">
             <p:sp>
               <p:nvSpPr>
                 <p:cNvPr id="58" name="TextBox 57">
@@ -5613,7 +5605,7 @@
               </p:txBody>
             </p:sp>
           </mc:Choice>
-          <mc:Fallback>
+          <mc:Fallback xmlns="">
             <p:sp>
               <p:nvSpPr>
                 <p:cNvPr id="58" name="TextBox 57">
@@ -5658,8 +5650,8 @@
             </p:sp>
           </mc:Fallback>
         </mc:AlternateContent>
-        <mc:AlternateContent xmlns:mc="http://schemas.openxmlformats.org/markup-compatibility/2006">
-          <mc:Choice xmlns:a14="http://schemas.microsoft.com/office/drawing/2010/main" Requires="a14">
+        <mc:AlternateContent xmlns:mc="http://schemas.openxmlformats.org/markup-compatibility/2006" xmlns:a14="http://schemas.microsoft.com/office/drawing/2010/main">
+          <mc:Choice Requires="a14">
             <p:sp>
               <p:nvSpPr>
                 <p:cNvPr id="59" name="TextBox 58">
@@ -5745,7 +5737,7 @@
               </p:txBody>
             </p:sp>
           </mc:Choice>
-          <mc:Fallback>
+          <mc:Fallback xmlns="">
             <p:sp>
               <p:nvSpPr>
                 <p:cNvPr id="59" name="TextBox 58">
@@ -5980,8 +5972,8 @@
             <a:chExt cx="4931158" cy="2229842"/>
           </a:xfrm>
         </p:grpSpPr>
-        <mc:AlternateContent xmlns:mc="http://schemas.openxmlformats.org/markup-compatibility/2006">
-          <mc:Choice xmlns:a14="http://schemas.microsoft.com/office/drawing/2010/main" Requires="a14">
+        <mc:AlternateContent xmlns:mc="http://schemas.openxmlformats.org/markup-compatibility/2006" xmlns:a14="http://schemas.microsoft.com/office/drawing/2010/main">
+          <mc:Choice Requires="a14">
             <p:sp>
               <p:nvSpPr>
                 <p:cNvPr id="28" name="TextBox 27">
@@ -6166,7 +6158,7 @@
               </p:txBody>
             </p:sp>
           </mc:Choice>
-          <mc:Fallback>
+          <mc:Fallback xmlns="">
             <p:sp>
               <p:nvSpPr>
                 <p:cNvPr id="28" name="TextBox 27">
@@ -6211,8 +6203,8 @@
             </p:sp>
           </mc:Fallback>
         </mc:AlternateContent>
-        <mc:AlternateContent xmlns:mc="http://schemas.openxmlformats.org/markup-compatibility/2006">
-          <mc:Choice xmlns:a14="http://schemas.microsoft.com/office/drawing/2010/main" Requires="a14">
+        <mc:AlternateContent xmlns:mc="http://schemas.openxmlformats.org/markup-compatibility/2006" xmlns:a14="http://schemas.microsoft.com/office/drawing/2010/main">
+          <mc:Choice Requires="a14">
             <p:sp>
               <p:nvSpPr>
                 <p:cNvPr id="30" name="TextBox 29">
@@ -6356,7 +6348,7 @@
               </p:txBody>
             </p:sp>
           </mc:Choice>
-          <mc:Fallback>
+          <mc:Fallback xmlns="">
             <p:sp>
               <p:nvSpPr>
                 <p:cNvPr id="30" name="TextBox 29">
@@ -6492,8 +6484,8 @@
             </a:p>
           </p:txBody>
         </p:sp>
-        <mc:AlternateContent xmlns:mc="http://schemas.openxmlformats.org/markup-compatibility/2006">
-          <mc:Choice xmlns:a14="http://schemas.microsoft.com/office/drawing/2010/main" Requires="a14">
+        <mc:AlternateContent xmlns:mc="http://schemas.openxmlformats.org/markup-compatibility/2006" xmlns:a14="http://schemas.microsoft.com/office/drawing/2010/main">
+          <mc:Choice Requires="a14">
             <p:sp>
               <p:nvSpPr>
                 <p:cNvPr id="25" name="TextBox 24">
@@ -6582,16 +6574,7 @@
                                 </a:solidFill>
                                 <a:latin typeface="Cambria Math" panose="02040503050406030204" pitchFamily="18" charset="0"/>
                               </a:rPr>
-                              <m:t>,</m:t>
-                            </m:r>
-                            <m:r>
-                              <a:rPr lang="en-US" sz="5400" b="0" i="1" smtClean="0">
-                                <a:solidFill>
-                                  <a:schemeClr val="tx1"/>
-                                </a:solidFill>
-                                <a:latin typeface="Cambria Math" panose="02040503050406030204" pitchFamily="18" charset="0"/>
-                              </a:rPr>
-                              <m:t> </m:t>
+                              <m:t>, </m:t>
                             </m:r>
                             <m:sSup>
                               <m:sSupPr>
@@ -6641,7 +6624,7 @@
               </p:txBody>
             </p:sp>
           </mc:Choice>
-          <mc:Fallback>
+          <mc:Fallback xmlns="">
             <p:sp>
               <p:nvSpPr>
                 <p:cNvPr id="25" name="TextBox 24">
@@ -6686,8 +6669,8 @@
             </p:sp>
           </mc:Fallback>
         </mc:AlternateContent>
-        <mc:AlternateContent xmlns:mc="http://schemas.openxmlformats.org/markup-compatibility/2006">
-          <mc:Choice xmlns:a14="http://schemas.microsoft.com/office/drawing/2010/main" Requires="a14">
+        <mc:AlternateContent xmlns:mc="http://schemas.openxmlformats.org/markup-compatibility/2006" xmlns:a14="http://schemas.microsoft.com/office/drawing/2010/main">
+          <mc:Choice Requires="a14">
             <p:sp>
               <p:nvSpPr>
                 <p:cNvPr id="26" name="TextBox 25">
@@ -6857,7 +6840,7 @@
               </p:txBody>
             </p:sp>
           </mc:Choice>
-          <mc:Fallback>
+          <mc:Fallback xmlns="">
             <p:sp>
               <p:nvSpPr>
                 <p:cNvPr id="26" name="TextBox 25">
@@ -7382,8 +7365,8 @@
             </p:cxnSp>
           </p:grpSp>
         </p:grpSp>
-        <mc:AlternateContent xmlns:mc="http://schemas.openxmlformats.org/markup-compatibility/2006">
-          <mc:Choice xmlns:a14="http://schemas.microsoft.com/office/drawing/2010/main" Requires="a14">
+        <mc:AlternateContent xmlns:mc="http://schemas.openxmlformats.org/markup-compatibility/2006" xmlns:a14="http://schemas.microsoft.com/office/drawing/2010/main">
+          <mc:Choice Requires="a14">
             <p:sp>
               <p:nvSpPr>
                 <p:cNvPr id="51" name="TextBox 50">
@@ -7433,7 +7416,7 @@
               </p:txBody>
             </p:sp>
           </mc:Choice>
-          <mc:Fallback>
+          <mc:Fallback xmlns="">
             <p:sp>
               <p:nvSpPr>
                 <p:cNvPr id="51" name="TextBox 50">
@@ -7478,8 +7461,8 @@
             </p:sp>
           </mc:Fallback>
         </mc:AlternateContent>
-        <mc:AlternateContent xmlns:mc="http://schemas.openxmlformats.org/markup-compatibility/2006">
-          <mc:Choice xmlns:a14="http://schemas.microsoft.com/office/drawing/2010/main" Requires="a14">
+        <mc:AlternateContent xmlns:mc="http://schemas.openxmlformats.org/markup-compatibility/2006" xmlns:a14="http://schemas.microsoft.com/office/drawing/2010/main">
+          <mc:Choice Requires="a14">
             <p:sp>
               <p:nvSpPr>
                 <p:cNvPr id="52" name="TextBox 51">
@@ -7560,7 +7543,7 @@
               </p:txBody>
             </p:sp>
           </mc:Choice>
-          <mc:Fallback>
+          <mc:Fallback xmlns="">
             <p:sp>
               <p:nvSpPr>
                 <p:cNvPr id="52" name="TextBox 51">
@@ -7605,8 +7588,8 @@
             </p:sp>
           </mc:Fallback>
         </mc:AlternateContent>
-        <mc:AlternateContent xmlns:mc="http://schemas.openxmlformats.org/markup-compatibility/2006">
-          <mc:Choice xmlns:a14="http://schemas.microsoft.com/office/drawing/2010/main" Requires="a14">
+        <mc:AlternateContent xmlns:mc="http://schemas.openxmlformats.org/markup-compatibility/2006" xmlns:a14="http://schemas.microsoft.com/office/drawing/2010/main">
+          <mc:Choice Requires="a14">
             <p:sp>
               <p:nvSpPr>
                 <p:cNvPr id="53" name="TextBox 52">
@@ -7687,7 +7670,7 @@
               </p:txBody>
             </p:sp>
           </mc:Choice>
-          <mc:Fallback>
+          <mc:Fallback xmlns="">
             <p:sp>
               <p:nvSpPr>
                 <p:cNvPr id="53" name="TextBox 52">
@@ -7817,8 +7800,8 @@
             </a:fontRef>
           </p:style>
         </p:cxnSp>
-        <mc:AlternateContent xmlns:mc="http://schemas.openxmlformats.org/markup-compatibility/2006">
-          <mc:Choice xmlns:a14="http://schemas.microsoft.com/office/drawing/2010/main" Requires="a14">
+        <mc:AlternateContent xmlns:mc="http://schemas.openxmlformats.org/markup-compatibility/2006" xmlns:a14="http://schemas.microsoft.com/office/drawing/2010/main">
+          <mc:Choice Requires="a14">
             <p:sp>
               <p:nvSpPr>
                 <p:cNvPr id="56" name="TextBox 55">
@@ -7868,7 +7851,7 @@
               </p:txBody>
             </p:sp>
           </mc:Choice>
-          <mc:Fallback>
+          <mc:Fallback xmlns="">
             <p:sp>
               <p:nvSpPr>
                 <p:cNvPr id="56" name="TextBox 55">
@@ -7913,8 +7896,8 @@
             </p:sp>
           </mc:Fallback>
         </mc:AlternateContent>
-        <mc:AlternateContent xmlns:mc="http://schemas.openxmlformats.org/markup-compatibility/2006">
-          <mc:Choice xmlns:a14="http://schemas.microsoft.com/office/drawing/2010/main" Requires="a14">
+        <mc:AlternateContent xmlns:mc="http://schemas.openxmlformats.org/markup-compatibility/2006" xmlns:a14="http://schemas.microsoft.com/office/drawing/2010/main">
+          <mc:Choice Requires="a14">
             <p:sp>
               <p:nvSpPr>
                 <p:cNvPr id="58" name="TextBox 57">
@@ -8000,7 +7983,7 @@
               </p:txBody>
             </p:sp>
           </mc:Choice>
-          <mc:Fallback>
+          <mc:Fallback xmlns="">
             <p:sp>
               <p:nvSpPr>
                 <p:cNvPr id="58" name="TextBox 57">
@@ -8045,8 +8028,8 @@
             </p:sp>
           </mc:Fallback>
         </mc:AlternateContent>
-        <mc:AlternateContent xmlns:mc="http://schemas.openxmlformats.org/markup-compatibility/2006">
-          <mc:Choice xmlns:a14="http://schemas.microsoft.com/office/drawing/2010/main" Requires="a14">
+        <mc:AlternateContent xmlns:mc="http://schemas.openxmlformats.org/markup-compatibility/2006" xmlns:a14="http://schemas.microsoft.com/office/drawing/2010/main">
+          <mc:Choice Requires="a14">
             <p:sp>
               <p:nvSpPr>
                 <p:cNvPr id="59" name="TextBox 58">
@@ -8132,7 +8115,7 @@
               </p:txBody>
             </p:sp>
           </mc:Choice>
-          <mc:Fallback>
+          <mc:Fallback xmlns="">
             <p:sp>
               <p:nvSpPr>
                 <p:cNvPr id="59" name="TextBox 58">
@@ -8368,8 +8351,8 @@
             <a:chExt cx="4931158" cy="2229842"/>
           </a:xfrm>
         </p:grpSpPr>
-        <mc:AlternateContent xmlns:mc="http://schemas.openxmlformats.org/markup-compatibility/2006">
-          <mc:Choice xmlns:a14="http://schemas.microsoft.com/office/drawing/2010/main" Requires="a14">
+        <mc:AlternateContent xmlns:mc="http://schemas.openxmlformats.org/markup-compatibility/2006" xmlns:a14="http://schemas.microsoft.com/office/drawing/2010/main">
+          <mc:Choice Requires="a14">
             <p:sp>
               <p:nvSpPr>
                 <p:cNvPr id="28" name="TextBox 27">
@@ -8554,7 +8537,7 @@
               </p:txBody>
             </p:sp>
           </mc:Choice>
-          <mc:Fallback>
+          <mc:Fallback xmlns="">
             <p:sp>
               <p:nvSpPr>
                 <p:cNvPr id="28" name="TextBox 27">
@@ -8599,8 +8582,8 @@
             </p:sp>
           </mc:Fallback>
         </mc:AlternateContent>
-        <mc:AlternateContent xmlns:mc="http://schemas.openxmlformats.org/markup-compatibility/2006">
-          <mc:Choice xmlns:a14="http://schemas.microsoft.com/office/drawing/2010/main" Requires="a14">
+        <mc:AlternateContent xmlns:mc="http://schemas.openxmlformats.org/markup-compatibility/2006" xmlns:a14="http://schemas.microsoft.com/office/drawing/2010/main">
+          <mc:Choice Requires="a14">
             <p:sp>
               <p:nvSpPr>
                 <p:cNvPr id="30" name="TextBox 29">
@@ -8744,7 +8727,7 @@
               </p:txBody>
             </p:sp>
           </mc:Choice>
-          <mc:Fallback>
+          <mc:Fallback xmlns="">
             <p:sp>
               <p:nvSpPr>
                 <p:cNvPr id="30" name="TextBox 29">
@@ -8880,8 +8863,8 @@
             </a:p>
           </p:txBody>
         </p:sp>
-        <mc:AlternateContent xmlns:mc="http://schemas.openxmlformats.org/markup-compatibility/2006">
-          <mc:Choice xmlns:a14="http://schemas.microsoft.com/office/drawing/2010/main" Requires="a14">
+        <mc:AlternateContent xmlns:mc="http://schemas.openxmlformats.org/markup-compatibility/2006" xmlns:a14="http://schemas.microsoft.com/office/drawing/2010/main">
+          <mc:Choice Requires="a14">
             <p:sp>
               <p:nvSpPr>
                 <p:cNvPr id="25" name="TextBox 24">
@@ -8970,16 +8953,7 @@
                                 </a:solidFill>
                                 <a:latin typeface="Cambria Math" panose="02040503050406030204" pitchFamily="18" charset="0"/>
                               </a:rPr>
-                              <m:t>,</m:t>
-                            </m:r>
-                            <m:r>
-                              <a:rPr lang="en-US" sz="5400" b="0" i="1" smtClean="0">
-                                <a:solidFill>
-                                  <a:schemeClr val="tx1"/>
-                                </a:solidFill>
-                                <a:latin typeface="Cambria Math" panose="02040503050406030204" pitchFamily="18" charset="0"/>
-                              </a:rPr>
-                              <m:t> </m:t>
+                              <m:t>, </m:t>
                             </m:r>
                             <m:sSup>
                               <m:sSupPr>
@@ -9029,7 +9003,7 @@
               </p:txBody>
             </p:sp>
           </mc:Choice>
-          <mc:Fallback>
+          <mc:Fallback xmlns="">
             <p:sp>
               <p:nvSpPr>
                 <p:cNvPr id="25" name="TextBox 24">
@@ -9074,8 +9048,8 @@
             </p:sp>
           </mc:Fallback>
         </mc:AlternateContent>
-        <mc:AlternateContent xmlns:mc="http://schemas.openxmlformats.org/markup-compatibility/2006">
-          <mc:Choice xmlns:a14="http://schemas.microsoft.com/office/drawing/2010/main" Requires="a14">
+        <mc:AlternateContent xmlns:mc="http://schemas.openxmlformats.org/markup-compatibility/2006" xmlns:a14="http://schemas.microsoft.com/office/drawing/2010/main">
+          <mc:Choice Requires="a14">
             <p:sp>
               <p:nvSpPr>
                 <p:cNvPr id="26" name="TextBox 25">
@@ -9245,7 +9219,7 @@
               </p:txBody>
             </p:sp>
           </mc:Choice>
-          <mc:Fallback>
+          <mc:Fallback xmlns="">
             <p:sp>
               <p:nvSpPr>
                 <p:cNvPr id="26" name="TextBox 25">
@@ -9770,8 +9744,8 @@
             </p:cxnSp>
           </p:grpSp>
         </p:grpSp>
-        <mc:AlternateContent xmlns:mc="http://schemas.openxmlformats.org/markup-compatibility/2006">
-          <mc:Choice xmlns:a14="http://schemas.microsoft.com/office/drawing/2010/main" Requires="a14">
+        <mc:AlternateContent xmlns:mc="http://schemas.openxmlformats.org/markup-compatibility/2006" xmlns:a14="http://schemas.microsoft.com/office/drawing/2010/main">
+          <mc:Choice Requires="a14">
             <p:sp>
               <p:nvSpPr>
                 <p:cNvPr id="51" name="TextBox 50">
@@ -9821,7 +9795,7 @@
               </p:txBody>
             </p:sp>
           </mc:Choice>
-          <mc:Fallback>
+          <mc:Fallback xmlns="">
             <p:sp>
               <p:nvSpPr>
                 <p:cNvPr id="51" name="TextBox 50">
@@ -9866,8 +9840,8 @@
             </p:sp>
           </mc:Fallback>
         </mc:AlternateContent>
-        <mc:AlternateContent xmlns:mc="http://schemas.openxmlformats.org/markup-compatibility/2006">
-          <mc:Choice xmlns:a14="http://schemas.microsoft.com/office/drawing/2010/main" Requires="a14">
+        <mc:AlternateContent xmlns:mc="http://schemas.openxmlformats.org/markup-compatibility/2006" xmlns:a14="http://schemas.microsoft.com/office/drawing/2010/main">
+          <mc:Choice Requires="a14">
             <p:sp>
               <p:nvSpPr>
                 <p:cNvPr id="52" name="TextBox 51">
@@ -9948,7 +9922,7 @@
               </p:txBody>
             </p:sp>
           </mc:Choice>
-          <mc:Fallback>
+          <mc:Fallback xmlns="">
             <p:sp>
               <p:nvSpPr>
                 <p:cNvPr id="52" name="TextBox 51">
@@ -9993,8 +9967,8 @@
             </p:sp>
           </mc:Fallback>
         </mc:AlternateContent>
-        <mc:AlternateContent xmlns:mc="http://schemas.openxmlformats.org/markup-compatibility/2006">
-          <mc:Choice xmlns:a14="http://schemas.microsoft.com/office/drawing/2010/main" Requires="a14">
+        <mc:AlternateContent xmlns:mc="http://schemas.openxmlformats.org/markup-compatibility/2006" xmlns:a14="http://schemas.microsoft.com/office/drawing/2010/main">
+          <mc:Choice Requires="a14">
             <p:sp>
               <p:nvSpPr>
                 <p:cNvPr id="53" name="TextBox 52">
@@ -10075,7 +10049,7 @@
               </p:txBody>
             </p:sp>
           </mc:Choice>
-          <mc:Fallback>
+          <mc:Fallback xmlns="">
             <p:sp>
               <p:nvSpPr>
                 <p:cNvPr id="53" name="TextBox 52">
@@ -10205,8 +10179,8 @@
             </a:fontRef>
           </p:style>
         </p:cxnSp>
-        <mc:AlternateContent xmlns:mc="http://schemas.openxmlformats.org/markup-compatibility/2006">
-          <mc:Choice xmlns:a14="http://schemas.microsoft.com/office/drawing/2010/main" Requires="a14">
+        <mc:AlternateContent xmlns:mc="http://schemas.openxmlformats.org/markup-compatibility/2006" xmlns:a14="http://schemas.microsoft.com/office/drawing/2010/main">
+          <mc:Choice Requires="a14">
             <p:sp>
               <p:nvSpPr>
                 <p:cNvPr id="56" name="TextBox 55">
@@ -10256,7 +10230,7 @@
               </p:txBody>
             </p:sp>
           </mc:Choice>
-          <mc:Fallback>
+          <mc:Fallback xmlns="">
             <p:sp>
               <p:nvSpPr>
                 <p:cNvPr id="56" name="TextBox 55">
@@ -10301,8 +10275,8 @@
             </p:sp>
           </mc:Fallback>
         </mc:AlternateContent>
-        <mc:AlternateContent xmlns:mc="http://schemas.openxmlformats.org/markup-compatibility/2006">
-          <mc:Choice xmlns:a14="http://schemas.microsoft.com/office/drawing/2010/main" Requires="a14">
+        <mc:AlternateContent xmlns:mc="http://schemas.openxmlformats.org/markup-compatibility/2006" xmlns:a14="http://schemas.microsoft.com/office/drawing/2010/main">
+          <mc:Choice Requires="a14">
             <p:sp>
               <p:nvSpPr>
                 <p:cNvPr id="58" name="TextBox 57">
@@ -10388,7 +10362,7 @@
               </p:txBody>
             </p:sp>
           </mc:Choice>
-          <mc:Fallback>
+          <mc:Fallback xmlns="">
             <p:sp>
               <p:nvSpPr>
                 <p:cNvPr id="58" name="TextBox 57">
@@ -10433,8 +10407,8 @@
             </p:sp>
           </mc:Fallback>
         </mc:AlternateContent>
-        <mc:AlternateContent xmlns:mc="http://schemas.openxmlformats.org/markup-compatibility/2006">
-          <mc:Choice xmlns:a14="http://schemas.microsoft.com/office/drawing/2010/main" Requires="a14">
+        <mc:AlternateContent xmlns:mc="http://schemas.openxmlformats.org/markup-compatibility/2006" xmlns:a14="http://schemas.microsoft.com/office/drawing/2010/main">
+          <mc:Choice Requires="a14">
             <p:sp>
               <p:nvSpPr>
                 <p:cNvPr id="59" name="TextBox 58">
@@ -10520,7 +10494,7 @@
               </p:txBody>
             </p:sp>
           </mc:Choice>
-          <mc:Fallback>
+          <mc:Fallback xmlns="">
             <p:sp>
               <p:nvSpPr>
                 <p:cNvPr id="59" name="TextBox 58">
@@ -10704,6 +10678,1893 @@
     <p:extLst>
       <p:ext uri="{BB962C8B-B14F-4D97-AF65-F5344CB8AC3E}">
         <p14:creationId xmlns:p14="http://schemas.microsoft.com/office/powerpoint/2010/main" val="3059211557"/>
+      </p:ext>
+    </p:extLst>
+  </p:cSld>
+  <p:clrMapOvr>
+    <a:masterClrMapping/>
+  </p:clrMapOvr>
+</p:sld>
+</file>
+
+<file path=ppt/slides/slide6.xml><?xml version="1.0" encoding="utf-8"?>
+<p:sld xmlns:a="http://schemas.openxmlformats.org/drawingml/2006/main" xmlns:r="http://schemas.openxmlformats.org/officeDocument/2006/relationships" xmlns:p="http://schemas.openxmlformats.org/presentationml/2006/main">
+  <p:cSld>
+    <p:spTree>
+      <p:nvGrpSpPr>
+        <p:cNvPr id="1" name="">
+          <a:extLst>
+            <a:ext uri="{FF2B5EF4-FFF2-40B4-BE49-F238E27FC236}">
+              <a16:creationId xmlns:a16="http://schemas.microsoft.com/office/drawing/2014/main" id="{130CE082-C3FC-14E7-D483-2827B3AAEB61}"/>
+            </a:ext>
+          </a:extLst>
+        </p:cNvPr>
+        <p:cNvGrpSpPr/>
+        <p:nvPr/>
+      </p:nvGrpSpPr>
+      <p:grpSpPr>
+        <a:xfrm>
+          <a:off x="0" y="0"/>
+          <a:ext cx="0" cy="0"/>
+          <a:chOff x="0" y="0"/>
+          <a:chExt cx="0" cy="0"/>
+        </a:xfrm>
+      </p:grpSpPr>
+      <p:sp>
+        <p:nvSpPr>
+          <p:cNvPr id="3" name="TextBox 2">
+            <a:extLst>
+              <a:ext uri="{FF2B5EF4-FFF2-40B4-BE49-F238E27FC236}">
+                <a16:creationId xmlns:a16="http://schemas.microsoft.com/office/drawing/2014/main" id="{98E3C0A9-7C83-D2D9-1AAA-ABBB8A5F0F6A}"/>
+              </a:ext>
+            </a:extLst>
+          </p:cNvPr>
+          <p:cNvSpPr txBox="1"/>
+          <p:nvPr/>
+        </p:nvSpPr>
+        <p:spPr>
+          <a:xfrm>
+            <a:off x="95808" y="146736"/>
+            <a:ext cx="12000401" cy="923330"/>
+          </a:xfrm>
+          <a:prstGeom prst="rect">
+            <a:avLst/>
+          </a:prstGeom>
+          <a:noFill/>
+        </p:spPr>
+        <p:txBody>
+          <a:bodyPr wrap="none" rtlCol="0">
+            <a:spAutoFit/>
+          </a:bodyPr>
+          <a:lstStyle/>
+          <a:p>
+            <a:pPr algn="ctr"/>
+            <a:r>
+              <a:rPr lang="en-US" sz="5400" dirty="0"/>
+              <a:t>Superposition is multi-decomposition</a:t>
+            </a:r>
+          </a:p>
+        </p:txBody>
+      </p:sp>
+      <p:cxnSp>
+        <p:nvCxnSpPr>
+          <p:cNvPr id="4" name="Straight Connector 3">
+            <a:extLst>
+              <a:ext uri="{FF2B5EF4-FFF2-40B4-BE49-F238E27FC236}">
+                <a16:creationId xmlns:a16="http://schemas.microsoft.com/office/drawing/2014/main" id="{D85C6D50-5747-AF4E-6A95-18B6B5BF002C}"/>
+              </a:ext>
+            </a:extLst>
+          </p:cNvPr>
+          <p:cNvCxnSpPr>
+            <a:cxnSpLocks/>
+          </p:cNvCxnSpPr>
+          <p:nvPr/>
+        </p:nvCxnSpPr>
+        <p:spPr>
+          <a:xfrm>
+            <a:off x="3696005" y="1871542"/>
+            <a:ext cx="0" cy="3195828"/>
+          </a:xfrm>
+          <a:prstGeom prst="line">
+            <a:avLst/>
+          </a:prstGeom>
+          <a:ln w="12700">
+            <a:solidFill>
+              <a:schemeClr val="tx1"/>
+            </a:solidFill>
+          </a:ln>
+        </p:spPr>
+        <p:style>
+          <a:lnRef idx="1">
+            <a:schemeClr val="accent1"/>
+          </a:lnRef>
+          <a:fillRef idx="0">
+            <a:schemeClr val="accent1"/>
+          </a:fillRef>
+          <a:effectRef idx="0">
+            <a:schemeClr val="accent1"/>
+          </a:effectRef>
+          <a:fontRef idx="minor">
+            <a:schemeClr val="tx1"/>
+          </a:fontRef>
+        </p:style>
+      </p:cxnSp>
+      <mc:AlternateContent xmlns:mc="http://schemas.openxmlformats.org/markup-compatibility/2006">
+        <mc:Choice xmlns:a14="http://schemas.microsoft.com/office/drawing/2010/main" Requires="a14">
+          <p:sp>
+            <p:nvSpPr>
+              <p:cNvPr id="5" name="TextBox 4">
+                <a:extLst>
+                  <a:ext uri="{FF2B5EF4-FFF2-40B4-BE49-F238E27FC236}">
+                    <a16:creationId xmlns:a16="http://schemas.microsoft.com/office/drawing/2014/main" id="{8EFE85B9-236F-F614-BE74-35D2920ECD2E}"/>
+                  </a:ext>
+                </a:extLst>
+              </p:cNvPr>
+              <p:cNvSpPr txBox="1"/>
+              <p:nvPr/>
+            </p:nvSpPr>
+            <p:spPr>
+              <a:xfrm>
+                <a:off x="3407249" y="1378740"/>
+                <a:ext cx="813877" cy="461665"/>
+              </a:xfrm>
+              <a:prstGeom prst="rect">
+                <a:avLst/>
+              </a:prstGeom>
+              <a:noFill/>
+            </p:spPr>
+            <p:txBody>
+              <a:bodyPr wrap="none" rtlCol="0">
+                <a:spAutoFit/>
+              </a:bodyPr>
+              <a:lstStyle/>
+              <a:p>
+                <a:pPr/>
+                <a14:m>
+                  <m:oMathPara xmlns:m="http://schemas.openxmlformats.org/officeDocument/2006/math">
+                    <m:oMathParaPr>
+                      <m:jc m:val="centerGroup"/>
+                    </m:oMathParaPr>
+                    <m:oMath xmlns:m="http://schemas.openxmlformats.org/officeDocument/2006/math">
+                      <m:r>
+                        <a:rPr lang="en-US" sz="2400" i="1" dirty="0" smtClean="0">
+                          <a:latin typeface="Cambria Math" panose="02040503050406030204" pitchFamily="18" charset="0"/>
+                        </a:rPr>
+                        <m:t>|</m:t>
+                      </m:r>
+                      <m:sSub>
+                        <m:sSubPr>
+                          <m:ctrlPr>
+                            <a:rPr lang="en-US" sz="2400" b="0" i="1" dirty="0" smtClean="0">
+                              <a:latin typeface="Cambria Math" panose="02040503050406030204" pitchFamily="18" charset="0"/>
+                            </a:rPr>
+                          </m:ctrlPr>
+                        </m:sSubPr>
+                        <m:e>
+                          <m:r>
+                            <a:rPr lang="en-US" sz="2400" b="0" i="1" dirty="0" smtClean="0">
+                              <a:latin typeface="Cambria Math" panose="02040503050406030204" pitchFamily="18" charset="0"/>
+                            </a:rPr>
+                            <m:t>𝜓</m:t>
+                          </m:r>
+                        </m:e>
+                        <m:sub>
+                          <m:r>
+                            <a:rPr lang="en-US" sz="2400" b="0" i="1" dirty="0" smtClean="0">
+                              <a:latin typeface="Cambria Math" panose="02040503050406030204" pitchFamily="18" charset="0"/>
+                            </a:rPr>
+                            <m:t>1</m:t>
+                          </m:r>
+                        </m:sub>
+                      </m:sSub>
+                      <m:r>
+                        <a:rPr lang="en-US" sz="2400" i="1" dirty="0">
+                          <a:latin typeface="Cambria Math" panose="02040503050406030204" pitchFamily="18" charset="0"/>
+                        </a:rPr>
+                        <m:t>⟩</m:t>
+                      </m:r>
+                    </m:oMath>
+                  </m:oMathPara>
+                </a14:m>
+                <a:endParaRPr lang="en-US" sz="2400" dirty="0"/>
+              </a:p>
+            </p:txBody>
+          </p:sp>
+        </mc:Choice>
+        <mc:Fallback>
+          <p:sp>
+            <p:nvSpPr>
+              <p:cNvPr id="5" name="TextBox 4">
+                <a:extLst>
+                  <a:ext uri="{FF2B5EF4-FFF2-40B4-BE49-F238E27FC236}">
+                    <a16:creationId xmlns:a16="http://schemas.microsoft.com/office/drawing/2014/main" id="{8EFE85B9-236F-F614-BE74-35D2920ECD2E}"/>
+                  </a:ext>
+                </a:extLst>
+              </p:cNvPr>
+              <p:cNvSpPr txBox="1">
+                <a:spLocks noRot="1" noChangeAspect="1" noMove="1" noResize="1" noEditPoints="1" noAdjustHandles="1" noChangeArrowheads="1" noChangeShapeType="1" noTextEdit="1"/>
+              </p:cNvSpPr>
+              <p:nvPr/>
+            </p:nvSpPr>
+            <p:spPr>
+              <a:xfrm>
+                <a:off x="3407249" y="1378740"/>
+                <a:ext cx="813877" cy="461665"/>
+              </a:xfrm>
+              <a:prstGeom prst="rect">
+                <a:avLst/>
+              </a:prstGeom>
+              <a:blipFill>
+                <a:blip r:embed="rId2"/>
+                <a:stretch>
+                  <a:fillRect l="-2256" r="-1504" b="-18421"/>
+                </a:stretch>
+              </a:blipFill>
+            </p:spPr>
+            <p:txBody>
+              <a:bodyPr/>
+              <a:lstStyle/>
+              <a:p>
+                <a:r>
+                  <a:rPr lang="en-US">
+                    <a:noFill/>
+                  </a:rPr>
+                  <a:t> </a:t>
+                </a:r>
+              </a:p>
+            </p:txBody>
+          </p:sp>
+        </mc:Fallback>
+      </mc:AlternateContent>
+      <mc:AlternateContent xmlns:mc="http://schemas.openxmlformats.org/markup-compatibility/2006">
+        <mc:Choice xmlns:a14="http://schemas.microsoft.com/office/drawing/2010/main" Requires="a14">
+          <p:sp>
+            <p:nvSpPr>
+              <p:cNvPr id="6" name="TextBox 5">
+                <a:extLst>
+                  <a:ext uri="{FF2B5EF4-FFF2-40B4-BE49-F238E27FC236}">
+                    <a16:creationId xmlns:a16="http://schemas.microsoft.com/office/drawing/2014/main" id="{831575E8-A1E0-2101-0E54-C01B58E78B12}"/>
+                  </a:ext>
+                </a:extLst>
+              </p:cNvPr>
+              <p:cNvSpPr txBox="1"/>
+              <p:nvPr/>
+            </p:nvSpPr>
+            <p:spPr>
+              <a:xfrm>
+                <a:off x="3516577" y="5124456"/>
+                <a:ext cx="820994" cy="461665"/>
+              </a:xfrm>
+              <a:prstGeom prst="rect">
+                <a:avLst/>
+              </a:prstGeom>
+              <a:noFill/>
+            </p:spPr>
+            <p:txBody>
+              <a:bodyPr wrap="none" rtlCol="0">
+                <a:spAutoFit/>
+              </a:bodyPr>
+              <a:lstStyle/>
+              <a:p>
+                <a:pPr/>
+                <a14:m>
+                  <m:oMathPara xmlns:m="http://schemas.openxmlformats.org/officeDocument/2006/math">
+                    <m:oMathParaPr>
+                      <m:jc m:val="centerGroup"/>
+                    </m:oMathParaPr>
+                    <m:oMath xmlns:m="http://schemas.openxmlformats.org/officeDocument/2006/math">
+                      <m:r>
+                        <a:rPr lang="en-US" sz="2400" i="1" dirty="0" smtClean="0">
+                          <a:latin typeface="Cambria Math" panose="02040503050406030204" pitchFamily="18" charset="0"/>
+                        </a:rPr>
+                        <m:t>|</m:t>
+                      </m:r>
+                      <m:sSub>
+                        <m:sSubPr>
+                          <m:ctrlPr>
+                            <a:rPr lang="en-US" sz="2400" b="0" i="1" dirty="0" smtClean="0">
+                              <a:latin typeface="Cambria Math" panose="02040503050406030204" pitchFamily="18" charset="0"/>
+                            </a:rPr>
+                          </m:ctrlPr>
+                        </m:sSubPr>
+                        <m:e>
+                          <m:r>
+                            <a:rPr lang="en-US" sz="2400" b="0" i="1" dirty="0" smtClean="0">
+                              <a:latin typeface="Cambria Math" panose="02040503050406030204" pitchFamily="18" charset="0"/>
+                            </a:rPr>
+                            <m:t>𝜓</m:t>
+                          </m:r>
+                        </m:e>
+                        <m:sub>
+                          <m:r>
+                            <a:rPr lang="en-US" sz="2400" b="0" i="1" dirty="0" smtClean="0">
+                              <a:latin typeface="Cambria Math" panose="02040503050406030204" pitchFamily="18" charset="0"/>
+                            </a:rPr>
+                            <m:t>2</m:t>
+                          </m:r>
+                        </m:sub>
+                      </m:sSub>
+                      <m:r>
+                        <a:rPr lang="en-US" sz="2400" i="1" dirty="0">
+                          <a:latin typeface="Cambria Math" panose="02040503050406030204" pitchFamily="18" charset="0"/>
+                        </a:rPr>
+                        <m:t>⟩</m:t>
+                      </m:r>
+                    </m:oMath>
+                  </m:oMathPara>
+                </a14:m>
+                <a:endParaRPr lang="en-US" sz="2400" dirty="0"/>
+              </a:p>
+            </p:txBody>
+          </p:sp>
+        </mc:Choice>
+        <mc:Fallback>
+          <p:sp>
+            <p:nvSpPr>
+              <p:cNvPr id="6" name="TextBox 5">
+                <a:extLst>
+                  <a:ext uri="{FF2B5EF4-FFF2-40B4-BE49-F238E27FC236}">
+                    <a16:creationId xmlns:a16="http://schemas.microsoft.com/office/drawing/2014/main" id="{831575E8-A1E0-2101-0E54-C01B58E78B12}"/>
+                  </a:ext>
+                </a:extLst>
+              </p:cNvPr>
+              <p:cNvSpPr txBox="1">
+                <a:spLocks noRot="1" noChangeAspect="1" noMove="1" noResize="1" noEditPoints="1" noAdjustHandles="1" noChangeArrowheads="1" noChangeShapeType="1" noTextEdit="1"/>
+              </p:cNvSpPr>
+              <p:nvPr/>
+            </p:nvSpPr>
+            <p:spPr>
+              <a:xfrm>
+                <a:off x="3516577" y="5124456"/>
+                <a:ext cx="820994" cy="461665"/>
+              </a:xfrm>
+              <a:prstGeom prst="rect">
+                <a:avLst/>
+              </a:prstGeom>
+              <a:blipFill>
+                <a:blip r:embed="rId3"/>
+                <a:stretch>
+                  <a:fillRect l="-2222" r="-741" b="-20000"/>
+                </a:stretch>
+              </a:blipFill>
+            </p:spPr>
+            <p:txBody>
+              <a:bodyPr/>
+              <a:lstStyle/>
+              <a:p>
+                <a:r>
+                  <a:rPr lang="en-US">
+                    <a:noFill/>
+                  </a:rPr>
+                  <a:t> </a:t>
+                </a:r>
+              </a:p>
+            </p:txBody>
+          </p:sp>
+        </mc:Fallback>
+      </mc:AlternateContent>
+      <mc:AlternateContent xmlns:mc="http://schemas.openxmlformats.org/markup-compatibility/2006">
+        <mc:Choice xmlns:a14="http://schemas.microsoft.com/office/drawing/2010/main" Requires="a14">
+          <p:sp>
+            <p:nvSpPr>
+              <p:cNvPr id="7" name="TextBox 6">
+                <a:extLst>
+                  <a:ext uri="{FF2B5EF4-FFF2-40B4-BE49-F238E27FC236}">
+                    <a16:creationId xmlns:a16="http://schemas.microsoft.com/office/drawing/2014/main" id="{B798C361-0E0D-8AC8-CD8F-2B2C0D073057}"/>
+                  </a:ext>
+                </a:extLst>
+              </p:cNvPr>
+              <p:cNvSpPr txBox="1"/>
+              <p:nvPr/>
+            </p:nvSpPr>
+            <p:spPr>
+              <a:xfrm>
+                <a:off x="3400089" y="2624974"/>
+                <a:ext cx="370230" cy="369332"/>
+              </a:xfrm>
+              <a:prstGeom prst="rect">
+                <a:avLst/>
+              </a:prstGeom>
+              <a:noFill/>
+            </p:spPr>
+            <p:txBody>
+              <a:bodyPr wrap="none" rtlCol="0">
+                <a:spAutoFit/>
+              </a:bodyPr>
+              <a:lstStyle/>
+              <a:p>
+                <a:pPr/>
+                <a14:m>
+                  <m:oMathPara xmlns:m="http://schemas.openxmlformats.org/officeDocument/2006/math">
+                    <m:oMathParaPr>
+                      <m:jc m:val="centerGroup"/>
+                    </m:oMathParaPr>
+                    <m:oMath xmlns:m="http://schemas.openxmlformats.org/officeDocument/2006/math">
+                      <m:r>
+                        <a:rPr lang="en-US" b="0" i="1" smtClean="0">
+                          <a:latin typeface="Cambria Math" panose="02040503050406030204" pitchFamily="18" charset="0"/>
+                        </a:rPr>
+                        <m:t>𝜌</m:t>
+                      </m:r>
+                    </m:oMath>
+                  </m:oMathPara>
+                </a14:m>
+                <a:endParaRPr lang="en-US" dirty="0"/>
+              </a:p>
+            </p:txBody>
+          </p:sp>
+        </mc:Choice>
+        <mc:Fallback>
+          <p:sp>
+            <p:nvSpPr>
+              <p:cNvPr id="7" name="TextBox 6">
+                <a:extLst>
+                  <a:ext uri="{FF2B5EF4-FFF2-40B4-BE49-F238E27FC236}">
+                    <a16:creationId xmlns:a16="http://schemas.microsoft.com/office/drawing/2014/main" id="{B798C361-0E0D-8AC8-CD8F-2B2C0D073057}"/>
+                  </a:ext>
+                </a:extLst>
+              </p:cNvPr>
+              <p:cNvSpPr txBox="1">
+                <a:spLocks noRot="1" noChangeAspect="1" noMove="1" noResize="1" noEditPoints="1" noAdjustHandles="1" noChangeArrowheads="1" noChangeShapeType="1" noTextEdit="1"/>
+              </p:cNvSpPr>
+              <p:nvPr/>
+            </p:nvSpPr>
+            <p:spPr>
+              <a:xfrm>
+                <a:off x="3400089" y="2624974"/>
+                <a:ext cx="370230" cy="369332"/>
+              </a:xfrm>
+              <a:prstGeom prst="rect">
+                <a:avLst/>
+              </a:prstGeom>
+              <a:blipFill>
+                <a:blip r:embed="rId4"/>
+                <a:stretch>
+                  <a:fillRect b="-8333"/>
+                </a:stretch>
+              </a:blipFill>
+            </p:spPr>
+            <p:txBody>
+              <a:bodyPr/>
+              <a:lstStyle/>
+              <a:p>
+                <a:r>
+                  <a:rPr lang="en-US">
+                    <a:noFill/>
+                  </a:rPr>
+                  <a:t> </a:t>
+                </a:r>
+              </a:p>
+            </p:txBody>
+          </p:sp>
+        </mc:Fallback>
+      </mc:AlternateContent>
+      <mc:AlternateContent xmlns:mc="http://schemas.openxmlformats.org/markup-compatibility/2006">
+        <mc:Choice xmlns:a14="http://schemas.microsoft.com/office/drawing/2010/main" Requires="a14">
+          <p:sp>
+            <p:nvSpPr>
+              <p:cNvPr id="8" name="TextBox 7">
+                <a:extLst>
+                  <a:ext uri="{FF2B5EF4-FFF2-40B4-BE49-F238E27FC236}">
+                    <a16:creationId xmlns:a16="http://schemas.microsoft.com/office/drawing/2014/main" id="{2889E797-3CA1-1593-2AFF-120AB8ED59AF}"/>
+                  </a:ext>
+                </a:extLst>
+              </p:cNvPr>
+              <p:cNvSpPr txBox="1"/>
+              <p:nvPr/>
+            </p:nvSpPr>
+            <p:spPr>
+              <a:xfrm>
+                <a:off x="4605057" y="2638402"/>
+                <a:ext cx="678584" cy="461665"/>
+              </a:xfrm>
+              <a:prstGeom prst="rect">
+                <a:avLst/>
+              </a:prstGeom>
+              <a:noFill/>
+            </p:spPr>
+            <p:txBody>
+              <a:bodyPr wrap="none" rtlCol="0">
+                <a:spAutoFit/>
+              </a:bodyPr>
+              <a:lstStyle/>
+              <a:p>
+                <a:pPr/>
+                <a14:m>
+                  <m:oMathPara xmlns:m="http://schemas.openxmlformats.org/officeDocument/2006/math">
+                    <m:oMathParaPr>
+                      <m:jc m:val="centerGroup"/>
+                    </m:oMathParaPr>
+                    <m:oMath xmlns:m="http://schemas.openxmlformats.org/officeDocument/2006/math">
+                      <m:r>
+                        <a:rPr lang="en-US" sz="2400" i="1" dirty="0" smtClean="0">
+                          <a:latin typeface="Cambria Math" panose="02040503050406030204" pitchFamily="18" charset="0"/>
+                        </a:rPr>
+                        <m:t>|</m:t>
+                      </m:r>
+                      <m:r>
+                        <a:rPr lang="en-US" sz="2400" b="0" i="1" dirty="0" smtClean="0">
+                          <a:latin typeface="Cambria Math" panose="02040503050406030204" pitchFamily="18" charset="0"/>
+                        </a:rPr>
+                        <m:t>𝜙</m:t>
+                      </m:r>
+                      <m:r>
+                        <a:rPr lang="en-US" sz="2400" i="1" dirty="0">
+                          <a:latin typeface="Cambria Math" panose="02040503050406030204" pitchFamily="18" charset="0"/>
+                        </a:rPr>
+                        <m:t>⟩</m:t>
+                      </m:r>
+                    </m:oMath>
+                  </m:oMathPara>
+                </a14:m>
+                <a:endParaRPr lang="en-US" sz="2400" dirty="0"/>
+              </a:p>
+            </p:txBody>
+          </p:sp>
+        </mc:Choice>
+        <mc:Fallback>
+          <p:sp>
+            <p:nvSpPr>
+              <p:cNvPr id="8" name="TextBox 7">
+                <a:extLst>
+                  <a:ext uri="{FF2B5EF4-FFF2-40B4-BE49-F238E27FC236}">
+                    <a16:creationId xmlns:a16="http://schemas.microsoft.com/office/drawing/2014/main" id="{2889E797-3CA1-1593-2AFF-120AB8ED59AF}"/>
+                  </a:ext>
+                </a:extLst>
+              </p:cNvPr>
+              <p:cNvSpPr txBox="1">
+                <a:spLocks noRot="1" noChangeAspect="1" noMove="1" noResize="1" noEditPoints="1" noAdjustHandles="1" noChangeArrowheads="1" noChangeShapeType="1" noTextEdit="1"/>
+              </p:cNvSpPr>
+              <p:nvPr/>
+            </p:nvSpPr>
+            <p:spPr>
+              <a:xfrm>
+                <a:off x="4605057" y="2638402"/>
+                <a:ext cx="678584" cy="461665"/>
+              </a:xfrm>
+              <a:prstGeom prst="rect">
+                <a:avLst/>
+              </a:prstGeom>
+              <a:blipFill>
+                <a:blip r:embed="rId5"/>
+                <a:stretch>
+                  <a:fillRect l="-1786" r="-1786" b="-18421"/>
+                </a:stretch>
+              </a:blipFill>
+            </p:spPr>
+            <p:txBody>
+              <a:bodyPr/>
+              <a:lstStyle/>
+              <a:p>
+                <a:r>
+                  <a:rPr lang="en-US">
+                    <a:noFill/>
+                  </a:rPr>
+                  <a:t> </a:t>
+                </a:r>
+              </a:p>
+            </p:txBody>
+          </p:sp>
+        </mc:Fallback>
+      </mc:AlternateContent>
+      <mc:AlternateContent xmlns:mc="http://schemas.openxmlformats.org/markup-compatibility/2006">
+        <mc:Choice xmlns:a14="http://schemas.microsoft.com/office/drawing/2010/main" Requires="a14">
+          <p:sp>
+            <p:nvSpPr>
+              <p:cNvPr id="9" name="TextBox 8">
+                <a:extLst>
+                  <a:ext uri="{FF2B5EF4-FFF2-40B4-BE49-F238E27FC236}">
+                    <a16:creationId xmlns:a16="http://schemas.microsoft.com/office/drawing/2014/main" id="{BAD93A75-B747-7B8D-714C-7F594526AA91}"/>
+                  </a:ext>
+                </a:extLst>
+              </p:cNvPr>
+              <p:cNvSpPr txBox="1"/>
+              <p:nvPr/>
+            </p:nvSpPr>
+            <p:spPr>
+              <a:xfrm>
+                <a:off x="971824" y="1831258"/>
+                <a:ext cx="678583" cy="477118"/>
+              </a:xfrm>
+              <a:prstGeom prst="rect">
+                <a:avLst/>
+              </a:prstGeom>
+              <a:noFill/>
+            </p:spPr>
+            <p:txBody>
+              <a:bodyPr wrap="none" rtlCol="0">
+                <a:spAutoFit/>
+              </a:bodyPr>
+              <a:lstStyle/>
+              <a:p>
+                <a:pPr/>
+                <a14:m>
+                  <m:oMathPara xmlns:m="http://schemas.openxmlformats.org/officeDocument/2006/math">
+                    <m:oMathParaPr>
+                      <m:jc m:val="centerGroup"/>
+                    </m:oMathParaPr>
+                    <m:oMath xmlns:m="http://schemas.openxmlformats.org/officeDocument/2006/math">
+                      <m:r>
+                        <a:rPr lang="en-US" sz="2400" i="1" dirty="0" smtClean="0">
+                          <a:latin typeface="Cambria Math" panose="02040503050406030204" pitchFamily="18" charset="0"/>
+                        </a:rPr>
+                        <m:t>|</m:t>
+                      </m:r>
+                      <m:acc>
+                        <m:accPr>
+                          <m:chr m:val="̂"/>
+                          <m:ctrlPr>
+                            <a:rPr lang="en-US" sz="2400" b="0" i="1" dirty="0" smtClean="0">
+                              <a:latin typeface="Cambria Math" panose="02040503050406030204" pitchFamily="18" charset="0"/>
+                            </a:rPr>
+                          </m:ctrlPr>
+                        </m:accPr>
+                        <m:e>
+                          <m:r>
+                            <a:rPr lang="en-US" sz="2400" b="0" i="1" dirty="0" smtClean="0">
+                              <a:latin typeface="Cambria Math" panose="02040503050406030204" pitchFamily="18" charset="0"/>
+                            </a:rPr>
+                            <m:t>𝜙</m:t>
+                          </m:r>
+                        </m:e>
+                      </m:acc>
+                      <m:r>
+                        <a:rPr lang="en-US" sz="2400" i="1" dirty="0">
+                          <a:latin typeface="Cambria Math" panose="02040503050406030204" pitchFamily="18" charset="0"/>
+                        </a:rPr>
+                        <m:t>⟩</m:t>
+                      </m:r>
+                    </m:oMath>
+                  </m:oMathPara>
+                </a14:m>
+                <a:endParaRPr lang="en-US" sz="2400" dirty="0"/>
+              </a:p>
+            </p:txBody>
+          </p:sp>
+        </mc:Choice>
+        <mc:Fallback>
+          <p:sp>
+            <p:nvSpPr>
+              <p:cNvPr id="9" name="TextBox 8">
+                <a:extLst>
+                  <a:ext uri="{FF2B5EF4-FFF2-40B4-BE49-F238E27FC236}">
+                    <a16:creationId xmlns:a16="http://schemas.microsoft.com/office/drawing/2014/main" id="{BAD93A75-B747-7B8D-714C-7F594526AA91}"/>
+                  </a:ext>
+                </a:extLst>
+              </p:cNvPr>
+              <p:cNvSpPr txBox="1">
+                <a:spLocks noRot="1" noChangeAspect="1" noMove="1" noResize="1" noEditPoints="1" noAdjustHandles="1" noChangeArrowheads="1" noChangeShapeType="1" noTextEdit="1"/>
+              </p:cNvSpPr>
+              <p:nvPr/>
+            </p:nvSpPr>
+            <p:spPr>
+              <a:xfrm>
+                <a:off x="971824" y="1831258"/>
+                <a:ext cx="678583" cy="477118"/>
+              </a:xfrm>
+              <a:prstGeom prst="rect">
+                <a:avLst/>
+              </a:prstGeom>
+              <a:blipFill>
+                <a:blip r:embed="rId6"/>
+                <a:stretch>
+                  <a:fillRect l="-1786" t="-3797" r="-29464" b="-16456"/>
+                </a:stretch>
+              </a:blipFill>
+            </p:spPr>
+            <p:txBody>
+              <a:bodyPr/>
+              <a:lstStyle/>
+              <a:p>
+                <a:r>
+                  <a:rPr lang="en-US">
+                    <a:noFill/>
+                  </a:rPr>
+                  <a:t> </a:t>
+                </a:r>
+              </a:p>
+            </p:txBody>
+          </p:sp>
+        </mc:Fallback>
+      </mc:AlternateContent>
+      <p:grpSp>
+        <p:nvGrpSpPr>
+          <p:cNvPr id="10" name="Group 9">
+            <a:extLst>
+              <a:ext uri="{FF2B5EF4-FFF2-40B4-BE49-F238E27FC236}">
+                <a16:creationId xmlns:a16="http://schemas.microsoft.com/office/drawing/2014/main" id="{1CEB7310-C916-7143-5575-638C14E52C35}"/>
+              </a:ext>
+            </a:extLst>
+          </p:cNvPr>
+          <p:cNvGrpSpPr/>
+          <p:nvPr/>
+        </p:nvGrpSpPr>
+        <p:grpSpPr>
+          <a:xfrm>
+            <a:off x="1095271" y="1685194"/>
+            <a:ext cx="3577708" cy="3577703"/>
+            <a:chOff x="1153584" y="740244"/>
+            <a:chExt cx="3577708" cy="3577703"/>
+          </a:xfrm>
+        </p:grpSpPr>
+        <p:cxnSp>
+          <p:nvCxnSpPr>
+            <p:cNvPr id="11" name="Straight Connector 10">
+              <a:extLst>
+                <a:ext uri="{FF2B5EF4-FFF2-40B4-BE49-F238E27FC236}">
+                  <a16:creationId xmlns:a16="http://schemas.microsoft.com/office/drawing/2014/main" id="{0F7CB348-F46A-5AFB-4821-3C4B2D2FDBD9}"/>
+                </a:ext>
+              </a:extLst>
+            </p:cNvPr>
+            <p:cNvCxnSpPr>
+              <a:cxnSpLocks/>
+              <a:stCxn id="18" idx="2"/>
+            </p:cNvCxnSpPr>
+            <p:nvPr/>
+          </p:nvCxnSpPr>
+          <p:spPr>
+            <a:xfrm>
+              <a:off x="1153584" y="2529096"/>
+              <a:ext cx="3577706" cy="7622"/>
+            </a:xfrm>
+            <a:prstGeom prst="line">
+              <a:avLst/>
+            </a:prstGeom>
+            <a:ln>
+              <a:solidFill>
+                <a:schemeClr val="accent1"/>
+              </a:solidFill>
+            </a:ln>
+          </p:spPr>
+          <p:style>
+            <a:lnRef idx="1">
+              <a:schemeClr val="accent1"/>
+            </a:lnRef>
+            <a:fillRef idx="0">
+              <a:schemeClr val="accent1"/>
+            </a:fillRef>
+            <a:effectRef idx="0">
+              <a:schemeClr val="accent1"/>
+            </a:effectRef>
+            <a:fontRef idx="minor">
+              <a:schemeClr val="tx1"/>
+            </a:fontRef>
+          </p:style>
+        </p:cxnSp>
+        <p:grpSp>
+          <p:nvGrpSpPr>
+            <p:cNvPr id="12" name="Group 11">
+              <a:extLst>
+                <a:ext uri="{FF2B5EF4-FFF2-40B4-BE49-F238E27FC236}">
+                  <a16:creationId xmlns:a16="http://schemas.microsoft.com/office/drawing/2014/main" id="{AAF36011-EE32-62F0-6209-ED192A93F079}"/>
+                </a:ext>
+              </a:extLst>
+            </p:cNvPr>
+            <p:cNvGrpSpPr/>
+            <p:nvPr/>
+          </p:nvGrpSpPr>
+          <p:grpSpPr>
+            <a:xfrm>
+              <a:off x="1153584" y="740244"/>
+              <a:ext cx="3577708" cy="3577703"/>
+              <a:chOff x="2521889" y="2808131"/>
+              <a:chExt cx="1916265" cy="1916264"/>
+            </a:xfrm>
+          </p:grpSpPr>
+          <p:sp>
+            <p:nvSpPr>
+              <p:cNvPr id="14" name="Oval 13">
+                <a:extLst>
+                  <a:ext uri="{FF2B5EF4-FFF2-40B4-BE49-F238E27FC236}">
+                    <a16:creationId xmlns:a16="http://schemas.microsoft.com/office/drawing/2014/main" id="{3D41A95B-C2AC-A194-791E-BD8E2F1C133D}"/>
+                  </a:ext>
+                </a:extLst>
+              </p:cNvPr>
+              <p:cNvSpPr/>
+              <p:nvPr/>
+            </p:nvSpPr>
+            <p:spPr>
+              <a:xfrm>
+                <a:off x="2521889" y="2808131"/>
+                <a:ext cx="1916264" cy="1916264"/>
+              </a:xfrm>
+              <a:prstGeom prst="ellipse">
+                <a:avLst/>
+              </a:prstGeom>
+              <a:ln w="12700">
+                <a:solidFill>
+                  <a:schemeClr val="accent1"/>
+                </a:solidFill>
+              </a:ln>
+            </p:spPr>
+            <p:style>
+              <a:lnRef idx="1">
+                <a:schemeClr val="accent1"/>
+              </a:lnRef>
+              <a:fillRef idx="0">
+                <a:schemeClr val="accent1"/>
+              </a:fillRef>
+              <a:effectRef idx="0">
+                <a:schemeClr val="accent1"/>
+              </a:effectRef>
+              <a:fontRef idx="minor">
+                <a:schemeClr val="tx1"/>
+              </a:fontRef>
+            </p:style>
+            <p:txBody>
+              <a:bodyPr rtlCol="0" anchor="ctr"/>
+              <a:lstStyle/>
+              <a:p>
+                <a:pPr algn="ctr"/>
+                <a:endParaRPr lang="en-US"/>
+              </a:p>
+            </p:txBody>
+          </p:sp>
+          <p:sp>
+            <p:nvSpPr>
+              <p:cNvPr id="15" name="Oval 31">
+                <a:extLst>
+                  <a:ext uri="{FF2B5EF4-FFF2-40B4-BE49-F238E27FC236}">
+                    <a16:creationId xmlns:a16="http://schemas.microsoft.com/office/drawing/2014/main" id="{6DF63F73-4700-618C-E4F7-7937A39F559B}"/>
+                  </a:ext>
+                </a:extLst>
+              </p:cNvPr>
+              <p:cNvSpPr/>
+              <p:nvPr/>
+            </p:nvSpPr>
+            <p:spPr>
+              <a:xfrm>
+                <a:off x="2521889" y="2808132"/>
+                <a:ext cx="1916264" cy="958132"/>
+              </a:xfrm>
+              <a:custGeom>
+                <a:avLst/>
+                <a:gdLst>
+                  <a:gd name="connsiteX0" fmla="*/ 0 w 1916264"/>
+                  <a:gd name="connsiteY0" fmla="*/ 958132 h 1916264"/>
+                  <a:gd name="connsiteX1" fmla="*/ 958132 w 1916264"/>
+                  <a:gd name="connsiteY1" fmla="*/ 0 h 1916264"/>
+                  <a:gd name="connsiteX2" fmla="*/ 1916264 w 1916264"/>
+                  <a:gd name="connsiteY2" fmla="*/ 958132 h 1916264"/>
+                  <a:gd name="connsiteX3" fmla="*/ 958132 w 1916264"/>
+                  <a:gd name="connsiteY3" fmla="*/ 1916264 h 1916264"/>
+                  <a:gd name="connsiteX4" fmla="*/ 0 w 1916264"/>
+                  <a:gd name="connsiteY4" fmla="*/ 958132 h 1916264"/>
+                  <a:gd name="connsiteX0" fmla="*/ 958132 w 1916264"/>
+                  <a:gd name="connsiteY0" fmla="*/ 1916264 h 2007704"/>
+                  <a:gd name="connsiteX1" fmla="*/ 0 w 1916264"/>
+                  <a:gd name="connsiteY1" fmla="*/ 958132 h 2007704"/>
+                  <a:gd name="connsiteX2" fmla="*/ 958132 w 1916264"/>
+                  <a:gd name="connsiteY2" fmla="*/ 0 h 2007704"/>
+                  <a:gd name="connsiteX3" fmla="*/ 1916264 w 1916264"/>
+                  <a:gd name="connsiteY3" fmla="*/ 958132 h 2007704"/>
+                  <a:gd name="connsiteX4" fmla="*/ 1049572 w 1916264"/>
+                  <a:gd name="connsiteY4" fmla="*/ 2007704 h 2007704"/>
+                  <a:gd name="connsiteX0" fmla="*/ 958132 w 1916264"/>
+                  <a:gd name="connsiteY0" fmla="*/ 1916264 h 1916264"/>
+                  <a:gd name="connsiteX1" fmla="*/ 0 w 1916264"/>
+                  <a:gd name="connsiteY1" fmla="*/ 958132 h 1916264"/>
+                  <a:gd name="connsiteX2" fmla="*/ 958132 w 1916264"/>
+                  <a:gd name="connsiteY2" fmla="*/ 0 h 1916264"/>
+                  <a:gd name="connsiteX3" fmla="*/ 1916264 w 1916264"/>
+                  <a:gd name="connsiteY3" fmla="*/ 958132 h 1916264"/>
+                  <a:gd name="connsiteX0" fmla="*/ 0 w 1916264"/>
+                  <a:gd name="connsiteY0" fmla="*/ 958132 h 958132"/>
+                  <a:gd name="connsiteX1" fmla="*/ 958132 w 1916264"/>
+                  <a:gd name="connsiteY1" fmla="*/ 0 h 958132"/>
+                  <a:gd name="connsiteX2" fmla="*/ 1916264 w 1916264"/>
+                  <a:gd name="connsiteY2" fmla="*/ 958132 h 958132"/>
+                </a:gdLst>
+                <a:ahLst/>
+                <a:cxnLst>
+                  <a:cxn ang="0">
+                    <a:pos x="connsiteX0" y="connsiteY0"/>
+                  </a:cxn>
+                  <a:cxn ang="0">
+                    <a:pos x="connsiteX1" y="connsiteY1"/>
+                  </a:cxn>
+                  <a:cxn ang="0">
+                    <a:pos x="connsiteX2" y="connsiteY2"/>
+                  </a:cxn>
+                </a:cxnLst>
+                <a:rect l="l" t="t" r="r" b="b"/>
+                <a:pathLst>
+                  <a:path w="1916264" h="958132">
+                    <a:moveTo>
+                      <a:pt x="0" y="958132"/>
+                    </a:moveTo>
+                    <a:cubicBezTo>
+                      <a:pt x="0" y="428970"/>
+                      <a:pt x="428970" y="0"/>
+                      <a:pt x="958132" y="0"/>
+                    </a:cubicBezTo>
+                    <a:cubicBezTo>
+                      <a:pt x="1487294" y="0"/>
+                      <a:pt x="1916264" y="428970"/>
+                      <a:pt x="1916264" y="958132"/>
+                    </a:cubicBezTo>
+                  </a:path>
+                </a:pathLst>
+              </a:custGeom>
+              <a:noFill/>
+              <a:ln w="28575">
+                <a:solidFill>
+                  <a:schemeClr val="accent1"/>
+                </a:solidFill>
+              </a:ln>
+            </p:spPr>
+            <p:style>
+              <a:lnRef idx="2">
+                <a:schemeClr val="accent1">
+                  <a:shade val="15000"/>
+                </a:schemeClr>
+              </a:lnRef>
+              <a:fillRef idx="1">
+                <a:schemeClr val="accent1"/>
+              </a:fillRef>
+              <a:effectRef idx="0">
+                <a:schemeClr val="accent1"/>
+              </a:effectRef>
+              <a:fontRef idx="minor">
+                <a:schemeClr val="lt1"/>
+              </a:fontRef>
+            </p:style>
+            <p:txBody>
+              <a:bodyPr rtlCol="0" anchor="ctr"/>
+              <a:lstStyle/>
+              <a:p>
+                <a:pPr algn="ctr"/>
+                <a:endParaRPr lang="en-US"/>
+              </a:p>
+            </p:txBody>
+          </p:sp>
+          <p:sp>
+            <p:nvSpPr>
+              <p:cNvPr id="18" name="Oval 17">
+                <a:extLst>
+                  <a:ext uri="{FF2B5EF4-FFF2-40B4-BE49-F238E27FC236}">
+                    <a16:creationId xmlns:a16="http://schemas.microsoft.com/office/drawing/2014/main" id="{66567D6C-BEFB-214E-428D-DDE9E1825481}"/>
+                  </a:ext>
+                </a:extLst>
+              </p:cNvPr>
+              <p:cNvSpPr/>
+              <p:nvPr/>
+            </p:nvSpPr>
+            <p:spPr>
+              <a:xfrm>
+                <a:off x="2521889" y="2808131"/>
+                <a:ext cx="1916265" cy="1916264"/>
+              </a:xfrm>
+              <a:prstGeom prst="ellipse">
+                <a:avLst/>
+              </a:prstGeom>
+              <a:noFill/>
+              <a:ln w="28575">
+                <a:solidFill>
+                  <a:schemeClr val="accent1"/>
+                </a:solidFill>
+              </a:ln>
+            </p:spPr>
+            <p:style>
+              <a:lnRef idx="2">
+                <a:schemeClr val="accent1">
+                  <a:shade val="15000"/>
+                </a:schemeClr>
+              </a:lnRef>
+              <a:fillRef idx="1">
+                <a:schemeClr val="accent1"/>
+              </a:fillRef>
+              <a:effectRef idx="0">
+                <a:schemeClr val="accent1"/>
+              </a:effectRef>
+              <a:fontRef idx="minor">
+                <a:schemeClr val="lt1"/>
+              </a:fontRef>
+            </p:style>
+            <p:txBody>
+              <a:bodyPr rtlCol="0" anchor="ctr"/>
+              <a:lstStyle/>
+              <a:p>
+                <a:pPr algn="ctr"/>
+                <a:endParaRPr lang="en-US">
+                  <a:solidFill>
+                    <a:schemeClr val="lt1"/>
+                  </a:solidFill>
+                </a:endParaRPr>
+              </a:p>
+            </p:txBody>
+          </p:sp>
+        </p:grpSp>
+        <p:cxnSp>
+          <p:nvCxnSpPr>
+            <p:cNvPr id="13" name="Straight Connector 12">
+              <a:extLst>
+                <a:ext uri="{FF2B5EF4-FFF2-40B4-BE49-F238E27FC236}">
+                  <a16:creationId xmlns:a16="http://schemas.microsoft.com/office/drawing/2014/main" id="{862536B9-3E9E-3E84-1A32-BF73D4D2956D}"/>
+                </a:ext>
+              </a:extLst>
+            </p:cNvPr>
+            <p:cNvCxnSpPr>
+              <a:cxnSpLocks/>
+              <a:stCxn id="18" idx="0"/>
+              <a:endCxn id="18" idx="4"/>
+            </p:cNvCxnSpPr>
+            <p:nvPr/>
+          </p:nvCxnSpPr>
+          <p:spPr>
+            <a:xfrm>
+              <a:off x="2942438" y="740244"/>
+              <a:ext cx="0" cy="3577703"/>
+            </a:xfrm>
+            <a:prstGeom prst="line">
+              <a:avLst/>
+            </a:prstGeom>
+            <a:ln>
+              <a:solidFill>
+                <a:schemeClr val="accent1"/>
+              </a:solidFill>
+            </a:ln>
+          </p:spPr>
+          <p:style>
+            <a:lnRef idx="1">
+              <a:schemeClr val="accent1"/>
+            </a:lnRef>
+            <a:fillRef idx="0">
+              <a:schemeClr val="accent1"/>
+            </a:fillRef>
+            <a:effectRef idx="0">
+              <a:schemeClr val="accent1"/>
+            </a:effectRef>
+            <a:fontRef idx="minor">
+              <a:schemeClr val="tx1"/>
+            </a:fontRef>
+          </p:style>
+        </p:cxnSp>
+      </p:grpSp>
+      <p:cxnSp>
+        <p:nvCxnSpPr>
+          <p:cNvPr id="20" name="Straight Connector 19">
+            <a:extLst>
+              <a:ext uri="{FF2B5EF4-FFF2-40B4-BE49-F238E27FC236}">
+                <a16:creationId xmlns:a16="http://schemas.microsoft.com/office/drawing/2014/main" id="{0FC82B60-E6ED-395D-848E-90B198398AFB}"/>
+              </a:ext>
+            </a:extLst>
+          </p:cNvPr>
+          <p:cNvCxnSpPr>
+            <a:cxnSpLocks/>
+            <a:stCxn id="18" idx="1"/>
+          </p:cNvCxnSpPr>
+          <p:nvPr/>
+        </p:nvCxnSpPr>
+        <p:spPr>
+          <a:xfrm>
+            <a:off x="1619214" y="2209136"/>
+            <a:ext cx="2985843" cy="718590"/>
+          </a:xfrm>
+          <a:prstGeom prst="line">
+            <a:avLst/>
+          </a:prstGeom>
+          <a:ln w="12700">
+            <a:solidFill>
+              <a:schemeClr val="tx1"/>
+            </a:solidFill>
+          </a:ln>
+        </p:spPr>
+        <p:style>
+          <a:lnRef idx="1">
+            <a:schemeClr val="accent1"/>
+          </a:lnRef>
+          <a:fillRef idx="0">
+            <a:schemeClr val="accent1"/>
+          </a:fillRef>
+          <a:effectRef idx="0">
+            <a:schemeClr val="accent1"/>
+          </a:effectRef>
+          <a:fontRef idx="minor">
+            <a:schemeClr val="tx1"/>
+          </a:fontRef>
+        </p:style>
+      </p:cxnSp>
+      <p:sp>
+        <p:nvSpPr>
+          <p:cNvPr id="21" name="Oval 20">
+            <a:extLst>
+              <a:ext uri="{FF2B5EF4-FFF2-40B4-BE49-F238E27FC236}">
+                <a16:creationId xmlns:a16="http://schemas.microsoft.com/office/drawing/2014/main" id="{F63BC089-FDB3-41AC-1D1F-6B0C8E85C360}"/>
+              </a:ext>
+            </a:extLst>
+          </p:cNvPr>
+          <p:cNvSpPr/>
+          <p:nvPr/>
+        </p:nvSpPr>
+        <p:spPr>
+          <a:xfrm>
+            <a:off x="3664039" y="2679430"/>
+            <a:ext cx="66918" cy="63823"/>
+          </a:xfrm>
+          <a:prstGeom prst="ellipse">
+            <a:avLst/>
+          </a:prstGeom>
+          <a:solidFill>
+            <a:srgbClr val="FF0000"/>
+          </a:solidFill>
+          <a:ln>
+            <a:noFill/>
+          </a:ln>
+        </p:spPr>
+        <p:style>
+          <a:lnRef idx="2">
+            <a:schemeClr val="accent1">
+              <a:shade val="15000"/>
+            </a:schemeClr>
+          </a:lnRef>
+          <a:fillRef idx="1">
+            <a:schemeClr val="accent1"/>
+          </a:fillRef>
+          <a:effectRef idx="0">
+            <a:schemeClr val="accent1"/>
+          </a:effectRef>
+          <a:fontRef idx="minor">
+            <a:schemeClr val="lt1"/>
+          </a:fontRef>
+        </p:style>
+        <p:txBody>
+          <a:bodyPr rtlCol="0" anchor="ctr"/>
+          <a:lstStyle/>
+          <a:p>
+            <a:pPr algn="ctr"/>
+            <a:endParaRPr lang="en-US"/>
+          </a:p>
+        </p:txBody>
+      </p:sp>
+      <mc:AlternateContent xmlns:mc="http://schemas.openxmlformats.org/markup-compatibility/2006">
+        <mc:Choice xmlns:a14="http://schemas.microsoft.com/office/drawing/2010/main" Requires="a14">
+          <p:sp>
+            <p:nvSpPr>
+              <p:cNvPr id="22" name="TextBox 21">
+                <a:extLst>
+                  <a:ext uri="{FF2B5EF4-FFF2-40B4-BE49-F238E27FC236}">
+                    <a16:creationId xmlns:a16="http://schemas.microsoft.com/office/drawing/2014/main" id="{32B271AB-8A95-186A-5C58-2C879F7410E2}"/>
+                  </a:ext>
+                </a:extLst>
+              </p:cNvPr>
+              <p:cNvSpPr txBox="1"/>
+              <p:nvPr/>
+            </p:nvSpPr>
+            <p:spPr>
+              <a:xfrm>
+                <a:off x="5367714" y="2358826"/>
+                <a:ext cx="6534353" cy="1892698"/>
+              </a:xfrm>
+              <a:prstGeom prst="rect">
+                <a:avLst/>
+              </a:prstGeom>
+              <a:noFill/>
+            </p:spPr>
+            <p:txBody>
+              <a:bodyPr wrap="none" rtlCol="0">
+                <a:spAutoFit/>
+              </a:bodyPr>
+              <a:lstStyle/>
+              <a:p>
+                <a:pPr algn="ctr"/>
+                <a14:m>
+                  <m:oMath xmlns:m="http://schemas.openxmlformats.org/officeDocument/2006/math">
+                    <m:d>
+                      <m:dPr>
+                        <m:begChr m:val="|"/>
+                        <m:endChr m:val="⟩"/>
+                        <m:ctrlPr>
+                          <a:rPr lang="en-US" sz="3200" i="1" dirty="0" smtClean="0">
+                            <a:solidFill>
+                              <a:schemeClr val="tx1"/>
+                            </a:solidFill>
+                            <a:latin typeface="Cambria Math" panose="02040503050406030204" pitchFamily="18" charset="0"/>
+                          </a:rPr>
+                        </m:ctrlPr>
+                      </m:dPr>
+                      <m:e>
+                        <m:r>
+                          <a:rPr lang="en-US" sz="3200" i="1" dirty="0">
+                            <a:solidFill>
+                              <a:schemeClr val="tx1"/>
+                            </a:solidFill>
+                            <a:latin typeface="Cambria Math" panose="02040503050406030204" pitchFamily="18" charset="0"/>
+                          </a:rPr>
+                          <m:t>𝜙</m:t>
+                        </m:r>
+                      </m:e>
+                    </m:d>
+                    <m:r>
+                      <a:rPr lang="en-US" sz="3200" i="1" dirty="0">
+                        <a:solidFill>
+                          <a:schemeClr val="tx1"/>
+                        </a:solidFill>
+                        <a:latin typeface="Cambria Math" panose="02040503050406030204" pitchFamily="18" charset="0"/>
+                      </a:rPr>
+                      <m:t>=</m:t>
+                    </m:r>
+                    <m:sSub>
+                      <m:sSubPr>
+                        <m:ctrlPr>
+                          <a:rPr lang="en-US" sz="3200" i="1" dirty="0">
+                            <a:solidFill>
+                              <a:schemeClr val="tx1"/>
+                            </a:solidFill>
+                            <a:latin typeface="Cambria Math" panose="02040503050406030204" pitchFamily="18" charset="0"/>
+                          </a:rPr>
+                        </m:ctrlPr>
+                      </m:sSubPr>
+                      <m:e>
+                        <m:r>
+                          <a:rPr lang="en-US" sz="3200" i="1" dirty="0">
+                            <a:solidFill>
+                              <a:schemeClr val="tx1"/>
+                            </a:solidFill>
+                            <a:latin typeface="Cambria Math" panose="02040503050406030204" pitchFamily="18" charset="0"/>
+                          </a:rPr>
+                          <m:t>𝑐</m:t>
+                        </m:r>
+                      </m:e>
+                      <m:sub>
+                        <m:r>
+                          <a:rPr lang="en-US" sz="3200" i="1" dirty="0">
+                            <a:solidFill>
+                              <a:schemeClr val="tx1"/>
+                            </a:solidFill>
+                            <a:latin typeface="Cambria Math" panose="02040503050406030204" pitchFamily="18" charset="0"/>
+                          </a:rPr>
+                          <m:t>1</m:t>
+                        </m:r>
+                      </m:sub>
+                    </m:sSub>
+                    <m:d>
+                      <m:dPr>
+                        <m:begChr m:val="|"/>
+                        <m:endChr m:val="⟩"/>
+                        <m:ctrlPr>
+                          <a:rPr lang="en-US" sz="3200" i="1" dirty="0">
+                            <a:solidFill>
+                              <a:schemeClr val="tx1"/>
+                            </a:solidFill>
+                            <a:latin typeface="Cambria Math" panose="02040503050406030204" pitchFamily="18" charset="0"/>
+                          </a:rPr>
+                        </m:ctrlPr>
+                      </m:dPr>
+                      <m:e>
+                        <m:sSub>
+                          <m:sSubPr>
+                            <m:ctrlPr>
+                              <a:rPr lang="en-US" sz="3200" i="1" dirty="0">
+                                <a:solidFill>
+                                  <a:schemeClr val="tx1"/>
+                                </a:solidFill>
+                                <a:latin typeface="Cambria Math" panose="02040503050406030204" pitchFamily="18" charset="0"/>
+                              </a:rPr>
+                            </m:ctrlPr>
+                          </m:sSubPr>
+                          <m:e>
+                            <m:r>
+                              <a:rPr lang="en-US" sz="3200" i="1" dirty="0">
+                                <a:solidFill>
+                                  <a:schemeClr val="tx1"/>
+                                </a:solidFill>
+                                <a:latin typeface="Cambria Math" panose="02040503050406030204" pitchFamily="18" charset="0"/>
+                              </a:rPr>
+                              <m:t>𝜓</m:t>
+                            </m:r>
+                          </m:e>
+                          <m:sub>
+                            <m:r>
+                              <a:rPr lang="en-US" sz="3200" i="1" dirty="0">
+                                <a:solidFill>
+                                  <a:schemeClr val="tx1"/>
+                                </a:solidFill>
+                                <a:latin typeface="Cambria Math" panose="02040503050406030204" pitchFamily="18" charset="0"/>
+                              </a:rPr>
+                              <m:t>1</m:t>
+                            </m:r>
+                          </m:sub>
+                        </m:sSub>
+                      </m:e>
+                    </m:d>
+                    <m:r>
+                      <a:rPr lang="en-US" sz="3200" i="1" dirty="0">
+                        <a:solidFill>
+                          <a:schemeClr val="tx1"/>
+                        </a:solidFill>
+                        <a:latin typeface="Cambria Math" panose="02040503050406030204" pitchFamily="18" charset="0"/>
+                      </a:rPr>
+                      <m:t>+</m:t>
+                    </m:r>
+                    <m:sSub>
+                      <m:sSubPr>
+                        <m:ctrlPr>
+                          <a:rPr lang="en-US" sz="3200" i="1" dirty="0">
+                            <a:solidFill>
+                              <a:schemeClr val="tx1"/>
+                            </a:solidFill>
+                            <a:latin typeface="Cambria Math" panose="02040503050406030204" pitchFamily="18" charset="0"/>
+                          </a:rPr>
+                        </m:ctrlPr>
+                      </m:sSubPr>
+                      <m:e>
+                        <m:r>
+                          <a:rPr lang="en-US" sz="3200" i="1" dirty="0">
+                            <a:solidFill>
+                              <a:schemeClr val="tx1"/>
+                            </a:solidFill>
+                            <a:latin typeface="Cambria Math" panose="02040503050406030204" pitchFamily="18" charset="0"/>
+                          </a:rPr>
+                          <m:t>𝑐</m:t>
+                        </m:r>
+                      </m:e>
+                      <m:sub>
+                        <m:r>
+                          <a:rPr lang="en-US" sz="3200" i="1" dirty="0">
+                            <a:solidFill>
+                              <a:schemeClr val="tx1"/>
+                            </a:solidFill>
+                            <a:latin typeface="Cambria Math" panose="02040503050406030204" pitchFamily="18" charset="0"/>
+                          </a:rPr>
+                          <m:t>2</m:t>
+                        </m:r>
+                      </m:sub>
+                    </m:sSub>
+                    <m:d>
+                      <m:dPr>
+                        <m:begChr m:val="|"/>
+                        <m:endChr m:val="⟩"/>
+                        <m:ctrlPr>
+                          <a:rPr lang="en-US" sz="3200" i="1" dirty="0">
+                            <a:solidFill>
+                              <a:schemeClr val="tx1"/>
+                            </a:solidFill>
+                            <a:latin typeface="Cambria Math" panose="02040503050406030204" pitchFamily="18" charset="0"/>
+                          </a:rPr>
+                        </m:ctrlPr>
+                      </m:dPr>
+                      <m:e>
+                        <m:sSub>
+                          <m:sSubPr>
+                            <m:ctrlPr>
+                              <a:rPr lang="en-US" sz="3200" i="1" dirty="0">
+                                <a:solidFill>
+                                  <a:schemeClr val="tx1"/>
+                                </a:solidFill>
+                                <a:latin typeface="Cambria Math" panose="02040503050406030204" pitchFamily="18" charset="0"/>
+                              </a:rPr>
+                            </m:ctrlPr>
+                          </m:sSubPr>
+                          <m:e>
+                            <m:r>
+                              <a:rPr lang="en-US" sz="3200" i="1" dirty="0">
+                                <a:solidFill>
+                                  <a:schemeClr val="tx1"/>
+                                </a:solidFill>
+                                <a:latin typeface="Cambria Math" panose="02040503050406030204" pitchFamily="18" charset="0"/>
+                              </a:rPr>
+                              <m:t>𝜓</m:t>
+                            </m:r>
+                          </m:e>
+                          <m:sub>
+                            <m:r>
+                              <a:rPr lang="en-US" sz="3200" i="1" dirty="0">
+                                <a:solidFill>
+                                  <a:schemeClr val="tx1"/>
+                                </a:solidFill>
+                                <a:latin typeface="Cambria Math" panose="02040503050406030204" pitchFamily="18" charset="0"/>
+                              </a:rPr>
+                              <m:t>2</m:t>
+                            </m:r>
+                          </m:sub>
+                        </m:sSub>
+                      </m:e>
+                    </m:d>
+                  </m:oMath>
+                </a14:m>
+                <a:r>
+                  <a:rPr lang="en-US" sz="3200" dirty="0">
+                    <a:solidFill>
+                      <a:schemeClr val="tx1"/>
+                    </a:solidFill>
+                  </a:rPr>
+                  <a:t> </a:t>
+                </a:r>
+              </a:p>
+              <a:p>
+                <a:pPr algn="ctr"/>
+                <a14:m>
+                  <m:oMathPara xmlns:m="http://schemas.openxmlformats.org/officeDocument/2006/math">
+                    <m:oMathParaPr>
+                      <m:jc m:val="centerGroup"/>
+                    </m:oMathParaPr>
+                    <m:oMath xmlns:m="http://schemas.openxmlformats.org/officeDocument/2006/math">
+                      <m:r>
+                        <a:rPr lang="en-US" sz="4800" b="0" i="1" dirty="0" smtClean="0">
+                          <a:solidFill>
+                            <a:schemeClr val="tx1"/>
+                          </a:solidFill>
+                          <a:latin typeface="Cambria Math" panose="02040503050406030204" pitchFamily="18" charset="0"/>
+                          <a:ea typeface="Cambria Math" panose="02040503050406030204" pitchFamily="18" charset="0"/>
+                        </a:rPr>
+                        <m:t>⇕</m:t>
+                      </m:r>
+                    </m:oMath>
+                  </m:oMathPara>
+                </a14:m>
+                <a:endParaRPr lang="en-US" sz="3200" dirty="0">
+                  <a:solidFill>
+                    <a:schemeClr val="tx1"/>
+                  </a:solidFill>
+                </a:endParaRPr>
+              </a:p>
+              <a:p>
+                <a:pPr algn="ctr"/>
+                <a14:m>
+                  <m:oMathPara xmlns:m="http://schemas.openxmlformats.org/officeDocument/2006/math">
+                    <m:oMathParaPr>
+                      <m:jc m:val="centerGroup"/>
+                    </m:oMathParaPr>
+                    <m:oMath xmlns:m="http://schemas.openxmlformats.org/officeDocument/2006/math">
+                      <m:r>
+                        <a:rPr lang="en-US" sz="3200" i="1">
+                          <a:solidFill>
+                            <a:schemeClr val="tx1"/>
+                          </a:solidFill>
+                          <a:latin typeface="Cambria Math" panose="02040503050406030204" pitchFamily="18" charset="0"/>
+                        </a:rPr>
+                        <m:t>𝜌</m:t>
+                      </m:r>
+                      <m:r>
+                        <a:rPr lang="en-US" sz="3200" i="1">
+                          <a:solidFill>
+                            <a:schemeClr val="tx1"/>
+                          </a:solidFill>
+                          <a:latin typeface="Cambria Math" panose="02040503050406030204" pitchFamily="18" charset="0"/>
+                        </a:rPr>
+                        <m:t>=</m:t>
+                      </m:r>
+                      <m:sSub>
+                        <m:sSubPr>
+                          <m:ctrlPr>
+                            <a:rPr lang="en-US" sz="3200" i="1">
+                              <a:solidFill>
+                                <a:schemeClr val="tx1"/>
+                              </a:solidFill>
+                              <a:latin typeface="Cambria Math" panose="02040503050406030204" pitchFamily="18" charset="0"/>
+                            </a:rPr>
+                          </m:ctrlPr>
+                        </m:sSubPr>
+                        <m:e>
+                          <m:r>
+                            <a:rPr lang="en-US" sz="3200" i="1">
+                              <a:solidFill>
+                                <a:schemeClr val="tx1"/>
+                              </a:solidFill>
+                              <a:latin typeface="Cambria Math" panose="02040503050406030204" pitchFamily="18" charset="0"/>
+                            </a:rPr>
+                            <m:t>𝑝</m:t>
+                          </m:r>
+                        </m:e>
+                        <m:sub>
+                          <m:r>
+                            <a:rPr lang="en-US" sz="3200" i="1">
+                              <a:solidFill>
+                                <a:schemeClr val="tx1"/>
+                              </a:solidFill>
+                              <a:latin typeface="Cambria Math" panose="02040503050406030204" pitchFamily="18" charset="0"/>
+                            </a:rPr>
+                            <m:t>𝜙</m:t>
+                          </m:r>
+                        </m:sub>
+                      </m:sSub>
+                      <m:sSub>
+                        <m:sSubPr>
+                          <m:ctrlPr>
+                            <a:rPr lang="en-US" sz="3200" i="1">
+                              <a:solidFill>
+                                <a:schemeClr val="tx1"/>
+                              </a:solidFill>
+                              <a:latin typeface="Cambria Math" panose="02040503050406030204" pitchFamily="18" charset="0"/>
+                            </a:rPr>
+                          </m:ctrlPr>
+                        </m:sSubPr>
+                        <m:e>
+                          <m:r>
+                            <a:rPr lang="en-US" sz="3200" i="1">
+                              <a:solidFill>
+                                <a:schemeClr val="tx1"/>
+                              </a:solidFill>
+                              <a:latin typeface="Cambria Math" panose="02040503050406030204" pitchFamily="18" charset="0"/>
+                            </a:rPr>
+                            <m:t>𝜌</m:t>
+                          </m:r>
+                        </m:e>
+                        <m:sub>
+                          <m:r>
+                            <a:rPr lang="en-US" sz="3200" i="1">
+                              <a:solidFill>
+                                <a:schemeClr val="tx1"/>
+                              </a:solidFill>
+                              <a:latin typeface="Cambria Math" panose="02040503050406030204" pitchFamily="18" charset="0"/>
+                            </a:rPr>
+                            <m:t>𝜙</m:t>
+                          </m:r>
+                        </m:sub>
+                      </m:sSub>
+                      <m:r>
+                        <a:rPr lang="en-US" sz="3200" i="1">
+                          <a:solidFill>
+                            <a:schemeClr val="tx1"/>
+                          </a:solidFill>
+                          <a:latin typeface="Cambria Math" panose="02040503050406030204" pitchFamily="18" charset="0"/>
+                        </a:rPr>
+                        <m:t>+</m:t>
+                      </m:r>
+                      <m:sSub>
+                        <m:sSubPr>
+                          <m:ctrlPr>
+                            <a:rPr lang="en-US" sz="3200" i="1">
+                              <a:solidFill>
+                                <a:schemeClr val="tx1"/>
+                              </a:solidFill>
+                              <a:latin typeface="Cambria Math" panose="02040503050406030204" pitchFamily="18" charset="0"/>
+                            </a:rPr>
+                          </m:ctrlPr>
+                        </m:sSubPr>
+                        <m:e>
+                          <m:r>
+                            <a:rPr lang="en-US" sz="3200" i="1">
+                              <a:solidFill>
+                                <a:schemeClr val="tx1"/>
+                              </a:solidFill>
+                              <a:latin typeface="Cambria Math" panose="02040503050406030204" pitchFamily="18" charset="0"/>
+                            </a:rPr>
+                            <m:t>𝑝</m:t>
+                          </m:r>
+                        </m:e>
+                        <m:sub>
+                          <m:acc>
+                            <m:accPr>
+                              <m:chr m:val="̂"/>
+                              <m:ctrlPr>
+                                <a:rPr lang="en-US" sz="3200" i="1">
+                                  <a:solidFill>
+                                    <a:schemeClr val="tx1"/>
+                                  </a:solidFill>
+                                  <a:latin typeface="Cambria Math" panose="02040503050406030204" pitchFamily="18" charset="0"/>
+                                </a:rPr>
+                              </m:ctrlPr>
+                            </m:accPr>
+                            <m:e>
+                              <m:r>
+                                <a:rPr lang="en-US" sz="3200" i="1">
+                                  <a:solidFill>
+                                    <a:schemeClr val="tx1"/>
+                                  </a:solidFill>
+                                  <a:latin typeface="Cambria Math" panose="02040503050406030204" pitchFamily="18" charset="0"/>
+                                </a:rPr>
+                                <m:t>𝜙</m:t>
+                              </m:r>
+                            </m:e>
+                          </m:acc>
+                        </m:sub>
+                      </m:sSub>
+                      <m:sSub>
+                        <m:sSubPr>
+                          <m:ctrlPr>
+                            <a:rPr lang="en-US" sz="3200" i="1">
+                              <a:solidFill>
+                                <a:schemeClr val="tx1"/>
+                              </a:solidFill>
+                              <a:latin typeface="Cambria Math" panose="02040503050406030204" pitchFamily="18" charset="0"/>
+                            </a:rPr>
+                          </m:ctrlPr>
+                        </m:sSubPr>
+                        <m:e>
+                          <m:r>
+                            <a:rPr lang="en-US" sz="3200" i="1">
+                              <a:solidFill>
+                                <a:schemeClr val="tx1"/>
+                              </a:solidFill>
+                              <a:latin typeface="Cambria Math" panose="02040503050406030204" pitchFamily="18" charset="0"/>
+                            </a:rPr>
+                            <m:t>𝜌</m:t>
+                          </m:r>
+                        </m:e>
+                        <m:sub>
+                          <m:acc>
+                            <m:accPr>
+                              <m:chr m:val="̂"/>
+                              <m:ctrlPr>
+                                <a:rPr lang="en-US" sz="3200" i="1">
+                                  <a:solidFill>
+                                    <a:schemeClr val="tx1"/>
+                                  </a:solidFill>
+                                  <a:latin typeface="Cambria Math" panose="02040503050406030204" pitchFamily="18" charset="0"/>
+                                </a:rPr>
+                              </m:ctrlPr>
+                            </m:accPr>
+                            <m:e>
+                              <m:r>
+                                <a:rPr lang="en-US" sz="3200" i="1">
+                                  <a:solidFill>
+                                    <a:schemeClr val="tx1"/>
+                                  </a:solidFill>
+                                  <a:latin typeface="Cambria Math" panose="02040503050406030204" pitchFamily="18" charset="0"/>
+                                </a:rPr>
+                                <m:t>𝜙</m:t>
+                              </m:r>
+                            </m:e>
+                          </m:acc>
+                        </m:sub>
+                      </m:sSub>
+                      <m:r>
+                        <a:rPr lang="en-US" sz="3200" b="0" i="1" smtClean="0">
+                          <a:solidFill>
+                            <a:schemeClr val="tx1"/>
+                          </a:solidFill>
+                          <a:latin typeface="Cambria Math" panose="02040503050406030204" pitchFamily="18" charset="0"/>
+                        </a:rPr>
+                        <m:t>=</m:t>
+                      </m:r>
+                      <m:sSub>
+                        <m:sSubPr>
+                          <m:ctrlPr>
+                            <a:rPr lang="en-US" sz="3200" i="1">
+                              <a:solidFill>
+                                <a:schemeClr val="tx1"/>
+                              </a:solidFill>
+                              <a:latin typeface="Cambria Math" panose="02040503050406030204" pitchFamily="18" charset="0"/>
+                            </a:rPr>
+                          </m:ctrlPr>
+                        </m:sSubPr>
+                        <m:e>
+                          <m:r>
+                            <a:rPr lang="en-US" sz="3200" i="1">
+                              <a:solidFill>
+                                <a:schemeClr val="tx1"/>
+                              </a:solidFill>
+                              <a:latin typeface="Cambria Math" panose="02040503050406030204" pitchFamily="18" charset="0"/>
+                            </a:rPr>
+                            <m:t>𝑝</m:t>
+                          </m:r>
+                        </m:e>
+                        <m:sub>
+                          <m:r>
+                            <a:rPr lang="en-US" sz="3200" i="1">
+                              <a:solidFill>
+                                <a:schemeClr val="tx1"/>
+                              </a:solidFill>
+                              <a:latin typeface="Cambria Math" panose="02040503050406030204" pitchFamily="18" charset="0"/>
+                            </a:rPr>
+                            <m:t>1</m:t>
+                          </m:r>
+                        </m:sub>
+                      </m:sSub>
+                      <m:sSub>
+                        <m:sSubPr>
+                          <m:ctrlPr>
+                            <a:rPr lang="en-US" sz="3200" i="1">
+                              <a:solidFill>
+                                <a:schemeClr val="tx1"/>
+                              </a:solidFill>
+                              <a:latin typeface="Cambria Math" panose="02040503050406030204" pitchFamily="18" charset="0"/>
+                            </a:rPr>
+                          </m:ctrlPr>
+                        </m:sSubPr>
+                        <m:e>
+                          <m:r>
+                            <a:rPr lang="en-US" sz="3200" i="1">
+                              <a:solidFill>
+                                <a:schemeClr val="tx1"/>
+                              </a:solidFill>
+                              <a:latin typeface="Cambria Math" panose="02040503050406030204" pitchFamily="18" charset="0"/>
+                            </a:rPr>
+                            <m:t>𝜌</m:t>
+                          </m:r>
+                        </m:e>
+                        <m:sub>
+                          <m:sSub>
+                            <m:sSubPr>
+                              <m:ctrlPr>
+                                <a:rPr lang="en-US" sz="3200" b="0" i="1" smtClean="0">
+                                  <a:solidFill>
+                                    <a:schemeClr val="tx1"/>
+                                  </a:solidFill>
+                                  <a:latin typeface="Cambria Math" panose="02040503050406030204" pitchFamily="18" charset="0"/>
+                                </a:rPr>
+                              </m:ctrlPr>
+                            </m:sSubPr>
+                            <m:e>
+                              <m:r>
+                                <a:rPr lang="en-US" sz="3200" b="0" i="1" smtClean="0">
+                                  <a:solidFill>
+                                    <a:schemeClr val="tx1"/>
+                                  </a:solidFill>
+                                  <a:latin typeface="Cambria Math" panose="02040503050406030204" pitchFamily="18" charset="0"/>
+                                </a:rPr>
+                                <m:t>𝜓</m:t>
+                              </m:r>
+                            </m:e>
+                            <m:sub>
+                              <m:r>
+                                <a:rPr lang="en-US" sz="3200" i="1">
+                                  <a:solidFill>
+                                    <a:schemeClr val="tx1"/>
+                                  </a:solidFill>
+                                  <a:latin typeface="Cambria Math" panose="02040503050406030204" pitchFamily="18" charset="0"/>
+                                </a:rPr>
+                                <m:t>1</m:t>
+                              </m:r>
+                            </m:sub>
+                          </m:sSub>
+                        </m:sub>
+                      </m:sSub>
+                      <m:r>
+                        <a:rPr lang="en-US" sz="3200" i="1">
+                          <a:solidFill>
+                            <a:schemeClr val="tx1"/>
+                          </a:solidFill>
+                          <a:latin typeface="Cambria Math" panose="02040503050406030204" pitchFamily="18" charset="0"/>
+                        </a:rPr>
+                        <m:t>+</m:t>
+                      </m:r>
+                      <m:sSub>
+                        <m:sSubPr>
+                          <m:ctrlPr>
+                            <a:rPr lang="en-US" sz="3200" i="1">
+                              <a:solidFill>
+                                <a:schemeClr val="tx1"/>
+                              </a:solidFill>
+                              <a:latin typeface="Cambria Math" panose="02040503050406030204" pitchFamily="18" charset="0"/>
+                            </a:rPr>
+                          </m:ctrlPr>
+                        </m:sSubPr>
+                        <m:e>
+                          <m:r>
+                            <a:rPr lang="en-US" sz="3200" i="1">
+                              <a:solidFill>
+                                <a:schemeClr val="tx1"/>
+                              </a:solidFill>
+                              <a:latin typeface="Cambria Math" panose="02040503050406030204" pitchFamily="18" charset="0"/>
+                            </a:rPr>
+                            <m:t>𝑝</m:t>
+                          </m:r>
+                        </m:e>
+                        <m:sub>
+                          <m:r>
+                            <a:rPr lang="en-US" sz="3200" i="1">
+                              <a:solidFill>
+                                <a:schemeClr val="tx1"/>
+                              </a:solidFill>
+                              <a:latin typeface="Cambria Math" panose="02040503050406030204" pitchFamily="18" charset="0"/>
+                            </a:rPr>
+                            <m:t>2</m:t>
+                          </m:r>
+                        </m:sub>
+                      </m:sSub>
+                      <m:sSub>
+                        <m:sSubPr>
+                          <m:ctrlPr>
+                            <a:rPr lang="en-US" sz="3200" i="1">
+                              <a:solidFill>
+                                <a:schemeClr val="tx1"/>
+                              </a:solidFill>
+                              <a:latin typeface="Cambria Math" panose="02040503050406030204" pitchFamily="18" charset="0"/>
+                            </a:rPr>
+                          </m:ctrlPr>
+                        </m:sSubPr>
+                        <m:e>
+                          <m:r>
+                            <a:rPr lang="en-US" sz="3200" i="1">
+                              <a:solidFill>
+                                <a:schemeClr val="tx1"/>
+                              </a:solidFill>
+                              <a:latin typeface="Cambria Math" panose="02040503050406030204" pitchFamily="18" charset="0"/>
+                            </a:rPr>
+                            <m:t>𝜌</m:t>
+                          </m:r>
+                        </m:e>
+                        <m:sub>
+                          <m:sSub>
+                            <m:sSubPr>
+                              <m:ctrlPr>
+                                <a:rPr lang="en-US" sz="3200" b="0" i="1" smtClean="0">
+                                  <a:solidFill>
+                                    <a:schemeClr val="tx1"/>
+                                  </a:solidFill>
+                                  <a:latin typeface="Cambria Math" panose="02040503050406030204" pitchFamily="18" charset="0"/>
+                                </a:rPr>
+                              </m:ctrlPr>
+                            </m:sSubPr>
+                            <m:e>
+                              <m:r>
+                                <a:rPr lang="en-US" sz="3200" b="0" i="1" smtClean="0">
+                                  <a:solidFill>
+                                    <a:schemeClr val="tx1"/>
+                                  </a:solidFill>
+                                  <a:latin typeface="Cambria Math" panose="02040503050406030204" pitchFamily="18" charset="0"/>
+                                </a:rPr>
+                                <m:t>𝜓</m:t>
+                              </m:r>
+                            </m:e>
+                            <m:sub>
+                              <m:r>
+                                <a:rPr lang="en-US" sz="3200" i="1">
+                                  <a:solidFill>
+                                    <a:schemeClr val="tx1"/>
+                                  </a:solidFill>
+                                  <a:latin typeface="Cambria Math" panose="02040503050406030204" pitchFamily="18" charset="0"/>
+                                </a:rPr>
+                                <m:t>2</m:t>
+                              </m:r>
+                            </m:sub>
+                          </m:sSub>
+                        </m:sub>
+                      </m:sSub>
+                    </m:oMath>
+                  </m:oMathPara>
+                </a14:m>
+                <a:endParaRPr lang="en-US" sz="3200" dirty="0">
+                  <a:solidFill>
+                    <a:schemeClr val="tx1"/>
+                  </a:solidFill>
+                </a:endParaRPr>
+              </a:p>
+            </p:txBody>
+          </p:sp>
+        </mc:Choice>
+        <mc:Fallback>
+          <p:sp>
+            <p:nvSpPr>
+              <p:cNvPr id="22" name="TextBox 21">
+                <a:extLst>
+                  <a:ext uri="{FF2B5EF4-FFF2-40B4-BE49-F238E27FC236}">
+                    <a16:creationId xmlns:a16="http://schemas.microsoft.com/office/drawing/2014/main" id="{32B271AB-8A95-186A-5C58-2C879F7410E2}"/>
+                  </a:ext>
+                </a:extLst>
+              </p:cNvPr>
+              <p:cNvSpPr txBox="1">
+                <a:spLocks noRot="1" noChangeAspect="1" noMove="1" noResize="1" noEditPoints="1" noAdjustHandles="1" noChangeArrowheads="1" noChangeShapeType="1" noTextEdit="1"/>
+              </p:cNvSpPr>
+              <p:nvPr/>
+            </p:nvSpPr>
+            <p:spPr>
+              <a:xfrm>
+                <a:off x="5367714" y="2358826"/>
+                <a:ext cx="6534353" cy="1892698"/>
+              </a:xfrm>
+              <a:prstGeom prst="rect">
+                <a:avLst/>
+              </a:prstGeom>
+              <a:blipFill>
+                <a:blip r:embed="rId7"/>
+                <a:stretch>
+                  <a:fillRect/>
+                </a:stretch>
+              </a:blipFill>
+            </p:spPr>
+            <p:txBody>
+              <a:bodyPr/>
+              <a:lstStyle/>
+              <a:p>
+                <a:r>
+                  <a:rPr lang="en-US">
+                    <a:noFill/>
+                  </a:rPr>
+                  <a:t> </a:t>
+                </a:r>
+              </a:p>
+            </p:txBody>
+          </p:sp>
+        </mc:Fallback>
+      </mc:AlternateContent>
+    </p:spTree>
+    <p:extLst>
+      <p:ext uri="{BB962C8B-B14F-4D97-AF65-F5344CB8AC3E}">
+        <p14:creationId xmlns:p14="http://schemas.microsoft.com/office/powerpoint/2010/main" val="743702572"/>
       </p:ext>
     </p:extLst>
   </p:cSld>

--- a/2026/2026Thumbnail.pptx
+++ b/2026/2026Thumbnail.pptx
@@ -11,6 +11,9 @@
     <p:sldId id="943" r:id="rId5"/>
     <p:sldId id="944" r:id="rId6"/>
     <p:sldId id="945" r:id="rId7"/>
+    <p:sldId id="946" r:id="rId8"/>
+    <p:sldId id="947" r:id="rId9"/>
+    <p:sldId id="949" r:id="rId10"/>
   </p:sldIdLst>
   <p:sldSz cx="12192000" cy="6858000"/>
   <p:notesSz cx="6858000" cy="9144000"/>
@@ -264,7 +267,7 @@
           <a:p>
             <a:fld id="{3816CC03-B68F-4642-A2B8-7A8633A67F21}" type="datetimeFigureOut">
               <a:rPr lang="en-US" smtClean="0"/>
-              <a:t>5/28/2026</a:t>
+              <a:t>6/29/2026</a:t>
             </a:fld>
             <a:endParaRPr lang="en-US"/>
           </a:p>
@@ -462,7 +465,7 @@
           <a:p>
             <a:fld id="{3816CC03-B68F-4642-A2B8-7A8633A67F21}" type="datetimeFigureOut">
               <a:rPr lang="en-US" smtClean="0"/>
-              <a:t>5/28/2026</a:t>
+              <a:t>6/29/2026</a:t>
             </a:fld>
             <a:endParaRPr lang="en-US"/>
           </a:p>
@@ -670,7 +673,7 @@
           <a:p>
             <a:fld id="{3816CC03-B68F-4642-A2B8-7A8633A67F21}" type="datetimeFigureOut">
               <a:rPr lang="en-US" smtClean="0"/>
-              <a:t>5/28/2026</a:t>
+              <a:t>6/29/2026</a:t>
             </a:fld>
             <a:endParaRPr lang="en-US"/>
           </a:p>
@@ -868,7 +871,7 @@
           <a:p>
             <a:fld id="{3816CC03-B68F-4642-A2B8-7A8633A67F21}" type="datetimeFigureOut">
               <a:rPr lang="en-US" smtClean="0"/>
-              <a:t>5/28/2026</a:t>
+              <a:t>6/29/2026</a:t>
             </a:fld>
             <a:endParaRPr lang="en-US"/>
           </a:p>
@@ -1143,7 +1146,7 @@
           <a:p>
             <a:fld id="{3816CC03-B68F-4642-A2B8-7A8633A67F21}" type="datetimeFigureOut">
               <a:rPr lang="en-US" smtClean="0"/>
-              <a:t>5/28/2026</a:t>
+              <a:t>6/29/2026</a:t>
             </a:fld>
             <a:endParaRPr lang="en-US"/>
           </a:p>
@@ -1408,7 +1411,7 @@
           <a:p>
             <a:fld id="{3816CC03-B68F-4642-A2B8-7A8633A67F21}" type="datetimeFigureOut">
               <a:rPr lang="en-US" smtClean="0"/>
-              <a:t>5/28/2026</a:t>
+              <a:t>6/29/2026</a:t>
             </a:fld>
             <a:endParaRPr lang="en-US"/>
           </a:p>
@@ -1820,7 +1823,7 @@
           <a:p>
             <a:fld id="{3816CC03-B68F-4642-A2B8-7A8633A67F21}" type="datetimeFigureOut">
               <a:rPr lang="en-US" smtClean="0"/>
-              <a:t>5/28/2026</a:t>
+              <a:t>6/29/2026</a:t>
             </a:fld>
             <a:endParaRPr lang="en-US"/>
           </a:p>
@@ -1961,7 +1964,7 @@
           <a:p>
             <a:fld id="{3816CC03-B68F-4642-A2B8-7A8633A67F21}" type="datetimeFigureOut">
               <a:rPr lang="en-US" smtClean="0"/>
-              <a:t>5/28/2026</a:t>
+              <a:t>6/29/2026</a:t>
             </a:fld>
             <a:endParaRPr lang="en-US"/>
           </a:p>
@@ -2074,7 +2077,7 @@
           <a:p>
             <a:fld id="{3816CC03-B68F-4642-A2B8-7A8633A67F21}" type="datetimeFigureOut">
               <a:rPr lang="en-US" smtClean="0"/>
-              <a:t>5/28/2026</a:t>
+              <a:t>6/29/2026</a:t>
             </a:fld>
             <a:endParaRPr lang="en-US"/>
           </a:p>
@@ -2421,7 +2424,7 @@
           <a:p>
             <a:fld id="{3816CC03-B68F-4642-A2B8-7A8633A67F21}" type="datetimeFigureOut">
               <a:rPr lang="en-US" smtClean="0"/>
-              <a:t>5/28/2026</a:t>
+              <a:t>6/29/2026</a:t>
             </a:fld>
             <a:endParaRPr lang="en-US"/>
           </a:p>
@@ -2709,7 +2712,7 @@
           <a:p>
             <a:fld id="{3816CC03-B68F-4642-A2B8-7A8633A67F21}" type="datetimeFigureOut">
               <a:rPr lang="en-US" smtClean="0"/>
-              <a:t>5/28/2026</a:t>
+              <a:t>6/29/2026</a:t>
             </a:fld>
             <a:endParaRPr lang="en-US"/>
           </a:p>
@@ -2950,7 +2953,7 @@
           <a:p>
             <a:fld id="{3816CC03-B68F-4642-A2B8-7A8633A67F21}" type="datetimeFigureOut">
               <a:rPr lang="en-US" smtClean="0"/>
-              <a:t>5/28/2026</a:t>
+              <a:t>6/29/2026</a:t>
             </a:fld>
             <a:endParaRPr lang="en-US"/>
           </a:p>
@@ -10789,8 +10792,8 @@
           </a:fontRef>
         </p:style>
       </p:cxnSp>
-      <mc:AlternateContent xmlns:mc="http://schemas.openxmlformats.org/markup-compatibility/2006">
-        <mc:Choice xmlns:a14="http://schemas.microsoft.com/office/drawing/2010/main" Requires="a14">
+      <mc:AlternateContent xmlns:mc="http://schemas.openxmlformats.org/markup-compatibility/2006" xmlns:a14="http://schemas.microsoft.com/office/drawing/2010/main">
+        <mc:Choice Requires="a14">
           <p:sp>
             <p:nvSpPr>
               <p:cNvPr id="5" name="TextBox 4">
@@ -10871,7 +10874,7 @@
             </p:txBody>
           </p:sp>
         </mc:Choice>
-        <mc:Fallback>
+        <mc:Fallback xmlns="">
           <p:sp>
             <p:nvSpPr>
               <p:cNvPr id="5" name="TextBox 4">
@@ -10916,8 +10919,8 @@
           </p:sp>
         </mc:Fallback>
       </mc:AlternateContent>
-      <mc:AlternateContent xmlns:mc="http://schemas.openxmlformats.org/markup-compatibility/2006">
-        <mc:Choice xmlns:a14="http://schemas.microsoft.com/office/drawing/2010/main" Requires="a14">
+      <mc:AlternateContent xmlns:mc="http://schemas.openxmlformats.org/markup-compatibility/2006" xmlns:a14="http://schemas.microsoft.com/office/drawing/2010/main">
+        <mc:Choice Requires="a14">
           <p:sp>
             <p:nvSpPr>
               <p:cNvPr id="6" name="TextBox 5">
@@ -10998,7 +11001,7 @@
             </p:txBody>
           </p:sp>
         </mc:Choice>
-        <mc:Fallback>
+        <mc:Fallback xmlns="">
           <p:sp>
             <p:nvSpPr>
               <p:cNvPr id="6" name="TextBox 5">
@@ -11043,8 +11046,8 @@
           </p:sp>
         </mc:Fallback>
       </mc:AlternateContent>
-      <mc:AlternateContent xmlns:mc="http://schemas.openxmlformats.org/markup-compatibility/2006">
-        <mc:Choice xmlns:a14="http://schemas.microsoft.com/office/drawing/2010/main" Requires="a14">
+      <mc:AlternateContent xmlns:mc="http://schemas.openxmlformats.org/markup-compatibility/2006" xmlns:a14="http://schemas.microsoft.com/office/drawing/2010/main">
+        <mc:Choice Requires="a14">
           <p:sp>
             <p:nvSpPr>
               <p:cNvPr id="7" name="TextBox 6">
@@ -11094,7 +11097,7 @@
             </p:txBody>
           </p:sp>
         </mc:Choice>
-        <mc:Fallback>
+        <mc:Fallback xmlns="">
           <p:sp>
             <p:nvSpPr>
               <p:cNvPr id="7" name="TextBox 6">
@@ -11139,8 +11142,8 @@
           </p:sp>
         </mc:Fallback>
       </mc:AlternateContent>
-      <mc:AlternateContent xmlns:mc="http://schemas.openxmlformats.org/markup-compatibility/2006">
-        <mc:Choice xmlns:a14="http://schemas.microsoft.com/office/drawing/2010/main" Requires="a14">
+      <mc:AlternateContent xmlns:mc="http://schemas.openxmlformats.org/markup-compatibility/2006" xmlns:a14="http://schemas.microsoft.com/office/drawing/2010/main">
+        <mc:Choice Requires="a14">
           <p:sp>
             <p:nvSpPr>
               <p:cNvPr id="8" name="TextBox 7">
@@ -11202,7 +11205,7 @@
             </p:txBody>
           </p:sp>
         </mc:Choice>
-        <mc:Fallback>
+        <mc:Fallback xmlns="">
           <p:sp>
             <p:nvSpPr>
               <p:cNvPr id="8" name="TextBox 7">
@@ -11247,8 +11250,8 @@
           </p:sp>
         </mc:Fallback>
       </mc:AlternateContent>
-      <mc:AlternateContent xmlns:mc="http://schemas.openxmlformats.org/markup-compatibility/2006">
-        <mc:Choice xmlns:a14="http://schemas.microsoft.com/office/drawing/2010/main" Requires="a14">
+      <mc:AlternateContent xmlns:mc="http://schemas.openxmlformats.org/markup-compatibility/2006" xmlns:a14="http://schemas.microsoft.com/office/drawing/2010/main">
+        <mc:Choice Requires="a14">
           <p:sp>
             <p:nvSpPr>
               <p:cNvPr id="9" name="TextBox 8">
@@ -11322,7 +11325,7 @@
             </p:txBody>
           </p:sp>
         </mc:Choice>
-        <mc:Fallback>
+        <mc:Fallback xmlns="">
           <p:sp>
             <p:nvSpPr>
               <p:cNvPr id="9" name="TextBox 8">
@@ -11817,8 +11820,8 @@
           </a:p>
         </p:txBody>
       </p:sp>
-      <mc:AlternateContent xmlns:mc="http://schemas.openxmlformats.org/markup-compatibility/2006">
-        <mc:Choice xmlns:a14="http://schemas.microsoft.com/office/drawing/2010/main" Requires="a14">
+      <mc:AlternateContent xmlns:mc="http://schemas.openxmlformats.org/markup-compatibility/2006" xmlns:a14="http://schemas.microsoft.com/office/drawing/2010/main">
+        <mc:Choice Requires="a14">
           <p:sp>
             <p:nvSpPr>
               <p:cNvPr id="22" name="TextBox 21">
@@ -12516,7 +12519,7 @@
             </p:txBody>
           </p:sp>
         </mc:Choice>
-        <mc:Fallback>
+        <mc:Fallback xmlns="">
           <p:sp>
             <p:nvSpPr>
               <p:cNvPr id="22" name="TextBox 21">
@@ -12565,6 +12568,3153 @@
     <p:extLst>
       <p:ext uri="{BB962C8B-B14F-4D97-AF65-F5344CB8AC3E}">
         <p14:creationId xmlns:p14="http://schemas.microsoft.com/office/powerpoint/2010/main" val="743702572"/>
+      </p:ext>
+    </p:extLst>
+  </p:cSld>
+  <p:clrMapOvr>
+    <a:masterClrMapping/>
+  </p:clrMapOvr>
+</p:sld>
+</file>
+
+<file path=ppt/slides/slide7.xml><?xml version="1.0" encoding="utf-8"?>
+<p:sld xmlns:a="http://schemas.openxmlformats.org/drawingml/2006/main" xmlns:r="http://schemas.openxmlformats.org/officeDocument/2006/relationships" xmlns:p="http://schemas.openxmlformats.org/presentationml/2006/main">
+  <p:cSld>
+    <p:spTree>
+      <p:nvGrpSpPr>
+        <p:cNvPr id="1" name=""/>
+        <p:cNvGrpSpPr/>
+        <p:nvPr/>
+      </p:nvGrpSpPr>
+      <p:grpSpPr>
+        <a:xfrm>
+          <a:off x="0" y="0"/>
+          <a:ext cx="0" cy="0"/>
+          <a:chOff x="0" y="0"/>
+          <a:chExt cx="0" cy="0"/>
+        </a:xfrm>
+      </p:grpSpPr>
+      <mc:AlternateContent xmlns:mc="http://schemas.openxmlformats.org/markup-compatibility/2006">
+        <mc:Choice xmlns:a14="http://schemas.microsoft.com/office/drawing/2010/main" Requires="a14">
+          <p:sp>
+            <p:nvSpPr>
+              <p:cNvPr id="3" name="TextBox 2">
+                <a:extLst>
+                  <a:ext uri="{FF2B5EF4-FFF2-40B4-BE49-F238E27FC236}">
+                    <a16:creationId xmlns:a16="http://schemas.microsoft.com/office/drawing/2014/main" id="{633D94B5-DB0E-456B-7BFE-0204519C6D69}"/>
+                  </a:ext>
+                </a:extLst>
+              </p:cNvPr>
+              <p:cNvSpPr txBox="1"/>
+              <p:nvPr/>
+            </p:nvSpPr>
+            <p:spPr>
+              <a:xfrm>
+                <a:off x="1076781" y="358776"/>
+                <a:ext cx="4951997" cy="4924425"/>
+              </a:xfrm>
+              <a:prstGeom prst="rect">
+                <a:avLst/>
+              </a:prstGeom>
+              <a:noFill/>
+            </p:spPr>
+            <p:txBody>
+              <a:bodyPr wrap="none" rtlCol="0">
+                <a:spAutoFit/>
+              </a:bodyPr>
+              <a:lstStyle/>
+              <a:p>
+                <a:pPr algn="ctr"/>
+                <a:r>
+                  <a:rPr lang="en-US" sz="8800" dirty="0"/>
+                  <a:t>Born rule</a:t>
+                </a:r>
+              </a:p>
+              <a:p>
+                <a:pPr algn="ctr"/>
+                <a14:m>
+                  <m:oMathPara xmlns:m="http://schemas.openxmlformats.org/officeDocument/2006/math">
+                    <m:oMathParaPr>
+                      <m:jc m:val="centerGroup"/>
+                    </m:oMathParaPr>
+                    <m:oMath xmlns:m="http://schemas.openxmlformats.org/officeDocument/2006/math">
+                      <m:r>
+                        <a:rPr lang="en-US" sz="13800" i="1" smtClean="0">
+                          <a:latin typeface="Cambria Math" panose="02040503050406030204" pitchFamily="18" charset="0"/>
+                          <a:ea typeface="Cambria Math" panose="02040503050406030204" pitchFamily="18" charset="0"/>
+                        </a:rPr>
+                        <m:t>⇕</m:t>
+                      </m:r>
+                    </m:oMath>
+                  </m:oMathPara>
+                </a14:m>
+                <a:endParaRPr lang="en-US" sz="8800" dirty="0"/>
+              </a:p>
+              <a:p>
+                <a:pPr algn="ctr"/>
+                <a:r>
+                  <a:rPr lang="en-US" sz="8800" dirty="0"/>
+                  <a:t>Entropy</a:t>
+                </a:r>
+              </a:p>
+            </p:txBody>
+          </p:sp>
+        </mc:Choice>
+        <mc:Fallback>
+          <p:sp>
+            <p:nvSpPr>
+              <p:cNvPr id="3" name="TextBox 2">
+                <a:extLst>
+                  <a:ext uri="{FF2B5EF4-FFF2-40B4-BE49-F238E27FC236}">
+                    <a16:creationId xmlns:a16="http://schemas.microsoft.com/office/drawing/2014/main" id="{633D94B5-DB0E-456B-7BFE-0204519C6D69}"/>
+                  </a:ext>
+                </a:extLst>
+              </p:cNvPr>
+              <p:cNvSpPr txBox="1">
+                <a:spLocks noRot="1" noChangeAspect="1" noMove="1" noResize="1" noEditPoints="1" noAdjustHandles="1" noChangeArrowheads="1" noChangeShapeType="1" noTextEdit="1"/>
+              </p:cNvSpPr>
+              <p:nvPr/>
+            </p:nvSpPr>
+            <p:spPr>
+              <a:xfrm>
+                <a:off x="1076781" y="358776"/>
+                <a:ext cx="4951997" cy="4924425"/>
+              </a:xfrm>
+              <a:prstGeom prst="rect">
+                <a:avLst/>
+              </a:prstGeom>
+              <a:blipFill>
+                <a:blip r:embed="rId2"/>
+                <a:stretch>
+                  <a:fillRect l="-11330" t="-5941" r="-11207" b="-11757"/>
+                </a:stretch>
+              </a:blipFill>
+            </p:spPr>
+            <p:txBody>
+              <a:bodyPr/>
+              <a:lstStyle/>
+              <a:p>
+                <a:r>
+                  <a:rPr lang="en-US">
+                    <a:noFill/>
+                  </a:rPr>
+                  <a:t> </a:t>
+                </a:r>
+              </a:p>
+            </p:txBody>
+          </p:sp>
+        </mc:Fallback>
+      </mc:AlternateContent>
+      <p:grpSp>
+        <p:nvGrpSpPr>
+          <p:cNvPr id="24" name="Group 23">
+            <a:extLst>
+              <a:ext uri="{FF2B5EF4-FFF2-40B4-BE49-F238E27FC236}">
+                <a16:creationId xmlns:a16="http://schemas.microsoft.com/office/drawing/2014/main" id="{791D97F2-A9EB-6F39-D374-A8F50AB2532E}"/>
+              </a:ext>
+            </a:extLst>
+          </p:cNvPr>
+          <p:cNvGrpSpPr/>
+          <p:nvPr/>
+        </p:nvGrpSpPr>
+        <p:grpSpPr>
+          <a:xfrm>
+            <a:off x="7380781" y="2499811"/>
+            <a:ext cx="4057845" cy="3805469"/>
+            <a:chOff x="1480313" y="1976614"/>
+            <a:chExt cx="3399571" cy="3188136"/>
+          </a:xfrm>
+        </p:grpSpPr>
+        <p:sp>
+          <p:nvSpPr>
+            <p:cNvPr id="4" name="Rectangle 3">
+              <a:extLst>
+                <a:ext uri="{FF2B5EF4-FFF2-40B4-BE49-F238E27FC236}">
+                  <a16:creationId xmlns:a16="http://schemas.microsoft.com/office/drawing/2014/main" id="{DFA7E3FC-DC3D-333A-6E89-E8162CA6BFBF}"/>
+                </a:ext>
+              </a:extLst>
+            </p:cNvPr>
+            <p:cNvSpPr/>
+            <p:nvPr/>
+          </p:nvSpPr>
+          <p:spPr>
+            <a:xfrm rot="19598101">
+              <a:off x="2980286" y="2219742"/>
+              <a:ext cx="1224349" cy="1224349"/>
+            </a:xfrm>
+            <a:prstGeom prst="rect">
+              <a:avLst/>
+            </a:prstGeom>
+            <a:solidFill>
+              <a:srgbClr val="548235">
+                <a:alpha val="50196"/>
+              </a:srgbClr>
+            </a:solidFill>
+            <a:ln>
+              <a:noFill/>
+            </a:ln>
+          </p:spPr>
+          <p:style>
+            <a:lnRef idx="2">
+              <a:schemeClr val="accent1">
+                <a:shade val="15000"/>
+              </a:schemeClr>
+            </a:lnRef>
+            <a:fillRef idx="1">
+              <a:schemeClr val="accent1"/>
+            </a:fillRef>
+            <a:effectRef idx="0">
+              <a:schemeClr val="accent1"/>
+            </a:effectRef>
+            <a:fontRef idx="minor">
+              <a:schemeClr val="lt1"/>
+            </a:fontRef>
+          </p:style>
+          <p:txBody>
+            <a:bodyPr rtlCol="0" anchor="ctr"/>
+            <a:lstStyle/>
+            <a:p>
+              <a:pPr algn="ctr"/>
+              <a:endParaRPr lang="en-US" sz="1400"/>
+            </a:p>
+          </p:txBody>
+        </p:sp>
+        <p:sp>
+          <p:nvSpPr>
+            <p:cNvPr id="5" name="Rectangle 4">
+              <a:extLst>
+                <a:ext uri="{FF2B5EF4-FFF2-40B4-BE49-F238E27FC236}">
+                  <a16:creationId xmlns:a16="http://schemas.microsoft.com/office/drawing/2014/main" id="{93C7928D-E832-8C38-FA02-F758A01A2D72}"/>
+                </a:ext>
+              </a:extLst>
+            </p:cNvPr>
+            <p:cNvSpPr/>
+            <p:nvPr/>
+          </p:nvSpPr>
+          <p:spPr>
+            <a:xfrm>
+              <a:off x="3417570" y="3686712"/>
+              <a:ext cx="1015611" cy="1478038"/>
+            </a:xfrm>
+            <a:prstGeom prst="rect">
+              <a:avLst/>
+            </a:prstGeom>
+            <a:solidFill>
+              <a:srgbClr val="548235">
+                <a:alpha val="50196"/>
+              </a:srgbClr>
+            </a:solidFill>
+            <a:ln>
+              <a:noFill/>
+            </a:ln>
+          </p:spPr>
+          <p:style>
+            <a:lnRef idx="2">
+              <a:schemeClr val="accent1">
+                <a:shade val="15000"/>
+              </a:schemeClr>
+            </a:lnRef>
+            <a:fillRef idx="1">
+              <a:schemeClr val="accent1"/>
+            </a:fillRef>
+            <a:effectRef idx="0">
+              <a:schemeClr val="accent1"/>
+            </a:effectRef>
+            <a:fontRef idx="minor">
+              <a:schemeClr val="lt1"/>
+            </a:fontRef>
+          </p:style>
+          <p:txBody>
+            <a:bodyPr rtlCol="0" anchor="ctr"/>
+            <a:lstStyle/>
+            <a:p>
+              <a:pPr algn="ctr"/>
+              <a:endParaRPr lang="en-US" sz="1400"/>
+            </a:p>
+          </p:txBody>
+        </p:sp>
+        <p:cxnSp>
+          <p:nvCxnSpPr>
+            <p:cNvPr id="6" name="Straight Connector 5">
+              <a:extLst>
+                <a:ext uri="{FF2B5EF4-FFF2-40B4-BE49-F238E27FC236}">
+                  <a16:creationId xmlns:a16="http://schemas.microsoft.com/office/drawing/2014/main" id="{252EC95E-CD5B-5ABA-1C7E-C45E8C64BB39}"/>
+                </a:ext>
+              </a:extLst>
+            </p:cNvPr>
+            <p:cNvCxnSpPr>
+              <a:cxnSpLocks/>
+            </p:cNvCxnSpPr>
+            <p:nvPr/>
+          </p:nvCxnSpPr>
+          <p:spPr>
+            <a:xfrm flipV="1">
+              <a:off x="2203280" y="2874625"/>
+              <a:ext cx="2438766" cy="1614525"/>
+            </a:xfrm>
+            <a:prstGeom prst="line">
+              <a:avLst/>
+            </a:prstGeom>
+          </p:spPr>
+          <p:style>
+            <a:lnRef idx="1">
+              <a:schemeClr val="accent1"/>
+            </a:lnRef>
+            <a:fillRef idx="0">
+              <a:schemeClr val="accent1"/>
+            </a:fillRef>
+            <a:effectRef idx="0">
+              <a:schemeClr val="accent1"/>
+            </a:effectRef>
+            <a:fontRef idx="minor">
+              <a:schemeClr val="tx1"/>
+            </a:fontRef>
+          </p:style>
+        </p:cxnSp>
+        <p:sp>
+          <p:nvSpPr>
+            <p:cNvPr id="7" name="Oval 6">
+              <a:extLst>
+                <a:ext uri="{FF2B5EF4-FFF2-40B4-BE49-F238E27FC236}">
+                  <a16:creationId xmlns:a16="http://schemas.microsoft.com/office/drawing/2014/main" id="{7D25C42A-8AA0-D989-0768-829B7501364B}"/>
+                </a:ext>
+              </a:extLst>
+            </p:cNvPr>
+            <p:cNvSpPr/>
+            <p:nvPr/>
+          </p:nvSpPr>
+          <p:spPr>
+            <a:xfrm>
+              <a:off x="1955254" y="2208734"/>
+              <a:ext cx="2924630" cy="2956016"/>
+            </a:xfrm>
+            <a:prstGeom prst="ellipse">
+              <a:avLst/>
+            </a:prstGeom>
+            <a:noFill/>
+            <a:ln w="28575">
+              <a:solidFill>
+                <a:schemeClr val="accent1"/>
+              </a:solidFill>
+            </a:ln>
+          </p:spPr>
+          <p:style>
+            <a:lnRef idx="2">
+              <a:schemeClr val="accent1">
+                <a:shade val="15000"/>
+              </a:schemeClr>
+            </a:lnRef>
+            <a:fillRef idx="1">
+              <a:schemeClr val="accent1"/>
+            </a:fillRef>
+            <a:effectRef idx="0">
+              <a:schemeClr val="accent1"/>
+            </a:effectRef>
+            <a:fontRef idx="minor">
+              <a:schemeClr val="lt1"/>
+            </a:fontRef>
+          </p:style>
+          <p:txBody>
+            <a:bodyPr rtlCol="0" anchor="ctr"/>
+            <a:lstStyle/>
+            <a:p>
+              <a:pPr algn="ctr"/>
+              <a:endParaRPr lang="en-US" sz="2000"/>
+            </a:p>
+          </p:txBody>
+        </p:sp>
+        <p:cxnSp>
+          <p:nvCxnSpPr>
+            <p:cNvPr id="8" name="Straight Connector 7">
+              <a:extLst>
+                <a:ext uri="{FF2B5EF4-FFF2-40B4-BE49-F238E27FC236}">
+                  <a16:creationId xmlns:a16="http://schemas.microsoft.com/office/drawing/2014/main" id="{6A2F512D-E2F3-5FFD-E795-B539597A08A0}"/>
+                </a:ext>
+              </a:extLst>
+            </p:cNvPr>
+            <p:cNvCxnSpPr>
+              <a:stCxn id="7" idx="2"/>
+              <a:endCxn id="7" idx="6"/>
+            </p:cNvCxnSpPr>
+            <p:nvPr/>
+          </p:nvCxnSpPr>
+          <p:spPr>
+            <a:xfrm>
+              <a:off x="1955254" y="3686742"/>
+              <a:ext cx="2924630" cy="0"/>
+            </a:xfrm>
+            <a:prstGeom prst="line">
+              <a:avLst/>
+            </a:prstGeom>
+          </p:spPr>
+          <p:style>
+            <a:lnRef idx="1">
+              <a:schemeClr val="accent1"/>
+            </a:lnRef>
+            <a:fillRef idx="0">
+              <a:schemeClr val="accent1"/>
+            </a:fillRef>
+            <a:effectRef idx="0">
+              <a:schemeClr val="accent1"/>
+            </a:effectRef>
+            <a:fontRef idx="minor">
+              <a:schemeClr val="tx1"/>
+            </a:fontRef>
+          </p:style>
+        </p:cxnSp>
+        <p:cxnSp>
+          <p:nvCxnSpPr>
+            <p:cNvPr id="9" name="Straight Connector 8">
+              <a:extLst>
+                <a:ext uri="{FF2B5EF4-FFF2-40B4-BE49-F238E27FC236}">
+                  <a16:creationId xmlns:a16="http://schemas.microsoft.com/office/drawing/2014/main" id="{541899C0-4991-07E6-E4BC-EFE19BA4035A}"/>
+                </a:ext>
+              </a:extLst>
+            </p:cNvPr>
+            <p:cNvCxnSpPr>
+              <a:cxnSpLocks/>
+              <a:endCxn id="7" idx="6"/>
+            </p:cNvCxnSpPr>
+            <p:nvPr/>
+          </p:nvCxnSpPr>
+          <p:spPr>
+            <a:xfrm>
+              <a:off x="3995099" y="2325185"/>
+              <a:ext cx="884785" cy="1361558"/>
+            </a:xfrm>
+            <a:prstGeom prst="line">
+              <a:avLst/>
+            </a:prstGeom>
+          </p:spPr>
+          <p:style>
+            <a:lnRef idx="1">
+              <a:schemeClr val="accent1"/>
+            </a:lnRef>
+            <a:fillRef idx="0">
+              <a:schemeClr val="accent1"/>
+            </a:fillRef>
+            <a:effectRef idx="0">
+              <a:schemeClr val="accent1"/>
+            </a:effectRef>
+            <a:fontRef idx="minor">
+              <a:schemeClr val="tx1"/>
+            </a:fontRef>
+          </p:style>
+        </p:cxnSp>
+        <p:cxnSp>
+          <p:nvCxnSpPr>
+            <p:cNvPr id="10" name="Straight Connector 9">
+              <a:extLst>
+                <a:ext uri="{FF2B5EF4-FFF2-40B4-BE49-F238E27FC236}">
+                  <a16:creationId xmlns:a16="http://schemas.microsoft.com/office/drawing/2014/main" id="{71450492-5900-DAD1-1178-D1ECC2AFF02C}"/>
+                </a:ext>
+              </a:extLst>
+            </p:cNvPr>
+            <p:cNvCxnSpPr>
+              <a:cxnSpLocks/>
+            </p:cNvCxnSpPr>
+            <p:nvPr/>
+          </p:nvCxnSpPr>
+          <p:spPr>
+            <a:xfrm flipV="1">
+              <a:off x="3417569" y="3000930"/>
+              <a:ext cx="1033690" cy="684329"/>
+            </a:xfrm>
+            <a:prstGeom prst="line">
+              <a:avLst/>
+            </a:prstGeom>
+            <a:ln w="28575">
+              <a:solidFill>
+                <a:schemeClr val="tx1"/>
+              </a:solidFill>
+            </a:ln>
+          </p:spPr>
+          <p:style>
+            <a:lnRef idx="1">
+              <a:schemeClr val="accent1"/>
+            </a:lnRef>
+            <a:fillRef idx="0">
+              <a:schemeClr val="accent1"/>
+            </a:fillRef>
+            <a:effectRef idx="0">
+              <a:schemeClr val="accent1"/>
+            </a:effectRef>
+            <a:fontRef idx="minor">
+              <a:schemeClr val="tx1"/>
+            </a:fontRef>
+          </p:style>
+        </p:cxnSp>
+        <mc:AlternateContent xmlns:mc="http://schemas.openxmlformats.org/markup-compatibility/2006">
+          <mc:Choice xmlns:a14="http://schemas.microsoft.com/office/drawing/2010/main" Requires="a14">
+            <p:sp>
+              <p:nvSpPr>
+                <p:cNvPr id="11" name="TextBox 10">
+                  <a:extLst>
+                    <a:ext uri="{FF2B5EF4-FFF2-40B4-BE49-F238E27FC236}">
+                      <a16:creationId xmlns:a16="http://schemas.microsoft.com/office/drawing/2014/main" id="{C5D1E511-C9D4-56A3-FE8D-E117346FBE51}"/>
+                    </a:ext>
+                  </a:extLst>
+                </p:cNvPr>
+                <p:cNvSpPr txBox="1"/>
+                <p:nvPr/>
+              </p:nvSpPr>
+              <p:spPr>
+                <a:xfrm>
+                  <a:off x="3862398" y="1976614"/>
+                  <a:ext cx="422615" cy="400110"/>
+                </a:xfrm>
+                <a:prstGeom prst="rect">
+                  <a:avLst/>
+                </a:prstGeom>
+                <a:noFill/>
+              </p:spPr>
+              <p:txBody>
+                <a:bodyPr wrap="none" rtlCol="0">
+                  <a:spAutoFit/>
+                </a:bodyPr>
+                <a:lstStyle/>
+                <a:p>
+                  <a:pPr/>
+                  <a14:m>
+                    <m:oMathPara xmlns:m="http://schemas.openxmlformats.org/officeDocument/2006/math">
+                      <m:oMathParaPr>
+                        <m:jc m:val="centerGroup"/>
+                      </m:oMathParaPr>
+                      <m:oMath xmlns:m="http://schemas.openxmlformats.org/officeDocument/2006/math">
+                        <m:r>
+                          <a:rPr lang="en-US" sz="2000" b="0" i="1" smtClean="0">
+                            <a:latin typeface="Cambria Math" panose="02040503050406030204" pitchFamily="18" charset="0"/>
+                          </a:rPr>
+                          <m:t>𝜙</m:t>
+                        </m:r>
+                      </m:oMath>
+                    </m:oMathPara>
+                  </a14:m>
+                  <a:endParaRPr lang="en-US" sz="2000" dirty="0"/>
+                </a:p>
+              </p:txBody>
+            </p:sp>
+          </mc:Choice>
+          <mc:Fallback>
+            <p:sp>
+              <p:nvSpPr>
+                <p:cNvPr id="11" name="TextBox 10">
+                  <a:extLst>
+                    <a:ext uri="{FF2B5EF4-FFF2-40B4-BE49-F238E27FC236}">
+                      <a16:creationId xmlns:a16="http://schemas.microsoft.com/office/drawing/2014/main" id="{C5D1E511-C9D4-56A3-FE8D-E117346FBE51}"/>
+                    </a:ext>
+                  </a:extLst>
+                </p:cNvPr>
+                <p:cNvSpPr txBox="1">
+                  <a:spLocks noRot="1" noChangeAspect="1" noMove="1" noResize="1" noEditPoints="1" noAdjustHandles="1" noChangeArrowheads="1" noChangeShapeType="1" noTextEdit="1"/>
+                </p:cNvSpPr>
+                <p:nvPr/>
+              </p:nvSpPr>
+              <p:spPr>
+                <a:xfrm>
+                  <a:off x="3862398" y="1976614"/>
+                  <a:ext cx="422615" cy="400110"/>
+                </a:xfrm>
+                <a:prstGeom prst="rect">
+                  <a:avLst/>
+                </a:prstGeom>
+                <a:blipFill>
+                  <a:blip r:embed="rId3"/>
+                  <a:stretch>
+                    <a:fillRect/>
+                  </a:stretch>
+                </a:blipFill>
+              </p:spPr>
+              <p:txBody>
+                <a:bodyPr/>
+                <a:lstStyle/>
+                <a:p>
+                  <a:r>
+                    <a:rPr lang="en-US">
+                      <a:noFill/>
+                    </a:rPr>
+                    <a:t> </a:t>
+                  </a:r>
+                </a:p>
+              </p:txBody>
+            </p:sp>
+          </mc:Fallback>
+        </mc:AlternateContent>
+        <mc:AlternateContent xmlns:mc="http://schemas.openxmlformats.org/markup-compatibility/2006">
+          <mc:Choice xmlns:a14="http://schemas.microsoft.com/office/drawing/2010/main" Requires="a14">
+            <p:sp>
+              <p:nvSpPr>
+                <p:cNvPr id="12" name="TextBox 11">
+                  <a:extLst>
+                    <a:ext uri="{FF2B5EF4-FFF2-40B4-BE49-F238E27FC236}">
+                      <a16:creationId xmlns:a16="http://schemas.microsoft.com/office/drawing/2014/main" id="{15D3B79B-7F63-7049-63ED-C68D59A68678}"/>
+                    </a:ext>
+                  </a:extLst>
+                </p:cNvPr>
+                <p:cNvSpPr txBox="1"/>
+                <p:nvPr/>
+              </p:nvSpPr>
+              <p:spPr>
+                <a:xfrm>
+                  <a:off x="4333801" y="2635166"/>
+                  <a:ext cx="389787" cy="400110"/>
+                </a:xfrm>
+                <a:prstGeom prst="rect">
+                  <a:avLst/>
+                </a:prstGeom>
+                <a:noFill/>
+              </p:spPr>
+              <p:txBody>
+                <a:bodyPr wrap="none" rtlCol="0">
+                  <a:spAutoFit/>
+                </a:bodyPr>
+                <a:lstStyle/>
+                <a:p>
+                  <a:pPr/>
+                  <a14:m>
+                    <m:oMathPara xmlns:m="http://schemas.openxmlformats.org/officeDocument/2006/math">
+                      <m:oMathParaPr>
+                        <m:jc m:val="centerGroup"/>
+                      </m:oMathParaPr>
+                      <m:oMath xmlns:m="http://schemas.openxmlformats.org/officeDocument/2006/math">
+                        <m:r>
+                          <a:rPr lang="en-US" sz="2000" b="0" i="1" smtClean="0">
+                            <a:latin typeface="Cambria Math" panose="02040503050406030204" pitchFamily="18" charset="0"/>
+                          </a:rPr>
+                          <m:t>𝜌</m:t>
+                        </m:r>
+                      </m:oMath>
+                    </m:oMathPara>
+                  </a14:m>
+                  <a:endParaRPr lang="en-US" sz="2000" dirty="0"/>
+                </a:p>
+              </p:txBody>
+            </p:sp>
+          </mc:Choice>
+          <mc:Fallback>
+            <p:sp>
+              <p:nvSpPr>
+                <p:cNvPr id="12" name="TextBox 11">
+                  <a:extLst>
+                    <a:ext uri="{FF2B5EF4-FFF2-40B4-BE49-F238E27FC236}">
+                      <a16:creationId xmlns:a16="http://schemas.microsoft.com/office/drawing/2014/main" id="{15D3B79B-7F63-7049-63ED-C68D59A68678}"/>
+                    </a:ext>
+                  </a:extLst>
+                </p:cNvPr>
+                <p:cNvSpPr txBox="1">
+                  <a:spLocks noRot="1" noChangeAspect="1" noMove="1" noResize="1" noEditPoints="1" noAdjustHandles="1" noChangeArrowheads="1" noChangeShapeType="1" noTextEdit="1"/>
+                </p:cNvSpPr>
+                <p:nvPr/>
+              </p:nvSpPr>
+              <p:spPr>
+                <a:xfrm>
+                  <a:off x="4333801" y="2635166"/>
+                  <a:ext cx="389787" cy="400110"/>
+                </a:xfrm>
+                <a:prstGeom prst="rect">
+                  <a:avLst/>
+                </a:prstGeom>
+                <a:blipFill>
+                  <a:blip r:embed="rId4"/>
+                  <a:stretch>
+                    <a:fillRect/>
+                  </a:stretch>
+                </a:blipFill>
+              </p:spPr>
+              <p:txBody>
+                <a:bodyPr/>
+                <a:lstStyle/>
+                <a:p>
+                  <a:r>
+                    <a:rPr lang="en-US">
+                      <a:noFill/>
+                    </a:rPr>
+                    <a:t> </a:t>
+                  </a:r>
+                </a:p>
+              </p:txBody>
+            </p:sp>
+          </mc:Fallback>
+        </mc:AlternateContent>
+        <mc:AlternateContent xmlns:mc="http://schemas.openxmlformats.org/markup-compatibility/2006">
+          <mc:Choice xmlns:a14="http://schemas.microsoft.com/office/drawing/2010/main" Requires="a14">
+            <p:sp>
+              <p:nvSpPr>
+                <p:cNvPr id="13" name="TextBox 12">
+                  <a:extLst>
+                    <a:ext uri="{FF2B5EF4-FFF2-40B4-BE49-F238E27FC236}">
+                      <a16:creationId xmlns:a16="http://schemas.microsoft.com/office/drawing/2014/main" id="{FCE9D669-B021-EC90-C2C7-DBB161A17545}"/>
+                    </a:ext>
+                  </a:extLst>
+                </p:cNvPr>
+                <p:cNvSpPr txBox="1"/>
+                <p:nvPr/>
+              </p:nvSpPr>
+              <p:spPr>
+                <a:xfrm>
+                  <a:off x="3888219" y="3611509"/>
+                  <a:ext cx="405944" cy="400110"/>
+                </a:xfrm>
+                <a:prstGeom prst="rect">
+                  <a:avLst/>
+                </a:prstGeom>
+                <a:noFill/>
+              </p:spPr>
+              <p:txBody>
+                <a:bodyPr wrap="none" rtlCol="0">
+                  <a:spAutoFit/>
+                </a:bodyPr>
+                <a:lstStyle/>
+                <a:p>
+                  <a:pPr/>
+                  <a14:m>
+                    <m:oMathPara xmlns:m="http://schemas.openxmlformats.org/officeDocument/2006/math">
+                      <m:oMathParaPr>
+                        <m:jc m:val="centerGroup"/>
+                      </m:oMathParaPr>
+                      <m:oMath xmlns:m="http://schemas.openxmlformats.org/officeDocument/2006/math">
+                        <m:r>
+                          <a:rPr lang="en-US" sz="2000" b="0" i="1" smtClean="0">
+                            <a:latin typeface="Cambria Math" panose="02040503050406030204" pitchFamily="18" charset="0"/>
+                          </a:rPr>
+                          <m:t>𝐶</m:t>
+                        </m:r>
+                      </m:oMath>
+                    </m:oMathPara>
+                  </a14:m>
+                  <a:endParaRPr lang="en-US" sz="2000" dirty="0"/>
+                </a:p>
+              </p:txBody>
+            </p:sp>
+          </mc:Choice>
+          <mc:Fallback>
+            <p:sp>
+              <p:nvSpPr>
+                <p:cNvPr id="13" name="TextBox 12">
+                  <a:extLst>
+                    <a:ext uri="{FF2B5EF4-FFF2-40B4-BE49-F238E27FC236}">
+                      <a16:creationId xmlns:a16="http://schemas.microsoft.com/office/drawing/2014/main" id="{FCE9D669-B021-EC90-C2C7-DBB161A17545}"/>
+                    </a:ext>
+                  </a:extLst>
+                </p:cNvPr>
+                <p:cNvSpPr txBox="1">
+                  <a:spLocks noRot="1" noChangeAspect="1" noMove="1" noResize="1" noEditPoints="1" noAdjustHandles="1" noChangeArrowheads="1" noChangeShapeType="1" noTextEdit="1"/>
+                </p:cNvSpPr>
+                <p:nvPr/>
+              </p:nvSpPr>
+              <p:spPr>
+                <a:xfrm>
+                  <a:off x="3888219" y="3611509"/>
+                  <a:ext cx="405944" cy="400110"/>
+                </a:xfrm>
+                <a:prstGeom prst="rect">
+                  <a:avLst/>
+                </a:prstGeom>
+                <a:blipFill>
+                  <a:blip r:embed="rId5"/>
+                  <a:stretch>
+                    <a:fillRect/>
+                  </a:stretch>
+                </a:blipFill>
+              </p:spPr>
+              <p:txBody>
+                <a:bodyPr/>
+                <a:lstStyle/>
+                <a:p>
+                  <a:r>
+                    <a:rPr lang="en-US">
+                      <a:noFill/>
+                    </a:rPr>
+                    <a:t> </a:t>
+                  </a:r>
+                </a:p>
+              </p:txBody>
+            </p:sp>
+          </mc:Fallback>
+        </mc:AlternateContent>
+        <p:cxnSp>
+          <p:nvCxnSpPr>
+            <p:cNvPr id="14" name="Straight Connector 13">
+              <a:extLst>
+                <a:ext uri="{FF2B5EF4-FFF2-40B4-BE49-F238E27FC236}">
+                  <a16:creationId xmlns:a16="http://schemas.microsoft.com/office/drawing/2014/main" id="{F7CB3B10-CFE2-EB83-018A-3889131B5C54}"/>
+                </a:ext>
+              </a:extLst>
+            </p:cNvPr>
+            <p:cNvCxnSpPr>
+              <a:cxnSpLocks/>
+            </p:cNvCxnSpPr>
+            <p:nvPr/>
+          </p:nvCxnSpPr>
+          <p:spPr>
+            <a:xfrm flipV="1">
+              <a:off x="3417569" y="2338847"/>
+              <a:ext cx="571552" cy="1343040"/>
+            </a:xfrm>
+            <a:prstGeom prst="line">
+              <a:avLst/>
+            </a:prstGeom>
+          </p:spPr>
+          <p:style>
+            <a:lnRef idx="1">
+              <a:schemeClr val="accent1"/>
+            </a:lnRef>
+            <a:fillRef idx="0">
+              <a:schemeClr val="accent1"/>
+            </a:fillRef>
+            <a:effectRef idx="0">
+              <a:schemeClr val="accent1"/>
+            </a:effectRef>
+            <a:fontRef idx="minor">
+              <a:schemeClr val="tx1"/>
+            </a:fontRef>
+          </p:style>
+        </p:cxnSp>
+        <p:sp>
+          <p:nvSpPr>
+            <p:cNvPr id="15" name="Oval 14">
+              <a:extLst>
+                <a:ext uri="{FF2B5EF4-FFF2-40B4-BE49-F238E27FC236}">
+                  <a16:creationId xmlns:a16="http://schemas.microsoft.com/office/drawing/2014/main" id="{D26F6209-34AA-A7DD-460B-58682B4CB4D7}"/>
+                </a:ext>
+              </a:extLst>
+            </p:cNvPr>
+            <p:cNvSpPr/>
+            <p:nvPr/>
+          </p:nvSpPr>
+          <p:spPr>
+            <a:xfrm>
+              <a:off x="4417925" y="2983737"/>
+              <a:ext cx="46249" cy="46745"/>
+            </a:xfrm>
+            <a:prstGeom prst="ellipse">
+              <a:avLst/>
+            </a:prstGeom>
+            <a:solidFill>
+              <a:srgbClr val="FFFFFF"/>
+            </a:solidFill>
+            <a:ln>
+              <a:noFill/>
+            </a:ln>
+          </p:spPr>
+          <p:style>
+            <a:lnRef idx="2">
+              <a:schemeClr val="accent1">
+                <a:shade val="15000"/>
+              </a:schemeClr>
+            </a:lnRef>
+            <a:fillRef idx="1">
+              <a:schemeClr val="accent1"/>
+            </a:fillRef>
+            <a:effectRef idx="0">
+              <a:schemeClr val="accent1"/>
+            </a:effectRef>
+            <a:fontRef idx="minor">
+              <a:schemeClr val="lt1"/>
+            </a:fontRef>
+          </p:style>
+          <p:txBody>
+            <a:bodyPr rtlCol="0" anchor="ctr"/>
+            <a:lstStyle/>
+            <a:p>
+              <a:pPr algn="ctr"/>
+              <a:endParaRPr lang="en-US" sz="2000"/>
+            </a:p>
+          </p:txBody>
+        </p:sp>
+        <p:cxnSp>
+          <p:nvCxnSpPr>
+            <p:cNvPr id="16" name="Straight Connector 15">
+              <a:extLst>
+                <a:ext uri="{FF2B5EF4-FFF2-40B4-BE49-F238E27FC236}">
+                  <a16:creationId xmlns:a16="http://schemas.microsoft.com/office/drawing/2014/main" id="{F1369E4D-E39E-26D4-7BB2-4F6BC4A0A43E}"/>
+                </a:ext>
+              </a:extLst>
+            </p:cNvPr>
+            <p:cNvCxnSpPr>
+              <a:cxnSpLocks/>
+            </p:cNvCxnSpPr>
+            <p:nvPr/>
+          </p:nvCxnSpPr>
+          <p:spPr>
+            <a:xfrm>
+              <a:off x="3998657" y="2338847"/>
+              <a:ext cx="1235" cy="1355626"/>
+            </a:xfrm>
+            <a:prstGeom prst="line">
+              <a:avLst/>
+            </a:prstGeom>
+          </p:spPr>
+          <p:style>
+            <a:lnRef idx="1">
+              <a:schemeClr val="accent1"/>
+            </a:lnRef>
+            <a:fillRef idx="0">
+              <a:schemeClr val="accent1"/>
+            </a:fillRef>
+            <a:effectRef idx="0">
+              <a:schemeClr val="accent1"/>
+            </a:effectRef>
+            <a:fontRef idx="minor">
+              <a:schemeClr val="tx1"/>
+            </a:fontRef>
+          </p:style>
+        </p:cxnSp>
+        <mc:AlternateContent xmlns:mc="http://schemas.openxmlformats.org/markup-compatibility/2006">
+          <mc:Choice xmlns:a14="http://schemas.microsoft.com/office/drawing/2010/main" Requires="a14">
+            <p:sp>
+              <p:nvSpPr>
+                <p:cNvPr id="17" name="TextBox 16">
+                  <a:extLst>
+                    <a:ext uri="{FF2B5EF4-FFF2-40B4-BE49-F238E27FC236}">
+                      <a16:creationId xmlns:a16="http://schemas.microsoft.com/office/drawing/2014/main" id="{5AFF39A0-F132-DE19-98BD-6F4EA4BF9CEE}"/>
+                    </a:ext>
+                  </a:extLst>
+                </p:cNvPr>
+                <p:cNvSpPr txBox="1"/>
+                <p:nvPr/>
+              </p:nvSpPr>
+              <p:spPr>
+                <a:xfrm>
+                  <a:off x="1480313" y="3468793"/>
+                  <a:ext cx="575670" cy="400110"/>
+                </a:xfrm>
+                <a:prstGeom prst="rect">
+                  <a:avLst/>
+                </a:prstGeom>
+                <a:noFill/>
+              </p:spPr>
+              <p:txBody>
+                <a:bodyPr wrap="none" rtlCol="0">
+                  <a:spAutoFit/>
+                </a:bodyPr>
+                <a:lstStyle/>
+                <a:p>
+                  <a:pPr/>
+                  <a14:m>
+                    <m:oMathPara xmlns:m="http://schemas.openxmlformats.org/officeDocument/2006/math">
+                      <m:oMathParaPr>
+                        <m:jc m:val="centerGroup"/>
+                      </m:oMathParaPr>
+                      <m:oMath xmlns:m="http://schemas.openxmlformats.org/officeDocument/2006/math">
+                        <m:sSup>
+                          <m:sSupPr>
+                            <m:ctrlPr>
+                              <a:rPr lang="en-US" sz="2000" b="0" i="1" smtClean="0">
+                                <a:latin typeface="Cambria Math" panose="02040503050406030204" pitchFamily="18" charset="0"/>
+                              </a:rPr>
+                            </m:ctrlPr>
+                          </m:sSupPr>
+                          <m:e>
+                            <m:r>
+                              <a:rPr lang="en-US" sz="2000" b="0" i="1" smtClean="0">
+                                <a:latin typeface="Cambria Math" panose="02040503050406030204" pitchFamily="18" charset="0"/>
+                              </a:rPr>
+                              <m:t>𝜓</m:t>
+                            </m:r>
+                          </m:e>
+                          <m:sup>
+                            <m:r>
+                              <a:rPr lang="en-US" sz="2000" b="0" i="1" smtClean="0">
+                                <a:latin typeface="Cambria Math" panose="02040503050406030204" pitchFamily="18" charset="0"/>
+                              </a:rPr>
+                              <m:t>⊥</m:t>
+                            </m:r>
+                          </m:sup>
+                        </m:sSup>
+                      </m:oMath>
+                    </m:oMathPara>
+                  </a14:m>
+                  <a:endParaRPr lang="en-US" sz="2000" dirty="0"/>
+                </a:p>
+              </p:txBody>
+            </p:sp>
+          </mc:Choice>
+          <mc:Fallback>
+            <p:sp>
+              <p:nvSpPr>
+                <p:cNvPr id="17" name="TextBox 16">
+                  <a:extLst>
+                    <a:ext uri="{FF2B5EF4-FFF2-40B4-BE49-F238E27FC236}">
+                      <a16:creationId xmlns:a16="http://schemas.microsoft.com/office/drawing/2014/main" id="{5AFF39A0-F132-DE19-98BD-6F4EA4BF9CEE}"/>
+                    </a:ext>
+                  </a:extLst>
+                </p:cNvPr>
+                <p:cNvSpPr txBox="1">
+                  <a:spLocks noRot="1" noChangeAspect="1" noMove="1" noResize="1" noEditPoints="1" noAdjustHandles="1" noChangeArrowheads="1" noChangeShapeType="1" noTextEdit="1"/>
+                </p:cNvSpPr>
+                <p:nvPr/>
+              </p:nvSpPr>
+              <p:spPr>
+                <a:xfrm>
+                  <a:off x="1480313" y="3468793"/>
+                  <a:ext cx="575670" cy="400110"/>
+                </a:xfrm>
+                <a:prstGeom prst="rect">
+                  <a:avLst/>
+                </a:prstGeom>
+                <a:blipFill>
+                  <a:blip r:embed="rId6"/>
+                  <a:stretch>
+                    <a:fillRect/>
+                  </a:stretch>
+                </a:blipFill>
+              </p:spPr>
+              <p:txBody>
+                <a:bodyPr/>
+                <a:lstStyle/>
+                <a:p>
+                  <a:r>
+                    <a:rPr lang="en-US">
+                      <a:noFill/>
+                    </a:rPr>
+                    <a:t> </a:t>
+                  </a:r>
+                </a:p>
+              </p:txBody>
+            </p:sp>
+          </mc:Fallback>
+        </mc:AlternateContent>
+        <mc:AlternateContent xmlns:mc="http://schemas.openxmlformats.org/markup-compatibility/2006">
+          <mc:Choice xmlns:a14="http://schemas.microsoft.com/office/drawing/2010/main" Requires="a14">
+            <p:sp>
+              <p:nvSpPr>
+                <p:cNvPr id="18" name="TextBox 17">
+                  <a:extLst>
+                    <a:ext uri="{FF2B5EF4-FFF2-40B4-BE49-F238E27FC236}">
+                      <a16:creationId xmlns:a16="http://schemas.microsoft.com/office/drawing/2014/main" id="{E72DC929-5EF9-0B25-2A51-08F002DD707A}"/>
+                    </a:ext>
+                  </a:extLst>
+                </p:cNvPr>
+                <p:cNvSpPr txBox="1"/>
+                <p:nvPr/>
+              </p:nvSpPr>
+              <p:spPr>
+                <a:xfrm>
+                  <a:off x="3215940" y="3630679"/>
+                  <a:ext cx="421782" cy="400110"/>
+                </a:xfrm>
+                <a:prstGeom prst="rect">
+                  <a:avLst/>
+                </a:prstGeom>
+                <a:noFill/>
+              </p:spPr>
+              <p:txBody>
+                <a:bodyPr wrap="none" rtlCol="0">
+                  <a:spAutoFit/>
+                </a:bodyPr>
+                <a:lstStyle/>
+                <a:p>
+                  <a:pPr/>
+                  <a14:m>
+                    <m:oMathPara xmlns:m="http://schemas.openxmlformats.org/officeDocument/2006/math">
+                      <m:oMathParaPr>
+                        <m:jc m:val="centerGroup"/>
+                      </m:oMathParaPr>
+                      <m:oMath xmlns:m="http://schemas.openxmlformats.org/officeDocument/2006/math">
+                        <m:r>
+                          <a:rPr lang="en-US" sz="2000" b="0" i="1" smtClean="0">
+                            <a:latin typeface="Cambria Math" panose="02040503050406030204" pitchFamily="18" charset="0"/>
+                          </a:rPr>
+                          <m:t>𝑂</m:t>
+                        </m:r>
+                      </m:oMath>
+                    </m:oMathPara>
+                  </a14:m>
+                  <a:endParaRPr lang="en-US" sz="2000" dirty="0"/>
+                </a:p>
+              </p:txBody>
+            </p:sp>
+          </mc:Choice>
+          <mc:Fallback>
+            <p:sp>
+              <p:nvSpPr>
+                <p:cNvPr id="18" name="TextBox 17">
+                  <a:extLst>
+                    <a:ext uri="{FF2B5EF4-FFF2-40B4-BE49-F238E27FC236}">
+                      <a16:creationId xmlns:a16="http://schemas.microsoft.com/office/drawing/2014/main" id="{E72DC929-5EF9-0B25-2A51-08F002DD707A}"/>
+                    </a:ext>
+                  </a:extLst>
+                </p:cNvPr>
+                <p:cNvSpPr txBox="1">
+                  <a:spLocks noRot="1" noChangeAspect="1" noMove="1" noResize="1" noEditPoints="1" noAdjustHandles="1" noChangeArrowheads="1" noChangeShapeType="1" noTextEdit="1"/>
+                </p:cNvSpPr>
+                <p:nvPr/>
+              </p:nvSpPr>
+              <p:spPr>
+                <a:xfrm>
+                  <a:off x="3215940" y="3630679"/>
+                  <a:ext cx="421782" cy="400110"/>
+                </a:xfrm>
+                <a:prstGeom prst="rect">
+                  <a:avLst/>
+                </a:prstGeom>
+                <a:blipFill>
+                  <a:blip r:embed="rId7"/>
+                  <a:stretch>
+                    <a:fillRect/>
+                  </a:stretch>
+                </a:blipFill>
+              </p:spPr>
+              <p:txBody>
+                <a:bodyPr/>
+                <a:lstStyle/>
+                <a:p>
+                  <a:r>
+                    <a:rPr lang="en-US">
+                      <a:noFill/>
+                    </a:rPr>
+                    <a:t> </a:t>
+                  </a:r>
+                </a:p>
+              </p:txBody>
+            </p:sp>
+          </mc:Fallback>
+        </mc:AlternateContent>
+        <p:cxnSp>
+          <p:nvCxnSpPr>
+            <p:cNvPr id="19" name="Straight Connector 18">
+              <a:extLst>
+                <a:ext uri="{FF2B5EF4-FFF2-40B4-BE49-F238E27FC236}">
+                  <a16:creationId xmlns:a16="http://schemas.microsoft.com/office/drawing/2014/main" id="{07CA3001-C8EF-AD8A-9A1F-E9237AF377CE}"/>
+                </a:ext>
+              </a:extLst>
+            </p:cNvPr>
+            <p:cNvCxnSpPr>
+              <a:cxnSpLocks/>
+            </p:cNvCxnSpPr>
+            <p:nvPr/>
+          </p:nvCxnSpPr>
+          <p:spPr>
+            <a:xfrm>
+              <a:off x="1955254" y="3686742"/>
+              <a:ext cx="2044637" cy="0"/>
+            </a:xfrm>
+            <a:prstGeom prst="line">
+              <a:avLst/>
+            </a:prstGeom>
+            <a:ln w="28575">
+              <a:solidFill>
+                <a:schemeClr val="tx1"/>
+              </a:solidFill>
+            </a:ln>
+          </p:spPr>
+          <p:style>
+            <a:lnRef idx="1">
+              <a:schemeClr val="accent1"/>
+            </a:lnRef>
+            <a:fillRef idx="0">
+              <a:schemeClr val="accent1"/>
+            </a:fillRef>
+            <a:effectRef idx="0">
+              <a:schemeClr val="accent1"/>
+            </a:effectRef>
+            <a:fontRef idx="minor">
+              <a:schemeClr val="tx1"/>
+            </a:fontRef>
+          </p:style>
+        </p:cxnSp>
+        <mc:AlternateContent xmlns:mc="http://schemas.openxmlformats.org/markup-compatibility/2006">
+          <mc:Choice xmlns:a14="http://schemas.microsoft.com/office/drawing/2010/main" Requires="a14">
+            <p:sp>
+              <p:nvSpPr>
+                <p:cNvPr id="20" name="TextBox 19">
+                  <a:extLst>
+                    <a:ext uri="{FF2B5EF4-FFF2-40B4-BE49-F238E27FC236}">
+                      <a16:creationId xmlns:a16="http://schemas.microsoft.com/office/drawing/2014/main" id="{1B6CCCEB-E417-D6EA-A8E7-329B3B264E9B}"/>
+                    </a:ext>
+                  </a:extLst>
+                </p:cNvPr>
+                <p:cNvSpPr txBox="1"/>
+                <p:nvPr/>
+              </p:nvSpPr>
+              <p:spPr>
+                <a:xfrm>
+                  <a:off x="3721345" y="2981017"/>
+                  <a:ext cx="369845" cy="400110"/>
+                </a:xfrm>
+                <a:prstGeom prst="rect">
+                  <a:avLst/>
+                </a:prstGeom>
+                <a:noFill/>
+              </p:spPr>
+              <p:txBody>
+                <a:bodyPr wrap="none" rtlCol="0">
+                  <a:spAutoFit/>
+                </a:bodyPr>
+                <a:lstStyle/>
+                <a:p>
+                  <a:pPr/>
+                  <a14:m>
+                    <m:oMathPara xmlns:m="http://schemas.openxmlformats.org/officeDocument/2006/math">
+                      <m:oMathParaPr>
+                        <m:jc m:val="centerGroup"/>
+                      </m:oMathParaPr>
+                      <m:oMath xmlns:m="http://schemas.openxmlformats.org/officeDocument/2006/math">
+                        <m:r>
+                          <a:rPr lang="en-US" sz="2000" b="0" i="1" smtClean="0">
+                            <a:latin typeface="Cambria Math" panose="02040503050406030204" pitchFamily="18" charset="0"/>
+                          </a:rPr>
+                          <m:t>𝑟</m:t>
+                        </m:r>
+                      </m:oMath>
+                    </m:oMathPara>
+                  </a14:m>
+                  <a:endParaRPr lang="en-US" sz="2000" dirty="0"/>
+                </a:p>
+              </p:txBody>
+            </p:sp>
+          </mc:Choice>
+          <mc:Fallback>
+            <p:sp>
+              <p:nvSpPr>
+                <p:cNvPr id="20" name="TextBox 19">
+                  <a:extLst>
+                    <a:ext uri="{FF2B5EF4-FFF2-40B4-BE49-F238E27FC236}">
+                      <a16:creationId xmlns:a16="http://schemas.microsoft.com/office/drawing/2014/main" id="{1B6CCCEB-E417-D6EA-A8E7-329B3B264E9B}"/>
+                    </a:ext>
+                  </a:extLst>
+                </p:cNvPr>
+                <p:cNvSpPr txBox="1">
+                  <a:spLocks noRot="1" noChangeAspect="1" noMove="1" noResize="1" noEditPoints="1" noAdjustHandles="1" noChangeArrowheads="1" noChangeShapeType="1" noTextEdit="1"/>
+                </p:cNvSpPr>
+                <p:nvPr/>
+              </p:nvSpPr>
+              <p:spPr>
+                <a:xfrm>
+                  <a:off x="3721345" y="2981017"/>
+                  <a:ext cx="369845" cy="400110"/>
+                </a:xfrm>
+                <a:prstGeom prst="rect">
+                  <a:avLst/>
+                </a:prstGeom>
+                <a:blipFill>
+                  <a:blip r:embed="rId8"/>
+                  <a:stretch>
+                    <a:fillRect/>
+                  </a:stretch>
+                </a:blipFill>
+              </p:spPr>
+              <p:txBody>
+                <a:bodyPr/>
+                <a:lstStyle/>
+                <a:p>
+                  <a:r>
+                    <a:rPr lang="en-US">
+                      <a:noFill/>
+                    </a:rPr>
+                    <a:t> </a:t>
+                  </a:r>
+                </a:p>
+              </p:txBody>
+            </p:sp>
+          </mc:Fallback>
+        </mc:AlternateContent>
+        <p:cxnSp>
+          <p:nvCxnSpPr>
+            <p:cNvPr id="21" name="Straight Connector 20">
+              <a:extLst>
+                <a:ext uri="{FF2B5EF4-FFF2-40B4-BE49-F238E27FC236}">
+                  <a16:creationId xmlns:a16="http://schemas.microsoft.com/office/drawing/2014/main" id="{7F735D4E-2117-7468-FCC4-D8AE464A2430}"/>
+                </a:ext>
+              </a:extLst>
+            </p:cNvPr>
+            <p:cNvCxnSpPr>
+              <a:cxnSpLocks/>
+              <a:stCxn id="7" idx="2"/>
+            </p:cNvCxnSpPr>
+            <p:nvPr/>
+          </p:nvCxnSpPr>
+          <p:spPr>
+            <a:xfrm flipV="1">
+              <a:off x="1955254" y="2326262"/>
+              <a:ext cx="2039845" cy="1360479"/>
+            </a:xfrm>
+            <a:prstGeom prst="line">
+              <a:avLst/>
+            </a:prstGeom>
+          </p:spPr>
+          <p:style>
+            <a:lnRef idx="1">
+              <a:schemeClr val="accent1"/>
+            </a:lnRef>
+            <a:fillRef idx="0">
+              <a:schemeClr val="accent1"/>
+            </a:fillRef>
+            <a:effectRef idx="0">
+              <a:schemeClr val="accent1"/>
+            </a:effectRef>
+            <a:fontRef idx="minor">
+              <a:schemeClr val="tx1"/>
+            </a:fontRef>
+          </p:style>
+        </p:cxnSp>
+        <mc:AlternateContent xmlns:mc="http://schemas.openxmlformats.org/markup-compatibility/2006">
+          <mc:Choice xmlns:a14="http://schemas.microsoft.com/office/drawing/2010/main" Requires="a14">
+            <p:sp>
+              <p:nvSpPr>
+                <p:cNvPr id="23" name="TextBox 22">
+                  <a:extLst>
+                    <a:ext uri="{FF2B5EF4-FFF2-40B4-BE49-F238E27FC236}">
+                      <a16:creationId xmlns:a16="http://schemas.microsoft.com/office/drawing/2014/main" id="{B32E80B2-AABE-C56E-C566-715AD9CFFCF3}"/>
+                    </a:ext>
+                  </a:extLst>
+                </p:cNvPr>
+                <p:cNvSpPr txBox="1"/>
+                <p:nvPr/>
+              </p:nvSpPr>
+              <p:spPr>
+                <a:xfrm>
+                  <a:off x="2399383" y="3292879"/>
+                  <a:ext cx="1047402" cy="400110"/>
+                </a:xfrm>
+                <a:prstGeom prst="rect">
+                  <a:avLst/>
+                </a:prstGeom>
+                <a:noFill/>
+              </p:spPr>
+              <p:txBody>
+                <a:bodyPr wrap="none" rtlCol="0">
+                  <a:spAutoFit/>
+                </a:bodyPr>
+                <a:lstStyle/>
+                <a:p>
+                  <a:pPr/>
+                  <a14:m>
+                    <m:oMathPara xmlns:m="http://schemas.openxmlformats.org/officeDocument/2006/math">
+                      <m:oMathParaPr>
+                        <m:jc m:val="centerGroup"/>
+                      </m:oMathParaPr>
+                      <m:oMath xmlns:m="http://schemas.openxmlformats.org/officeDocument/2006/math">
+                        <m:r>
+                          <a:rPr lang="en-US" sz="2000" b="0" i="1" smtClean="0">
+                            <a:latin typeface="Cambria Math" panose="02040503050406030204" pitchFamily="18" charset="0"/>
+                          </a:rPr>
+                          <m:t>𝑝</m:t>
+                        </m:r>
+                        <m:d>
+                          <m:dPr>
+                            <m:ctrlPr>
+                              <a:rPr lang="en-US" sz="2000" b="0" i="1" smtClean="0">
+                                <a:latin typeface="Cambria Math" panose="02040503050406030204" pitchFamily="18" charset="0"/>
+                              </a:rPr>
+                            </m:ctrlPr>
+                          </m:dPr>
+                          <m:e>
+                            <m:r>
+                              <a:rPr lang="en-US" sz="2000" b="0" i="1" smtClean="0">
+                                <a:latin typeface="Cambria Math" panose="02040503050406030204" pitchFamily="18" charset="0"/>
+                              </a:rPr>
+                              <m:t>𝜓</m:t>
+                            </m:r>
+                          </m:e>
+                          <m:e>
+                            <m:r>
+                              <a:rPr lang="en-US" sz="2000" b="0" i="1" smtClean="0">
+                                <a:latin typeface="Cambria Math" panose="02040503050406030204" pitchFamily="18" charset="0"/>
+                              </a:rPr>
+                              <m:t>𝜙</m:t>
+                            </m:r>
+                          </m:e>
+                        </m:d>
+                      </m:oMath>
+                    </m:oMathPara>
+                  </a14:m>
+                  <a:endParaRPr lang="en-US" sz="2000" dirty="0"/>
+                </a:p>
+              </p:txBody>
+            </p:sp>
+          </mc:Choice>
+          <mc:Fallback>
+            <p:sp>
+              <p:nvSpPr>
+                <p:cNvPr id="23" name="TextBox 22">
+                  <a:extLst>
+                    <a:ext uri="{FF2B5EF4-FFF2-40B4-BE49-F238E27FC236}">
+                      <a16:creationId xmlns:a16="http://schemas.microsoft.com/office/drawing/2014/main" id="{B32E80B2-AABE-C56E-C566-715AD9CFFCF3}"/>
+                    </a:ext>
+                  </a:extLst>
+                </p:cNvPr>
+                <p:cNvSpPr txBox="1">
+                  <a:spLocks noRot="1" noChangeAspect="1" noMove="1" noResize="1" noEditPoints="1" noAdjustHandles="1" noChangeArrowheads="1" noChangeShapeType="1" noTextEdit="1"/>
+                </p:cNvSpPr>
+                <p:nvPr/>
+              </p:nvSpPr>
+              <p:spPr>
+                <a:xfrm>
+                  <a:off x="2399383" y="3292879"/>
+                  <a:ext cx="1047402" cy="400110"/>
+                </a:xfrm>
+                <a:prstGeom prst="rect">
+                  <a:avLst/>
+                </a:prstGeom>
+                <a:blipFill>
+                  <a:blip r:embed="rId9"/>
+                  <a:stretch>
+                    <a:fillRect/>
+                  </a:stretch>
+                </a:blipFill>
+              </p:spPr>
+              <p:txBody>
+                <a:bodyPr/>
+                <a:lstStyle/>
+                <a:p>
+                  <a:r>
+                    <a:rPr lang="en-US">
+                      <a:noFill/>
+                    </a:rPr>
+                    <a:t> </a:t>
+                  </a:r>
+                </a:p>
+              </p:txBody>
+            </p:sp>
+          </mc:Fallback>
+        </mc:AlternateContent>
+      </p:grpSp>
+      <p:sp>
+        <p:nvSpPr>
+          <p:cNvPr id="25" name="TextBox 24">
+            <a:extLst>
+              <a:ext uri="{FF2B5EF4-FFF2-40B4-BE49-F238E27FC236}">
+                <a16:creationId xmlns:a16="http://schemas.microsoft.com/office/drawing/2014/main" id="{A8E35FDF-B41F-0522-2DB4-AF49172D144C}"/>
+              </a:ext>
+            </a:extLst>
+          </p:cNvPr>
+          <p:cNvSpPr txBox="1"/>
+          <p:nvPr/>
+        </p:nvSpPr>
+        <p:spPr>
+          <a:xfrm>
+            <a:off x="8088958" y="527854"/>
+            <a:ext cx="3195105" cy="1446550"/>
+          </a:xfrm>
+          <a:prstGeom prst="rect">
+            <a:avLst/>
+          </a:prstGeom>
+          <a:noFill/>
+        </p:spPr>
+        <p:txBody>
+          <a:bodyPr wrap="none" rtlCol="0">
+            <a:spAutoFit/>
+          </a:bodyPr>
+          <a:lstStyle/>
+          <a:p>
+            <a:pPr algn="ctr"/>
+            <a:r>
+              <a:rPr lang="en-US" sz="4400" dirty="0"/>
+              <a:t>Geometric</a:t>
+            </a:r>
+            <a:br>
+              <a:rPr lang="en-US" sz="4400" dirty="0"/>
+            </a:br>
+            <a:r>
+              <a:rPr lang="en-US" sz="4400" dirty="0"/>
+              <a:t>explanation</a:t>
+            </a:r>
+          </a:p>
+        </p:txBody>
+      </p:sp>
+    </p:spTree>
+    <p:extLst>
+      <p:ext uri="{BB962C8B-B14F-4D97-AF65-F5344CB8AC3E}">
+        <p14:creationId xmlns:p14="http://schemas.microsoft.com/office/powerpoint/2010/main" val="3769557130"/>
+      </p:ext>
+    </p:extLst>
+  </p:cSld>
+  <p:clrMapOvr>
+    <a:masterClrMapping/>
+  </p:clrMapOvr>
+</p:sld>
+</file>
+
+<file path=ppt/slides/slide8.xml><?xml version="1.0" encoding="utf-8"?>
+<p:sld xmlns:a="http://schemas.openxmlformats.org/drawingml/2006/main" xmlns:r="http://schemas.openxmlformats.org/officeDocument/2006/relationships" xmlns:p="http://schemas.openxmlformats.org/presentationml/2006/main">
+  <p:cSld>
+    <p:spTree>
+      <p:nvGrpSpPr>
+        <p:cNvPr id="1" name="">
+          <a:extLst>
+            <a:ext uri="{FF2B5EF4-FFF2-40B4-BE49-F238E27FC236}">
+              <a16:creationId xmlns:a16="http://schemas.microsoft.com/office/drawing/2014/main" id="{3FE4BFF1-8208-39BB-4DF1-A1C1BE3C8AF4}"/>
+            </a:ext>
+          </a:extLst>
+        </p:cNvPr>
+        <p:cNvGrpSpPr/>
+        <p:nvPr/>
+      </p:nvGrpSpPr>
+      <p:grpSpPr>
+        <a:xfrm>
+          <a:off x="0" y="0"/>
+          <a:ext cx="0" cy="0"/>
+          <a:chOff x="0" y="0"/>
+          <a:chExt cx="0" cy="0"/>
+        </a:xfrm>
+      </p:grpSpPr>
+      <mc:AlternateContent xmlns:mc="http://schemas.openxmlformats.org/markup-compatibility/2006">
+        <mc:Choice xmlns:a14="http://schemas.microsoft.com/office/drawing/2010/main" Requires="a14">
+          <p:sp>
+            <p:nvSpPr>
+              <p:cNvPr id="3" name="TextBox 2">
+                <a:extLst>
+                  <a:ext uri="{FF2B5EF4-FFF2-40B4-BE49-F238E27FC236}">
+                    <a16:creationId xmlns:a16="http://schemas.microsoft.com/office/drawing/2014/main" id="{5C389A46-B9A5-7D70-39E7-DF5F5AF51FBC}"/>
+                  </a:ext>
+                </a:extLst>
+              </p:cNvPr>
+              <p:cNvSpPr txBox="1"/>
+              <p:nvPr/>
+            </p:nvSpPr>
+            <p:spPr>
+              <a:xfrm>
+                <a:off x="483219" y="0"/>
+                <a:ext cx="11470256" cy="5596917"/>
+              </a:xfrm>
+              <a:prstGeom prst="rect">
+                <a:avLst/>
+              </a:prstGeom>
+              <a:noFill/>
+            </p:spPr>
+            <p:txBody>
+              <a:bodyPr wrap="none" rtlCol="0">
+                <a:spAutoFit/>
+              </a:bodyPr>
+              <a:lstStyle/>
+              <a:p>
+                <a:pPr algn="ctr"/>
+                <a:r>
+                  <a:rPr lang="en-US" sz="8800" dirty="0"/>
+                  <a:t>Born rule - </a:t>
+                </a:r>
+                <a14:m>
+                  <m:oMath xmlns:m="http://schemas.openxmlformats.org/officeDocument/2006/math">
+                    <m:r>
+                      <a:rPr lang="en-US" sz="8800" b="0" i="1" smtClean="0">
+                        <a:latin typeface="Cambria Math" panose="02040503050406030204" pitchFamily="18" charset="0"/>
+                      </a:rPr>
+                      <m:t>𝑝</m:t>
+                    </m:r>
+                    <m:d>
+                      <m:dPr>
+                        <m:ctrlPr>
+                          <a:rPr lang="en-US" sz="8800" b="0" i="1" smtClean="0">
+                            <a:latin typeface="Cambria Math" panose="02040503050406030204" pitchFamily="18" charset="0"/>
+                          </a:rPr>
+                        </m:ctrlPr>
+                      </m:dPr>
+                      <m:e>
+                        <m:r>
+                          <a:rPr lang="en-US" sz="8800" b="0" i="1" smtClean="0">
+                            <a:latin typeface="Cambria Math" panose="02040503050406030204" pitchFamily="18" charset="0"/>
+                          </a:rPr>
+                          <m:t>𝜓</m:t>
+                        </m:r>
+                      </m:e>
+                      <m:e>
+                        <m:r>
+                          <a:rPr lang="en-US" sz="8800" b="0" i="1" smtClean="0">
+                            <a:latin typeface="Cambria Math" panose="02040503050406030204" pitchFamily="18" charset="0"/>
+                          </a:rPr>
+                          <m:t>𝜙</m:t>
+                        </m:r>
+                      </m:e>
+                    </m:d>
+                  </m:oMath>
+                </a14:m>
+                <a:endParaRPr lang="en-US" sz="8800" dirty="0"/>
+              </a:p>
+              <a:p>
+                <a:pPr algn="ctr"/>
+                <a14:m>
+                  <m:oMathPara xmlns:m="http://schemas.openxmlformats.org/officeDocument/2006/math">
+                    <m:oMathParaPr>
+                      <m:jc m:val="centerGroup"/>
+                    </m:oMathParaPr>
+                    <m:oMath xmlns:m="http://schemas.openxmlformats.org/officeDocument/2006/math">
+                      <m:r>
+                        <a:rPr lang="en-US" sz="13800" i="1" smtClean="0">
+                          <a:latin typeface="Cambria Math" panose="02040503050406030204" pitchFamily="18" charset="0"/>
+                          <a:ea typeface="Cambria Math" panose="02040503050406030204" pitchFamily="18" charset="0"/>
+                        </a:rPr>
+                        <m:t>⇕</m:t>
+                      </m:r>
+                    </m:oMath>
+                  </m:oMathPara>
+                </a14:m>
+                <a:endParaRPr lang="en-US" sz="8800" dirty="0"/>
+              </a:p>
+              <a:p>
+                <a:pPr algn="ctr"/>
+                <a:r>
+                  <a:rPr lang="en-US" sz="8800" dirty="0"/>
+                  <a:t>Entropy - </a:t>
+                </a:r>
+                <a14:m>
+                  <m:oMath xmlns:m="http://schemas.openxmlformats.org/officeDocument/2006/math">
+                    <m:r>
+                      <a:rPr lang="en-US" sz="8800" b="0" i="1" smtClean="0">
+                        <a:latin typeface="Cambria Math" panose="02040503050406030204" pitchFamily="18" charset="0"/>
+                      </a:rPr>
+                      <m:t>𝑆</m:t>
+                    </m:r>
+                    <m:d>
+                      <m:dPr>
+                        <m:ctrlPr>
+                          <a:rPr lang="en-US" sz="8800" b="0" i="1" smtClean="0">
+                            <a:latin typeface="Cambria Math" panose="02040503050406030204" pitchFamily="18" charset="0"/>
+                          </a:rPr>
+                        </m:ctrlPr>
+                      </m:dPr>
+                      <m:e>
+                        <m:f>
+                          <m:fPr>
+                            <m:ctrlPr>
+                              <a:rPr lang="en-US" sz="8800" b="0" i="1" smtClean="0">
+                                <a:latin typeface="Cambria Math" panose="02040503050406030204" pitchFamily="18" charset="0"/>
+                              </a:rPr>
+                            </m:ctrlPr>
+                          </m:fPr>
+                          <m:num>
+                            <m:r>
+                              <a:rPr lang="en-US" sz="8800" b="0" i="1" smtClean="0">
+                                <a:latin typeface="Cambria Math" panose="02040503050406030204" pitchFamily="18" charset="0"/>
+                              </a:rPr>
+                              <m:t>1</m:t>
+                            </m:r>
+                          </m:num>
+                          <m:den>
+                            <m:r>
+                              <a:rPr lang="en-US" sz="8800" b="0" i="1" smtClean="0">
+                                <a:latin typeface="Cambria Math" panose="02040503050406030204" pitchFamily="18" charset="0"/>
+                              </a:rPr>
+                              <m:t>2</m:t>
+                            </m:r>
+                          </m:den>
+                        </m:f>
+                        <m:r>
+                          <a:rPr lang="en-US" sz="8800" b="0" i="1" smtClean="0">
+                            <a:latin typeface="Cambria Math" panose="02040503050406030204" pitchFamily="18" charset="0"/>
+                          </a:rPr>
+                          <m:t>𝜓</m:t>
+                        </m:r>
+                        <m:r>
+                          <a:rPr lang="en-US" sz="8800" b="0" i="1" smtClean="0">
+                            <a:latin typeface="Cambria Math" panose="02040503050406030204" pitchFamily="18" charset="0"/>
+                          </a:rPr>
+                          <m:t>+</m:t>
+                        </m:r>
+                        <m:f>
+                          <m:fPr>
+                            <m:ctrlPr>
+                              <a:rPr lang="en-US" sz="8800" b="0" i="1" smtClean="0">
+                                <a:latin typeface="Cambria Math" panose="02040503050406030204" pitchFamily="18" charset="0"/>
+                              </a:rPr>
+                            </m:ctrlPr>
+                          </m:fPr>
+                          <m:num>
+                            <m:r>
+                              <a:rPr lang="en-US" sz="8800" b="0" i="1" smtClean="0">
+                                <a:latin typeface="Cambria Math" panose="02040503050406030204" pitchFamily="18" charset="0"/>
+                              </a:rPr>
+                              <m:t>1</m:t>
+                            </m:r>
+                          </m:num>
+                          <m:den>
+                            <m:r>
+                              <a:rPr lang="en-US" sz="8800" b="0" i="1" smtClean="0">
+                                <a:latin typeface="Cambria Math" panose="02040503050406030204" pitchFamily="18" charset="0"/>
+                              </a:rPr>
+                              <m:t>2</m:t>
+                            </m:r>
+                          </m:den>
+                        </m:f>
+                        <m:r>
+                          <a:rPr lang="en-US" sz="8800" b="0" i="1" smtClean="0">
+                            <a:latin typeface="Cambria Math" panose="02040503050406030204" pitchFamily="18" charset="0"/>
+                          </a:rPr>
+                          <m:t>𝜙</m:t>
+                        </m:r>
+                      </m:e>
+                    </m:d>
+                  </m:oMath>
+                </a14:m>
+                <a:endParaRPr lang="en-US" sz="8800" dirty="0"/>
+              </a:p>
+            </p:txBody>
+          </p:sp>
+        </mc:Choice>
+        <mc:Fallback>
+          <p:sp>
+            <p:nvSpPr>
+              <p:cNvPr id="3" name="TextBox 2">
+                <a:extLst>
+                  <a:ext uri="{FF2B5EF4-FFF2-40B4-BE49-F238E27FC236}">
+                    <a16:creationId xmlns:a16="http://schemas.microsoft.com/office/drawing/2014/main" id="{5C389A46-B9A5-7D70-39E7-DF5F5AF51FBC}"/>
+                  </a:ext>
+                </a:extLst>
+              </p:cNvPr>
+              <p:cNvSpPr txBox="1">
+                <a:spLocks noRot="1" noChangeAspect="1" noMove="1" noResize="1" noEditPoints="1" noAdjustHandles="1" noChangeArrowheads="1" noChangeShapeType="1" noTextEdit="1"/>
+              </p:cNvSpPr>
+              <p:nvPr/>
+            </p:nvSpPr>
+            <p:spPr>
+              <a:xfrm>
+                <a:off x="483219" y="0"/>
+                <a:ext cx="11470256" cy="5596917"/>
+              </a:xfrm>
+              <a:prstGeom prst="rect">
+                <a:avLst/>
+              </a:prstGeom>
+              <a:blipFill>
+                <a:blip r:embed="rId2"/>
+                <a:stretch>
+                  <a:fillRect l="-4570" t="-5229" b="-4357"/>
+                </a:stretch>
+              </a:blipFill>
+            </p:spPr>
+            <p:txBody>
+              <a:bodyPr/>
+              <a:lstStyle/>
+              <a:p>
+                <a:r>
+                  <a:rPr lang="en-US">
+                    <a:noFill/>
+                  </a:rPr>
+                  <a:t> </a:t>
+                </a:r>
+              </a:p>
+            </p:txBody>
+          </p:sp>
+        </mc:Fallback>
+      </mc:AlternateContent>
+      <p:sp>
+        <p:nvSpPr>
+          <p:cNvPr id="25" name="TextBox 24">
+            <a:extLst>
+              <a:ext uri="{FF2B5EF4-FFF2-40B4-BE49-F238E27FC236}">
+                <a16:creationId xmlns:a16="http://schemas.microsoft.com/office/drawing/2014/main" id="{7279BAB4-61D6-7B28-127E-B7579B56BAAD}"/>
+              </a:ext>
+            </a:extLst>
+          </p:cNvPr>
+          <p:cNvSpPr txBox="1"/>
+          <p:nvPr/>
+        </p:nvSpPr>
+        <p:spPr>
+          <a:xfrm>
+            <a:off x="5824680" y="5800786"/>
+            <a:ext cx="5981126" cy="769441"/>
+          </a:xfrm>
+          <a:prstGeom prst="rect">
+            <a:avLst/>
+          </a:prstGeom>
+          <a:noFill/>
+        </p:spPr>
+        <p:txBody>
+          <a:bodyPr wrap="none" rtlCol="0">
+            <a:spAutoFit/>
+          </a:bodyPr>
+          <a:lstStyle/>
+          <a:p>
+            <a:pPr algn="ctr"/>
+            <a:r>
+              <a:rPr lang="en-US" sz="4400" dirty="0"/>
+              <a:t>Geometric explanation</a:t>
+            </a:r>
+          </a:p>
+        </p:txBody>
+      </p:sp>
+    </p:spTree>
+    <p:extLst>
+      <p:ext uri="{BB962C8B-B14F-4D97-AF65-F5344CB8AC3E}">
+        <p14:creationId xmlns:p14="http://schemas.microsoft.com/office/powerpoint/2010/main" val="3293150442"/>
+      </p:ext>
+    </p:extLst>
+  </p:cSld>
+  <p:clrMapOvr>
+    <a:masterClrMapping/>
+  </p:clrMapOvr>
+</p:sld>
+</file>
+
+<file path=ppt/slides/slide9.xml><?xml version="1.0" encoding="utf-8"?>
+<p:sld xmlns:a="http://schemas.openxmlformats.org/drawingml/2006/main" xmlns:r="http://schemas.openxmlformats.org/officeDocument/2006/relationships" xmlns:p="http://schemas.openxmlformats.org/presentationml/2006/main">
+  <p:cSld>
+    <p:spTree>
+      <p:nvGrpSpPr>
+        <p:cNvPr id="1" name="">
+          <a:extLst>
+            <a:ext uri="{FF2B5EF4-FFF2-40B4-BE49-F238E27FC236}">
+              <a16:creationId xmlns:a16="http://schemas.microsoft.com/office/drawing/2014/main" id="{C492A337-C91B-CCCE-D92B-E28F8A8582DC}"/>
+            </a:ext>
+          </a:extLst>
+        </p:cNvPr>
+        <p:cNvGrpSpPr/>
+        <p:nvPr/>
+      </p:nvGrpSpPr>
+      <p:grpSpPr>
+        <a:xfrm>
+          <a:off x="0" y="0"/>
+          <a:ext cx="0" cy="0"/>
+          <a:chOff x="0" y="0"/>
+          <a:chExt cx="0" cy="0"/>
+        </a:xfrm>
+      </p:grpSpPr>
+      <p:sp>
+        <p:nvSpPr>
+          <p:cNvPr id="3" name="TextBox 2">
+            <a:extLst>
+              <a:ext uri="{FF2B5EF4-FFF2-40B4-BE49-F238E27FC236}">
+                <a16:creationId xmlns:a16="http://schemas.microsoft.com/office/drawing/2014/main" id="{EA3274AC-87DC-050B-E906-4D430667A09A}"/>
+              </a:ext>
+            </a:extLst>
+          </p:cNvPr>
+          <p:cNvSpPr txBox="1"/>
+          <p:nvPr/>
+        </p:nvSpPr>
+        <p:spPr>
+          <a:xfrm>
+            <a:off x="429906" y="3881337"/>
+            <a:ext cx="6135013" cy="1446550"/>
+          </a:xfrm>
+          <a:prstGeom prst="rect">
+            <a:avLst/>
+          </a:prstGeom>
+          <a:noFill/>
+        </p:spPr>
+        <p:txBody>
+          <a:bodyPr wrap="none" rtlCol="0">
+            <a:spAutoFit/>
+          </a:bodyPr>
+          <a:lstStyle/>
+          <a:p>
+            <a:pPr algn="ctr"/>
+            <a:r>
+              <a:rPr lang="en-US" sz="4400" dirty="0"/>
+              <a:t>Their geometric</a:t>
+            </a:r>
+            <a:br>
+              <a:rPr lang="en-US" sz="4400" dirty="0"/>
+            </a:br>
+            <a:r>
+              <a:rPr lang="en-US" sz="4400" dirty="0"/>
+              <a:t>                      relationship</a:t>
+            </a:r>
+          </a:p>
+        </p:txBody>
+      </p:sp>
+      <p:grpSp>
+        <p:nvGrpSpPr>
+          <p:cNvPr id="24" name="Group 23">
+            <a:extLst>
+              <a:ext uri="{FF2B5EF4-FFF2-40B4-BE49-F238E27FC236}">
+                <a16:creationId xmlns:a16="http://schemas.microsoft.com/office/drawing/2014/main" id="{EC3AA6FC-F8AE-988F-380F-C9FD8CFA5938}"/>
+              </a:ext>
+            </a:extLst>
+          </p:cNvPr>
+          <p:cNvGrpSpPr/>
+          <p:nvPr/>
+        </p:nvGrpSpPr>
+        <p:grpSpPr>
+          <a:xfrm>
+            <a:off x="7501349" y="2682447"/>
+            <a:ext cx="4057845" cy="3805469"/>
+            <a:chOff x="1480313" y="1976614"/>
+            <a:chExt cx="3399571" cy="3188136"/>
+          </a:xfrm>
+        </p:grpSpPr>
+        <p:sp>
+          <p:nvSpPr>
+            <p:cNvPr id="4" name="Rectangle 3">
+              <a:extLst>
+                <a:ext uri="{FF2B5EF4-FFF2-40B4-BE49-F238E27FC236}">
+                  <a16:creationId xmlns:a16="http://schemas.microsoft.com/office/drawing/2014/main" id="{4EF8ADB9-C753-EA7F-EB34-830B00DA7141}"/>
+                </a:ext>
+              </a:extLst>
+            </p:cNvPr>
+            <p:cNvSpPr/>
+            <p:nvPr/>
+          </p:nvSpPr>
+          <p:spPr>
+            <a:xfrm rot="19598101">
+              <a:off x="2980286" y="2219742"/>
+              <a:ext cx="1224349" cy="1224349"/>
+            </a:xfrm>
+            <a:prstGeom prst="rect">
+              <a:avLst/>
+            </a:prstGeom>
+            <a:solidFill>
+              <a:srgbClr val="548235">
+                <a:alpha val="50196"/>
+              </a:srgbClr>
+            </a:solidFill>
+            <a:ln>
+              <a:noFill/>
+            </a:ln>
+          </p:spPr>
+          <p:style>
+            <a:lnRef idx="2">
+              <a:schemeClr val="accent1">
+                <a:shade val="15000"/>
+              </a:schemeClr>
+            </a:lnRef>
+            <a:fillRef idx="1">
+              <a:schemeClr val="accent1"/>
+            </a:fillRef>
+            <a:effectRef idx="0">
+              <a:schemeClr val="accent1"/>
+            </a:effectRef>
+            <a:fontRef idx="minor">
+              <a:schemeClr val="lt1"/>
+            </a:fontRef>
+          </p:style>
+          <p:txBody>
+            <a:bodyPr rtlCol="0" anchor="ctr"/>
+            <a:lstStyle/>
+            <a:p>
+              <a:pPr algn="ctr"/>
+              <a:endParaRPr lang="en-US" sz="1400"/>
+            </a:p>
+          </p:txBody>
+        </p:sp>
+        <p:sp>
+          <p:nvSpPr>
+            <p:cNvPr id="5" name="Rectangle 4">
+              <a:extLst>
+                <a:ext uri="{FF2B5EF4-FFF2-40B4-BE49-F238E27FC236}">
+                  <a16:creationId xmlns:a16="http://schemas.microsoft.com/office/drawing/2014/main" id="{16694EA6-193D-C0BA-4282-DA26787E5E01}"/>
+                </a:ext>
+              </a:extLst>
+            </p:cNvPr>
+            <p:cNvSpPr/>
+            <p:nvPr/>
+          </p:nvSpPr>
+          <p:spPr>
+            <a:xfrm>
+              <a:off x="3417570" y="3686712"/>
+              <a:ext cx="1015611" cy="1478038"/>
+            </a:xfrm>
+            <a:prstGeom prst="rect">
+              <a:avLst/>
+            </a:prstGeom>
+            <a:solidFill>
+              <a:srgbClr val="548235">
+                <a:alpha val="50196"/>
+              </a:srgbClr>
+            </a:solidFill>
+            <a:ln>
+              <a:noFill/>
+            </a:ln>
+          </p:spPr>
+          <p:style>
+            <a:lnRef idx="2">
+              <a:schemeClr val="accent1">
+                <a:shade val="15000"/>
+              </a:schemeClr>
+            </a:lnRef>
+            <a:fillRef idx="1">
+              <a:schemeClr val="accent1"/>
+            </a:fillRef>
+            <a:effectRef idx="0">
+              <a:schemeClr val="accent1"/>
+            </a:effectRef>
+            <a:fontRef idx="minor">
+              <a:schemeClr val="lt1"/>
+            </a:fontRef>
+          </p:style>
+          <p:txBody>
+            <a:bodyPr rtlCol="0" anchor="ctr"/>
+            <a:lstStyle/>
+            <a:p>
+              <a:pPr algn="ctr"/>
+              <a:endParaRPr lang="en-US" sz="1400"/>
+            </a:p>
+          </p:txBody>
+        </p:sp>
+        <p:cxnSp>
+          <p:nvCxnSpPr>
+            <p:cNvPr id="6" name="Straight Connector 5">
+              <a:extLst>
+                <a:ext uri="{FF2B5EF4-FFF2-40B4-BE49-F238E27FC236}">
+                  <a16:creationId xmlns:a16="http://schemas.microsoft.com/office/drawing/2014/main" id="{33E1EC2A-A3F0-F7B8-DC0E-3B7C7EE61B3C}"/>
+                </a:ext>
+              </a:extLst>
+            </p:cNvPr>
+            <p:cNvCxnSpPr>
+              <a:cxnSpLocks/>
+            </p:cNvCxnSpPr>
+            <p:nvPr/>
+          </p:nvCxnSpPr>
+          <p:spPr>
+            <a:xfrm flipV="1">
+              <a:off x="2203280" y="2874625"/>
+              <a:ext cx="2438766" cy="1614525"/>
+            </a:xfrm>
+            <a:prstGeom prst="line">
+              <a:avLst/>
+            </a:prstGeom>
+          </p:spPr>
+          <p:style>
+            <a:lnRef idx="1">
+              <a:schemeClr val="accent1"/>
+            </a:lnRef>
+            <a:fillRef idx="0">
+              <a:schemeClr val="accent1"/>
+            </a:fillRef>
+            <a:effectRef idx="0">
+              <a:schemeClr val="accent1"/>
+            </a:effectRef>
+            <a:fontRef idx="minor">
+              <a:schemeClr val="tx1"/>
+            </a:fontRef>
+          </p:style>
+        </p:cxnSp>
+        <p:sp>
+          <p:nvSpPr>
+            <p:cNvPr id="7" name="Oval 6">
+              <a:extLst>
+                <a:ext uri="{FF2B5EF4-FFF2-40B4-BE49-F238E27FC236}">
+                  <a16:creationId xmlns:a16="http://schemas.microsoft.com/office/drawing/2014/main" id="{AFEF4E6C-49EA-DFFE-AD5A-53219F714D35}"/>
+                </a:ext>
+              </a:extLst>
+            </p:cNvPr>
+            <p:cNvSpPr/>
+            <p:nvPr/>
+          </p:nvSpPr>
+          <p:spPr>
+            <a:xfrm>
+              <a:off x="1955254" y="2208734"/>
+              <a:ext cx="2924630" cy="2956016"/>
+            </a:xfrm>
+            <a:prstGeom prst="ellipse">
+              <a:avLst/>
+            </a:prstGeom>
+            <a:noFill/>
+            <a:ln w="28575">
+              <a:solidFill>
+                <a:schemeClr val="accent1"/>
+              </a:solidFill>
+            </a:ln>
+          </p:spPr>
+          <p:style>
+            <a:lnRef idx="2">
+              <a:schemeClr val="accent1">
+                <a:shade val="15000"/>
+              </a:schemeClr>
+            </a:lnRef>
+            <a:fillRef idx="1">
+              <a:schemeClr val="accent1"/>
+            </a:fillRef>
+            <a:effectRef idx="0">
+              <a:schemeClr val="accent1"/>
+            </a:effectRef>
+            <a:fontRef idx="minor">
+              <a:schemeClr val="lt1"/>
+            </a:fontRef>
+          </p:style>
+          <p:txBody>
+            <a:bodyPr rtlCol="0" anchor="ctr"/>
+            <a:lstStyle/>
+            <a:p>
+              <a:pPr algn="ctr"/>
+              <a:endParaRPr lang="en-US" sz="2000"/>
+            </a:p>
+          </p:txBody>
+        </p:sp>
+        <p:cxnSp>
+          <p:nvCxnSpPr>
+            <p:cNvPr id="8" name="Straight Connector 7">
+              <a:extLst>
+                <a:ext uri="{FF2B5EF4-FFF2-40B4-BE49-F238E27FC236}">
+                  <a16:creationId xmlns:a16="http://schemas.microsoft.com/office/drawing/2014/main" id="{6CB24CA4-335F-FAE3-60D3-48241B4AD938}"/>
+                </a:ext>
+              </a:extLst>
+            </p:cNvPr>
+            <p:cNvCxnSpPr>
+              <a:stCxn id="7" idx="2"/>
+              <a:endCxn id="7" idx="6"/>
+            </p:cNvCxnSpPr>
+            <p:nvPr/>
+          </p:nvCxnSpPr>
+          <p:spPr>
+            <a:xfrm>
+              <a:off x="1955254" y="3686742"/>
+              <a:ext cx="2924630" cy="0"/>
+            </a:xfrm>
+            <a:prstGeom prst="line">
+              <a:avLst/>
+            </a:prstGeom>
+          </p:spPr>
+          <p:style>
+            <a:lnRef idx="1">
+              <a:schemeClr val="accent1"/>
+            </a:lnRef>
+            <a:fillRef idx="0">
+              <a:schemeClr val="accent1"/>
+            </a:fillRef>
+            <a:effectRef idx="0">
+              <a:schemeClr val="accent1"/>
+            </a:effectRef>
+            <a:fontRef idx="minor">
+              <a:schemeClr val="tx1"/>
+            </a:fontRef>
+          </p:style>
+        </p:cxnSp>
+        <p:cxnSp>
+          <p:nvCxnSpPr>
+            <p:cNvPr id="9" name="Straight Connector 8">
+              <a:extLst>
+                <a:ext uri="{FF2B5EF4-FFF2-40B4-BE49-F238E27FC236}">
+                  <a16:creationId xmlns:a16="http://schemas.microsoft.com/office/drawing/2014/main" id="{E3DD35CD-C304-29A9-8C40-1780866EE470}"/>
+                </a:ext>
+              </a:extLst>
+            </p:cNvPr>
+            <p:cNvCxnSpPr>
+              <a:cxnSpLocks/>
+              <a:endCxn id="7" idx="6"/>
+            </p:cNvCxnSpPr>
+            <p:nvPr/>
+          </p:nvCxnSpPr>
+          <p:spPr>
+            <a:xfrm>
+              <a:off x="3995099" y="2325185"/>
+              <a:ext cx="884785" cy="1361558"/>
+            </a:xfrm>
+            <a:prstGeom prst="line">
+              <a:avLst/>
+            </a:prstGeom>
+          </p:spPr>
+          <p:style>
+            <a:lnRef idx="1">
+              <a:schemeClr val="accent1"/>
+            </a:lnRef>
+            <a:fillRef idx="0">
+              <a:schemeClr val="accent1"/>
+            </a:fillRef>
+            <a:effectRef idx="0">
+              <a:schemeClr val="accent1"/>
+            </a:effectRef>
+            <a:fontRef idx="minor">
+              <a:schemeClr val="tx1"/>
+            </a:fontRef>
+          </p:style>
+        </p:cxnSp>
+        <p:cxnSp>
+          <p:nvCxnSpPr>
+            <p:cNvPr id="10" name="Straight Connector 9">
+              <a:extLst>
+                <a:ext uri="{FF2B5EF4-FFF2-40B4-BE49-F238E27FC236}">
+                  <a16:creationId xmlns:a16="http://schemas.microsoft.com/office/drawing/2014/main" id="{791DDCDD-68BA-E91E-EFBD-9C56A228A58E}"/>
+                </a:ext>
+              </a:extLst>
+            </p:cNvPr>
+            <p:cNvCxnSpPr>
+              <a:cxnSpLocks/>
+            </p:cNvCxnSpPr>
+            <p:nvPr/>
+          </p:nvCxnSpPr>
+          <p:spPr>
+            <a:xfrm flipV="1">
+              <a:off x="3417569" y="3000930"/>
+              <a:ext cx="1033690" cy="684329"/>
+            </a:xfrm>
+            <a:prstGeom prst="line">
+              <a:avLst/>
+            </a:prstGeom>
+            <a:ln w="28575">
+              <a:solidFill>
+                <a:schemeClr val="tx1"/>
+              </a:solidFill>
+            </a:ln>
+          </p:spPr>
+          <p:style>
+            <a:lnRef idx="1">
+              <a:schemeClr val="accent1"/>
+            </a:lnRef>
+            <a:fillRef idx="0">
+              <a:schemeClr val="accent1"/>
+            </a:fillRef>
+            <a:effectRef idx="0">
+              <a:schemeClr val="accent1"/>
+            </a:effectRef>
+            <a:fontRef idx="minor">
+              <a:schemeClr val="tx1"/>
+            </a:fontRef>
+          </p:style>
+        </p:cxnSp>
+        <mc:AlternateContent xmlns:mc="http://schemas.openxmlformats.org/markup-compatibility/2006">
+          <mc:Choice xmlns:a14="http://schemas.microsoft.com/office/drawing/2010/main" Requires="a14">
+            <p:sp>
+              <p:nvSpPr>
+                <p:cNvPr id="11" name="TextBox 10">
+                  <a:extLst>
+                    <a:ext uri="{FF2B5EF4-FFF2-40B4-BE49-F238E27FC236}">
+                      <a16:creationId xmlns:a16="http://schemas.microsoft.com/office/drawing/2014/main" id="{2B7E3E67-7EE9-0E5F-AE21-64E157501E34}"/>
+                    </a:ext>
+                  </a:extLst>
+                </p:cNvPr>
+                <p:cNvSpPr txBox="1"/>
+                <p:nvPr/>
+              </p:nvSpPr>
+              <p:spPr>
+                <a:xfrm>
+                  <a:off x="3862398" y="1976614"/>
+                  <a:ext cx="422615" cy="400110"/>
+                </a:xfrm>
+                <a:prstGeom prst="rect">
+                  <a:avLst/>
+                </a:prstGeom>
+                <a:noFill/>
+              </p:spPr>
+              <p:txBody>
+                <a:bodyPr wrap="none" rtlCol="0">
+                  <a:spAutoFit/>
+                </a:bodyPr>
+                <a:lstStyle/>
+                <a:p>
+                  <a:pPr/>
+                  <a14:m>
+                    <m:oMathPara xmlns:m="http://schemas.openxmlformats.org/officeDocument/2006/math">
+                      <m:oMathParaPr>
+                        <m:jc m:val="centerGroup"/>
+                      </m:oMathParaPr>
+                      <m:oMath xmlns:m="http://schemas.openxmlformats.org/officeDocument/2006/math">
+                        <m:r>
+                          <a:rPr lang="en-US" sz="2000" b="0" i="1" smtClean="0">
+                            <a:latin typeface="Cambria Math" panose="02040503050406030204" pitchFamily="18" charset="0"/>
+                          </a:rPr>
+                          <m:t>𝜙</m:t>
+                        </m:r>
+                      </m:oMath>
+                    </m:oMathPara>
+                  </a14:m>
+                  <a:endParaRPr lang="en-US" sz="2000" dirty="0"/>
+                </a:p>
+              </p:txBody>
+            </p:sp>
+          </mc:Choice>
+          <mc:Fallback>
+            <p:sp>
+              <p:nvSpPr>
+                <p:cNvPr id="11" name="TextBox 10">
+                  <a:extLst>
+                    <a:ext uri="{FF2B5EF4-FFF2-40B4-BE49-F238E27FC236}">
+                      <a16:creationId xmlns:a16="http://schemas.microsoft.com/office/drawing/2014/main" id="{2B7E3E67-7EE9-0E5F-AE21-64E157501E34}"/>
+                    </a:ext>
+                  </a:extLst>
+                </p:cNvPr>
+                <p:cNvSpPr txBox="1">
+                  <a:spLocks noRot="1" noChangeAspect="1" noMove="1" noResize="1" noEditPoints="1" noAdjustHandles="1" noChangeArrowheads="1" noChangeShapeType="1" noTextEdit="1"/>
+                </p:cNvSpPr>
+                <p:nvPr/>
+              </p:nvSpPr>
+              <p:spPr>
+                <a:xfrm>
+                  <a:off x="3862398" y="1976614"/>
+                  <a:ext cx="422615" cy="400110"/>
+                </a:xfrm>
+                <a:prstGeom prst="rect">
+                  <a:avLst/>
+                </a:prstGeom>
+                <a:blipFill>
+                  <a:blip r:embed="rId2"/>
+                  <a:stretch>
+                    <a:fillRect/>
+                  </a:stretch>
+                </a:blipFill>
+              </p:spPr>
+              <p:txBody>
+                <a:bodyPr/>
+                <a:lstStyle/>
+                <a:p>
+                  <a:r>
+                    <a:rPr lang="en-US">
+                      <a:noFill/>
+                    </a:rPr>
+                    <a:t> </a:t>
+                  </a:r>
+                </a:p>
+              </p:txBody>
+            </p:sp>
+          </mc:Fallback>
+        </mc:AlternateContent>
+        <mc:AlternateContent xmlns:mc="http://schemas.openxmlformats.org/markup-compatibility/2006">
+          <mc:Choice xmlns:a14="http://schemas.microsoft.com/office/drawing/2010/main" Requires="a14">
+            <p:sp>
+              <p:nvSpPr>
+                <p:cNvPr id="12" name="TextBox 11">
+                  <a:extLst>
+                    <a:ext uri="{FF2B5EF4-FFF2-40B4-BE49-F238E27FC236}">
+                      <a16:creationId xmlns:a16="http://schemas.microsoft.com/office/drawing/2014/main" id="{8F9B8614-EAD0-28C7-CA3E-F2F410D15029}"/>
+                    </a:ext>
+                  </a:extLst>
+                </p:cNvPr>
+                <p:cNvSpPr txBox="1"/>
+                <p:nvPr/>
+              </p:nvSpPr>
+              <p:spPr>
+                <a:xfrm>
+                  <a:off x="4333801" y="2635166"/>
+                  <a:ext cx="389787" cy="400110"/>
+                </a:xfrm>
+                <a:prstGeom prst="rect">
+                  <a:avLst/>
+                </a:prstGeom>
+                <a:noFill/>
+              </p:spPr>
+              <p:txBody>
+                <a:bodyPr wrap="none" rtlCol="0">
+                  <a:spAutoFit/>
+                </a:bodyPr>
+                <a:lstStyle/>
+                <a:p>
+                  <a:pPr/>
+                  <a14:m>
+                    <m:oMathPara xmlns:m="http://schemas.openxmlformats.org/officeDocument/2006/math">
+                      <m:oMathParaPr>
+                        <m:jc m:val="centerGroup"/>
+                      </m:oMathParaPr>
+                      <m:oMath xmlns:m="http://schemas.openxmlformats.org/officeDocument/2006/math">
+                        <m:r>
+                          <a:rPr lang="en-US" sz="2000" b="0" i="1" smtClean="0">
+                            <a:latin typeface="Cambria Math" panose="02040503050406030204" pitchFamily="18" charset="0"/>
+                          </a:rPr>
+                          <m:t>𝜌</m:t>
+                        </m:r>
+                      </m:oMath>
+                    </m:oMathPara>
+                  </a14:m>
+                  <a:endParaRPr lang="en-US" sz="2000" dirty="0"/>
+                </a:p>
+              </p:txBody>
+            </p:sp>
+          </mc:Choice>
+          <mc:Fallback>
+            <p:sp>
+              <p:nvSpPr>
+                <p:cNvPr id="12" name="TextBox 11">
+                  <a:extLst>
+                    <a:ext uri="{FF2B5EF4-FFF2-40B4-BE49-F238E27FC236}">
+                      <a16:creationId xmlns:a16="http://schemas.microsoft.com/office/drawing/2014/main" id="{8F9B8614-EAD0-28C7-CA3E-F2F410D15029}"/>
+                    </a:ext>
+                  </a:extLst>
+                </p:cNvPr>
+                <p:cNvSpPr txBox="1">
+                  <a:spLocks noRot="1" noChangeAspect="1" noMove="1" noResize="1" noEditPoints="1" noAdjustHandles="1" noChangeArrowheads="1" noChangeShapeType="1" noTextEdit="1"/>
+                </p:cNvSpPr>
+                <p:nvPr/>
+              </p:nvSpPr>
+              <p:spPr>
+                <a:xfrm>
+                  <a:off x="4333801" y="2635166"/>
+                  <a:ext cx="389787" cy="400110"/>
+                </a:xfrm>
+                <a:prstGeom prst="rect">
+                  <a:avLst/>
+                </a:prstGeom>
+                <a:blipFill>
+                  <a:blip r:embed="rId3"/>
+                  <a:stretch>
+                    <a:fillRect/>
+                  </a:stretch>
+                </a:blipFill>
+              </p:spPr>
+              <p:txBody>
+                <a:bodyPr/>
+                <a:lstStyle/>
+                <a:p>
+                  <a:r>
+                    <a:rPr lang="en-US">
+                      <a:noFill/>
+                    </a:rPr>
+                    <a:t> </a:t>
+                  </a:r>
+                </a:p>
+              </p:txBody>
+            </p:sp>
+          </mc:Fallback>
+        </mc:AlternateContent>
+        <mc:AlternateContent xmlns:mc="http://schemas.openxmlformats.org/markup-compatibility/2006">
+          <mc:Choice xmlns:a14="http://schemas.microsoft.com/office/drawing/2010/main" Requires="a14">
+            <p:sp>
+              <p:nvSpPr>
+                <p:cNvPr id="13" name="TextBox 12">
+                  <a:extLst>
+                    <a:ext uri="{FF2B5EF4-FFF2-40B4-BE49-F238E27FC236}">
+                      <a16:creationId xmlns:a16="http://schemas.microsoft.com/office/drawing/2014/main" id="{867919DF-392E-6D3A-C85B-E2E9C2FF3035}"/>
+                    </a:ext>
+                  </a:extLst>
+                </p:cNvPr>
+                <p:cNvSpPr txBox="1"/>
+                <p:nvPr/>
+              </p:nvSpPr>
+              <p:spPr>
+                <a:xfrm>
+                  <a:off x="3888219" y="3611509"/>
+                  <a:ext cx="405944" cy="400110"/>
+                </a:xfrm>
+                <a:prstGeom prst="rect">
+                  <a:avLst/>
+                </a:prstGeom>
+                <a:noFill/>
+              </p:spPr>
+              <p:txBody>
+                <a:bodyPr wrap="none" rtlCol="0">
+                  <a:spAutoFit/>
+                </a:bodyPr>
+                <a:lstStyle/>
+                <a:p>
+                  <a:pPr/>
+                  <a14:m>
+                    <m:oMathPara xmlns:m="http://schemas.openxmlformats.org/officeDocument/2006/math">
+                      <m:oMathParaPr>
+                        <m:jc m:val="centerGroup"/>
+                      </m:oMathParaPr>
+                      <m:oMath xmlns:m="http://schemas.openxmlformats.org/officeDocument/2006/math">
+                        <m:r>
+                          <a:rPr lang="en-US" sz="2000" b="0" i="1" smtClean="0">
+                            <a:latin typeface="Cambria Math" panose="02040503050406030204" pitchFamily="18" charset="0"/>
+                          </a:rPr>
+                          <m:t>𝐶</m:t>
+                        </m:r>
+                      </m:oMath>
+                    </m:oMathPara>
+                  </a14:m>
+                  <a:endParaRPr lang="en-US" sz="2000" dirty="0"/>
+                </a:p>
+              </p:txBody>
+            </p:sp>
+          </mc:Choice>
+          <mc:Fallback>
+            <p:sp>
+              <p:nvSpPr>
+                <p:cNvPr id="13" name="TextBox 12">
+                  <a:extLst>
+                    <a:ext uri="{FF2B5EF4-FFF2-40B4-BE49-F238E27FC236}">
+                      <a16:creationId xmlns:a16="http://schemas.microsoft.com/office/drawing/2014/main" id="{867919DF-392E-6D3A-C85B-E2E9C2FF3035}"/>
+                    </a:ext>
+                  </a:extLst>
+                </p:cNvPr>
+                <p:cNvSpPr txBox="1">
+                  <a:spLocks noRot="1" noChangeAspect="1" noMove="1" noResize="1" noEditPoints="1" noAdjustHandles="1" noChangeArrowheads="1" noChangeShapeType="1" noTextEdit="1"/>
+                </p:cNvSpPr>
+                <p:nvPr/>
+              </p:nvSpPr>
+              <p:spPr>
+                <a:xfrm>
+                  <a:off x="3888219" y="3611509"/>
+                  <a:ext cx="405944" cy="400110"/>
+                </a:xfrm>
+                <a:prstGeom prst="rect">
+                  <a:avLst/>
+                </a:prstGeom>
+                <a:blipFill>
+                  <a:blip r:embed="rId4"/>
+                  <a:stretch>
+                    <a:fillRect/>
+                  </a:stretch>
+                </a:blipFill>
+              </p:spPr>
+              <p:txBody>
+                <a:bodyPr/>
+                <a:lstStyle/>
+                <a:p>
+                  <a:r>
+                    <a:rPr lang="en-US">
+                      <a:noFill/>
+                    </a:rPr>
+                    <a:t> </a:t>
+                  </a:r>
+                </a:p>
+              </p:txBody>
+            </p:sp>
+          </mc:Fallback>
+        </mc:AlternateContent>
+        <p:cxnSp>
+          <p:nvCxnSpPr>
+            <p:cNvPr id="14" name="Straight Connector 13">
+              <a:extLst>
+                <a:ext uri="{FF2B5EF4-FFF2-40B4-BE49-F238E27FC236}">
+                  <a16:creationId xmlns:a16="http://schemas.microsoft.com/office/drawing/2014/main" id="{E9EFB215-DFCE-B5A6-B85C-DCDEACCD5F47}"/>
+                </a:ext>
+              </a:extLst>
+            </p:cNvPr>
+            <p:cNvCxnSpPr>
+              <a:cxnSpLocks/>
+            </p:cNvCxnSpPr>
+            <p:nvPr/>
+          </p:nvCxnSpPr>
+          <p:spPr>
+            <a:xfrm flipV="1">
+              <a:off x="3417569" y="2338847"/>
+              <a:ext cx="571552" cy="1343040"/>
+            </a:xfrm>
+            <a:prstGeom prst="line">
+              <a:avLst/>
+            </a:prstGeom>
+          </p:spPr>
+          <p:style>
+            <a:lnRef idx="1">
+              <a:schemeClr val="accent1"/>
+            </a:lnRef>
+            <a:fillRef idx="0">
+              <a:schemeClr val="accent1"/>
+            </a:fillRef>
+            <a:effectRef idx="0">
+              <a:schemeClr val="accent1"/>
+            </a:effectRef>
+            <a:fontRef idx="minor">
+              <a:schemeClr val="tx1"/>
+            </a:fontRef>
+          </p:style>
+        </p:cxnSp>
+        <p:sp>
+          <p:nvSpPr>
+            <p:cNvPr id="15" name="Oval 14">
+              <a:extLst>
+                <a:ext uri="{FF2B5EF4-FFF2-40B4-BE49-F238E27FC236}">
+                  <a16:creationId xmlns:a16="http://schemas.microsoft.com/office/drawing/2014/main" id="{02E6E9D2-581C-BFBA-F8BC-DAF56866E6F5}"/>
+                </a:ext>
+              </a:extLst>
+            </p:cNvPr>
+            <p:cNvSpPr/>
+            <p:nvPr/>
+          </p:nvSpPr>
+          <p:spPr>
+            <a:xfrm>
+              <a:off x="4417925" y="2983737"/>
+              <a:ext cx="46249" cy="46745"/>
+            </a:xfrm>
+            <a:prstGeom prst="ellipse">
+              <a:avLst/>
+            </a:prstGeom>
+            <a:solidFill>
+              <a:srgbClr val="FFFFFF"/>
+            </a:solidFill>
+            <a:ln>
+              <a:noFill/>
+            </a:ln>
+          </p:spPr>
+          <p:style>
+            <a:lnRef idx="2">
+              <a:schemeClr val="accent1">
+                <a:shade val="15000"/>
+              </a:schemeClr>
+            </a:lnRef>
+            <a:fillRef idx="1">
+              <a:schemeClr val="accent1"/>
+            </a:fillRef>
+            <a:effectRef idx="0">
+              <a:schemeClr val="accent1"/>
+            </a:effectRef>
+            <a:fontRef idx="minor">
+              <a:schemeClr val="lt1"/>
+            </a:fontRef>
+          </p:style>
+          <p:txBody>
+            <a:bodyPr rtlCol="0" anchor="ctr"/>
+            <a:lstStyle/>
+            <a:p>
+              <a:pPr algn="ctr"/>
+              <a:endParaRPr lang="en-US" sz="2000"/>
+            </a:p>
+          </p:txBody>
+        </p:sp>
+        <p:cxnSp>
+          <p:nvCxnSpPr>
+            <p:cNvPr id="16" name="Straight Connector 15">
+              <a:extLst>
+                <a:ext uri="{FF2B5EF4-FFF2-40B4-BE49-F238E27FC236}">
+                  <a16:creationId xmlns:a16="http://schemas.microsoft.com/office/drawing/2014/main" id="{FC2DAD7C-6A68-64F2-BB00-35284884D0AB}"/>
+                </a:ext>
+              </a:extLst>
+            </p:cNvPr>
+            <p:cNvCxnSpPr>
+              <a:cxnSpLocks/>
+            </p:cNvCxnSpPr>
+            <p:nvPr/>
+          </p:nvCxnSpPr>
+          <p:spPr>
+            <a:xfrm>
+              <a:off x="3998657" y="2338847"/>
+              <a:ext cx="1235" cy="1355626"/>
+            </a:xfrm>
+            <a:prstGeom prst="line">
+              <a:avLst/>
+            </a:prstGeom>
+          </p:spPr>
+          <p:style>
+            <a:lnRef idx="1">
+              <a:schemeClr val="accent1"/>
+            </a:lnRef>
+            <a:fillRef idx="0">
+              <a:schemeClr val="accent1"/>
+            </a:fillRef>
+            <a:effectRef idx="0">
+              <a:schemeClr val="accent1"/>
+            </a:effectRef>
+            <a:fontRef idx="minor">
+              <a:schemeClr val="tx1"/>
+            </a:fontRef>
+          </p:style>
+        </p:cxnSp>
+        <mc:AlternateContent xmlns:mc="http://schemas.openxmlformats.org/markup-compatibility/2006">
+          <mc:Choice xmlns:a14="http://schemas.microsoft.com/office/drawing/2010/main" Requires="a14">
+            <p:sp>
+              <p:nvSpPr>
+                <p:cNvPr id="17" name="TextBox 16">
+                  <a:extLst>
+                    <a:ext uri="{FF2B5EF4-FFF2-40B4-BE49-F238E27FC236}">
+                      <a16:creationId xmlns:a16="http://schemas.microsoft.com/office/drawing/2014/main" id="{E97BF142-FB9D-7AC9-1E12-AD62C52B97C3}"/>
+                    </a:ext>
+                  </a:extLst>
+                </p:cNvPr>
+                <p:cNvSpPr txBox="1"/>
+                <p:nvPr/>
+              </p:nvSpPr>
+              <p:spPr>
+                <a:xfrm>
+                  <a:off x="1480313" y="3468793"/>
+                  <a:ext cx="575670" cy="400110"/>
+                </a:xfrm>
+                <a:prstGeom prst="rect">
+                  <a:avLst/>
+                </a:prstGeom>
+                <a:noFill/>
+              </p:spPr>
+              <p:txBody>
+                <a:bodyPr wrap="none" rtlCol="0">
+                  <a:spAutoFit/>
+                </a:bodyPr>
+                <a:lstStyle/>
+                <a:p>
+                  <a:pPr/>
+                  <a14:m>
+                    <m:oMathPara xmlns:m="http://schemas.openxmlformats.org/officeDocument/2006/math">
+                      <m:oMathParaPr>
+                        <m:jc m:val="centerGroup"/>
+                      </m:oMathParaPr>
+                      <m:oMath xmlns:m="http://schemas.openxmlformats.org/officeDocument/2006/math">
+                        <m:sSup>
+                          <m:sSupPr>
+                            <m:ctrlPr>
+                              <a:rPr lang="en-US" sz="2000" b="0" i="1" smtClean="0">
+                                <a:latin typeface="Cambria Math" panose="02040503050406030204" pitchFamily="18" charset="0"/>
+                              </a:rPr>
+                            </m:ctrlPr>
+                          </m:sSupPr>
+                          <m:e>
+                            <m:r>
+                              <a:rPr lang="en-US" sz="2000" b="0" i="1" smtClean="0">
+                                <a:latin typeface="Cambria Math" panose="02040503050406030204" pitchFamily="18" charset="0"/>
+                              </a:rPr>
+                              <m:t>𝜓</m:t>
+                            </m:r>
+                          </m:e>
+                          <m:sup>
+                            <m:r>
+                              <a:rPr lang="en-US" sz="2000" b="0" i="1" smtClean="0">
+                                <a:latin typeface="Cambria Math" panose="02040503050406030204" pitchFamily="18" charset="0"/>
+                              </a:rPr>
+                              <m:t>⊥</m:t>
+                            </m:r>
+                          </m:sup>
+                        </m:sSup>
+                      </m:oMath>
+                    </m:oMathPara>
+                  </a14:m>
+                  <a:endParaRPr lang="en-US" sz="2000" dirty="0"/>
+                </a:p>
+              </p:txBody>
+            </p:sp>
+          </mc:Choice>
+          <mc:Fallback>
+            <p:sp>
+              <p:nvSpPr>
+                <p:cNvPr id="17" name="TextBox 16">
+                  <a:extLst>
+                    <a:ext uri="{FF2B5EF4-FFF2-40B4-BE49-F238E27FC236}">
+                      <a16:creationId xmlns:a16="http://schemas.microsoft.com/office/drawing/2014/main" id="{E97BF142-FB9D-7AC9-1E12-AD62C52B97C3}"/>
+                    </a:ext>
+                  </a:extLst>
+                </p:cNvPr>
+                <p:cNvSpPr txBox="1">
+                  <a:spLocks noRot="1" noChangeAspect="1" noMove="1" noResize="1" noEditPoints="1" noAdjustHandles="1" noChangeArrowheads="1" noChangeShapeType="1" noTextEdit="1"/>
+                </p:cNvSpPr>
+                <p:nvPr/>
+              </p:nvSpPr>
+              <p:spPr>
+                <a:xfrm>
+                  <a:off x="1480313" y="3468793"/>
+                  <a:ext cx="575670" cy="400110"/>
+                </a:xfrm>
+                <a:prstGeom prst="rect">
+                  <a:avLst/>
+                </a:prstGeom>
+                <a:blipFill>
+                  <a:blip r:embed="rId5"/>
+                  <a:stretch>
+                    <a:fillRect/>
+                  </a:stretch>
+                </a:blipFill>
+              </p:spPr>
+              <p:txBody>
+                <a:bodyPr/>
+                <a:lstStyle/>
+                <a:p>
+                  <a:r>
+                    <a:rPr lang="en-US">
+                      <a:noFill/>
+                    </a:rPr>
+                    <a:t> </a:t>
+                  </a:r>
+                </a:p>
+              </p:txBody>
+            </p:sp>
+          </mc:Fallback>
+        </mc:AlternateContent>
+        <mc:AlternateContent xmlns:mc="http://schemas.openxmlformats.org/markup-compatibility/2006">
+          <mc:Choice xmlns:a14="http://schemas.microsoft.com/office/drawing/2010/main" Requires="a14">
+            <p:sp>
+              <p:nvSpPr>
+                <p:cNvPr id="18" name="TextBox 17">
+                  <a:extLst>
+                    <a:ext uri="{FF2B5EF4-FFF2-40B4-BE49-F238E27FC236}">
+                      <a16:creationId xmlns:a16="http://schemas.microsoft.com/office/drawing/2014/main" id="{63D796A4-9248-55E2-498F-FE89BFA80E68}"/>
+                    </a:ext>
+                  </a:extLst>
+                </p:cNvPr>
+                <p:cNvSpPr txBox="1"/>
+                <p:nvPr/>
+              </p:nvSpPr>
+              <p:spPr>
+                <a:xfrm>
+                  <a:off x="3215940" y="3630679"/>
+                  <a:ext cx="421782" cy="400110"/>
+                </a:xfrm>
+                <a:prstGeom prst="rect">
+                  <a:avLst/>
+                </a:prstGeom>
+                <a:noFill/>
+              </p:spPr>
+              <p:txBody>
+                <a:bodyPr wrap="none" rtlCol="0">
+                  <a:spAutoFit/>
+                </a:bodyPr>
+                <a:lstStyle/>
+                <a:p>
+                  <a:pPr/>
+                  <a14:m>
+                    <m:oMathPara xmlns:m="http://schemas.openxmlformats.org/officeDocument/2006/math">
+                      <m:oMathParaPr>
+                        <m:jc m:val="centerGroup"/>
+                      </m:oMathParaPr>
+                      <m:oMath xmlns:m="http://schemas.openxmlformats.org/officeDocument/2006/math">
+                        <m:r>
+                          <a:rPr lang="en-US" sz="2000" b="0" i="1" smtClean="0">
+                            <a:latin typeface="Cambria Math" panose="02040503050406030204" pitchFamily="18" charset="0"/>
+                          </a:rPr>
+                          <m:t>𝑂</m:t>
+                        </m:r>
+                      </m:oMath>
+                    </m:oMathPara>
+                  </a14:m>
+                  <a:endParaRPr lang="en-US" sz="2000" dirty="0"/>
+                </a:p>
+              </p:txBody>
+            </p:sp>
+          </mc:Choice>
+          <mc:Fallback>
+            <p:sp>
+              <p:nvSpPr>
+                <p:cNvPr id="18" name="TextBox 17">
+                  <a:extLst>
+                    <a:ext uri="{FF2B5EF4-FFF2-40B4-BE49-F238E27FC236}">
+                      <a16:creationId xmlns:a16="http://schemas.microsoft.com/office/drawing/2014/main" id="{63D796A4-9248-55E2-498F-FE89BFA80E68}"/>
+                    </a:ext>
+                  </a:extLst>
+                </p:cNvPr>
+                <p:cNvSpPr txBox="1">
+                  <a:spLocks noRot="1" noChangeAspect="1" noMove="1" noResize="1" noEditPoints="1" noAdjustHandles="1" noChangeArrowheads="1" noChangeShapeType="1" noTextEdit="1"/>
+                </p:cNvSpPr>
+                <p:nvPr/>
+              </p:nvSpPr>
+              <p:spPr>
+                <a:xfrm>
+                  <a:off x="3215940" y="3630679"/>
+                  <a:ext cx="421782" cy="400110"/>
+                </a:xfrm>
+                <a:prstGeom prst="rect">
+                  <a:avLst/>
+                </a:prstGeom>
+                <a:blipFill>
+                  <a:blip r:embed="rId6"/>
+                  <a:stretch>
+                    <a:fillRect/>
+                  </a:stretch>
+                </a:blipFill>
+              </p:spPr>
+              <p:txBody>
+                <a:bodyPr/>
+                <a:lstStyle/>
+                <a:p>
+                  <a:r>
+                    <a:rPr lang="en-US">
+                      <a:noFill/>
+                    </a:rPr>
+                    <a:t> </a:t>
+                  </a:r>
+                </a:p>
+              </p:txBody>
+            </p:sp>
+          </mc:Fallback>
+        </mc:AlternateContent>
+        <p:cxnSp>
+          <p:nvCxnSpPr>
+            <p:cNvPr id="19" name="Straight Connector 18">
+              <a:extLst>
+                <a:ext uri="{FF2B5EF4-FFF2-40B4-BE49-F238E27FC236}">
+                  <a16:creationId xmlns:a16="http://schemas.microsoft.com/office/drawing/2014/main" id="{FD60C392-8B0F-69BE-32B9-BFEA60FEA29D}"/>
+                </a:ext>
+              </a:extLst>
+            </p:cNvPr>
+            <p:cNvCxnSpPr>
+              <a:cxnSpLocks/>
+            </p:cNvCxnSpPr>
+            <p:nvPr/>
+          </p:nvCxnSpPr>
+          <p:spPr>
+            <a:xfrm>
+              <a:off x="1955254" y="3686742"/>
+              <a:ext cx="2044637" cy="0"/>
+            </a:xfrm>
+            <a:prstGeom prst="line">
+              <a:avLst/>
+            </a:prstGeom>
+            <a:ln w="28575">
+              <a:solidFill>
+                <a:schemeClr val="tx1"/>
+              </a:solidFill>
+            </a:ln>
+          </p:spPr>
+          <p:style>
+            <a:lnRef idx="1">
+              <a:schemeClr val="accent1"/>
+            </a:lnRef>
+            <a:fillRef idx="0">
+              <a:schemeClr val="accent1"/>
+            </a:fillRef>
+            <a:effectRef idx="0">
+              <a:schemeClr val="accent1"/>
+            </a:effectRef>
+            <a:fontRef idx="minor">
+              <a:schemeClr val="tx1"/>
+            </a:fontRef>
+          </p:style>
+        </p:cxnSp>
+        <mc:AlternateContent xmlns:mc="http://schemas.openxmlformats.org/markup-compatibility/2006">
+          <mc:Choice xmlns:a14="http://schemas.microsoft.com/office/drawing/2010/main" Requires="a14">
+            <p:sp>
+              <p:nvSpPr>
+                <p:cNvPr id="20" name="TextBox 19">
+                  <a:extLst>
+                    <a:ext uri="{FF2B5EF4-FFF2-40B4-BE49-F238E27FC236}">
+                      <a16:creationId xmlns:a16="http://schemas.microsoft.com/office/drawing/2014/main" id="{D4E1EAA4-DC92-DC29-8D97-6E5E9736A032}"/>
+                    </a:ext>
+                  </a:extLst>
+                </p:cNvPr>
+                <p:cNvSpPr txBox="1"/>
+                <p:nvPr/>
+              </p:nvSpPr>
+              <p:spPr>
+                <a:xfrm>
+                  <a:off x="3721345" y="2981017"/>
+                  <a:ext cx="369845" cy="400110"/>
+                </a:xfrm>
+                <a:prstGeom prst="rect">
+                  <a:avLst/>
+                </a:prstGeom>
+                <a:noFill/>
+              </p:spPr>
+              <p:txBody>
+                <a:bodyPr wrap="none" rtlCol="0">
+                  <a:spAutoFit/>
+                </a:bodyPr>
+                <a:lstStyle/>
+                <a:p>
+                  <a:pPr/>
+                  <a14:m>
+                    <m:oMathPara xmlns:m="http://schemas.openxmlformats.org/officeDocument/2006/math">
+                      <m:oMathParaPr>
+                        <m:jc m:val="centerGroup"/>
+                      </m:oMathParaPr>
+                      <m:oMath xmlns:m="http://schemas.openxmlformats.org/officeDocument/2006/math">
+                        <m:r>
+                          <a:rPr lang="en-US" sz="2000" b="0" i="1" smtClean="0">
+                            <a:latin typeface="Cambria Math" panose="02040503050406030204" pitchFamily="18" charset="0"/>
+                          </a:rPr>
+                          <m:t>𝑟</m:t>
+                        </m:r>
+                      </m:oMath>
+                    </m:oMathPara>
+                  </a14:m>
+                  <a:endParaRPr lang="en-US" sz="2000" dirty="0"/>
+                </a:p>
+              </p:txBody>
+            </p:sp>
+          </mc:Choice>
+          <mc:Fallback>
+            <p:sp>
+              <p:nvSpPr>
+                <p:cNvPr id="20" name="TextBox 19">
+                  <a:extLst>
+                    <a:ext uri="{FF2B5EF4-FFF2-40B4-BE49-F238E27FC236}">
+                      <a16:creationId xmlns:a16="http://schemas.microsoft.com/office/drawing/2014/main" id="{D4E1EAA4-DC92-DC29-8D97-6E5E9736A032}"/>
+                    </a:ext>
+                  </a:extLst>
+                </p:cNvPr>
+                <p:cNvSpPr txBox="1">
+                  <a:spLocks noRot="1" noChangeAspect="1" noMove="1" noResize="1" noEditPoints="1" noAdjustHandles="1" noChangeArrowheads="1" noChangeShapeType="1" noTextEdit="1"/>
+                </p:cNvSpPr>
+                <p:nvPr/>
+              </p:nvSpPr>
+              <p:spPr>
+                <a:xfrm>
+                  <a:off x="3721345" y="2981017"/>
+                  <a:ext cx="369845" cy="400110"/>
+                </a:xfrm>
+                <a:prstGeom prst="rect">
+                  <a:avLst/>
+                </a:prstGeom>
+                <a:blipFill>
+                  <a:blip r:embed="rId7"/>
+                  <a:stretch>
+                    <a:fillRect/>
+                  </a:stretch>
+                </a:blipFill>
+              </p:spPr>
+              <p:txBody>
+                <a:bodyPr/>
+                <a:lstStyle/>
+                <a:p>
+                  <a:r>
+                    <a:rPr lang="en-US">
+                      <a:noFill/>
+                    </a:rPr>
+                    <a:t> </a:t>
+                  </a:r>
+                </a:p>
+              </p:txBody>
+            </p:sp>
+          </mc:Fallback>
+        </mc:AlternateContent>
+        <p:cxnSp>
+          <p:nvCxnSpPr>
+            <p:cNvPr id="21" name="Straight Connector 20">
+              <a:extLst>
+                <a:ext uri="{FF2B5EF4-FFF2-40B4-BE49-F238E27FC236}">
+                  <a16:creationId xmlns:a16="http://schemas.microsoft.com/office/drawing/2014/main" id="{86061541-1293-8BEE-B46C-EBF7605F2BD3}"/>
+                </a:ext>
+              </a:extLst>
+            </p:cNvPr>
+            <p:cNvCxnSpPr>
+              <a:cxnSpLocks/>
+              <a:stCxn id="7" idx="2"/>
+            </p:cNvCxnSpPr>
+            <p:nvPr/>
+          </p:nvCxnSpPr>
+          <p:spPr>
+            <a:xfrm flipV="1">
+              <a:off x="1955254" y="2326262"/>
+              <a:ext cx="2039845" cy="1360479"/>
+            </a:xfrm>
+            <a:prstGeom prst="line">
+              <a:avLst/>
+            </a:prstGeom>
+          </p:spPr>
+          <p:style>
+            <a:lnRef idx="1">
+              <a:schemeClr val="accent1"/>
+            </a:lnRef>
+            <a:fillRef idx="0">
+              <a:schemeClr val="accent1"/>
+            </a:fillRef>
+            <a:effectRef idx="0">
+              <a:schemeClr val="accent1"/>
+            </a:effectRef>
+            <a:fontRef idx="minor">
+              <a:schemeClr val="tx1"/>
+            </a:fontRef>
+          </p:style>
+        </p:cxnSp>
+        <mc:AlternateContent xmlns:mc="http://schemas.openxmlformats.org/markup-compatibility/2006">
+          <mc:Choice xmlns:a14="http://schemas.microsoft.com/office/drawing/2010/main" Requires="a14">
+            <p:sp>
+              <p:nvSpPr>
+                <p:cNvPr id="23" name="TextBox 22">
+                  <a:extLst>
+                    <a:ext uri="{FF2B5EF4-FFF2-40B4-BE49-F238E27FC236}">
+                      <a16:creationId xmlns:a16="http://schemas.microsoft.com/office/drawing/2014/main" id="{B782DA7E-7E75-C4B7-503A-94C80421C60F}"/>
+                    </a:ext>
+                  </a:extLst>
+                </p:cNvPr>
+                <p:cNvSpPr txBox="1"/>
+                <p:nvPr/>
+              </p:nvSpPr>
+              <p:spPr>
+                <a:xfrm>
+                  <a:off x="2399383" y="3292879"/>
+                  <a:ext cx="1047402" cy="400110"/>
+                </a:xfrm>
+                <a:prstGeom prst="rect">
+                  <a:avLst/>
+                </a:prstGeom>
+                <a:noFill/>
+              </p:spPr>
+              <p:txBody>
+                <a:bodyPr wrap="none" rtlCol="0">
+                  <a:spAutoFit/>
+                </a:bodyPr>
+                <a:lstStyle/>
+                <a:p>
+                  <a:pPr/>
+                  <a14:m>
+                    <m:oMathPara xmlns:m="http://schemas.openxmlformats.org/officeDocument/2006/math">
+                      <m:oMathParaPr>
+                        <m:jc m:val="centerGroup"/>
+                      </m:oMathParaPr>
+                      <m:oMath xmlns:m="http://schemas.openxmlformats.org/officeDocument/2006/math">
+                        <m:r>
+                          <a:rPr lang="en-US" sz="2000" b="0" i="1" smtClean="0">
+                            <a:latin typeface="Cambria Math" panose="02040503050406030204" pitchFamily="18" charset="0"/>
+                          </a:rPr>
+                          <m:t>𝑝</m:t>
+                        </m:r>
+                        <m:d>
+                          <m:dPr>
+                            <m:ctrlPr>
+                              <a:rPr lang="en-US" sz="2000" b="0" i="1" smtClean="0">
+                                <a:latin typeface="Cambria Math" panose="02040503050406030204" pitchFamily="18" charset="0"/>
+                              </a:rPr>
+                            </m:ctrlPr>
+                          </m:dPr>
+                          <m:e>
+                            <m:r>
+                              <a:rPr lang="en-US" sz="2000" b="0" i="1" smtClean="0">
+                                <a:latin typeface="Cambria Math" panose="02040503050406030204" pitchFamily="18" charset="0"/>
+                              </a:rPr>
+                              <m:t>𝜓</m:t>
+                            </m:r>
+                          </m:e>
+                          <m:e>
+                            <m:r>
+                              <a:rPr lang="en-US" sz="2000" b="0" i="1" smtClean="0">
+                                <a:latin typeface="Cambria Math" panose="02040503050406030204" pitchFamily="18" charset="0"/>
+                              </a:rPr>
+                              <m:t>𝜙</m:t>
+                            </m:r>
+                          </m:e>
+                        </m:d>
+                      </m:oMath>
+                    </m:oMathPara>
+                  </a14:m>
+                  <a:endParaRPr lang="en-US" sz="2000" dirty="0"/>
+                </a:p>
+              </p:txBody>
+            </p:sp>
+          </mc:Choice>
+          <mc:Fallback>
+            <p:sp>
+              <p:nvSpPr>
+                <p:cNvPr id="23" name="TextBox 22">
+                  <a:extLst>
+                    <a:ext uri="{FF2B5EF4-FFF2-40B4-BE49-F238E27FC236}">
+                      <a16:creationId xmlns:a16="http://schemas.microsoft.com/office/drawing/2014/main" id="{B782DA7E-7E75-C4B7-503A-94C80421C60F}"/>
+                    </a:ext>
+                  </a:extLst>
+                </p:cNvPr>
+                <p:cNvSpPr txBox="1">
+                  <a:spLocks noRot="1" noChangeAspect="1" noMove="1" noResize="1" noEditPoints="1" noAdjustHandles="1" noChangeArrowheads="1" noChangeShapeType="1" noTextEdit="1"/>
+                </p:cNvSpPr>
+                <p:nvPr/>
+              </p:nvSpPr>
+              <p:spPr>
+                <a:xfrm>
+                  <a:off x="2399383" y="3292879"/>
+                  <a:ext cx="1047402" cy="400110"/>
+                </a:xfrm>
+                <a:prstGeom prst="rect">
+                  <a:avLst/>
+                </a:prstGeom>
+                <a:blipFill>
+                  <a:blip r:embed="rId8"/>
+                  <a:stretch>
+                    <a:fillRect/>
+                  </a:stretch>
+                </a:blipFill>
+              </p:spPr>
+              <p:txBody>
+                <a:bodyPr/>
+                <a:lstStyle/>
+                <a:p>
+                  <a:r>
+                    <a:rPr lang="en-US">
+                      <a:noFill/>
+                    </a:rPr>
+                    <a:t> </a:t>
+                  </a:r>
+                </a:p>
+              </p:txBody>
+            </p:sp>
+          </mc:Fallback>
+        </mc:AlternateContent>
+      </p:grpSp>
+      <p:sp>
+        <p:nvSpPr>
+          <p:cNvPr id="22" name="TextBox 21">
+            <a:extLst>
+              <a:ext uri="{FF2B5EF4-FFF2-40B4-BE49-F238E27FC236}">
+                <a16:creationId xmlns:a16="http://schemas.microsoft.com/office/drawing/2014/main" id="{C63DBC76-CAE1-14D2-EA71-34449390D250}"/>
+              </a:ext>
+            </a:extLst>
+          </p:cNvPr>
+          <p:cNvSpPr txBox="1"/>
+          <p:nvPr/>
+        </p:nvSpPr>
+        <p:spPr>
+          <a:xfrm>
+            <a:off x="632805" y="235535"/>
+            <a:ext cx="10926389" cy="2800767"/>
+          </a:xfrm>
+          <a:prstGeom prst="rect">
+            <a:avLst/>
+          </a:prstGeom>
+          <a:noFill/>
+        </p:spPr>
+        <p:txBody>
+          <a:bodyPr wrap="none" rtlCol="0">
+            <a:spAutoFit/>
+          </a:bodyPr>
+          <a:lstStyle/>
+          <a:p>
+            <a:pPr algn="ctr"/>
+            <a:r>
+              <a:rPr lang="en-US" sz="8800" dirty="0"/>
+              <a:t>Quantum probability</a:t>
+            </a:r>
+            <a:br>
+              <a:rPr lang="en-US" sz="8800" dirty="0"/>
+            </a:br>
+            <a:r>
+              <a:rPr lang="en-US" sz="8800" dirty="0"/>
+              <a:t>and entropy</a:t>
+            </a:r>
+          </a:p>
+        </p:txBody>
+      </p:sp>
+    </p:spTree>
+    <p:extLst>
+      <p:ext uri="{BB962C8B-B14F-4D97-AF65-F5344CB8AC3E}">
+        <p14:creationId xmlns:p14="http://schemas.microsoft.com/office/powerpoint/2010/main" val="4242425041"/>
       </p:ext>
     </p:extLst>
   </p:cSld>
